--- a/output/presentation/Aimo_защита_проекта.pptx
+++ b/output/presentation/Aimo_защита_проекта.pptx
@@ -2,25 +2,27 @@
 <file path=ppt/presentation.xml><?xml version="1.0" encoding="utf-8"?>
 <p:presentation xmlns:p="http://schemas.openxmlformats.org/presentationml/2006/main">
   <p:sldMasterIdLst>
-    <p:sldMasterId xmlns:r="http://schemas.openxmlformats.org/officeDocument/2006/relationships" id="2147483648" r:id="Ra504050174f642dc"/>
+    <p:sldMasterId xmlns:r="http://schemas.openxmlformats.org/officeDocument/2006/relationships" id="2147483648" r:id="R2d118db41e10467a"/>
   </p:sldMasterIdLst>
   <p:notesMasterIdLst>
-    <p:notesMasterId xmlns:r="http://schemas.openxmlformats.org/officeDocument/2006/relationships" r:id="R01cf1e715da5436c"/>
+    <p:notesMasterId xmlns:r="http://schemas.openxmlformats.org/officeDocument/2006/relationships" r:id="Re713ea74216440b0"/>
   </p:notesMasterIdLst>
   <p:sldIdLst>
-    <p:sldId xmlns:r="http://schemas.openxmlformats.org/officeDocument/2006/relationships" id="256" r:id="R68bfe1d6093e411e"/>
-    <p:sldId xmlns:r="http://schemas.openxmlformats.org/officeDocument/2006/relationships" id="257" r:id="Ra185534584ca4c5f"/>
-    <p:sldId xmlns:r="http://schemas.openxmlformats.org/officeDocument/2006/relationships" id="258" r:id="Rc88e2b2d2b564cdb"/>
-    <p:sldId xmlns:r="http://schemas.openxmlformats.org/officeDocument/2006/relationships" id="259" r:id="Rdf183e358bf54979"/>
-    <p:sldId xmlns:r="http://schemas.openxmlformats.org/officeDocument/2006/relationships" id="260" r:id="Rfef45d2c80de4ca7"/>
-    <p:sldId xmlns:r="http://schemas.openxmlformats.org/officeDocument/2006/relationships" id="261" r:id="R03676ced81704336"/>
-    <p:sldId xmlns:r="http://schemas.openxmlformats.org/officeDocument/2006/relationships" id="262" r:id="Rce151f2f3006442d"/>
-    <p:sldId xmlns:r="http://schemas.openxmlformats.org/officeDocument/2006/relationships" id="263" r:id="Rbbb477f9491241c6"/>
-    <p:sldId xmlns:r="http://schemas.openxmlformats.org/officeDocument/2006/relationships" id="264" r:id="R22ace24c8278417a"/>
-    <p:sldId xmlns:r="http://schemas.openxmlformats.org/officeDocument/2006/relationships" id="265" r:id="R8deac8ed04194e59"/>
-    <p:sldId xmlns:r="http://schemas.openxmlformats.org/officeDocument/2006/relationships" id="266" r:id="R67a318f163d548fa"/>
-    <p:sldId xmlns:r="http://schemas.openxmlformats.org/officeDocument/2006/relationships" id="267" r:id="R86b96fc471b148fc"/>
-    <p:sldId xmlns:r="http://schemas.openxmlformats.org/officeDocument/2006/relationships" id="268" r:id="R98ec9f4270804135"/>
+    <p:sldId xmlns:r="http://schemas.openxmlformats.org/officeDocument/2006/relationships" id="256" r:id="Rae84999e87054456"/>
+    <p:sldId xmlns:r="http://schemas.openxmlformats.org/officeDocument/2006/relationships" id="257" r:id="Re518b6f3a71643f6"/>
+    <p:sldId xmlns:r="http://schemas.openxmlformats.org/officeDocument/2006/relationships" id="258" r:id="R17411205c2aa4dcf"/>
+    <p:sldId xmlns:r="http://schemas.openxmlformats.org/officeDocument/2006/relationships" id="259" r:id="R697fb11400cf49b3"/>
+    <p:sldId xmlns:r="http://schemas.openxmlformats.org/officeDocument/2006/relationships" id="260" r:id="R88f6d5ce31bc498b"/>
+    <p:sldId xmlns:r="http://schemas.openxmlformats.org/officeDocument/2006/relationships" id="261" r:id="Rc0c4381d0f7c4a49"/>
+    <p:sldId xmlns:r="http://schemas.openxmlformats.org/officeDocument/2006/relationships" id="262" r:id="R3f1c240e1902446d"/>
+    <p:sldId xmlns:r="http://schemas.openxmlformats.org/officeDocument/2006/relationships" id="263" r:id="R59b144fce7064968"/>
+    <p:sldId xmlns:r="http://schemas.openxmlformats.org/officeDocument/2006/relationships" id="264" r:id="R16785ee9caf44db4"/>
+    <p:sldId xmlns:r="http://schemas.openxmlformats.org/officeDocument/2006/relationships" id="265" r:id="R8a6b11fd7b534c63"/>
+    <p:sldId xmlns:r="http://schemas.openxmlformats.org/officeDocument/2006/relationships" id="266" r:id="R07d8f1465f3543d0"/>
+    <p:sldId xmlns:r="http://schemas.openxmlformats.org/officeDocument/2006/relationships" id="267" r:id="Re128239c9eae4248"/>
+    <p:sldId xmlns:r="http://schemas.openxmlformats.org/officeDocument/2006/relationships" id="268" r:id="Rcd4d3da5a65946af"/>
+    <p:sldId xmlns:r="http://schemas.openxmlformats.org/officeDocument/2006/relationships" id="269" r:id="R28b66a4d67b0496c"/>
+    <p:sldId xmlns:r="http://schemas.openxmlformats.org/officeDocument/2006/relationships" id="270" r:id="R9dbf109f0f044a98"/>
   </p:sldIdLst>
   <p:sldSz cx="12192000" cy="6858000"/>
   <p:notesSz cx="6858000" cy="9144000"/>
@@ -534,6 +536,166 @@
           <a:lstStyle xmlns:a="http://schemas.openxmlformats.org/drawingml/2006/main"/>
           <a:p xmlns:a="http://schemas.openxmlformats.org/drawingml/2006/main">
             <a:r>
+              <a:t>Продукт работает как статическое приложение: HTML, CSS и ES-модули публикуются на GitHub Pages, Service Worker кеширует оболочку, IndexedDB хранит локальные данные и модели. MediaPipe выполняет распознавание позы и предметов. WebLLM 0.2.86 запускает Qwen2.5-1.5B-Instruct-q4f16_1-MLC, а для слабых устройств доступна версия 0.5B. Piper даёт локальные голоса. В разработке агенты Codex и Claude Code помогали писать и проверять код, тесты и документацию. Context7 подключён по протоколу MCP и использовался для проверки актуальных API, а не для работы приложения во время тренировки.</a:t>
+            </a:r>
+          </a:p>
+          <a:p xmlns:a="http://schemas.openxmlformats.org/drawingml/2006/main">
+            <a:r>
+              <a:t/>
+            </a:r>
+          </a:p>
+          <a:p xmlns:a="http://schemas.openxmlformats.org/drawingml/2006/main">
+            <a:r>
+              <a:t>Источники: README.md; package.json; sw.js; coach-llm.js; app/tts-worker.js; .mcp.json; AGENTS.md; docs/AI_STRATEGY.md.</a:t>
+            </a:r>
+          </a:p>
+        </p:txBody>
+      </p:sp>
+      <p:sp>
+        <p:nvSpPr>
+          <p:cNvPr id="4" name="Slide Number Placeholder 3"/>
+          <p:cNvSpPr>
+            <a:spLocks xmlns:a="http://schemas.openxmlformats.org/drawingml/2006/main" noGrp="1"/>
+          </p:cNvSpPr>
+          <p:nvPr>
+            <p:ph type="sldNum" idx="5"/>
+          </p:nvPr>
+        </p:nvSpPr>
+        <p:spPr/>
+        <p:txBody>
+          <a:bodyPr xmlns:a="http://schemas.openxmlformats.org/drawingml/2006/main"/>
+          <a:lstStyle xmlns:a="http://schemas.openxmlformats.org/drawingml/2006/main"/>
+          <a:p xmlns:a="http://schemas.openxmlformats.org/drawingml/2006/main"/>
+        </p:txBody>
+      </p:sp>
+    </p:spTree>
+  </p:cSld>
+  <p:clrMapOvr>
+    <a:masterClrMapping xmlns:a="http://schemas.openxmlformats.org/drawingml/2006/main"/>
+  </p:clrMapOvr>
+</p:notes>
+</file>
+
+<file path=ppt/notesSlides/notesSlide11.xml><?xml version="1.0" encoding="utf-8"?>
+<p:notes xmlns:p="http://schemas.openxmlformats.org/presentationml/2006/main">
+  <p:cSld>
+    <p:spTree>
+      <p:nvGrpSpPr>
+        <p:cNvPr id="1" name=""/>
+        <p:cNvGrpSpPr/>
+        <p:nvPr/>
+      </p:nvGrpSpPr>
+      <p:grpSpPr>
+        <a:xfrm xmlns:a="http://schemas.openxmlformats.org/drawingml/2006/main"/>
+      </p:grpSpPr>
+      <p:sp>
+        <p:nvSpPr>
+          <p:cNvPr id="2" name="Slide Image Placeholder 1"/>
+          <p:cNvSpPr>
+            <a:spLocks xmlns:a="http://schemas.openxmlformats.org/drawingml/2006/main" noGrp="1"/>
+          </p:cNvSpPr>
+          <p:nvPr>
+            <p:ph type="sldImg" idx="0"/>
+          </p:nvPr>
+        </p:nvSpPr>
+        <p:spPr/>
+      </p:sp>
+      <p:sp>
+        <p:nvSpPr>
+          <p:cNvPr id="3" name="Notes Placeholder 2"/>
+          <p:cNvSpPr>
+            <a:spLocks xmlns:a="http://schemas.openxmlformats.org/drawingml/2006/main" noGrp="1"/>
+          </p:cNvSpPr>
+          <p:nvPr>
+            <p:ph type="body" idx="1"/>
+          </p:nvPr>
+        </p:nvSpPr>
+        <p:spPr/>
+        <p:txBody>
+          <a:bodyPr xmlns:a="http://schemas.openxmlformats.org/drawingml/2006/main"/>
+          <a:lstStyle xmlns:a="http://schemas.openxmlformats.org/drawingml/2006/main"/>
+          <a:p xmlns:a="http://schemas.openxmlformats.org/drawingml/2006/main">
+            <a:r>
+              <a:t>В продукте работают MediaPipe, правила и Qwen. В разработке использовали агентов Claude Code и Codex для кода, тестов, интеграции и документации, а генерацию изображений для иконки. Context7 подключён как MCP-сервер для сверки API. В AGENTS.md зафиксированы владение файлами и контракты. Журнал содержит наблюдение, исправление и способ проверки. Агент развития имеет дорожную карту, но не работает самостоятельно по расписанию.</a:t>
+            </a:r>
+          </a:p>
+          <a:p xmlns:a="http://schemas.openxmlformats.org/drawingml/2006/main">
+            <a:r>
+              <a:t/>
+            </a:r>
+          </a:p>
+          <a:p xmlns:a="http://schemas.openxmlformats.org/drawingml/2006/main">
+            <a:r>
+              <a:t>Источники: AGENTS.md; .mcp.json; docs/AI_STRATEGY.md; docs/ICON_PROMPT.txt; .codex/agents/feature_developer.toml.</a:t>
+            </a:r>
+          </a:p>
+        </p:txBody>
+      </p:sp>
+      <p:sp>
+        <p:nvSpPr>
+          <p:cNvPr id="4" name="Slide Number Placeholder 3"/>
+          <p:cNvSpPr>
+            <a:spLocks xmlns:a="http://schemas.openxmlformats.org/drawingml/2006/main" noGrp="1"/>
+          </p:cNvSpPr>
+          <p:nvPr>
+            <p:ph type="sldNum" idx="5"/>
+          </p:nvPr>
+        </p:nvSpPr>
+        <p:spPr/>
+        <p:txBody>
+          <a:bodyPr xmlns:a="http://schemas.openxmlformats.org/drawingml/2006/main"/>
+          <a:lstStyle xmlns:a="http://schemas.openxmlformats.org/drawingml/2006/main"/>
+          <a:p xmlns:a="http://schemas.openxmlformats.org/drawingml/2006/main"/>
+        </p:txBody>
+      </p:sp>
+    </p:spTree>
+  </p:cSld>
+  <p:clrMapOvr>
+    <a:masterClrMapping xmlns:a="http://schemas.openxmlformats.org/drawingml/2006/main"/>
+  </p:clrMapOvr>
+</p:notes>
+</file>
+
+<file path=ppt/notesSlides/notesSlide12.xml><?xml version="1.0" encoding="utf-8"?>
+<p:notes xmlns:p="http://schemas.openxmlformats.org/presentationml/2006/main">
+  <p:cSld>
+    <p:spTree>
+      <p:nvGrpSpPr>
+        <p:cNvPr id="1" name=""/>
+        <p:cNvGrpSpPr/>
+        <p:nvPr/>
+      </p:nvGrpSpPr>
+      <p:grpSpPr>
+        <a:xfrm xmlns:a="http://schemas.openxmlformats.org/drawingml/2006/main"/>
+      </p:grpSpPr>
+      <p:sp>
+        <p:nvSpPr>
+          <p:cNvPr id="2" name="Slide Image Placeholder 1"/>
+          <p:cNvSpPr>
+            <a:spLocks xmlns:a="http://schemas.openxmlformats.org/drawingml/2006/main" noGrp="1"/>
+          </p:cNvSpPr>
+          <p:nvPr>
+            <p:ph type="sldImg" idx="0"/>
+          </p:nvPr>
+        </p:nvSpPr>
+        <p:spPr/>
+      </p:sp>
+      <p:sp>
+        <p:nvSpPr>
+          <p:cNvPr id="3" name="Notes Placeholder 2"/>
+          <p:cNvSpPr>
+            <a:spLocks xmlns:a="http://schemas.openxmlformats.org/drawingml/2006/main" noGrp="1"/>
+          </p:cNvSpPr>
+          <p:nvPr>
+            <p:ph type="body" idx="1"/>
+          </p:nvPr>
+        </p:nvSpPr>
+        <p:spPr/>
+        <p:txBody>
+          <a:bodyPr xmlns:a="http://schemas.openxmlformats.org/drawingml/2006/main"/>
+          <a:lstStyle xmlns:a="http://schemas.openxmlformats.org/drawingml/2006/main"/>
+          <a:p xmlns:a="http://schemas.openxmlformats.org/drawingml/2006/main">
+            <a:r>
               <a:t>Наш сильный результат: полный сценарий работает, правила тестируются, модель не отвечает за измерения. Слабое место: мы расширили каталог быстрее, чем собрали записи реальных пользователей. Много времени ушло на стык браузера, камеры и голоса. Мы также увидели цену параллельной работы: разные версии правил и интерфейса приходится объединять вручную. Дальше нам важнее измерить ошибки счёта на телефонах, чем добавить ещё несколько упражнений. Подробная саморефлексия приложена отдельным текстом.</a:t>
             </a:r>
           </a:p>
@@ -574,7 +736,7 @@
 </p:notes>
 </file>
 
-<file path=ppt/notesSlides/notesSlide11.xml><?xml version="1.0" encoding="utf-8"?>
+<file path=ppt/notesSlides/notesSlide13.xml><?xml version="1.0" encoding="utf-8"?>
 <p:notes xmlns:p="http://schemas.openxmlformats.org/presentationml/2006/main">
   <p:cSld>
     <p:spTree>
@@ -654,7 +816,7 @@
 </p:notes>
 </file>
 
-<file path=ppt/notesSlides/notesSlide12.xml><?xml version="1.0" encoding="utf-8"?>
+<file path=ppt/notesSlides/notesSlide14.xml><?xml version="1.0" encoding="utf-8"?>
 <p:notes xmlns:p="http://schemas.openxmlformats.org/presentationml/2006/main">
   <p:cSld>
     <p:spTree>
@@ -734,7 +896,7 @@
 </p:notes>
 </file>
 
-<file path=ppt/notesSlides/notesSlide13.xml><?xml version="1.0" encoding="utf-8"?>
+<file path=ppt/notesSlides/notesSlide15.xml><?xml version="1.0" encoding="utf-8"?>
 <p:notes xmlns:p="http://schemas.openxmlformats.org/presentationml/2006/main">
   <p:cSld>
     <p:spTree>
@@ -1334,7 +1496,7 @@
           <a:lstStyle xmlns:a="http://schemas.openxmlformats.org/drawingml/2006/main"/>
           <a:p xmlns:a="http://schemas.openxmlformats.org/drawingml/2006/main">
             <a:r>
-              <a:t>Источником распределения служат журнал и история изменений, а не количество строк кода. Максим вёл интеграцию и агентов Claude Code. Наран публиковал сайт, развивал интерфейс и голосовые настройки, приносил обратную связь с телефона. Пример совместного решения при объединении: детектор распознаёт предметы для всех навыков, но только sports ball участвует в касаниях. Участники проверяют решения агентов и принимают продуктовые решения.</a:t>
+              <a:t>Работу делим по компетенциям, но не передаём интеграцию агентам без проверки. Общий контракт связывает интерфейс, зрение и LLM. Пример совместного решения: детектор распознаёт предметы для разных навыков, а логика касаний принимает только sports ball и только там, где навык требует мяч.</a:t>
             </a:r>
           </a:p>
           <a:p xmlns:a="http://schemas.openxmlformats.org/drawingml/2006/main">
@@ -1344,7 +1506,7 @@
           </a:p>
           <a:p xmlns:a="http://schemas.openxmlformats.org/drawingml/2006/main">
             <a:r>
-              <a:t>Источники: docs/AI_STRATEGY.md: «Роли людей», «25 октября: синхронизация с работой Нарана»; git log; AGENTS.md.</a:t>
+              <a:t>Источники: AGENTS.md; docs/AI_STRATEGY.md; coach-engine.js; app/live.js.</a:t>
             </a:r>
           </a:p>
         </p:txBody>
@@ -1414,7 +1576,7 @@
           <a:lstStyle xmlns:a="http://schemas.openxmlformats.org/drawingml/2006/main"/>
           <a:p xmlns:a="http://schemas.openxmlformats.org/drawingml/2006/main">
             <a:r>
-              <a:t>В продукте работают MediaPipe, правила и Qwen. В разработке использовали агентов Claude Code и Codex для кода, тестов, интеграции и документации, а генерацию изображений для иконки. Context7 подключён как MCP-сервер для сверки API. В AGENTS.md зафиксированы владение файлами и контракты. Журнал содержит наблюдение, исправление и способ проверки. Агент развития имеет дорожную карту, но не работает самостоятельно по расписанию.</a:t>
+              <a:t>Наран выполняет роль тимлида и full-stack-разработчика: удерживает целостный пользовательский сценарий, интеграцию и выпуск. Максим выполняет роль ML/LLM-инженера: отвечает за логику анализа, локальную модель и качество её ответов. Граница не мешает совместной приёмке: оба участника проверяют приложение и обсуждают решения, влияющие на продукт.</a:t>
             </a:r>
           </a:p>
           <a:p xmlns:a="http://schemas.openxmlformats.org/drawingml/2006/main">
@@ -1424,7 +1586,7 @@
           </a:p>
           <a:p xmlns:a="http://schemas.openxmlformats.org/drawingml/2006/main">
             <a:r>
-              <a:t>Источники: AGENTS.md; .mcp.json; docs/AI_STRATEGY.md; docs/ICON_PROMPT.txt; .codex/agents/feature_developer.toml.</a:t>
+              <a:t>Источники: Уточнение команды 25.10.2026; AGENTS.md; docs/AI_STRATEGY.md.</a:t>
             </a:r>
           </a:p>
         </p:txBody>
@@ -1471,7 +1633,7 @@
           <p:cNvPr id="3" name="Title">
             <a:extLst xmlns:a="http://schemas.openxmlformats.org/drawingml/2006/main">
               <a:ext uri="{FF2B5EF4-FFF2-40B4-BE49-F238E27FC236}">
-                <a16:creationId xmlns:a16="http://schemas.microsoft.com/office/drawing/2014/main" id="{12FD0805-D591-4F87-9BDB-B2C9E2FD3E15}"/>
+                <a16:creationId xmlns:a16="http://schemas.microsoft.com/office/drawing/2014/main" id="{B62DD755-2DA9-4138-8A0B-A508F1D9B5D8}"/>
               </a:ext>
             </a:extLst>
           </p:cNvPr>
@@ -1700,7 +1862,7 @@
           <p:cNvPr id="2" name="Subtitle">
             <a:extLst xmlns:a="http://schemas.openxmlformats.org/drawingml/2006/main">
               <a:ext uri="{FF2B5EF4-FFF2-40B4-BE49-F238E27FC236}">
-                <a16:creationId xmlns:a16="http://schemas.microsoft.com/office/drawing/2014/main" id="{317FA642-EDA6-47A7-B6E5-955B02293314}"/>
+                <a16:creationId xmlns:a16="http://schemas.microsoft.com/office/drawing/2014/main" id="{52ABC4D6-BFAB-4B83-9AF0-80379B1C8FE3}"/>
               </a:ext>
             </a:extLst>
           </p:cNvPr>
@@ -1946,7 +2108,7 @@
           <p:cNvPr id="2" name="Section title">
             <a:extLst xmlns:a="http://schemas.openxmlformats.org/drawingml/2006/main">
               <a:ext uri="{FF2B5EF4-FFF2-40B4-BE49-F238E27FC236}">
-                <a16:creationId xmlns:a16="http://schemas.microsoft.com/office/drawing/2014/main" id="{4B2CC957-F45D-4D3E-863C-D1ADD8760840}"/>
+                <a16:creationId xmlns:a16="http://schemas.microsoft.com/office/drawing/2014/main" id="{7B68E8FD-3E35-4429-B461-479DB63FFCF8}"/>
               </a:ext>
             </a:extLst>
           </p:cNvPr>
@@ -2192,7 +2354,7 @@
           <p:cNvPr id="3" name="Title">
             <a:extLst xmlns:a="http://schemas.openxmlformats.org/drawingml/2006/main">
               <a:ext uri="{FF2B5EF4-FFF2-40B4-BE49-F238E27FC236}">
-                <a16:creationId xmlns:a16="http://schemas.microsoft.com/office/drawing/2014/main" id="{65CDD063-86B4-43F7-8DFE-1D2652C9D5DB}"/>
+                <a16:creationId xmlns:a16="http://schemas.microsoft.com/office/drawing/2014/main" id="{C035352C-3F6B-45BC-B6DC-CB4ADB40AA26}"/>
               </a:ext>
             </a:extLst>
           </p:cNvPr>
@@ -2421,7 +2583,7 @@
           <p:cNvPr id="2" name="Body">
             <a:extLst xmlns:a="http://schemas.openxmlformats.org/drawingml/2006/main">
               <a:ext uri="{FF2B5EF4-FFF2-40B4-BE49-F238E27FC236}">
-                <a16:creationId xmlns:a16="http://schemas.microsoft.com/office/drawing/2014/main" id="{D70853E9-DC3A-46A4-98E6-DF9D5DEA2DD2}"/>
+                <a16:creationId xmlns:a16="http://schemas.microsoft.com/office/drawing/2014/main" id="{95F86D90-0B38-4417-A177-3AE08A1ADF08}"/>
               </a:ext>
             </a:extLst>
           </p:cNvPr>
@@ -2667,7 +2829,7 @@
           <p:cNvPr id="4" name="Title">
             <a:extLst xmlns:a="http://schemas.openxmlformats.org/drawingml/2006/main">
               <a:ext uri="{FF2B5EF4-FFF2-40B4-BE49-F238E27FC236}">
-                <a16:creationId xmlns:a16="http://schemas.microsoft.com/office/drawing/2014/main" id="{2E348B77-C7F3-49B8-9F1D-01D58EB5959F}"/>
+                <a16:creationId xmlns:a16="http://schemas.microsoft.com/office/drawing/2014/main" id="{3B77646E-0F10-401D-AFF7-6A21F537A682}"/>
               </a:ext>
             </a:extLst>
           </p:cNvPr>
@@ -2896,7 +3058,7 @@
           <p:cNvPr id="2" name="Left column">
             <a:extLst xmlns:a="http://schemas.openxmlformats.org/drawingml/2006/main">
               <a:ext uri="{FF2B5EF4-FFF2-40B4-BE49-F238E27FC236}">
-                <a16:creationId xmlns:a16="http://schemas.microsoft.com/office/drawing/2014/main" id="{EC0A4E5A-ECDB-480B-89BA-D10AA9FEFB3D}"/>
+                <a16:creationId xmlns:a16="http://schemas.microsoft.com/office/drawing/2014/main" id="{745FD9B0-0C0E-473C-AC7C-796F153DF68E}"/>
               </a:ext>
             </a:extLst>
           </p:cNvPr>
@@ -3125,7 +3287,7 @@
           <p:cNvPr id="3" name="Right column">
             <a:extLst xmlns:a="http://schemas.openxmlformats.org/drawingml/2006/main">
               <a:ext uri="{FF2B5EF4-FFF2-40B4-BE49-F238E27FC236}">
-                <a16:creationId xmlns:a16="http://schemas.microsoft.com/office/drawing/2014/main" id="{069159FB-A116-4F29-9C63-A5C9B020A5CE}"/>
+                <a16:creationId xmlns:a16="http://schemas.microsoft.com/office/drawing/2014/main" id="{D0385B6D-E82D-418C-888F-A524F3A82AAB}"/>
               </a:ext>
             </a:extLst>
           </p:cNvPr>
@@ -3371,7 +3533,7 @@
           <p:cNvPr id="3" name="Title">
             <a:extLst xmlns:a="http://schemas.openxmlformats.org/drawingml/2006/main">
               <a:ext uri="{FF2B5EF4-FFF2-40B4-BE49-F238E27FC236}">
-                <a16:creationId xmlns:a16="http://schemas.microsoft.com/office/drawing/2014/main" id="{F9C73ADB-3A73-4A56-93DF-55C7CCEDB76C}"/>
+                <a16:creationId xmlns:a16="http://schemas.microsoft.com/office/drawing/2014/main" id="{44564559-8BB7-48E2-AAE0-47600867DEA3}"/>
               </a:ext>
             </a:extLst>
           </p:cNvPr>
@@ -3600,7 +3762,7 @@
           <p:cNvPr id="2" name="Left column">
             <a:extLst xmlns:a="http://schemas.openxmlformats.org/drawingml/2006/main">
               <a:ext uri="{FF2B5EF4-FFF2-40B4-BE49-F238E27FC236}">
-                <a16:creationId xmlns:a16="http://schemas.microsoft.com/office/drawing/2014/main" id="{BBAF50DE-3330-433A-B1CD-6F2F3A0F1195}"/>
+                <a16:creationId xmlns:a16="http://schemas.microsoft.com/office/drawing/2014/main" id="{1502A37E-5F40-4C23-B2E5-A6414D7922DA}"/>
               </a:ext>
             </a:extLst>
           </p:cNvPr>
@@ -3867,12 +4029,12 @@
   </p:cSld>
   <p:clrMap bg1="lt1" tx1="dk1" bg2="lt2" tx2="dk2" accent1="accent1" accent2="accent2" accent3="accent3" accent4="accent4" accent5="accent5" accent6="accent6" hlink="hlink" folHlink="folHlink"/>
   <p:sldLayoutIdLst>
-    <p:sldLayoutId xmlns:r="http://schemas.openxmlformats.org/officeDocument/2006/relationships" id="2147483649" r:id="Reda5106fabc04370"/>
-    <p:sldLayoutId xmlns:r="http://schemas.openxmlformats.org/officeDocument/2006/relationships" id="2147483650" r:id="Rbd6c38a8cf5b421c"/>
-    <p:sldLayoutId xmlns:r="http://schemas.openxmlformats.org/officeDocument/2006/relationships" id="2147483651" r:id="Rb00fd7cee07a4674"/>
-    <p:sldLayoutId xmlns:r="http://schemas.openxmlformats.org/officeDocument/2006/relationships" id="2147483652" r:id="Reb5540df1929418d"/>
-    <p:sldLayoutId xmlns:r="http://schemas.openxmlformats.org/officeDocument/2006/relationships" id="2147483653" r:id="Rbb478db5091c4711"/>
-    <p:sldLayoutId xmlns:r="http://schemas.openxmlformats.org/officeDocument/2006/relationships" id="2147483654" r:id="R3301c53998104e60"/>
+    <p:sldLayoutId xmlns:r="http://schemas.openxmlformats.org/officeDocument/2006/relationships" id="2147483649" r:id="R5c16406178bc4717"/>
+    <p:sldLayoutId xmlns:r="http://schemas.openxmlformats.org/officeDocument/2006/relationships" id="2147483650" r:id="Re720be68e6c347a8"/>
+    <p:sldLayoutId xmlns:r="http://schemas.openxmlformats.org/officeDocument/2006/relationships" id="2147483651" r:id="Re1e84aa6b2304461"/>
+    <p:sldLayoutId xmlns:r="http://schemas.openxmlformats.org/officeDocument/2006/relationships" id="2147483652" r:id="R3bbf0abf941e4dc8"/>
+    <p:sldLayoutId xmlns:r="http://schemas.openxmlformats.org/officeDocument/2006/relationships" id="2147483653" r:id="R51e7dbd1dafb45d5"/>
+    <p:sldLayoutId xmlns:r="http://schemas.openxmlformats.org/officeDocument/2006/relationships" id="2147483654" r:id="R1964273c354d41b6"/>
   </p:sldLayoutIdLst>
   <p:txStyles>
     <p:titleStyle>
@@ -4423,7 +4585,7 @@
           <p:cNvPr id="6" name="VIBEHACK 2026   /   КОМАНДА noMad">
             <a:extLst xmlns:a="http://schemas.openxmlformats.org/drawingml/2006/main">
               <a:ext uri="{FF2B5EF4-FFF2-40B4-BE49-F238E27FC236}">
-                <a16:creationId xmlns:a16="http://schemas.microsoft.com/office/drawing/2014/main" id="{2C020CCC-18AC-42A5-8EB9-D0DC74AE87E2}"/>
+                <a16:creationId xmlns:a16="http://schemas.microsoft.com/office/drawing/2014/main" id="{CD7E427B-6B08-4D6A-AF17-0ED26713F0B5}"/>
               </a:ext>
             </a:extLst>
           </p:cNvPr>
@@ -4579,7 +4741,7 @@
           <p:cNvPr id="2" name="aimo">
             <a:extLst xmlns:a="http://schemas.openxmlformats.org/drawingml/2006/main">
               <a:ext uri="{FF2B5EF4-FFF2-40B4-BE49-F238E27FC236}">
-                <a16:creationId xmlns:a16="http://schemas.microsoft.com/office/drawing/2014/main" id="{D3108781-66CD-45AC-AE1C-37B03B0BF7C9}"/>
+                <a16:creationId xmlns:a16="http://schemas.microsoft.com/office/drawing/2014/main" id="{140A3478-1726-4CC7-9C4A-3886017BE5EF}"/>
               </a:ext>
             </a:extLst>
           </p:cNvPr>
@@ -4735,7 +4897,7 @@
           <p:cNvPr id="3" name="Нейро-тренер в прямом эфире">
             <a:extLst xmlns:a="http://schemas.openxmlformats.org/drawingml/2006/main">
               <a:ext uri="{FF2B5EF4-FFF2-40B4-BE49-F238E27FC236}">
-                <a16:creationId xmlns:a16="http://schemas.microsoft.com/office/drawing/2014/main" id="{D318B768-0F54-4DE8-9E17-3043929431A5}"/>
+                <a16:creationId xmlns:a16="http://schemas.microsoft.com/office/drawing/2014/main" id="{EC5CE7CE-995D-461B-81D6-075E369D80C3}"/>
               </a:ext>
             </a:extLst>
           </p:cNvPr>
@@ -4891,7 +5053,7 @@
           <p:cNvPr id="4" name="Человек ставит телефон, выбирает навык&#10;и получает подск">
             <a:extLst xmlns:a="http://schemas.openxmlformats.org/drawingml/2006/main">
               <a:ext uri="{FF2B5EF4-FFF2-40B4-BE49-F238E27FC236}">
-                <a16:creationId xmlns:a16="http://schemas.microsoft.com/office/drawing/2014/main" id="{720DE33D-9399-4E3C-95C3-180CD5C4287F}"/>
+                <a16:creationId xmlns:a16="http://schemas.microsoft.com/office/drawing/2014/main" id="{484DA101-8ADB-4D4F-B385-BE9833E03F2C}"/>
               </a:ext>
             </a:extLst>
           </p:cNvPr>
@@ -5070,7 +5232,7 @@
           <p:cNvPr id="5" name="Максим и Наран   /   25 октября 2026">
             <a:extLst xmlns:a="http://schemas.openxmlformats.org/drawingml/2006/main">
               <a:ext uri="{FF2B5EF4-FFF2-40B4-BE49-F238E27FC236}">
-                <a16:creationId xmlns:a16="http://schemas.microsoft.com/office/drawing/2014/main" id="{DA66B579-8250-4659-A5C1-C5B110CA5E46}"/>
+                <a16:creationId xmlns:a16="http://schemas.microsoft.com/office/drawing/2014/main" id="{764DF534-E8BA-430D-AB70-72D5A1434439}"/>
               </a:ext>
             </a:extLst>
           </p:cNvPr>
@@ -5224,7 +5386,7 @@
     </p:spTree>
     <p:extLst>
       <p:ext uri="{BB962C8B-B14F-4D97-AF65-F5344CB8AC3E}">
-        <p14:creationId xmlns:p14="http://schemas.microsoft.com/office/powerpoint/2010/main" val="857212177"/>
+        <p14:creationId xmlns:p14="http://schemas.microsoft.com/office/powerpoint/2010/main" val="792849539"/>
       </p:ext>
     </p:extLst>
   </p:cSld>
@@ -5237,7 +5399,7 @@
     <p:bg>
       <p:bgPr>
         <a:solidFill xmlns:a="http://schemas.openxmlformats.org/drawingml/2006/main">
-          <a:srgbClr val="FFFFFF"/>
+          <a:srgbClr val="18191A"/>
         </a:solidFill>
       </p:bgPr>
     </p:bg>
@@ -5252,10 +5414,10 @@
       </p:grpSpPr>
       <p:sp>
         <p:nvSpPr>
-          <p:cNvPr id="10" name="ВЫВОДЫ РАЗРАБОТКИ">
+          <p:cNvPr id="13" name="СТЕК ПРОЕКТА">
             <a:extLst xmlns:a="http://schemas.openxmlformats.org/drawingml/2006/main">
               <a:ext uri="{FF2B5EF4-FFF2-40B4-BE49-F238E27FC236}">
-                <a16:creationId xmlns:a16="http://schemas.microsoft.com/office/drawing/2014/main" id="{A4501847-E5CD-49F9-9AA5-8543A82D01B8}"/>
+                <a16:creationId xmlns:a16="http://schemas.microsoft.com/office/drawing/2014/main" id="{DDC3023F-E3F1-4EBB-97FA-737A4BB68EA0}"/>
               </a:ext>
             </a:extLst>
           </p:cNvPr>
@@ -5283,7 +5445,7 @@
             <a:defPPr>
               <a:defRPr sz="1350" b="1">
                 <a:solidFill>
-                  <a:srgbClr val="0866FF"/>
+                  <a:srgbClr val="69AAFF"/>
                 </a:solidFill>
                 <a:latin typeface="Arial"/>
                 <a:ea typeface="Arial"/>
@@ -5293,7 +5455,7 @@
             <a:lvl1pPr>
               <a:defRPr sz="1350" b="1">
                 <a:solidFill>
-                  <a:srgbClr val="0866FF"/>
+                  <a:srgbClr val="69AAFF"/>
                 </a:solidFill>
                 <a:latin typeface="Arial"/>
                 <a:ea typeface="Arial"/>
@@ -5303,7 +5465,7 @@
             <a:lvl2pPr>
               <a:defRPr sz="1350" b="1">
                 <a:solidFill>
-                  <a:srgbClr val="0866FF"/>
+                  <a:srgbClr val="69AAFF"/>
                 </a:solidFill>
                 <a:latin typeface="Arial"/>
                 <a:ea typeface="Arial"/>
@@ -5313,7 +5475,7 @@
             <a:lvl3pPr>
               <a:defRPr sz="1350" b="1">
                 <a:solidFill>
-                  <a:srgbClr val="0866FF"/>
+                  <a:srgbClr val="69AAFF"/>
                 </a:solidFill>
                 <a:latin typeface="Arial"/>
                 <a:ea typeface="Arial"/>
@@ -5323,7 +5485,7 @@
             <a:lvl4pPr>
               <a:defRPr sz="1350" b="1">
                 <a:solidFill>
-                  <a:srgbClr val="0866FF"/>
+                  <a:srgbClr val="69AAFF"/>
                 </a:solidFill>
                 <a:latin typeface="Arial"/>
                 <a:ea typeface="Arial"/>
@@ -5333,7 +5495,7 @@
             <a:lvl5pPr>
               <a:defRPr sz="1350" b="1">
                 <a:solidFill>
-                  <a:srgbClr val="0866FF"/>
+                  <a:srgbClr val="69AAFF"/>
                 </a:solidFill>
                 <a:latin typeface="Arial"/>
                 <a:ea typeface="Arial"/>
@@ -5343,7 +5505,7 @@
             <a:lvl6pPr>
               <a:defRPr sz="1350" b="1">
                 <a:solidFill>
-                  <a:srgbClr val="0866FF"/>
+                  <a:srgbClr val="69AAFF"/>
                 </a:solidFill>
                 <a:latin typeface="Arial"/>
                 <a:ea typeface="Arial"/>
@@ -5353,7 +5515,7 @@
             <a:lvl7pPr>
               <a:defRPr sz="1350" b="1">
                 <a:solidFill>
-                  <a:srgbClr val="0866FF"/>
+                  <a:srgbClr val="69AAFF"/>
                 </a:solidFill>
                 <a:latin typeface="Arial"/>
                 <a:ea typeface="Arial"/>
@@ -5363,7 +5525,7 @@
             <a:lvl8pPr>
               <a:defRPr sz="1350" b="1">
                 <a:solidFill>
-                  <a:srgbClr val="0866FF"/>
+                  <a:srgbClr val="69AAFF"/>
                 </a:solidFill>
                 <a:latin typeface="Arial"/>
                 <a:ea typeface="Arial"/>
@@ -5373,7 +5535,7 @@
             <a:lvl9pPr>
               <a:defRPr sz="1350" b="1">
                 <a:solidFill>
-                  <a:srgbClr val="0866FF"/>
+                  <a:srgbClr val="69AAFF"/>
                 </a:solidFill>
                 <a:latin typeface="Arial"/>
                 <a:ea typeface="Arial"/>
@@ -5385,7 +5547,7 @@
             <a:pPr>
               <a:defRPr sz="1350" b="1">
                 <a:solidFill>
-                  <a:srgbClr val="0866FF"/>
+                  <a:srgbClr val="69AAFF"/>
                 </a:solidFill>
                 <a:latin typeface="Arial"/>
                 <a:ea typeface="Arial"/>
@@ -5395,23 +5557,23 @@
             <a:r>
               <a:rPr sz="1350" b="1">
                 <a:solidFill>
-                  <a:srgbClr val="0866FF"/>
+                  <a:srgbClr val="69AAFF"/>
                 </a:solidFill>
                 <a:latin typeface="Arial"/>
                 <a:ea typeface="Arial"/>
                 <a:cs typeface="Arial"/>
               </a:rPr>
-              <a:t>ВЫВОДЫ РАЗРАБОТКИ</a:t>
+              <a:t>СТЕК ПРОЕКТА</a:t>
             </a:r>
           </a:p>
         </p:txBody>
       </p:sp>
       <p:sp>
         <p:nvSpPr>
-          <p:cNvPr id="2" name="Саморефлексия команды">
+          <p:cNvPr id="2" name="Технологии и работа с ИИ">
             <a:extLst xmlns:a="http://schemas.openxmlformats.org/drawingml/2006/main">
               <a:ext uri="{FF2B5EF4-FFF2-40B4-BE49-F238E27FC236}">
-                <a16:creationId xmlns:a16="http://schemas.microsoft.com/office/drawing/2014/main" id="{35ACAFE3-7BC6-420B-B85F-F102BA2180F4}"/>
+                <a16:creationId xmlns:a16="http://schemas.microsoft.com/office/drawing/2014/main" id="{D0553EFF-B11F-440E-9C2C-D85135237EFE}"/>
               </a:ext>
             </a:extLst>
           </p:cNvPr>
@@ -5439,7 +5601,7 @@
             <a:defPPr>
               <a:defRPr sz="3150" b="1">
                 <a:solidFill>
-                  <a:srgbClr val="202124"/>
+                  <a:srgbClr val="FFFFFF"/>
                 </a:solidFill>
                 <a:latin typeface="Arial"/>
                 <a:ea typeface="Arial"/>
@@ -5449,7 +5611,7 @@
             <a:lvl1pPr>
               <a:defRPr sz="3150" b="1">
                 <a:solidFill>
-                  <a:srgbClr val="202124"/>
+                  <a:srgbClr val="FFFFFF"/>
                 </a:solidFill>
                 <a:latin typeface="Arial"/>
                 <a:ea typeface="Arial"/>
@@ -5459,7 +5621,7 @@
             <a:lvl2pPr>
               <a:defRPr sz="3150" b="1">
                 <a:solidFill>
-                  <a:srgbClr val="202124"/>
+                  <a:srgbClr val="FFFFFF"/>
                 </a:solidFill>
                 <a:latin typeface="Arial"/>
                 <a:ea typeface="Arial"/>
@@ -5469,7 +5631,7 @@
             <a:lvl3pPr>
               <a:defRPr sz="3150" b="1">
                 <a:solidFill>
-                  <a:srgbClr val="202124"/>
+                  <a:srgbClr val="FFFFFF"/>
                 </a:solidFill>
                 <a:latin typeface="Arial"/>
                 <a:ea typeface="Arial"/>
@@ -5479,7 +5641,7 @@
             <a:lvl4pPr>
               <a:defRPr sz="3150" b="1">
                 <a:solidFill>
-                  <a:srgbClr val="202124"/>
+                  <a:srgbClr val="FFFFFF"/>
                 </a:solidFill>
                 <a:latin typeface="Arial"/>
                 <a:ea typeface="Arial"/>
@@ -5489,7 +5651,7 @@
             <a:lvl5pPr>
               <a:defRPr sz="3150" b="1">
                 <a:solidFill>
-                  <a:srgbClr val="202124"/>
+                  <a:srgbClr val="FFFFFF"/>
                 </a:solidFill>
                 <a:latin typeface="Arial"/>
                 <a:ea typeface="Arial"/>
@@ -5499,7 +5661,7 @@
             <a:lvl6pPr>
               <a:defRPr sz="3150" b="1">
                 <a:solidFill>
-                  <a:srgbClr val="202124"/>
+                  <a:srgbClr val="FFFFFF"/>
                 </a:solidFill>
                 <a:latin typeface="Arial"/>
                 <a:ea typeface="Arial"/>
@@ -5509,7 +5671,7 @@
             <a:lvl7pPr>
               <a:defRPr sz="3150" b="1">
                 <a:solidFill>
-                  <a:srgbClr val="202124"/>
+                  <a:srgbClr val="FFFFFF"/>
                 </a:solidFill>
                 <a:latin typeface="Arial"/>
                 <a:ea typeface="Arial"/>
@@ -5519,7 +5681,7 @@
             <a:lvl8pPr>
               <a:defRPr sz="3150" b="1">
                 <a:solidFill>
-                  <a:srgbClr val="202124"/>
+                  <a:srgbClr val="FFFFFF"/>
                 </a:solidFill>
                 <a:latin typeface="Arial"/>
                 <a:ea typeface="Arial"/>
@@ -5529,7 +5691,7 @@
             <a:lvl9pPr>
               <a:defRPr sz="3150" b="1">
                 <a:solidFill>
-                  <a:srgbClr val="202124"/>
+                  <a:srgbClr val="FFFFFF"/>
                 </a:solidFill>
                 <a:latin typeface="Arial"/>
                 <a:ea typeface="Arial"/>
@@ -5541,7 +5703,7 @@
             <a:pPr>
               <a:defRPr sz="3150" b="1">
                 <a:solidFill>
-                  <a:srgbClr val="202124"/>
+                  <a:srgbClr val="FFFFFF"/>
                 </a:solidFill>
                 <a:latin typeface="Arial"/>
                 <a:ea typeface="Arial"/>
@@ -5551,23 +5713,23 @@
             <a:r>
               <a:rPr sz="3150" b="1">
                 <a:solidFill>
-                  <a:srgbClr val="202124"/>
+                  <a:srgbClr val="FFFFFF"/>
                 </a:solidFill>
                 <a:latin typeface="Arial"/>
                 <a:ea typeface="Arial"/>
                 <a:cs typeface="Arial"/>
               </a:rPr>
-              <a:t>Саморефлексия команды</a:t>
+              <a:t>Технологии и работа с ИИ</a:t>
             </a:r>
           </a:p>
         </p:txBody>
       </p:sp>
       <p:sp>
         <p:nvSpPr>
-          <p:cNvPr id="3" name="Что сработало">
+          <p:cNvPr id="3" name="Приложение">
             <a:extLst xmlns:a="http://schemas.openxmlformats.org/drawingml/2006/main">
               <a:ext uri="{FF2B5EF4-FFF2-40B4-BE49-F238E27FC236}">
-                <a16:creationId xmlns:a16="http://schemas.microsoft.com/office/drawing/2014/main" id="{5B41894B-4F9A-4565-9737-ADEAA73035CF}"/>
+                <a16:creationId xmlns:a16="http://schemas.microsoft.com/office/drawing/2014/main" id="{C2CFF599-701C-489C-86A6-BBC7094E132E}"/>
               </a:ext>
             </a:extLst>
           </p:cNvPr>
@@ -5578,8 +5740,8 @@
         </p:nvSpPr>
         <p:spPr>
           <a:xfrm xmlns:a="http://schemas.openxmlformats.org/drawingml/2006/main">
-            <a:off x="762000" y="2133600"/>
-            <a:ext cx="4905375" cy="552450"/>
+            <a:off x="762000" y="2047875"/>
+            <a:ext cx="3209925" cy="552450"/>
           </a:xfrm>
           <a:prstGeom xmlns:a="http://schemas.openxmlformats.org/drawingml/2006/main" prst="rect">
             <a:avLst/>
@@ -5595,7 +5757,7 @@
             <a:defPPr>
               <a:defRPr sz="2175" b="1">
                 <a:solidFill>
-                  <a:srgbClr val="202124"/>
+                  <a:srgbClr val="FFFFFF"/>
                 </a:solidFill>
                 <a:latin typeface="Arial"/>
                 <a:ea typeface="Arial"/>
@@ -5605,7 +5767,7 @@
             <a:lvl1pPr>
               <a:defRPr sz="2175" b="1">
                 <a:solidFill>
-                  <a:srgbClr val="202124"/>
+                  <a:srgbClr val="FFFFFF"/>
                 </a:solidFill>
                 <a:latin typeface="Arial"/>
                 <a:ea typeface="Arial"/>
@@ -5615,7 +5777,7 @@
             <a:lvl2pPr>
               <a:defRPr sz="2175" b="1">
                 <a:solidFill>
-                  <a:srgbClr val="202124"/>
+                  <a:srgbClr val="FFFFFF"/>
                 </a:solidFill>
                 <a:latin typeface="Arial"/>
                 <a:ea typeface="Arial"/>
@@ -5625,7 +5787,7 @@
             <a:lvl3pPr>
               <a:defRPr sz="2175" b="1">
                 <a:solidFill>
-                  <a:srgbClr val="202124"/>
+                  <a:srgbClr val="FFFFFF"/>
                 </a:solidFill>
                 <a:latin typeface="Arial"/>
                 <a:ea typeface="Arial"/>
@@ -5635,7 +5797,7 @@
             <a:lvl4pPr>
               <a:defRPr sz="2175" b="1">
                 <a:solidFill>
-                  <a:srgbClr val="202124"/>
+                  <a:srgbClr val="FFFFFF"/>
                 </a:solidFill>
                 <a:latin typeface="Arial"/>
                 <a:ea typeface="Arial"/>
@@ -5645,7 +5807,7 @@
             <a:lvl5pPr>
               <a:defRPr sz="2175" b="1">
                 <a:solidFill>
-                  <a:srgbClr val="202124"/>
+                  <a:srgbClr val="FFFFFF"/>
                 </a:solidFill>
                 <a:latin typeface="Arial"/>
                 <a:ea typeface="Arial"/>
@@ -5655,7 +5817,7 @@
             <a:lvl6pPr>
               <a:defRPr sz="2175" b="1">
                 <a:solidFill>
-                  <a:srgbClr val="202124"/>
+                  <a:srgbClr val="FFFFFF"/>
                 </a:solidFill>
                 <a:latin typeface="Arial"/>
                 <a:ea typeface="Arial"/>
@@ -5665,7 +5827,7 @@
             <a:lvl7pPr>
               <a:defRPr sz="2175" b="1">
                 <a:solidFill>
-                  <a:srgbClr val="202124"/>
+                  <a:srgbClr val="FFFFFF"/>
                 </a:solidFill>
                 <a:latin typeface="Arial"/>
                 <a:ea typeface="Arial"/>
@@ -5675,7 +5837,7 @@
             <a:lvl8pPr>
               <a:defRPr sz="2175" b="1">
                 <a:solidFill>
-                  <a:srgbClr val="202124"/>
+                  <a:srgbClr val="FFFFFF"/>
                 </a:solidFill>
                 <a:latin typeface="Arial"/>
                 <a:ea typeface="Arial"/>
@@ -5685,7 +5847,7 @@
             <a:lvl9pPr>
               <a:defRPr sz="2175" b="1">
                 <a:solidFill>
-                  <a:srgbClr val="202124"/>
+                  <a:srgbClr val="FFFFFF"/>
                 </a:solidFill>
                 <a:latin typeface="Arial"/>
                 <a:ea typeface="Arial"/>
@@ -5697,7 +5859,7 @@
             <a:pPr>
               <a:defRPr sz="2175" b="1">
                 <a:solidFill>
-                  <a:srgbClr val="202124"/>
+                  <a:srgbClr val="FFFFFF"/>
                 </a:solidFill>
                 <a:latin typeface="Arial"/>
                 <a:ea typeface="Arial"/>
@@ -5707,23 +5869,23 @@
             <a:r>
               <a:rPr sz="2175" b="1">
                 <a:solidFill>
-                  <a:srgbClr val="202124"/>
+                  <a:srgbClr val="FFFFFF"/>
                 </a:solidFill>
                 <a:latin typeface="Arial"/>
                 <a:ea typeface="Arial"/>
                 <a:cs typeface="Arial"/>
               </a:rPr>
-              <a:t>Что сработало</a:t>
+              <a:t>Приложение</a:t>
             </a:r>
           </a:p>
         </p:txBody>
       </p:sp>
       <p:sp>
         <p:nvSpPr>
-          <p:cNvPr id="4" name="Разделили измерение и генерацию речи. Правила определяю">
+          <p:cNvPr id="4" name="HTML, CSS и JavaScript-модули без сборки. PWA, Service ">
             <a:extLst xmlns:a="http://schemas.openxmlformats.org/drawingml/2006/main">
               <a:ext uri="{FF2B5EF4-FFF2-40B4-BE49-F238E27FC236}">
-                <a16:creationId xmlns:a16="http://schemas.microsoft.com/office/drawing/2014/main" id="{7717A6CF-C4E7-418C-9B5D-6EB9F0F4DFBF}"/>
+                <a16:creationId xmlns:a16="http://schemas.microsoft.com/office/drawing/2014/main" id="{161EB3C9-D462-4C2D-81D7-08038DCA68F1}"/>
               </a:ext>
             </a:extLst>
           </p:cNvPr>
@@ -5734,8 +5896,8 @@
         </p:nvSpPr>
         <p:spPr>
           <a:xfrm xmlns:a="http://schemas.openxmlformats.org/drawingml/2006/main">
-            <a:off x="762000" y="2800350"/>
-            <a:ext cx="4905375" cy="2047875"/>
+            <a:off x="762000" y="2714625"/>
+            <a:ext cx="3209925" cy="2047875"/>
           </a:xfrm>
           <a:prstGeom xmlns:a="http://schemas.openxmlformats.org/drawingml/2006/main" prst="rect">
             <a:avLst/>
@@ -5749,9 +5911,9 @@
           <a:bodyPr xmlns:a="http://schemas.openxmlformats.org/drawingml/2006/main" wrap="square" lIns="0" tIns="0" rIns="0" bIns="0" anchor="t"/>
           <a:lstStyle xmlns:a="http://schemas.openxmlformats.org/drawingml/2006/main">
             <a:defPPr>
-              <a:defRPr sz="1950" b="0">
-                <a:solidFill>
-                  <a:srgbClr val="62666D"/>
+              <a:defRPr sz="1800" b="0">
+                <a:solidFill>
+                  <a:srgbClr val="CDD0D5"/>
                 </a:solidFill>
                 <a:latin typeface="Arial"/>
                 <a:ea typeface="Arial"/>
@@ -5759,9 +5921,9 @@
               </a:defRPr>
             </a:defPPr>
             <a:lvl1pPr>
-              <a:defRPr sz="1950" b="0">
-                <a:solidFill>
-                  <a:srgbClr val="62666D"/>
+              <a:defRPr sz="1800" b="0">
+                <a:solidFill>
+                  <a:srgbClr val="CDD0D5"/>
                 </a:solidFill>
                 <a:latin typeface="Arial"/>
                 <a:ea typeface="Arial"/>
@@ -5769,9 +5931,9 @@
               </a:defRPr>
             </a:lvl1pPr>
             <a:lvl2pPr>
-              <a:defRPr sz="1950" b="0">
-                <a:solidFill>
-                  <a:srgbClr val="62666D"/>
+              <a:defRPr sz="1800" b="0">
+                <a:solidFill>
+                  <a:srgbClr val="CDD0D5"/>
                 </a:solidFill>
                 <a:latin typeface="Arial"/>
                 <a:ea typeface="Arial"/>
@@ -5779,9 +5941,9 @@
               </a:defRPr>
             </a:lvl2pPr>
             <a:lvl3pPr>
-              <a:defRPr sz="1950" b="0">
-                <a:solidFill>
-                  <a:srgbClr val="62666D"/>
+              <a:defRPr sz="1800" b="0">
+                <a:solidFill>
+                  <a:srgbClr val="CDD0D5"/>
                 </a:solidFill>
                 <a:latin typeface="Arial"/>
                 <a:ea typeface="Arial"/>
@@ -5789,9 +5951,9 @@
               </a:defRPr>
             </a:lvl3pPr>
             <a:lvl4pPr>
-              <a:defRPr sz="1950" b="0">
-                <a:solidFill>
-                  <a:srgbClr val="62666D"/>
+              <a:defRPr sz="1800" b="0">
+                <a:solidFill>
+                  <a:srgbClr val="CDD0D5"/>
                 </a:solidFill>
                 <a:latin typeface="Arial"/>
                 <a:ea typeface="Arial"/>
@@ -5799,9 +5961,9 @@
               </a:defRPr>
             </a:lvl4pPr>
             <a:lvl5pPr>
-              <a:defRPr sz="1950" b="0">
-                <a:solidFill>
-                  <a:srgbClr val="62666D"/>
+              <a:defRPr sz="1800" b="0">
+                <a:solidFill>
+                  <a:srgbClr val="CDD0D5"/>
                 </a:solidFill>
                 <a:latin typeface="Arial"/>
                 <a:ea typeface="Arial"/>
@@ -5809,9 +5971,9 @@
               </a:defRPr>
             </a:lvl5pPr>
             <a:lvl6pPr>
-              <a:defRPr sz="1950" b="0">
-                <a:solidFill>
-                  <a:srgbClr val="62666D"/>
+              <a:defRPr sz="1800" b="0">
+                <a:solidFill>
+                  <a:srgbClr val="CDD0D5"/>
                 </a:solidFill>
                 <a:latin typeface="Arial"/>
                 <a:ea typeface="Arial"/>
@@ -5819,9 +5981,9 @@
               </a:defRPr>
             </a:lvl6pPr>
             <a:lvl7pPr>
-              <a:defRPr sz="1950" b="0">
-                <a:solidFill>
-                  <a:srgbClr val="62666D"/>
+              <a:defRPr sz="1800" b="0">
+                <a:solidFill>
+                  <a:srgbClr val="CDD0D5"/>
                 </a:solidFill>
                 <a:latin typeface="Arial"/>
                 <a:ea typeface="Arial"/>
@@ -5829,9 +5991,9 @@
               </a:defRPr>
             </a:lvl7pPr>
             <a:lvl8pPr>
-              <a:defRPr sz="1950" b="0">
-                <a:solidFill>
-                  <a:srgbClr val="62666D"/>
+              <a:defRPr sz="1800" b="0">
+                <a:solidFill>
+                  <a:srgbClr val="CDD0D5"/>
                 </a:solidFill>
                 <a:latin typeface="Arial"/>
                 <a:ea typeface="Arial"/>
@@ -5839,9 +6001,9 @@
               </a:defRPr>
             </a:lvl8pPr>
             <a:lvl9pPr>
-              <a:defRPr sz="1950" b="0">
-                <a:solidFill>
-                  <a:srgbClr val="62666D"/>
+              <a:defRPr sz="1800" b="0">
+                <a:solidFill>
+                  <a:srgbClr val="CDD0D5"/>
                 </a:solidFill>
                 <a:latin typeface="Arial"/>
                 <a:ea typeface="Arial"/>
@@ -5851,9 +6013,9 @@
           </a:lstStyle>
           <a:p xmlns:a="http://schemas.openxmlformats.org/drawingml/2006/main">
             <a:pPr>
-              <a:defRPr sz="1950" b="0">
-                <a:solidFill>
-                  <a:srgbClr val="62666D"/>
+              <a:defRPr sz="1800" b="0">
+                <a:solidFill>
+                  <a:srgbClr val="CDD0D5"/>
                 </a:solidFill>
                 <a:latin typeface="Arial"/>
                 <a:ea typeface="Arial"/>
@@ -5861,25 +6023,25 @@
               </a:defRPr>
             </a:pPr>
             <a:r>
-              <a:rPr sz="1950" b="0">
-                <a:solidFill>
-                  <a:srgbClr val="62666D"/>
+              <a:rPr sz="1800" b="0">
+                <a:solidFill>
+                  <a:srgbClr val="CDD0D5"/>
                 </a:solidFill>
                 <a:latin typeface="Arial"/>
                 <a:ea typeface="Arial"/>
                 <a:cs typeface="Arial"/>
               </a:rPr>
-              <a:t>Разделили измерение и генерацию речи. Правила определяют результат, LLM делает ответ естественнее.</a:t>
+              <a:t>HTML, CSS и JavaScript-модули без сборки. PWA, Service Worker, IndexedDB и GitHub Pages.</a:t>
             </a:r>
           </a:p>
         </p:txBody>
       </p:sp>
       <p:sp>
         <p:nvSpPr>
-          <p:cNvPr id="5" name="Что недооценили">
+          <p:cNvPr id="5" name="ИИ в продукте">
             <a:extLst xmlns:a="http://schemas.openxmlformats.org/drawingml/2006/main">
               <a:ext uri="{FF2B5EF4-FFF2-40B4-BE49-F238E27FC236}">
-                <a16:creationId xmlns:a16="http://schemas.microsoft.com/office/drawing/2014/main" id="{BA133373-6914-48A5-928F-130997F50252}"/>
+                <a16:creationId xmlns:a16="http://schemas.microsoft.com/office/drawing/2014/main" id="{F7C5D527-5255-4DDD-95DA-2780B3BD64DA}"/>
               </a:ext>
             </a:extLst>
           </p:cNvPr>
@@ -5890,8 +6052,8 @@
         </p:nvSpPr>
         <p:spPr>
           <a:xfrm xmlns:a="http://schemas.openxmlformats.org/drawingml/2006/main">
-            <a:off x="6524625" y="2133600"/>
-            <a:ext cx="4905375" cy="552450"/>
+            <a:off x="4495800" y="2047875"/>
+            <a:ext cx="3209925" cy="552450"/>
           </a:xfrm>
           <a:prstGeom xmlns:a="http://schemas.openxmlformats.org/drawingml/2006/main" prst="rect">
             <a:avLst/>
@@ -5907,7 +6069,7 @@
             <a:defPPr>
               <a:defRPr sz="2175" b="1">
                 <a:solidFill>
-                  <a:srgbClr val="202124"/>
+                  <a:srgbClr val="FFFFFF"/>
                 </a:solidFill>
                 <a:latin typeface="Arial"/>
                 <a:ea typeface="Arial"/>
@@ -5917,7 +6079,7 @@
             <a:lvl1pPr>
               <a:defRPr sz="2175" b="1">
                 <a:solidFill>
-                  <a:srgbClr val="202124"/>
+                  <a:srgbClr val="FFFFFF"/>
                 </a:solidFill>
                 <a:latin typeface="Arial"/>
                 <a:ea typeface="Arial"/>
@@ -5927,7 +6089,7 @@
             <a:lvl2pPr>
               <a:defRPr sz="2175" b="1">
                 <a:solidFill>
-                  <a:srgbClr val="202124"/>
+                  <a:srgbClr val="FFFFFF"/>
                 </a:solidFill>
                 <a:latin typeface="Arial"/>
                 <a:ea typeface="Arial"/>
@@ -5937,7 +6099,7 @@
             <a:lvl3pPr>
               <a:defRPr sz="2175" b="1">
                 <a:solidFill>
-                  <a:srgbClr val="202124"/>
+                  <a:srgbClr val="FFFFFF"/>
                 </a:solidFill>
                 <a:latin typeface="Arial"/>
                 <a:ea typeface="Arial"/>
@@ -5947,7 +6109,7 @@
             <a:lvl4pPr>
               <a:defRPr sz="2175" b="1">
                 <a:solidFill>
-                  <a:srgbClr val="202124"/>
+                  <a:srgbClr val="FFFFFF"/>
                 </a:solidFill>
                 <a:latin typeface="Arial"/>
                 <a:ea typeface="Arial"/>
@@ -5957,7 +6119,7 @@
             <a:lvl5pPr>
               <a:defRPr sz="2175" b="1">
                 <a:solidFill>
-                  <a:srgbClr val="202124"/>
+                  <a:srgbClr val="FFFFFF"/>
                 </a:solidFill>
                 <a:latin typeface="Arial"/>
                 <a:ea typeface="Arial"/>
@@ -5967,7 +6129,7 @@
             <a:lvl6pPr>
               <a:defRPr sz="2175" b="1">
                 <a:solidFill>
-                  <a:srgbClr val="202124"/>
+                  <a:srgbClr val="FFFFFF"/>
                 </a:solidFill>
                 <a:latin typeface="Arial"/>
                 <a:ea typeface="Arial"/>
@@ -5977,7 +6139,7 @@
             <a:lvl7pPr>
               <a:defRPr sz="2175" b="1">
                 <a:solidFill>
-                  <a:srgbClr val="202124"/>
+                  <a:srgbClr val="FFFFFF"/>
                 </a:solidFill>
                 <a:latin typeface="Arial"/>
                 <a:ea typeface="Arial"/>
@@ -5987,7 +6149,7 @@
             <a:lvl8pPr>
               <a:defRPr sz="2175" b="1">
                 <a:solidFill>
-                  <a:srgbClr val="202124"/>
+                  <a:srgbClr val="FFFFFF"/>
                 </a:solidFill>
                 <a:latin typeface="Arial"/>
                 <a:ea typeface="Arial"/>
@@ -5997,7 +6159,7 @@
             <a:lvl9pPr>
               <a:defRPr sz="2175" b="1">
                 <a:solidFill>
-                  <a:srgbClr val="202124"/>
+                  <a:srgbClr val="FFFFFF"/>
                 </a:solidFill>
                 <a:latin typeface="Arial"/>
                 <a:ea typeface="Arial"/>
@@ -6009,7 +6171,7 @@
             <a:pPr>
               <a:defRPr sz="2175" b="1">
                 <a:solidFill>
-                  <a:srgbClr val="202124"/>
+                  <a:srgbClr val="FFFFFF"/>
                 </a:solidFill>
                 <a:latin typeface="Arial"/>
                 <a:ea typeface="Arial"/>
@@ -6019,23 +6181,23 @@
             <a:r>
               <a:rPr sz="2175" b="1">
                 <a:solidFill>
-                  <a:srgbClr val="202124"/>
+                  <a:srgbClr val="FFFFFF"/>
                 </a:solidFill>
                 <a:latin typeface="Arial"/>
                 <a:ea typeface="Arial"/>
                 <a:cs typeface="Arial"/>
               </a:rPr>
-              <a:t>Что недооценили</a:t>
+              <a:t>ИИ в продукте</a:t>
             </a:r>
           </a:p>
         </p:txBody>
       </p:sp>
       <p:sp>
         <p:nvSpPr>
-          <p:cNvPr id="6" name="Камера, клавиатура и кеш на телефоне потребовали нескол">
+          <p:cNvPr id="6" name="MediaPipe Pose и Object Detector. WebLLM 0.2.86 запуска">
             <a:extLst xmlns:a="http://schemas.openxmlformats.org/drawingml/2006/main">
               <a:ext uri="{FF2B5EF4-FFF2-40B4-BE49-F238E27FC236}">
-                <a16:creationId xmlns:a16="http://schemas.microsoft.com/office/drawing/2014/main" id="{D85256FA-3AC4-433F-9A61-7C7C34F94021}"/>
+                <a16:creationId xmlns:a16="http://schemas.microsoft.com/office/drawing/2014/main" id="{CDC20A31-98A3-4417-9295-8890EC4DE837}"/>
               </a:ext>
             </a:extLst>
           </p:cNvPr>
@@ -6046,8 +6208,8 @@
         </p:nvSpPr>
         <p:spPr>
           <a:xfrm xmlns:a="http://schemas.openxmlformats.org/drawingml/2006/main">
-            <a:off x="6524625" y="2800350"/>
-            <a:ext cx="4905375" cy="2047875"/>
+            <a:off x="4495800" y="2714625"/>
+            <a:ext cx="3209925" cy="2047875"/>
           </a:xfrm>
           <a:prstGeom xmlns:a="http://schemas.openxmlformats.org/drawingml/2006/main" prst="rect">
             <a:avLst/>
@@ -6061,9 +6223,9 @@
           <a:bodyPr xmlns:a="http://schemas.openxmlformats.org/drawingml/2006/main" wrap="square" lIns="0" tIns="0" rIns="0" bIns="0" anchor="t"/>
           <a:lstStyle xmlns:a="http://schemas.openxmlformats.org/drawingml/2006/main">
             <a:defPPr>
-              <a:defRPr sz="1950" b="0">
-                <a:solidFill>
-                  <a:srgbClr val="62666D"/>
+              <a:defRPr sz="1800" b="0">
+                <a:solidFill>
+                  <a:srgbClr val="CDD0D5"/>
                 </a:solidFill>
                 <a:latin typeface="Arial"/>
                 <a:ea typeface="Arial"/>
@@ -6071,9 +6233,9 @@
               </a:defRPr>
             </a:defPPr>
             <a:lvl1pPr>
-              <a:defRPr sz="1950" b="0">
-                <a:solidFill>
-                  <a:srgbClr val="62666D"/>
+              <a:defRPr sz="1800" b="0">
+                <a:solidFill>
+                  <a:srgbClr val="CDD0D5"/>
                 </a:solidFill>
                 <a:latin typeface="Arial"/>
                 <a:ea typeface="Arial"/>
@@ -6081,9 +6243,9 @@
               </a:defRPr>
             </a:lvl1pPr>
             <a:lvl2pPr>
-              <a:defRPr sz="1950" b="0">
-                <a:solidFill>
-                  <a:srgbClr val="62666D"/>
+              <a:defRPr sz="1800" b="0">
+                <a:solidFill>
+                  <a:srgbClr val="CDD0D5"/>
                 </a:solidFill>
                 <a:latin typeface="Arial"/>
                 <a:ea typeface="Arial"/>
@@ -6091,9 +6253,9 @@
               </a:defRPr>
             </a:lvl2pPr>
             <a:lvl3pPr>
-              <a:defRPr sz="1950" b="0">
-                <a:solidFill>
-                  <a:srgbClr val="62666D"/>
+              <a:defRPr sz="1800" b="0">
+                <a:solidFill>
+                  <a:srgbClr val="CDD0D5"/>
                 </a:solidFill>
                 <a:latin typeface="Arial"/>
                 <a:ea typeface="Arial"/>
@@ -6101,9 +6263,9 @@
               </a:defRPr>
             </a:lvl3pPr>
             <a:lvl4pPr>
-              <a:defRPr sz="1950" b="0">
-                <a:solidFill>
-                  <a:srgbClr val="62666D"/>
+              <a:defRPr sz="1800" b="0">
+                <a:solidFill>
+                  <a:srgbClr val="CDD0D5"/>
                 </a:solidFill>
                 <a:latin typeface="Arial"/>
                 <a:ea typeface="Arial"/>
@@ -6111,9 +6273,9 @@
               </a:defRPr>
             </a:lvl4pPr>
             <a:lvl5pPr>
-              <a:defRPr sz="1950" b="0">
-                <a:solidFill>
-                  <a:srgbClr val="62666D"/>
+              <a:defRPr sz="1800" b="0">
+                <a:solidFill>
+                  <a:srgbClr val="CDD0D5"/>
                 </a:solidFill>
                 <a:latin typeface="Arial"/>
                 <a:ea typeface="Arial"/>
@@ -6121,9 +6283,9 @@
               </a:defRPr>
             </a:lvl5pPr>
             <a:lvl6pPr>
-              <a:defRPr sz="1950" b="0">
-                <a:solidFill>
-                  <a:srgbClr val="62666D"/>
+              <a:defRPr sz="1800" b="0">
+                <a:solidFill>
+                  <a:srgbClr val="CDD0D5"/>
                 </a:solidFill>
                 <a:latin typeface="Arial"/>
                 <a:ea typeface="Arial"/>
@@ -6131,9 +6293,9 @@
               </a:defRPr>
             </a:lvl6pPr>
             <a:lvl7pPr>
-              <a:defRPr sz="1950" b="0">
-                <a:solidFill>
-                  <a:srgbClr val="62666D"/>
+              <a:defRPr sz="1800" b="0">
+                <a:solidFill>
+                  <a:srgbClr val="CDD0D5"/>
                 </a:solidFill>
                 <a:latin typeface="Arial"/>
                 <a:ea typeface="Arial"/>
@@ -6141,9 +6303,9 @@
               </a:defRPr>
             </a:lvl7pPr>
             <a:lvl8pPr>
-              <a:defRPr sz="1950" b="0">
-                <a:solidFill>
-                  <a:srgbClr val="62666D"/>
+              <a:defRPr sz="1800" b="0">
+                <a:solidFill>
+                  <a:srgbClr val="CDD0D5"/>
                 </a:solidFill>
                 <a:latin typeface="Arial"/>
                 <a:ea typeface="Arial"/>
@@ -6151,9 +6313,9 @@
               </a:defRPr>
             </a:lvl8pPr>
             <a:lvl9pPr>
-              <a:defRPr sz="1950" b="0">
-                <a:solidFill>
-                  <a:srgbClr val="62666D"/>
+              <a:defRPr sz="1800" b="0">
+                <a:solidFill>
+                  <a:srgbClr val="CDD0D5"/>
                 </a:solidFill>
                 <a:latin typeface="Arial"/>
                 <a:ea typeface="Arial"/>
@@ -6163,9 +6325,9 @@
           </a:lstStyle>
           <a:p xmlns:a="http://schemas.openxmlformats.org/drawingml/2006/main">
             <a:pPr>
-              <a:defRPr sz="1950" b="0">
-                <a:solidFill>
-                  <a:srgbClr val="62666D"/>
+              <a:defRPr sz="1800" b="0">
+                <a:solidFill>
+                  <a:srgbClr val="CDD0D5"/>
                 </a:solidFill>
                 <a:latin typeface="Arial"/>
                 <a:ea typeface="Arial"/>
@@ -6173,25 +6335,25 @@
               </a:defRPr>
             </a:pPr>
             <a:r>
-              <a:rPr sz="1950" b="0">
-                <a:solidFill>
-                  <a:srgbClr val="62666D"/>
+              <a:rPr sz="1800" b="0">
+                <a:solidFill>
+                  <a:srgbClr val="CDD0D5"/>
                 </a:solidFill>
                 <a:latin typeface="Arial"/>
                 <a:ea typeface="Arial"/>
                 <a:cs typeface="Arial"/>
               </a:rPr>
-              <a:t>Камера, клавиатура и кеш на телефоне потребовали нескольких итераций. Демо не выявляет все ошибки реального видео.</a:t>
+              <a:t>MediaPipe Pose и Object Detector. WebLLM 0.2.86 запускает Qwen2.5 1.5B или 0.5B через WebGPU.</a:t>
             </a:r>
           </a:p>
         </p:txBody>
       </p:sp>
       <p:sp>
         <p:nvSpPr>
-          <p:cNvPr id="7" name="Главный вывод">
+          <p:cNvPr id="7" name="Разработка с ИИ">
             <a:extLst xmlns:a="http://schemas.openxmlformats.org/drawingml/2006/main">
               <a:ext uri="{FF2B5EF4-FFF2-40B4-BE49-F238E27FC236}">
-                <a16:creationId xmlns:a16="http://schemas.microsoft.com/office/drawing/2014/main" id="{F98F5903-CDC3-436A-A261-2B588C2C5CFF}"/>
+                <a16:creationId xmlns:a16="http://schemas.microsoft.com/office/drawing/2014/main" id="{622B73FC-A996-4D0E-90FA-FDA541852822}"/>
               </a:ext>
             </a:extLst>
           </p:cNvPr>
@@ -6202,8 +6364,8 @@
         </p:nvSpPr>
         <p:spPr>
           <a:xfrm xmlns:a="http://schemas.openxmlformats.org/drawingml/2006/main">
-            <a:off x="762000" y="4619625"/>
-            <a:ext cx="10668000" cy="428625"/>
+            <a:off x="8229600" y="2047875"/>
+            <a:ext cx="3209925" cy="552450"/>
           </a:xfrm>
           <a:prstGeom xmlns:a="http://schemas.openxmlformats.org/drawingml/2006/main" prst="rect">
             <a:avLst/>
@@ -6217,9 +6379,9 @@
           <a:bodyPr xmlns:a="http://schemas.openxmlformats.org/drawingml/2006/main" wrap="square" lIns="0" tIns="0" rIns="0" bIns="0" anchor="t"/>
           <a:lstStyle xmlns:a="http://schemas.openxmlformats.org/drawingml/2006/main">
             <a:defPPr>
-              <a:defRPr sz="2250" b="1">
-                <a:solidFill>
-                  <a:srgbClr val="0866FF"/>
+              <a:defRPr sz="2175" b="1">
+                <a:solidFill>
+                  <a:srgbClr val="FFFFFF"/>
                 </a:solidFill>
                 <a:latin typeface="Arial"/>
                 <a:ea typeface="Arial"/>
@@ -6227,9 +6389,9 @@
               </a:defRPr>
             </a:defPPr>
             <a:lvl1pPr>
-              <a:defRPr sz="2250" b="1">
-                <a:solidFill>
-                  <a:srgbClr val="0866FF"/>
+              <a:defRPr sz="2175" b="1">
+                <a:solidFill>
+                  <a:srgbClr val="FFFFFF"/>
                 </a:solidFill>
                 <a:latin typeface="Arial"/>
                 <a:ea typeface="Arial"/>
@@ -6237,9 +6399,9 @@
               </a:defRPr>
             </a:lvl1pPr>
             <a:lvl2pPr>
-              <a:defRPr sz="2250" b="1">
-                <a:solidFill>
-                  <a:srgbClr val="0866FF"/>
+              <a:defRPr sz="2175" b="1">
+                <a:solidFill>
+                  <a:srgbClr val="FFFFFF"/>
                 </a:solidFill>
                 <a:latin typeface="Arial"/>
                 <a:ea typeface="Arial"/>
@@ -6247,9 +6409,9 @@
               </a:defRPr>
             </a:lvl2pPr>
             <a:lvl3pPr>
-              <a:defRPr sz="2250" b="1">
-                <a:solidFill>
-                  <a:srgbClr val="0866FF"/>
+              <a:defRPr sz="2175" b="1">
+                <a:solidFill>
+                  <a:srgbClr val="FFFFFF"/>
                 </a:solidFill>
                 <a:latin typeface="Arial"/>
                 <a:ea typeface="Arial"/>
@@ -6257,9 +6419,9 @@
               </a:defRPr>
             </a:lvl3pPr>
             <a:lvl4pPr>
-              <a:defRPr sz="2250" b="1">
-                <a:solidFill>
-                  <a:srgbClr val="0866FF"/>
+              <a:defRPr sz="2175" b="1">
+                <a:solidFill>
+                  <a:srgbClr val="FFFFFF"/>
                 </a:solidFill>
                 <a:latin typeface="Arial"/>
                 <a:ea typeface="Arial"/>
@@ -6267,9 +6429,9 @@
               </a:defRPr>
             </a:lvl4pPr>
             <a:lvl5pPr>
-              <a:defRPr sz="2250" b="1">
-                <a:solidFill>
-                  <a:srgbClr val="0866FF"/>
+              <a:defRPr sz="2175" b="1">
+                <a:solidFill>
+                  <a:srgbClr val="FFFFFF"/>
                 </a:solidFill>
                 <a:latin typeface="Arial"/>
                 <a:ea typeface="Arial"/>
@@ -6277,9 +6439,9 @@
               </a:defRPr>
             </a:lvl5pPr>
             <a:lvl6pPr>
-              <a:defRPr sz="2250" b="1">
-                <a:solidFill>
-                  <a:srgbClr val="0866FF"/>
+              <a:defRPr sz="2175" b="1">
+                <a:solidFill>
+                  <a:srgbClr val="FFFFFF"/>
                 </a:solidFill>
                 <a:latin typeface="Arial"/>
                 <a:ea typeface="Arial"/>
@@ -6287,9 +6449,9 @@
               </a:defRPr>
             </a:lvl6pPr>
             <a:lvl7pPr>
-              <a:defRPr sz="2250" b="1">
-                <a:solidFill>
-                  <a:srgbClr val="0866FF"/>
+              <a:defRPr sz="2175" b="1">
+                <a:solidFill>
+                  <a:srgbClr val="FFFFFF"/>
                 </a:solidFill>
                 <a:latin typeface="Arial"/>
                 <a:ea typeface="Arial"/>
@@ -6297,9 +6459,9 @@
               </a:defRPr>
             </a:lvl7pPr>
             <a:lvl8pPr>
-              <a:defRPr sz="2250" b="1">
-                <a:solidFill>
-                  <a:srgbClr val="0866FF"/>
+              <a:defRPr sz="2175" b="1">
+                <a:solidFill>
+                  <a:srgbClr val="FFFFFF"/>
                 </a:solidFill>
                 <a:latin typeface="Arial"/>
                 <a:ea typeface="Arial"/>
@@ -6307,9 +6469,9 @@
               </a:defRPr>
             </a:lvl8pPr>
             <a:lvl9pPr>
-              <a:defRPr sz="2250" b="1">
-                <a:solidFill>
-                  <a:srgbClr val="0866FF"/>
+              <a:defRPr sz="2175" b="1">
+                <a:solidFill>
+                  <a:srgbClr val="FFFFFF"/>
                 </a:solidFill>
                 <a:latin typeface="Arial"/>
                 <a:ea typeface="Arial"/>
@@ -6319,9 +6481,9 @@
           </a:lstStyle>
           <a:p xmlns:a="http://schemas.openxmlformats.org/drawingml/2006/main">
             <a:pPr>
-              <a:defRPr sz="2250" b="1">
-                <a:solidFill>
-                  <a:srgbClr val="0866FF"/>
+              <a:defRPr sz="2175" b="1">
+                <a:solidFill>
+                  <a:srgbClr val="FFFFFF"/>
                 </a:solidFill>
                 <a:latin typeface="Arial"/>
                 <a:ea typeface="Arial"/>
@@ -6329,25 +6491,25 @@
               </a:defRPr>
             </a:pPr>
             <a:r>
-              <a:rPr sz="2250" b="1">
-                <a:solidFill>
-                  <a:srgbClr val="0866FF"/>
+              <a:rPr sz="2175" b="1">
+                <a:solidFill>
+                  <a:srgbClr val="FFFFFF"/>
                 </a:solidFill>
                 <a:latin typeface="Arial"/>
                 <a:ea typeface="Arial"/>
                 <a:cs typeface="Arial"/>
               </a:rPr>
-              <a:t>Главный вывод</a:t>
+              <a:t>Разработка с ИИ</a:t>
             </a:r>
           </a:p>
         </p:txBody>
       </p:sp>
       <p:sp>
         <p:nvSpPr>
-          <p:cNvPr id="8" name="В следующей итерации начнём с одного навыка на реальных">
+          <p:cNvPr id="8" name="Агенты Codex и Claude Code работают по ролям. Context7 ">
             <a:extLst xmlns:a="http://schemas.openxmlformats.org/drawingml/2006/main">
               <a:ext uri="{FF2B5EF4-FFF2-40B4-BE49-F238E27FC236}">
-                <a16:creationId xmlns:a16="http://schemas.microsoft.com/office/drawing/2014/main" id="{ABEB1E12-8F2D-4802-8D5A-809FBFFE8E52}"/>
+                <a16:creationId xmlns:a16="http://schemas.microsoft.com/office/drawing/2014/main" id="{B07BAE1D-CE49-4B0C-8BDC-21507B903ECE}"/>
               </a:ext>
             </a:extLst>
           </p:cNvPr>
@@ -6358,8 +6520,8 @@
         </p:nvSpPr>
         <p:spPr>
           <a:xfrm xmlns:a="http://schemas.openxmlformats.org/drawingml/2006/main">
-            <a:off x="762000" y="5200650"/>
-            <a:ext cx="10668000" cy="952500"/>
+            <a:off x="8229600" y="2714625"/>
+            <a:ext cx="3209925" cy="2047875"/>
           </a:xfrm>
           <a:prstGeom xmlns:a="http://schemas.openxmlformats.org/drawingml/2006/main" prst="rect">
             <a:avLst/>
@@ -6373,9 +6535,9 @@
           <a:bodyPr xmlns:a="http://schemas.openxmlformats.org/drawingml/2006/main" wrap="square" lIns="0" tIns="0" rIns="0" bIns="0" anchor="t"/>
           <a:lstStyle xmlns:a="http://schemas.openxmlformats.org/drawingml/2006/main">
             <a:defPPr>
-              <a:defRPr sz="2250" b="1">
-                <a:solidFill>
-                  <a:srgbClr val="202124"/>
+              <a:defRPr sz="1800" b="0">
+                <a:solidFill>
+                  <a:srgbClr val="CDD0D5"/>
                 </a:solidFill>
                 <a:latin typeface="Arial"/>
                 <a:ea typeface="Arial"/>
@@ -6383,9 +6545,9 @@
               </a:defRPr>
             </a:defPPr>
             <a:lvl1pPr>
-              <a:defRPr sz="2250" b="1">
-                <a:solidFill>
-                  <a:srgbClr val="202124"/>
+              <a:defRPr sz="1800" b="0">
+                <a:solidFill>
+                  <a:srgbClr val="CDD0D5"/>
                 </a:solidFill>
                 <a:latin typeface="Arial"/>
                 <a:ea typeface="Arial"/>
@@ -6393,9 +6555,9 @@
               </a:defRPr>
             </a:lvl1pPr>
             <a:lvl2pPr>
-              <a:defRPr sz="2250" b="1">
-                <a:solidFill>
-                  <a:srgbClr val="202124"/>
+              <a:defRPr sz="1800" b="0">
+                <a:solidFill>
+                  <a:srgbClr val="CDD0D5"/>
                 </a:solidFill>
                 <a:latin typeface="Arial"/>
                 <a:ea typeface="Arial"/>
@@ -6403,9 +6565,9 @@
               </a:defRPr>
             </a:lvl2pPr>
             <a:lvl3pPr>
-              <a:defRPr sz="2250" b="1">
-                <a:solidFill>
-                  <a:srgbClr val="202124"/>
+              <a:defRPr sz="1800" b="0">
+                <a:solidFill>
+                  <a:srgbClr val="CDD0D5"/>
                 </a:solidFill>
                 <a:latin typeface="Arial"/>
                 <a:ea typeface="Arial"/>
@@ -6413,9 +6575,9 @@
               </a:defRPr>
             </a:lvl3pPr>
             <a:lvl4pPr>
-              <a:defRPr sz="2250" b="1">
-                <a:solidFill>
-                  <a:srgbClr val="202124"/>
+              <a:defRPr sz="1800" b="0">
+                <a:solidFill>
+                  <a:srgbClr val="CDD0D5"/>
                 </a:solidFill>
                 <a:latin typeface="Arial"/>
                 <a:ea typeface="Arial"/>
@@ -6423,9 +6585,9 @@
               </a:defRPr>
             </a:lvl4pPr>
             <a:lvl5pPr>
-              <a:defRPr sz="2250" b="1">
-                <a:solidFill>
-                  <a:srgbClr val="202124"/>
+              <a:defRPr sz="1800" b="0">
+                <a:solidFill>
+                  <a:srgbClr val="CDD0D5"/>
                 </a:solidFill>
                 <a:latin typeface="Arial"/>
                 <a:ea typeface="Arial"/>
@@ -6433,9 +6595,9 @@
               </a:defRPr>
             </a:lvl5pPr>
             <a:lvl6pPr>
-              <a:defRPr sz="2250" b="1">
-                <a:solidFill>
-                  <a:srgbClr val="202124"/>
+              <a:defRPr sz="1800" b="0">
+                <a:solidFill>
+                  <a:srgbClr val="CDD0D5"/>
                 </a:solidFill>
                 <a:latin typeface="Arial"/>
                 <a:ea typeface="Arial"/>
@@ -6443,9 +6605,9 @@
               </a:defRPr>
             </a:lvl6pPr>
             <a:lvl7pPr>
-              <a:defRPr sz="2250" b="1">
-                <a:solidFill>
-                  <a:srgbClr val="202124"/>
+              <a:defRPr sz="1800" b="0">
+                <a:solidFill>
+                  <a:srgbClr val="CDD0D5"/>
                 </a:solidFill>
                 <a:latin typeface="Arial"/>
                 <a:ea typeface="Arial"/>
@@ -6453,9 +6615,9 @@
               </a:defRPr>
             </a:lvl7pPr>
             <a:lvl8pPr>
-              <a:defRPr sz="2250" b="1">
-                <a:solidFill>
-                  <a:srgbClr val="202124"/>
+              <a:defRPr sz="1800" b="0">
+                <a:solidFill>
+                  <a:srgbClr val="CDD0D5"/>
                 </a:solidFill>
                 <a:latin typeface="Arial"/>
                 <a:ea typeface="Arial"/>
@@ -6463,9 +6625,9 @@
               </a:defRPr>
             </a:lvl8pPr>
             <a:lvl9pPr>
-              <a:defRPr sz="2250" b="1">
-                <a:solidFill>
-                  <a:srgbClr val="202124"/>
+              <a:defRPr sz="1800" b="0">
+                <a:solidFill>
+                  <a:srgbClr val="CDD0D5"/>
                 </a:solidFill>
                 <a:latin typeface="Arial"/>
                 <a:ea typeface="Arial"/>
@@ -6475,9 +6637,9 @@
           </a:lstStyle>
           <a:p xmlns:a="http://schemas.openxmlformats.org/drawingml/2006/main">
             <a:pPr>
-              <a:defRPr sz="2250" b="1">
-                <a:solidFill>
-                  <a:srgbClr val="202124"/>
+              <a:defRPr sz="1800" b="0">
+                <a:solidFill>
+                  <a:srgbClr val="CDD0D5"/>
                 </a:solidFill>
                 <a:latin typeface="Arial"/>
                 <a:ea typeface="Arial"/>
@@ -6485,25 +6647,493 @@
               </a:defRPr>
             </a:pPr>
             <a:r>
-              <a:rPr sz="2250" b="1">
-                <a:solidFill>
-                  <a:srgbClr val="202124"/>
+              <a:rPr sz="1800" b="0">
+                <a:solidFill>
+                  <a:srgbClr val="CDD0D5"/>
                 </a:solidFill>
                 <a:latin typeface="Arial"/>
                 <a:ea typeface="Arial"/>
                 <a:cs typeface="Arial"/>
               </a:rPr>
-              <a:t>В следующей итерации начнём с одного навыка на реальных телефонах. Расширять каталог будем после сравнения счёта с ручной разметкой.</a:t>
+              <a:t>Агенты Codex и Claude Code работают по ролям. Context7 MCP сверяет API MediaPipe и WebLLM.</a:t>
             </a:r>
           </a:p>
         </p:txBody>
       </p:sp>
       <p:sp>
         <p:nvSpPr>
-          <p:cNvPr id="9" name="Aimo   /   Что поняли и изменим   /   10 из 13">
+          <p:cNvPr id="9" name="Голос">
             <a:extLst xmlns:a="http://schemas.openxmlformats.org/drawingml/2006/main">
               <a:ext uri="{FF2B5EF4-FFF2-40B4-BE49-F238E27FC236}">
-                <a16:creationId xmlns:a16="http://schemas.microsoft.com/office/drawing/2014/main" id="{73D3B44B-037D-40C8-9AC8-99DD9DF52862}"/>
+                <a16:creationId xmlns:a16="http://schemas.microsoft.com/office/drawing/2014/main" id="{D6F1D3AC-E72F-4D5E-838B-B161EF5C32C7}"/>
+              </a:ext>
+            </a:extLst>
+          </p:cNvPr>
+          <p:cNvSpPr>
+            <a:spLocks xmlns:a="http://schemas.openxmlformats.org/drawingml/2006/main" noGrp="1"/>
+          </p:cNvSpPr>
+          <p:nvPr/>
+        </p:nvSpPr>
+        <p:spPr>
+          <a:xfrm xmlns:a="http://schemas.openxmlformats.org/drawingml/2006/main">
+            <a:off x="762000" y="4876800"/>
+            <a:ext cx="1809750" cy="342900"/>
+          </a:xfrm>
+          <a:prstGeom xmlns:a="http://schemas.openxmlformats.org/drawingml/2006/main" prst="rect">
+            <a:avLst/>
+          </a:prstGeom>
+          <a:noFill xmlns:a="http://schemas.openxmlformats.org/drawingml/2006/main"/>
+          <a:ln xmlns:a="http://schemas.openxmlformats.org/drawingml/2006/main" w="0">
+            <a:noFill/>
+          </a:ln>
+        </p:spPr>
+        <p:txBody>
+          <a:bodyPr xmlns:a="http://schemas.openxmlformats.org/drawingml/2006/main" wrap="square" lIns="0" tIns="0" rIns="0" bIns="0" anchor="t"/>
+          <a:lstStyle xmlns:a="http://schemas.openxmlformats.org/drawingml/2006/main">
+            <a:defPPr>
+              <a:defRPr sz="2025" b="1">
+                <a:solidFill>
+                  <a:srgbClr val="69AAFF"/>
+                </a:solidFill>
+                <a:latin typeface="Arial"/>
+                <a:ea typeface="Arial"/>
+                <a:cs typeface="Arial"/>
+              </a:defRPr>
+            </a:defPPr>
+            <a:lvl1pPr>
+              <a:defRPr sz="2025" b="1">
+                <a:solidFill>
+                  <a:srgbClr val="69AAFF"/>
+                </a:solidFill>
+                <a:latin typeface="Arial"/>
+                <a:ea typeface="Arial"/>
+                <a:cs typeface="Arial"/>
+              </a:defRPr>
+            </a:lvl1pPr>
+            <a:lvl2pPr>
+              <a:defRPr sz="2025" b="1">
+                <a:solidFill>
+                  <a:srgbClr val="69AAFF"/>
+                </a:solidFill>
+                <a:latin typeface="Arial"/>
+                <a:ea typeface="Arial"/>
+                <a:cs typeface="Arial"/>
+              </a:defRPr>
+            </a:lvl2pPr>
+            <a:lvl3pPr>
+              <a:defRPr sz="2025" b="1">
+                <a:solidFill>
+                  <a:srgbClr val="69AAFF"/>
+                </a:solidFill>
+                <a:latin typeface="Arial"/>
+                <a:ea typeface="Arial"/>
+                <a:cs typeface="Arial"/>
+              </a:defRPr>
+            </a:lvl3pPr>
+            <a:lvl4pPr>
+              <a:defRPr sz="2025" b="1">
+                <a:solidFill>
+                  <a:srgbClr val="69AAFF"/>
+                </a:solidFill>
+                <a:latin typeface="Arial"/>
+                <a:ea typeface="Arial"/>
+                <a:cs typeface="Arial"/>
+              </a:defRPr>
+            </a:lvl4pPr>
+            <a:lvl5pPr>
+              <a:defRPr sz="2025" b="1">
+                <a:solidFill>
+                  <a:srgbClr val="69AAFF"/>
+                </a:solidFill>
+                <a:latin typeface="Arial"/>
+                <a:ea typeface="Arial"/>
+                <a:cs typeface="Arial"/>
+              </a:defRPr>
+            </a:lvl5pPr>
+            <a:lvl6pPr>
+              <a:defRPr sz="2025" b="1">
+                <a:solidFill>
+                  <a:srgbClr val="69AAFF"/>
+                </a:solidFill>
+                <a:latin typeface="Arial"/>
+                <a:ea typeface="Arial"/>
+                <a:cs typeface="Arial"/>
+              </a:defRPr>
+            </a:lvl6pPr>
+            <a:lvl7pPr>
+              <a:defRPr sz="2025" b="1">
+                <a:solidFill>
+                  <a:srgbClr val="69AAFF"/>
+                </a:solidFill>
+                <a:latin typeface="Arial"/>
+                <a:ea typeface="Arial"/>
+                <a:cs typeface="Arial"/>
+              </a:defRPr>
+            </a:lvl7pPr>
+            <a:lvl8pPr>
+              <a:defRPr sz="2025" b="1">
+                <a:solidFill>
+                  <a:srgbClr val="69AAFF"/>
+                </a:solidFill>
+                <a:latin typeface="Arial"/>
+                <a:ea typeface="Arial"/>
+                <a:cs typeface="Arial"/>
+              </a:defRPr>
+            </a:lvl8pPr>
+            <a:lvl9pPr>
+              <a:defRPr sz="2025" b="1">
+                <a:solidFill>
+                  <a:srgbClr val="69AAFF"/>
+                </a:solidFill>
+                <a:latin typeface="Arial"/>
+                <a:ea typeface="Arial"/>
+                <a:cs typeface="Arial"/>
+              </a:defRPr>
+            </a:lvl9pPr>
+          </a:lstStyle>
+          <a:p xmlns:a="http://schemas.openxmlformats.org/drawingml/2006/main">
+            <a:pPr>
+              <a:defRPr sz="2025" b="1">
+                <a:solidFill>
+                  <a:srgbClr val="69AAFF"/>
+                </a:solidFill>
+                <a:latin typeface="Arial"/>
+                <a:ea typeface="Arial"/>
+                <a:cs typeface="Arial"/>
+              </a:defRPr>
+            </a:pPr>
+            <a:r>
+              <a:rPr sz="2025" b="1">
+                <a:solidFill>
+                  <a:srgbClr val="69AAFF"/>
+                </a:solidFill>
+                <a:latin typeface="Arial"/>
+                <a:ea typeface="Arial"/>
+                <a:cs typeface="Arial"/>
+              </a:rPr>
+              <a:t>Голос</a:t>
+            </a:r>
+          </a:p>
+        </p:txBody>
+      </p:sp>
+      <p:sp>
+        <p:nvSpPr>
+          <p:cNvPr id="10" name="Piper озвучивает подсказки локально. Web Speech API при">
+            <a:extLst xmlns:a="http://schemas.openxmlformats.org/drawingml/2006/main">
+              <a:ext uri="{FF2B5EF4-FFF2-40B4-BE49-F238E27FC236}">
+                <a16:creationId xmlns:a16="http://schemas.microsoft.com/office/drawing/2014/main" id="{D8C95D59-B00D-4145-A641-0BB6D89B8274}"/>
+              </a:ext>
+            </a:extLst>
+          </p:cNvPr>
+          <p:cNvSpPr>
+            <a:spLocks xmlns:a="http://schemas.openxmlformats.org/drawingml/2006/main" noGrp="1"/>
+          </p:cNvSpPr>
+          <p:nvPr/>
+        </p:nvSpPr>
+        <p:spPr>
+          <a:xfrm xmlns:a="http://schemas.openxmlformats.org/drawingml/2006/main">
+            <a:off x="2667000" y="4876800"/>
+            <a:ext cx="8763000" cy="666750"/>
+          </a:xfrm>
+          <a:prstGeom xmlns:a="http://schemas.openxmlformats.org/drawingml/2006/main" prst="rect">
+            <a:avLst/>
+          </a:prstGeom>
+          <a:noFill xmlns:a="http://schemas.openxmlformats.org/drawingml/2006/main"/>
+          <a:ln xmlns:a="http://schemas.openxmlformats.org/drawingml/2006/main" w="0">
+            <a:noFill/>
+          </a:ln>
+        </p:spPr>
+        <p:txBody>
+          <a:bodyPr xmlns:a="http://schemas.openxmlformats.org/drawingml/2006/main" wrap="square" lIns="0" tIns="0" rIns="0" bIns="0" anchor="t"/>
+          <a:lstStyle xmlns:a="http://schemas.openxmlformats.org/drawingml/2006/main">
+            <a:defPPr>
+              <a:defRPr sz="1875" b="0">
+                <a:solidFill>
+                  <a:srgbClr val="FFFFFF"/>
+                </a:solidFill>
+                <a:latin typeface="Arial"/>
+                <a:ea typeface="Arial"/>
+                <a:cs typeface="Arial"/>
+              </a:defRPr>
+            </a:defPPr>
+            <a:lvl1pPr>
+              <a:defRPr sz="1875" b="0">
+                <a:solidFill>
+                  <a:srgbClr val="FFFFFF"/>
+                </a:solidFill>
+                <a:latin typeface="Arial"/>
+                <a:ea typeface="Arial"/>
+                <a:cs typeface="Arial"/>
+              </a:defRPr>
+            </a:lvl1pPr>
+            <a:lvl2pPr>
+              <a:defRPr sz="1875" b="0">
+                <a:solidFill>
+                  <a:srgbClr val="FFFFFF"/>
+                </a:solidFill>
+                <a:latin typeface="Arial"/>
+                <a:ea typeface="Arial"/>
+                <a:cs typeface="Arial"/>
+              </a:defRPr>
+            </a:lvl2pPr>
+            <a:lvl3pPr>
+              <a:defRPr sz="1875" b="0">
+                <a:solidFill>
+                  <a:srgbClr val="FFFFFF"/>
+                </a:solidFill>
+                <a:latin typeface="Arial"/>
+                <a:ea typeface="Arial"/>
+                <a:cs typeface="Arial"/>
+              </a:defRPr>
+            </a:lvl3pPr>
+            <a:lvl4pPr>
+              <a:defRPr sz="1875" b="0">
+                <a:solidFill>
+                  <a:srgbClr val="FFFFFF"/>
+                </a:solidFill>
+                <a:latin typeface="Arial"/>
+                <a:ea typeface="Arial"/>
+                <a:cs typeface="Arial"/>
+              </a:defRPr>
+            </a:lvl4pPr>
+            <a:lvl5pPr>
+              <a:defRPr sz="1875" b="0">
+                <a:solidFill>
+                  <a:srgbClr val="FFFFFF"/>
+                </a:solidFill>
+                <a:latin typeface="Arial"/>
+                <a:ea typeface="Arial"/>
+                <a:cs typeface="Arial"/>
+              </a:defRPr>
+            </a:lvl5pPr>
+            <a:lvl6pPr>
+              <a:defRPr sz="1875" b="0">
+                <a:solidFill>
+                  <a:srgbClr val="FFFFFF"/>
+                </a:solidFill>
+                <a:latin typeface="Arial"/>
+                <a:ea typeface="Arial"/>
+                <a:cs typeface="Arial"/>
+              </a:defRPr>
+            </a:lvl6pPr>
+            <a:lvl7pPr>
+              <a:defRPr sz="1875" b="0">
+                <a:solidFill>
+                  <a:srgbClr val="FFFFFF"/>
+                </a:solidFill>
+                <a:latin typeface="Arial"/>
+                <a:ea typeface="Arial"/>
+                <a:cs typeface="Arial"/>
+              </a:defRPr>
+            </a:lvl7pPr>
+            <a:lvl8pPr>
+              <a:defRPr sz="1875" b="0">
+                <a:solidFill>
+                  <a:srgbClr val="FFFFFF"/>
+                </a:solidFill>
+                <a:latin typeface="Arial"/>
+                <a:ea typeface="Arial"/>
+                <a:cs typeface="Arial"/>
+              </a:defRPr>
+            </a:lvl8pPr>
+            <a:lvl9pPr>
+              <a:defRPr sz="1875" b="0">
+                <a:solidFill>
+                  <a:srgbClr val="FFFFFF"/>
+                </a:solidFill>
+                <a:latin typeface="Arial"/>
+                <a:ea typeface="Arial"/>
+                <a:cs typeface="Arial"/>
+              </a:defRPr>
+            </a:lvl9pPr>
+          </a:lstStyle>
+          <a:p xmlns:a="http://schemas.openxmlformats.org/drawingml/2006/main">
+            <a:pPr>
+              <a:defRPr sz="1875" b="0">
+                <a:solidFill>
+                  <a:srgbClr val="FFFFFF"/>
+                </a:solidFill>
+                <a:latin typeface="Arial"/>
+                <a:ea typeface="Arial"/>
+                <a:cs typeface="Arial"/>
+              </a:defRPr>
+            </a:pPr>
+            <a:r>
+              <a:rPr sz="1875" b="0">
+                <a:solidFill>
+                  <a:srgbClr val="FFFFFF"/>
+                </a:solidFill>
+                <a:latin typeface="Arial"/>
+                <a:ea typeface="Arial"/>
+                <a:cs typeface="Arial"/>
+              </a:rPr>
+              <a:t>Piper озвучивает подсказки локально. Web Speech API принимает голосовой вопрос с разрешения пользователя.</a:t>
+            </a:r>
+          </a:p>
+        </p:txBody>
+      </p:sp>
+      <p:sp>
+        <p:nvSpPr>
+          <p:cNvPr id="11" name="LLM получает текст и числовую сводку. Видеокадры ей не ">
+            <a:extLst xmlns:a="http://schemas.openxmlformats.org/drawingml/2006/main">
+              <a:ext uri="{FF2B5EF4-FFF2-40B4-BE49-F238E27FC236}">
+                <a16:creationId xmlns:a16="http://schemas.microsoft.com/office/drawing/2014/main" id="{24DDDE27-A758-47C9-A62C-101B14A3DBEE}"/>
+              </a:ext>
+            </a:extLst>
+          </p:cNvPr>
+          <p:cNvSpPr>
+            <a:spLocks xmlns:a="http://schemas.openxmlformats.org/drawingml/2006/main" noGrp="1"/>
+          </p:cNvSpPr>
+          <p:nvPr/>
+        </p:nvSpPr>
+        <p:spPr>
+          <a:xfrm xmlns:a="http://schemas.openxmlformats.org/drawingml/2006/main">
+            <a:off x="762000" y="5829300"/>
+            <a:ext cx="10668000" cy="342900"/>
+          </a:xfrm>
+          <a:prstGeom xmlns:a="http://schemas.openxmlformats.org/drawingml/2006/main" prst="rect">
+            <a:avLst/>
+          </a:prstGeom>
+          <a:noFill xmlns:a="http://schemas.openxmlformats.org/drawingml/2006/main"/>
+          <a:ln xmlns:a="http://schemas.openxmlformats.org/drawingml/2006/main" w="0">
+            <a:noFill/>
+          </a:ln>
+        </p:spPr>
+        <p:txBody>
+          <a:bodyPr xmlns:a="http://schemas.openxmlformats.org/drawingml/2006/main" wrap="square" lIns="0" tIns="0" rIns="0" bIns="0" anchor="t"/>
+          <a:lstStyle xmlns:a="http://schemas.openxmlformats.org/drawingml/2006/main">
+            <a:defPPr>
+              <a:defRPr sz="1650" b="0">
+                <a:solidFill>
+                  <a:srgbClr val="CDD0D5"/>
+                </a:solidFill>
+                <a:latin typeface="Arial"/>
+                <a:ea typeface="Arial"/>
+                <a:cs typeface="Arial"/>
+              </a:defRPr>
+            </a:defPPr>
+            <a:lvl1pPr>
+              <a:defRPr sz="1650" b="0">
+                <a:solidFill>
+                  <a:srgbClr val="CDD0D5"/>
+                </a:solidFill>
+                <a:latin typeface="Arial"/>
+                <a:ea typeface="Arial"/>
+                <a:cs typeface="Arial"/>
+              </a:defRPr>
+            </a:lvl1pPr>
+            <a:lvl2pPr>
+              <a:defRPr sz="1650" b="0">
+                <a:solidFill>
+                  <a:srgbClr val="CDD0D5"/>
+                </a:solidFill>
+                <a:latin typeface="Arial"/>
+                <a:ea typeface="Arial"/>
+                <a:cs typeface="Arial"/>
+              </a:defRPr>
+            </a:lvl2pPr>
+            <a:lvl3pPr>
+              <a:defRPr sz="1650" b="0">
+                <a:solidFill>
+                  <a:srgbClr val="CDD0D5"/>
+                </a:solidFill>
+                <a:latin typeface="Arial"/>
+                <a:ea typeface="Arial"/>
+                <a:cs typeface="Arial"/>
+              </a:defRPr>
+            </a:lvl3pPr>
+            <a:lvl4pPr>
+              <a:defRPr sz="1650" b="0">
+                <a:solidFill>
+                  <a:srgbClr val="CDD0D5"/>
+                </a:solidFill>
+                <a:latin typeface="Arial"/>
+                <a:ea typeface="Arial"/>
+                <a:cs typeface="Arial"/>
+              </a:defRPr>
+            </a:lvl4pPr>
+            <a:lvl5pPr>
+              <a:defRPr sz="1650" b="0">
+                <a:solidFill>
+                  <a:srgbClr val="CDD0D5"/>
+                </a:solidFill>
+                <a:latin typeface="Arial"/>
+                <a:ea typeface="Arial"/>
+                <a:cs typeface="Arial"/>
+              </a:defRPr>
+            </a:lvl5pPr>
+            <a:lvl6pPr>
+              <a:defRPr sz="1650" b="0">
+                <a:solidFill>
+                  <a:srgbClr val="CDD0D5"/>
+                </a:solidFill>
+                <a:latin typeface="Arial"/>
+                <a:ea typeface="Arial"/>
+                <a:cs typeface="Arial"/>
+              </a:defRPr>
+            </a:lvl6pPr>
+            <a:lvl7pPr>
+              <a:defRPr sz="1650" b="0">
+                <a:solidFill>
+                  <a:srgbClr val="CDD0D5"/>
+                </a:solidFill>
+                <a:latin typeface="Arial"/>
+                <a:ea typeface="Arial"/>
+                <a:cs typeface="Arial"/>
+              </a:defRPr>
+            </a:lvl7pPr>
+            <a:lvl8pPr>
+              <a:defRPr sz="1650" b="0">
+                <a:solidFill>
+                  <a:srgbClr val="CDD0D5"/>
+                </a:solidFill>
+                <a:latin typeface="Arial"/>
+                <a:ea typeface="Arial"/>
+                <a:cs typeface="Arial"/>
+              </a:defRPr>
+            </a:lvl8pPr>
+            <a:lvl9pPr>
+              <a:defRPr sz="1650" b="0">
+                <a:solidFill>
+                  <a:srgbClr val="CDD0D5"/>
+                </a:solidFill>
+                <a:latin typeface="Arial"/>
+                <a:ea typeface="Arial"/>
+                <a:cs typeface="Arial"/>
+              </a:defRPr>
+            </a:lvl9pPr>
+          </a:lstStyle>
+          <a:p xmlns:a="http://schemas.openxmlformats.org/drawingml/2006/main">
+            <a:pPr>
+              <a:defRPr sz="1650" b="0">
+                <a:solidFill>
+                  <a:srgbClr val="CDD0D5"/>
+                </a:solidFill>
+                <a:latin typeface="Arial"/>
+                <a:ea typeface="Arial"/>
+                <a:cs typeface="Arial"/>
+              </a:defRPr>
+            </a:pPr>
+            <a:r>
+              <a:rPr sz="1650" b="0">
+                <a:solidFill>
+                  <a:srgbClr val="CDD0D5"/>
+                </a:solidFill>
+                <a:latin typeface="Arial"/>
+                <a:ea typeface="Arial"/>
+                <a:cs typeface="Arial"/>
+              </a:rPr>
+              <a:t>LLM получает текст и числовую сводку. Видеокадры ей не передаются.</a:t>
+            </a:r>
+          </a:p>
+        </p:txBody>
+      </p:sp>
+      <p:sp>
+        <p:nvSpPr>
+          <p:cNvPr id="12" name="Aimo   /   Технологии   /   10 из 15">
+            <a:extLst xmlns:a="http://schemas.openxmlformats.org/drawingml/2006/main">
+              <a:ext uri="{FF2B5EF4-FFF2-40B4-BE49-F238E27FC236}">
+                <a16:creationId xmlns:a16="http://schemas.microsoft.com/office/drawing/2014/main" id="{F79D38A2-17AB-404C-8D6B-467B03B6B534}"/>
               </a:ext>
             </a:extLst>
           </p:cNvPr>
@@ -6531,7 +7161,7 @@
             <a:defPPr>
               <a:defRPr sz="1125" b="0">
                 <a:solidFill>
-                  <a:srgbClr val="62666D"/>
+                  <a:srgbClr val="B5B8BE"/>
                 </a:solidFill>
                 <a:latin typeface="Arial"/>
                 <a:ea typeface="Arial"/>
@@ -6541,7 +7171,7 @@
             <a:lvl1pPr>
               <a:defRPr sz="1125" b="0">
                 <a:solidFill>
-                  <a:srgbClr val="62666D"/>
+                  <a:srgbClr val="B5B8BE"/>
                 </a:solidFill>
                 <a:latin typeface="Arial"/>
                 <a:ea typeface="Arial"/>
@@ -6551,7 +7181,7 @@
             <a:lvl2pPr>
               <a:defRPr sz="1125" b="0">
                 <a:solidFill>
-                  <a:srgbClr val="62666D"/>
+                  <a:srgbClr val="B5B8BE"/>
                 </a:solidFill>
                 <a:latin typeface="Arial"/>
                 <a:ea typeface="Arial"/>
@@ -6561,7 +7191,7 @@
             <a:lvl3pPr>
               <a:defRPr sz="1125" b="0">
                 <a:solidFill>
-                  <a:srgbClr val="62666D"/>
+                  <a:srgbClr val="B5B8BE"/>
                 </a:solidFill>
                 <a:latin typeface="Arial"/>
                 <a:ea typeface="Arial"/>
@@ -6571,7 +7201,7 @@
             <a:lvl4pPr>
               <a:defRPr sz="1125" b="0">
                 <a:solidFill>
-                  <a:srgbClr val="62666D"/>
+                  <a:srgbClr val="B5B8BE"/>
                 </a:solidFill>
                 <a:latin typeface="Arial"/>
                 <a:ea typeface="Arial"/>
@@ -6581,7 +7211,7 @@
             <a:lvl5pPr>
               <a:defRPr sz="1125" b="0">
                 <a:solidFill>
-                  <a:srgbClr val="62666D"/>
+                  <a:srgbClr val="B5B8BE"/>
                 </a:solidFill>
                 <a:latin typeface="Arial"/>
                 <a:ea typeface="Arial"/>
@@ -6591,7 +7221,7 @@
             <a:lvl6pPr>
               <a:defRPr sz="1125" b="0">
                 <a:solidFill>
-                  <a:srgbClr val="62666D"/>
+                  <a:srgbClr val="B5B8BE"/>
                 </a:solidFill>
                 <a:latin typeface="Arial"/>
                 <a:ea typeface="Arial"/>
@@ -6601,7 +7231,7 @@
             <a:lvl7pPr>
               <a:defRPr sz="1125" b="0">
                 <a:solidFill>
-                  <a:srgbClr val="62666D"/>
+                  <a:srgbClr val="B5B8BE"/>
                 </a:solidFill>
                 <a:latin typeface="Arial"/>
                 <a:ea typeface="Arial"/>
@@ -6611,7 +7241,7 @@
             <a:lvl8pPr>
               <a:defRPr sz="1125" b="0">
                 <a:solidFill>
-                  <a:srgbClr val="62666D"/>
+                  <a:srgbClr val="B5B8BE"/>
                 </a:solidFill>
                 <a:latin typeface="Arial"/>
                 <a:ea typeface="Arial"/>
@@ -6621,7 +7251,7 @@
             <a:lvl9pPr>
               <a:defRPr sz="1125" b="0">
                 <a:solidFill>
-                  <a:srgbClr val="62666D"/>
+                  <a:srgbClr val="B5B8BE"/>
                 </a:solidFill>
                 <a:latin typeface="Arial"/>
                 <a:ea typeface="Arial"/>
@@ -6633,7 +7263,7 @@
             <a:pPr>
               <a:defRPr sz="1125" b="0">
                 <a:solidFill>
-                  <a:srgbClr val="62666D"/>
+                  <a:srgbClr val="B5B8BE"/>
                 </a:solidFill>
                 <a:latin typeface="Arial"/>
                 <a:ea typeface="Arial"/>
@@ -6643,13 +7273,13 @@
             <a:r>
               <a:rPr sz="1125" b="0">
                 <a:solidFill>
-                  <a:srgbClr val="62666D"/>
+                  <a:srgbClr val="B5B8BE"/>
                 </a:solidFill>
                 <a:latin typeface="Arial"/>
                 <a:ea typeface="Arial"/>
                 <a:cs typeface="Arial"/>
               </a:rPr>
-              <a:t>Aimo   /   Что поняли и изменим   /   10 из 13</a:t>
+              <a:t>Aimo   /   Технологии   /   10 из 15</a:t>
             </a:r>
           </a:p>
         </p:txBody>
@@ -6657,7 +7287,7 @@
     </p:spTree>
     <p:extLst>
       <p:ext uri="{BB962C8B-B14F-4D97-AF65-F5344CB8AC3E}">
-        <p14:creationId xmlns:p14="http://schemas.microsoft.com/office/powerpoint/2010/main" val="564083788"/>
+        <p14:creationId xmlns:p14="http://schemas.microsoft.com/office/powerpoint/2010/main" val="1094008591"/>
       </p:ext>
     </p:extLst>
   </p:cSld>
@@ -6685,10 +7315,10 @@
       </p:grpSpPr>
       <p:sp>
         <p:nvSpPr>
-          <p:cNvPr id="6" name="ПОЛЬЗА И ГРАНИЦЫ ПРОТОТИПА">
+          <p:cNvPr id="12" name="ИСПОЛЬЗОВАНИЕ ИИ 10%">
             <a:extLst xmlns:a="http://schemas.openxmlformats.org/drawingml/2006/main">
               <a:ext uri="{FF2B5EF4-FFF2-40B4-BE49-F238E27FC236}">
-                <a16:creationId xmlns:a16="http://schemas.microsoft.com/office/drawing/2014/main" id="{E28A92CB-E04C-4AF9-A8D7-BB034DAD6EF4}"/>
+                <a16:creationId xmlns:a16="http://schemas.microsoft.com/office/drawing/2014/main" id="{4CB4B82C-704C-4A01-A10F-A9F31D6D9000}"/>
               </a:ext>
             </a:extLst>
           </p:cNvPr>
@@ -6834,17 +7464,17 @@
                 <a:ea typeface="Arial"/>
                 <a:cs typeface="Arial"/>
               </a:rPr>
-              <a:t>ПОЛЬЗА И ГРАНИЦЫ ПРОТОТИПА</a:t>
+              <a:t>ИСПОЛЬЗОВАНИЕ ИИ 10%</a:t>
             </a:r>
           </a:p>
         </p:txBody>
       </p:sp>
       <p:sp>
         <p:nvSpPr>
-          <p:cNvPr id="2" name="Следующая итерация: проверка с новичками">
+          <p:cNvPr id="2" name="ИИ в разработке: задача, код, проверка">
             <a:extLst xmlns:a="http://schemas.openxmlformats.org/drawingml/2006/main">
               <a:ext uri="{FF2B5EF4-FFF2-40B4-BE49-F238E27FC236}">
-                <a16:creationId xmlns:a16="http://schemas.microsoft.com/office/drawing/2014/main" id="{AA7C2F52-47EF-4033-920A-3313869D5A19}"/>
+                <a16:creationId xmlns:a16="http://schemas.microsoft.com/office/drawing/2014/main" id="{3268090F-6374-4FD6-95C5-AD0752666BEF}"/>
               </a:ext>
             </a:extLst>
           </p:cNvPr>
@@ -6990,6 +7620,3184 @@
                 <a:ea typeface="Arial"/>
                 <a:cs typeface="Arial"/>
               </a:rPr>
+              <a:t>ИИ в разработке: задача, код, проверка</a:t>
+            </a:r>
+          </a:p>
+        </p:txBody>
+      </p:sp>
+      <p:sp>
+        <p:nvSpPr>
+          <p:cNvPr id="3" name="Постановка">
+            <a:extLst xmlns:a="http://schemas.openxmlformats.org/drawingml/2006/main">
+              <a:ext uri="{FF2B5EF4-FFF2-40B4-BE49-F238E27FC236}">
+                <a16:creationId xmlns:a16="http://schemas.microsoft.com/office/drawing/2014/main" id="{9462E523-8912-4F82-9A1C-0C35A38EA2B9}"/>
+              </a:ext>
+            </a:extLst>
+          </p:cNvPr>
+          <p:cNvSpPr>
+            <a:spLocks xmlns:a="http://schemas.openxmlformats.org/drawingml/2006/main" noGrp="1"/>
+          </p:cNvSpPr>
+          <p:nvPr/>
+        </p:nvSpPr>
+        <p:spPr>
+          <a:xfrm xmlns:a="http://schemas.openxmlformats.org/drawingml/2006/main">
+            <a:off x="762000" y="2057400"/>
+            <a:ext cx="2428875" cy="381000"/>
+          </a:xfrm>
+          <a:prstGeom xmlns:a="http://schemas.openxmlformats.org/drawingml/2006/main" prst="rect">
+            <a:avLst/>
+          </a:prstGeom>
+          <a:noFill xmlns:a="http://schemas.openxmlformats.org/drawingml/2006/main"/>
+          <a:ln xmlns:a="http://schemas.openxmlformats.org/drawingml/2006/main" w="0">
+            <a:noFill/>
+          </a:ln>
+        </p:spPr>
+        <p:txBody>
+          <a:bodyPr xmlns:a="http://schemas.openxmlformats.org/drawingml/2006/main" wrap="square" lIns="0" tIns="0" rIns="0" bIns="0" anchor="t"/>
+          <a:lstStyle xmlns:a="http://schemas.openxmlformats.org/drawingml/2006/main">
+            <a:defPPr>
+              <a:defRPr sz="2100" b="1">
+                <a:solidFill>
+                  <a:srgbClr val="0866FF"/>
+                </a:solidFill>
+                <a:latin typeface="Arial"/>
+                <a:ea typeface="Arial"/>
+                <a:cs typeface="Arial"/>
+              </a:defRPr>
+            </a:defPPr>
+            <a:lvl1pPr>
+              <a:defRPr sz="2100" b="1">
+                <a:solidFill>
+                  <a:srgbClr val="0866FF"/>
+                </a:solidFill>
+                <a:latin typeface="Arial"/>
+                <a:ea typeface="Arial"/>
+                <a:cs typeface="Arial"/>
+              </a:defRPr>
+            </a:lvl1pPr>
+            <a:lvl2pPr>
+              <a:defRPr sz="2100" b="1">
+                <a:solidFill>
+                  <a:srgbClr val="0866FF"/>
+                </a:solidFill>
+                <a:latin typeface="Arial"/>
+                <a:ea typeface="Arial"/>
+                <a:cs typeface="Arial"/>
+              </a:defRPr>
+            </a:lvl2pPr>
+            <a:lvl3pPr>
+              <a:defRPr sz="2100" b="1">
+                <a:solidFill>
+                  <a:srgbClr val="0866FF"/>
+                </a:solidFill>
+                <a:latin typeface="Arial"/>
+                <a:ea typeface="Arial"/>
+                <a:cs typeface="Arial"/>
+              </a:defRPr>
+            </a:lvl3pPr>
+            <a:lvl4pPr>
+              <a:defRPr sz="2100" b="1">
+                <a:solidFill>
+                  <a:srgbClr val="0866FF"/>
+                </a:solidFill>
+                <a:latin typeface="Arial"/>
+                <a:ea typeface="Arial"/>
+                <a:cs typeface="Arial"/>
+              </a:defRPr>
+            </a:lvl4pPr>
+            <a:lvl5pPr>
+              <a:defRPr sz="2100" b="1">
+                <a:solidFill>
+                  <a:srgbClr val="0866FF"/>
+                </a:solidFill>
+                <a:latin typeface="Arial"/>
+                <a:ea typeface="Arial"/>
+                <a:cs typeface="Arial"/>
+              </a:defRPr>
+            </a:lvl5pPr>
+            <a:lvl6pPr>
+              <a:defRPr sz="2100" b="1">
+                <a:solidFill>
+                  <a:srgbClr val="0866FF"/>
+                </a:solidFill>
+                <a:latin typeface="Arial"/>
+                <a:ea typeface="Arial"/>
+                <a:cs typeface="Arial"/>
+              </a:defRPr>
+            </a:lvl6pPr>
+            <a:lvl7pPr>
+              <a:defRPr sz="2100" b="1">
+                <a:solidFill>
+                  <a:srgbClr val="0866FF"/>
+                </a:solidFill>
+                <a:latin typeface="Arial"/>
+                <a:ea typeface="Arial"/>
+                <a:cs typeface="Arial"/>
+              </a:defRPr>
+            </a:lvl7pPr>
+            <a:lvl8pPr>
+              <a:defRPr sz="2100" b="1">
+                <a:solidFill>
+                  <a:srgbClr val="0866FF"/>
+                </a:solidFill>
+                <a:latin typeface="Arial"/>
+                <a:ea typeface="Arial"/>
+                <a:cs typeface="Arial"/>
+              </a:defRPr>
+            </a:lvl8pPr>
+            <a:lvl9pPr>
+              <a:defRPr sz="2100" b="1">
+                <a:solidFill>
+                  <a:srgbClr val="0866FF"/>
+                </a:solidFill>
+                <a:latin typeface="Arial"/>
+                <a:ea typeface="Arial"/>
+                <a:cs typeface="Arial"/>
+              </a:defRPr>
+            </a:lvl9pPr>
+          </a:lstStyle>
+          <a:p xmlns:a="http://schemas.openxmlformats.org/drawingml/2006/main">
+            <a:pPr>
+              <a:defRPr sz="2100" b="1">
+                <a:solidFill>
+                  <a:srgbClr val="0866FF"/>
+                </a:solidFill>
+                <a:latin typeface="Arial"/>
+                <a:ea typeface="Arial"/>
+                <a:cs typeface="Arial"/>
+              </a:defRPr>
+            </a:pPr>
+            <a:r>
+              <a:rPr sz="2100" b="1">
+                <a:solidFill>
+                  <a:srgbClr val="0866FF"/>
+                </a:solidFill>
+                <a:latin typeface="Arial"/>
+                <a:ea typeface="Arial"/>
+                <a:cs typeface="Arial"/>
+              </a:rPr>
+              <a:t>Постановка</a:t>
+            </a:r>
+          </a:p>
+        </p:txBody>
+      </p:sp>
+      <p:sp>
+        <p:nvSpPr>
+          <p:cNvPr id="4" name="Люди задают сценарий, присылают запись экрана и формули">
+            <a:extLst xmlns:a="http://schemas.openxmlformats.org/drawingml/2006/main">
+              <a:ext uri="{FF2B5EF4-FFF2-40B4-BE49-F238E27FC236}">
+                <a16:creationId xmlns:a16="http://schemas.microsoft.com/office/drawing/2014/main" id="{CA123100-9F85-4BF5-93FD-5A3818E4201E}"/>
+              </a:ext>
+            </a:extLst>
+          </p:cNvPr>
+          <p:cNvSpPr>
+            <a:spLocks xmlns:a="http://schemas.openxmlformats.org/drawingml/2006/main" noGrp="1"/>
+          </p:cNvSpPr>
+          <p:nvPr/>
+        </p:nvSpPr>
+        <p:spPr>
+          <a:xfrm xmlns:a="http://schemas.openxmlformats.org/drawingml/2006/main">
+            <a:off x="3476625" y="2057400"/>
+            <a:ext cx="7953375" cy="762000"/>
+          </a:xfrm>
+          <a:prstGeom xmlns:a="http://schemas.openxmlformats.org/drawingml/2006/main" prst="rect">
+            <a:avLst/>
+          </a:prstGeom>
+          <a:noFill xmlns:a="http://schemas.openxmlformats.org/drawingml/2006/main"/>
+          <a:ln xmlns:a="http://schemas.openxmlformats.org/drawingml/2006/main" w="0">
+            <a:noFill/>
+          </a:ln>
+        </p:spPr>
+        <p:txBody>
+          <a:bodyPr xmlns:a="http://schemas.openxmlformats.org/drawingml/2006/main" wrap="square" lIns="0" tIns="0" rIns="0" bIns="0" anchor="t"/>
+          <a:lstStyle xmlns:a="http://schemas.openxmlformats.org/drawingml/2006/main">
+            <a:defPPr>
+              <a:defRPr sz="1950" b="0">
+                <a:solidFill>
+                  <a:srgbClr val="202124"/>
+                </a:solidFill>
+                <a:latin typeface="Arial"/>
+                <a:ea typeface="Arial"/>
+                <a:cs typeface="Arial"/>
+              </a:defRPr>
+            </a:defPPr>
+            <a:lvl1pPr>
+              <a:defRPr sz="1950" b="0">
+                <a:solidFill>
+                  <a:srgbClr val="202124"/>
+                </a:solidFill>
+                <a:latin typeface="Arial"/>
+                <a:ea typeface="Arial"/>
+                <a:cs typeface="Arial"/>
+              </a:defRPr>
+            </a:lvl1pPr>
+            <a:lvl2pPr>
+              <a:defRPr sz="1950" b="0">
+                <a:solidFill>
+                  <a:srgbClr val="202124"/>
+                </a:solidFill>
+                <a:latin typeface="Arial"/>
+                <a:ea typeface="Arial"/>
+                <a:cs typeface="Arial"/>
+              </a:defRPr>
+            </a:lvl2pPr>
+            <a:lvl3pPr>
+              <a:defRPr sz="1950" b="0">
+                <a:solidFill>
+                  <a:srgbClr val="202124"/>
+                </a:solidFill>
+                <a:latin typeface="Arial"/>
+                <a:ea typeface="Arial"/>
+                <a:cs typeface="Arial"/>
+              </a:defRPr>
+            </a:lvl3pPr>
+            <a:lvl4pPr>
+              <a:defRPr sz="1950" b="0">
+                <a:solidFill>
+                  <a:srgbClr val="202124"/>
+                </a:solidFill>
+                <a:latin typeface="Arial"/>
+                <a:ea typeface="Arial"/>
+                <a:cs typeface="Arial"/>
+              </a:defRPr>
+            </a:lvl4pPr>
+            <a:lvl5pPr>
+              <a:defRPr sz="1950" b="0">
+                <a:solidFill>
+                  <a:srgbClr val="202124"/>
+                </a:solidFill>
+                <a:latin typeface="Arial"/>
+                <a:ea typeface="Arial"/>
+                <a:cs typeface="Arial"/>
+              </a:defRPr>
+            </a:lvl5pPr>
+            <a:lvl6pPr>
+              <a:defRPr sz="1950" b="0">
+                <a:solidFill>
+                  <a:srgbClr val="202124"/>
+                </a:solidFill>
+                <a:latin typeface="Arial"/>
+                <a:ea typeface="Arial"/>
+                <a:cs typeface="Arial"/>
+              </a:defRPr>
+            </a:lvl6pPr>
+            <a:lvl7pPr>
+              <a:defRPr sz="1950" b="0">
+                <a:solidFill>
+                  <a:srgbClr val="202124"/>
+                </a:solidFill>
+                <a:latin typeface="Arial"/>
+                <a:ea typeface="Arial"/>
+                <a:cs typeface="Arial"/>
+              </a:defRPr>
+            </a:lvl7pPr>
+            <a:lvl8pPr>
+              <a:defRPr sz="1950" b="0">
+                <a:solidFill>
+                  <a:srgbClr val="202124"/>
+                </a:solidFill>
+                <a:latin typeface="Arial"/>
+                <a:ea typeface="Arial"/>
+                <a:cs typeface="Arial"/>
+              </a:defRPr>
+            </a:lvl8pPr>
+            <a:lvl9pPr>
+              <a:defRPr sz="1950" b="0">
+                <a:solidFill>
+                  <a:srgbClr val="202124"/>
+                </a:solidFill>
+                <a:latin typeface="Arial"/>
+                <a:ea typeface="Arial"/>
+                <a:cs typeface="Arial"/>
+              </a:defRPr>
+            </a:lvl9pPr>
+          </a:lstStyle>
+          <a:p xmlns:a="http://schemas.openxmlformats.org/drawingml/2006/main">
+            <a:pPr>
+              <a:defRPr sz="1950" b="0">
+                <a:solidFill>
+                  <a:srgbClr val="202124"/>
+                </a:solidFill>
+                <a:latin typeface="Arial"/>
+                <a:ea typeface="Arial"/>
+                <a:cs typeface="Arial"/>
+              </a:defRPr>
+            </a:pPr>
+            <a:r>
+              <a:rPr sz="1950" b="0">
+                <a:solidFill>
+                  <a:srgbClr val="202124"/>
+                </a:solidFill>
+                <a:latin typeface="Arial"/>
+                <a:ea typeface="Arial"/>
+                <a:cs typeface="Arial"/>
+              </a:rPr>
+              <a:t>Люди задают сценарий, присылают запись экрана и формулируют дефект.</a:t>
+            </a:r>
+          </a:p>
+        </p:txBody>
+      </p:sp>
+      <p:sp>
+        <p:nvSpPr>
+          <p:cNvPr id="5" name="Разделение">
+            <a:extLst xmlns:a="http://schemas.openxmlformats.org/drawingml/2006/main">
+              <a:ext uri="{FF2B5EF4-FFF2-40B4-BE49-F238E27FC236}">
+                <a16:creationId xmlns:a16="http://schemas.microsoft.com/office/drawing/2014/main" id="{587E049E-5616-4B6B-8E84-583E1626B300}"/>
+              </a:ext>
+            </a:extLst>
+          </p:cNvPr>
+          <p:cNvSpPr>
+            <a:spLocks xmlns:a="http://schemas.openxmlformats.org/drawingml/2006/main" noGrp="1"/>
+          </p:cNvSpPr>
+          <p:nvPr/>
+        </p:nvSpPr>
+        <p:spPr>
+          <a:xfrm xmlns:a="http://schemas.openxmlformats.org/drawingml/2006/main">
+            <a:off x="762000" y="3009900"/>
+            <a:ext cx="2428875" cy="381000"/>
+          </a:xfrm>
+          <a:prstGeom xmlns:a="http://schemas.openxmlformats.org/drawingml/2006/main" prst="rect">
+            <a:avLst/>
+          </a:prstGeom>
+          <a:noFill xmlns:a="http://schemas.openxmlformats.org/drawingml/2006/main"/>
+          <a:ln xmlns:a="http://schemas.openxmlformats.org/drawingml/2006/main" w="0">
+            <a:noFill/>
+          </a:ln>
+        </p:spPr>
+        <p:txBody>
+          <a:bodyPr xmlns:a="http://schemas.openxmlformats.org/drawingml/2006/main" wrap="square" lIns="0" tIns="0" rIns="0" bIns="0" anchor="t"/>
+          <a:lstStyle xmlns:a="http://schemas.openxmlformats.org/drawingml/2006/main">
+            <a:defPPr>
+              <a:defRPr sz="2100" b="1">
+                <a:solidFill>
+                  <a:srgbClr val="0866FF"/>
+                </a:solidFill>
+                <a:latin typeface="Arial"/>
+                <a:ea typeface="Arial"/>
+                <a:cs typeface="Arial"/>
+              </a:defRPr>
+            </a:defPPr>
+            <a:lvl1pPr>
+              <a:defRPr sz="2100" b="1">
+                <a:solidFill>
+                  <a:srgbClr val="0866FF"/>
+                </a:solidFill>
+                <a:latin typeface="Arial"/>
+                <a:ea typeface="Arial"/>
+                <a:cs typeface="Arial"/>
+              </a:defRPr>
+            </a:lvl1pPr>
+            <a:lvl2pPr>
+              <a:defRPr sz="2100" b="1">
+                <a:solidFill>
+                  <a:srgbClr val="0866FF"/>
+                </a:solidFill>
+                <a:latin typeface="Arial"/>
+                <a:ea typeface="Arial"/>
+                <a:cs typeface="Arial"/>
+              </a:defRPr>
+            </a:lvl2pPr>
+            <a:lvl3pPr>
+              <a:defRPr sz="2100" b="1">
+                <a:solidFill>
+                  <a:srgbClr val="0866FF"/>
+                </a:solidFill>
+                <a:latin typeface="Arial"/>
+                <a:ea typeface="Arial"/>
+                <a:cs typeface="Arial"/>
+              </a:defRPr>
+            </a:lvl3pPr>
+            <a:lvl4pPr>
+              <a:defRPr sz="2100" b="1">
+                <a:solidFill>
+                  <a:srgbClr val="0866FF"/>
+                </a:solidFill>
+                <a:latin typeface="Arial"/>
+                <a:ea typeface="Arial"/>
+                <a:cs typeface="Arial"/>
+              </a:defRPr>
+            </a:lvl4pPr>
+            <a:lvl5pPr>
+              <a:defRPr sz="2100" b="1">
+                <a:solidFill>
+                  <a:srgbClr val="0866FF"/>
+                </a:solidFill>
+                <a:latin typeface="Arial"/>
+                <a:ea typeface="Arial"/>
+                <a:cs typeface="Arial"/>
+              </a:defRPr>
+            </a:lvl5pPr>
+            <a:lvl6pPr>
+              <a:defRPr sz="2100" b="1">
+                <a:solidFill>
+                  <a:srgbClr val="0866FF"/>
+                </a:solidFill>
+                <a:latin typeface="Arial"/>
+                <a:ea typeface="Arial"/>
+                <a:cs typeface="Arial"/>
+              </a:defRPr>
+            </a:lvl6pPr>
+            <a:lvl7pPr>
+              <a:defRPr sz="2100" b="1">
+                <a:solidFill>
+                  <a:srgbClr val="0866FF"/>
+                </a:solidFill>
+                <a:latin typeface="Arial"/>
+                <a:ea typeface="Arial"/>
+                <a:cs typeface="Arial"/>
+              </a:defRPr>
+            </a:lvl7pPr>
+            <a:lvl8pPr>
+              <a:defRPr sz="2100" b="1">
+                <a:solidFill>
+                  <a:srgbClr val="0866FF"/>
+                </a:solidFill>
+                <a:latin typeface="Arial"/>
+                <a:ea typeface="Arial"/>
+                <a:cs typeface="Arial"/>
+              </a:defRPr>
+            </a:lvl8pPr>
+            <a:lvl9pPr>
+              <a:defRPr sz="2100" b="1">
+                <a:solidFill>
+                  <a:srgbClr val="0866FF"/>
+                </a:solidFill>
+                <a:latin typeface="Arial"/>
+                <a:ea typeface="Arial"/>
+                <a:cs typeface="Arial"/>
+              </a:defRPr>
+            </a:lvl9pPr>
+          </a:lstStyle>
+          <a:p xmlns:a="http://schemas.openxmlformats.org/drawingml/2006/main">
+            <a:pPr>
+              <a:defRPr sz="2100" b="1">
+                <a:solidFill>
+                  <a:srgbClr val="0866FF"/>
+                </a:solidFill>
+                <a:latin typeface="Arial"/>
+                <a:ea typeface="Arial"/>
+                <a:cs typeface="Arial"/>
+              </a:defRPr>
+            </a:pPr>
+            <a:r>
+              <a:rPr sz="2100" b="1">
+                <a:solidFill>
+                  <a:srgbClr val="0866FF"/>
+                </a:solidFill>
+                <a:latin typeface="Arial"/>
+                <a:ea typeface="Arial"/>
+                <a:cs typeface="Arial"/>
+              </a:rPr>
+              <a:t>Разделение</a:t>
+            </a:r>
+          </a:p>
+        </p:txBody>
+      </p:sp>
+      <p:sp>
+        <p:nvSpPr>
+          <p:cNvPr id="6" name="Агенты frontend, vision, coach-llm и root работают по к">
+            <a:extLst xmlns:a="http://schemas.openxmlformats.org/drawingml/2006/main">
+              <a:ext uri="{FF2B5EF4-FFF2-40B4-BE49-F238E27FC236}">
+                <a16:creationId xmlns:a16="http://schemas.microsoft.com/office/drawing/2014/main" id="{2545897C-4813-4EE6-9D69-95D2C0F84323}"/>
+              </a:ext>
+            </a:extLst>
+          </p:cNvPr>
+          <p:cNvSpPr>
+            <a:spLocks xmlns:a="http://schemas.openxmlformats.org/drawingml/2006/main" noGrp="1"/>
+          </p:cNvSpPr>
+          <p:nvPr/>
+        </p:nvSpPr>
+        <p:spPr>
+          <a:xfrm xmlns:a="http://schemas.openxmlformats.org/drawingml/2006/main">
+            <a:off x="3476625" y="3009900"/>
+            <a:ext cx="7953375" cy="762000"/>
+          </a:xfrm>
+          <a:prstGeom xmlns:a="http://schemas.openxmlformats.org/drawingml/2006/main" prst="rect">
+            <a:avLst/>
+          </a:prstGeom>
+          <a:noFill xmlns:a="http://schemas.openxmlformats.org/drawingml/2006/main"/>
+          <a:ln xmlns:a="http://schemas.openxmlformats.org/drawingml/2006/main" w="0">
+            <a:noFill/>
+          </a:ln>
+        </p:spPr>
+        <p:txBody>
+          <a:bodyPr xmlns:a="http://schemas.openxmlformats.org/drawingml/2006/main" wrap="square" lIns="0" tIns="0" rIns="0" bIns="0" anchor="t"/>
+          <a:lstStyle xmlns:a="http://schemas.openxmlformats.org/drawingml/2006/main">
+            <a:defPPr>
+              <a:defRPr sz="1950" b="0">
+                <a:solidFill>
+                  <a:srgbClr val="202124"/>
+                </a:solidFill>
+                <a:latin typeface="Arial"/>
+                <a:ea typeface="Arial"/>
+                <a:cs typeface="Arial"/>
+              </a:defRPr>
+            </a:defPPr>
+            <a:lvl1pPr>
+              <a:defRPr sz="1950" b="0">
+                <a:solidFill>
+                  <a:srgbClr val="202124"/>
+                </a:solidFill>
+                <a:latin typeface="Arial"/>
+                <a:ea typeface="Arial"/>
+                <a:cs typeface="Arial"/>
+              </a:defRPr>
+            </a:lvl1pPr>
+            <a:lvl2pPr>
+              <a:defRPr sz="1950" b="0">
+                <a:solidFill>
+                  <a:srgbClr val="202124"/>
+                </a:solidFill>
+                <a:latin typeface="Arial"/>
+                <a:ea typeface="Arial"/>
+                <a:cs typeface="Arial"/>
+              </a:defRPr>
+            </a:lvl2pPr>
+            <a:lvl3pPr>
+              <a:defRPr sz="1950" b="0">
+                <a:solidFill>
+                  <a:srgbClr val="202124"/>
+                </a:solidFill>
+                <a:latin typeface="Arial"/>
+                <a:ea typeface="Arial"/>
+                <a:cs typeface="Arial"/>
+              </a:defRPr>
+            </a:lvl3pPr>
+            <a:lvl4pPr>
+              <a:defRPr sz="1950" b="0">
+                <a:solidFill>
+                  <a:srgbClr val="202124"/>
+                </a:solidFill>
+                <a:latin typeface="Arial"/>
+                <a:ea typeface="Arial"/>
+                <a:cs typeface="Arial"/>
+              </a:defRPr>
+            </a:lvl4pPr>
+            <a:lvl5pPr>
+              <a:defRPr sz="1950" b="0">
+                <a:solidFill>
+                  <a:srgbClr val="202124"/>
+                </a:solidFill>
+                <a:latin typeface="Arial"/>
+                <a:ea typeface="Arial"/>
+                <a:cs typeface="Arial"/>
+              </a:defRPr>
+            </a:lvl5pPr>
+            <a:lvl6pPr>
+              <a:defRPr sz="1950" b="0">
+                <a:solidFill>
+                  <a:srgbClr val="202124"/>
+                </a:solidFill>
+                <a:latin typeface="Arial"/>
+                <a:ea typeface="Arial"/>
+                <a:cs typeface="Arial"/>
+              </a:defRPr>
+            </a:lvl6pPr>
+            <a:lvl7pPr>
+              <a:defRPr sz="1950" b="0">
+                <a:solidFill>
+                  <a:srgbClr val="202124"/>
+                </a:solidFill>
+                <a:latin typeface="Arial"/>
+                <a:ea typeface="Arial"/>
+                <a:cs typeface="Arial"/>
+              </a:defRPr>
+            </a:lvl7pPr>
+            <a:lvl8pPr>
+              <a:defRPr sz="1950" b="0">
+                <a:solidFill>
+                  <a:srgbClr val="202124"/>
+                </a:solidFill>
+                <a:latin typeface="Arial"/>
+                <a:ea typeface="Arial"/>
+                <a:cs typeface="Arial"/>
+              </a:defRPr>
+            </a:lvl8pPr>
+            <a:lvl9pPr>
+              <a:defRPr sz="1950" b="0">
+                <a:solidFill>
+                  <a:srgbClr val="202124"/>
+                </a:solidFill>
+                <a:latin typeface="Arial"/>
+                <a:ea typeface="Arial"/>
+                <a:cs typeface="Arial"/>
+              </a:defRPr>
+            </a:lvl9pPr>
+          </a:lstStyle>
+          <a:p xmlns:a="http://schemas.openxmlformats.org/drawingml/2006/main">
+            <a:pPr>
+              <a:defRPr sz="1950" b="0">
+                <a:solidFill>
+                  <a:srgbClr val="202124"/>
+                </a:solidFill>
+                <a:latin typeface="Arial"/>
+                <a:ea typeface="Arial"/>
+                <a:cs typeface="Arial"/>
+              </a:defRPr>
+            </a:pPr>
+            <a:r>
+              <a:rPr sz="1950" b="0">
+                <a:solidFill>
+                  <a:srgbClr val="202124"/>
+                </a:solidFill>
+                <a:latin typeface="Arial"/>
+                <a:ea typeface="Arial"/>
+                <a:cs typeface="Arial"/>
+              </a:rPr>
+              <a:t>Агенты frontend, vision, coach-llm и root работают по контрактам файлов.</a:t>
+            </a:r>
+          </a:p>
+        </p:txBody>
+      </p:sp>
+      <p:sp>
+        <p:nvSpPr>
+          <p:cNvPr id="7" name="Реализация">
+            <a:extLst xmlns:a="http://schemas.openxmlformats.org/drawingml/2006/main">
+              <a:ext uri="{FF2B5EF4-FFF2-40B4-BE49-F238E27FC236}">
+                <a16:creationId xmlns:a16="http://schemas.microsoft.com/office/drawing/2014/main" id="{FB403A4D-3D6F-48F4-93B1-934AD01A7DC7}"/>
+              </a:ext>
+            </a:extLst>
+          </p:cNvPr>
+          <p:cNvSpPr>
+            <a:spLocks xmlns:a="http://schemas.openxmlformats.org/drawingml/2006/main" noGrp="1"/>
+          </p:cNvSpPr>
+          <p:nvPr/>
+        </p:nvSpPr>
+        <p:spPr>
+          <a:xfrm xmlns:a="http://schemas.openxmlformats.org/drawingml/2006/main">
+            <a:off x="762000" y="3962400"/>
+            <a:ext cx="2428875" cy="381000"/>
+          </a:xfrm>
+          <a:prstGeom xmlns:a="http://schemas.openxmlformats.org/drawingml/2006/main" prst="rect">
+            <a:avLst/>
+          </a:prstGeom>
+          <a:noFill xmlns:a="http://schemas.openxmlformats.org/drawingml/2006/main"/>
+          <a:ln xmlns:a="http://schemas.openxmlformats.org/drawingml/2006/main" w="0">
+            <a:noFill/>
+          </a:ln>
+        </p:spPr>
+        <p:txBody>
+          <a:bodyPr xmlns:a="http://schemas.openxmlformats.org/drawingml/2006/main" wrap="square" lIns="0" tIns="0" rIns="0" bIns="0" anchor="t"/>
+          <a:lstStyle xmlns:a="http://schemas.openxmlformats.org/drawingml/2006/main">
+            <a:defPPr>
+              <a:defRPr sz="2100" b="1">
+                <a:solidFill>
+                  <a:srgbClr val="0866FF"/>
+                </a:solidFill>
+                <a:latin typeface="Arial"/>
+                <a:ea typeface="Arial"/>
+                <a:cs typeface="Arial"/>
+              </a:defRPr>
+            </a:defPPr>
+            <a:lvl1pPr>
+              <a:defRPr sz="2100" b="1">
+                <a:solidFill>
+                  <a:srgbClr val="0866FF"/>
+                </a:solidFill>
+                <a:latin typeface="Arial"/>
+                <a:ea typeface="Arial"/>
+                <a:cs typeface="Arial"/>
+              </a:defRPr>
+            </a:lvl1pPr>
+            <a:lvl2pPr>
+              <a:defRPr sz="2100" b="1">
+                <a:solidFill>
+                  <a:srgbClr val="0866FF"/>
+                </a:solidFill>
+                <a:latin typeface="Arial"/>
+                <a:ea typeface="Arial"/>
+                <a:cs typeface="Arial"/>
+              </a:defRPr>
+            </a:lvl2pPr>
+            <a:lvl3pPr>
+              <a:defRPr sz="2100" b="1">
+                <a:solidFill>
+                  <a:srgbClr val="0866FF"/>
+                </a:solidFill>
+                <a:latin typeface="Arial"/>
+                <a:ea typeface="Arial"/>
+                <a:cs typeface="Arial"/>
+              </a:defRPr>
+            </a:lvl3pPr>
+            <a:lvl4pPr>
+              <a:defRPr sz="2100" b="1">
+                <a:solidFill>
+                  <a:srgbClr val="0866FF"/>
+                </a:solidFill>
+                <a:latin typeface="Arial"/>
+                <a:ea typeface="Arial"/>
+                <a:cs typeface="Arial"/>
+              </a:defRPr>
+            </a:lvl4pPr>
+            <a:lvl5pPr>
+              <a:defRPr sz="2100" b="1">
+                <a:solidFill>
+                  <a:srgbClr val="0866FF"/>
+                </a:solidFill>
+                <a:latin typeface="Arial"/>
+                <a:ea typeface="Arial"/>
+                <a:cs typeface="Arial"/>
+              </a:defRPr>
+            </a:lvl5pPr>
+            <a:lvl6pPr>
+              <a:defRPr sz="2100" b="1">
+                <a:solidFill>
+                  <a:srgbClr val="0866FF"/>
+                </a:solidFill>
+                <a:latin typeface="Arial"/>
+                <a:ea typeface="Arial"/>
+                <a:cs typeface="Arial"/>
+              </a:defRPr>
+            </a:lvl6pPr>
+            <a:lvl7pPr>
+              <a:defRPr sz="2100" b="1">
+                <a:solidFill>
+                  <a:srgbClr val="0866FF"/>
+                </a:solidFill>
+                <a:latin typeface="Arial"/>
+                <a:ea typeface="Arial"/>
+                <a:cs typeface="Arial"/>
+              </a:defRPr>
+            </a:lvl7pPr>
+            <a:lvl8pPr>
+              <a:defRPr sz="2100" b="1">
+                <a:solidFill>
+                  <a:srgbClr val="0866FF"/>
+                </a:solidFill>
+                <a:latin typeface="Arial"/>
+                <a:ea typeface="Arial"/>
+                <a:cs typeface="Arial"/>
+              </a:defRPr>
+            </a:lvl8pPr>
+            <a:lvl9pPr>
+              <a:defRPr sz="2100" b="1">
+                <a:solidFill>
+                  <a:srgbClr val="0866FF"/>
+                </a:solidFill>
+                <a:latin typeface="Arial"/>
+                <a:ea typeface="Arial"/>
+                <a:cs typeface="Arial"/>
+              </a:defRPr>
+            </a:lvl9pPr>
+          </a:lstStyle>
+          <a:p xmlns:a="http://schemas.openxmlformats.org/drawingml/2006/main">
+            <a:pPr>
+              <a:defRPr sz="2100" b="1">
+                <a:solidFill>
+                  <a:srgbClr val="0866FF"/>
+                </a:solidFill>
+                <a:latin typeface="Arial"/>
+                <a:ea typeface="Arial"/>
+                <a:cs typeface="Arial"/>
+              </a:defRPr>
+            </a:pPr>
+            <a:r>
+              <a:rPr sz="2100" b="1">
+                <a:solidFill>
+                  <a:srgbClr val="0866FF"/>
+                </a:solidFill>
+                <a:latin typeface="Arial"/>
+                <a:ea typeface="Arial"/>
+                <a:cs typeface="Arial"/>
+              </a:rPr>
+              <a:t>Реализация</a:t>
+            </a:r>
+          </a:p>
+        </p:txBody>
+      </p:sp>
+      <p:sp>
+        <p:nvSpPr>
+          <p:cNvPr id="8" name="Агенты пишут код и тесты. API MediaPipe и WebLLM сверяю">
+            <a:extLst xmlns:a="http://schemas.openxmlformats.org/drawingml/2006/main">
+              <a:ext uri="{FF2B5EF4-FFF2-40B4-BE49-F238E27FC236}">
+                <a16:creationId xmlns:a16="http://schemas.microsoft.com/office/drawing/2014/main" id="{C54C5DFC-8177-4C77-BC86-8ABD2F24F7FF}"/>
+              </a:ext>
+            </a:extLst>
+          </p:cNvPr>
+          <p:cNvSpPr>
+            <a:spLocks xmlns:a="http://schemas.openxmlformats.org/drawingml/2006/main" noGrp="1"/>
+          </p:cNvSpPr>
+          <p:nvPr/>
+        </p:nvSpPr>
+        <p:spPr>
+          <a:xfrm xmlns:a="http://schemas.openxmlformats.org/drawingml/2006/main">
+            <a:off x="3476625" y="3962400"/>
+            <a:ext cx="7953375" cy="762000"/>
+          </a:xfrm>
+          <a:prstGeom xmlns:a="http://schemas.openxmlformats.org/drawingml/2006/main" prst="rect">
+            <a:avLst/>
+          </a:prstGeom>
+          <a:noFill xmlns:a="http://schemas.openxmlformats.org/drawingml/2006/main"/>
+          <a:ln xmlns:a="http://schemas.openxmlformats.org/drawingml/2006/main" w="0">
+            <a:noFill/>
+          </a:ln>
+        </p:spPr>
+        <p:txBody>
+          <a:bodyPr xmlns:a="http://schemas.openxmlformats.org/drawingml/2006/main" wrap="square" lIns="0" tIns="0" rIns="0" bIns="0" anchor="t"/>
+          <a:lstStyle xmlns:a="http://schemas.openxmlformats.org/drawingml/2006/main">
+            <a:defPPr>
+              <a:defRPr sz="1950" b="0">
+                <a:solidFill>
+                  <a:srgbClr val="202124"/>
+                </a:solidFill>
+                <a:latin typeface="Arial"/>
+                <a:ea typeface="Arial"/>
+                <a:cs typeface="Arial"/>
+              </a:defRPr>
+            </a:defPPr>
+            <a:lvl1pPr>
+              <a:defRPr sz="1950" b="0">
+                <a:solidFill>
+                  <a:srgbClr val="202124"/>
+                </a:solidFill>
+                <a:latin typeface="Arial"/>
+                <a:ea typeface="Arial"/>
+                <a:cs typeface="Arial"/>
+              </a:defRPr>
+            </a:lvl1pPr>
+            <a:lvl2pPr>
+              <a:defRPr sz="1950" b="0">
+                <a:solidFill>
+                  <a:srgbClr val="202124"/>
+                </a:solidFill>
+                <a:latin typeface="Arial"/>
+                <a:ea typeface="Arial"/>
+                <a:cs typeface="Arial"/>
+              </a:defRPr>
+            </a:lvl2pPr>
+            <a:lvl3pPr>
+              <a:defRPr sz="1950" b="0">
+                <a:solidFill>
+                  <a:srgbClr val="202124"/>
+                </a:solidFill>
+                <a:latin typeface="Arial"/>
+                <a:ea typeface="Arial"/>
+                <a:cs typeface="Arial"/>
+              </a:defRPr>
+            </a:lvl3pPr>
+            <a:lvl4pPr>
+              <a:defRPr sz="1950" b="0">
+                <a:solidFill>
+                  <a:srgbClr val="202124"/>
+                </a:solidFill>
+                <a:latin typeface="Arial"/>
+                <a:ea typeface="Arial"/>
+                <a:cs typeface="Arial"/>
+              </a:defRPr>
+            </a:lvl4pPr>
+            <a:lvl5pPr>
+              <a:defRPr sz="1950" b="0">
+                <a:solidFill>
+                  <a:srgbClr val="202124"/>
+                </a:solidFill>
+                <a:latin typeface="Arial"/>
+                <a:ea typeface="Arial"/>
+                <a:cs typeface="Arial"/>
+              </a:defRPr>
+            </a:lvl5pPr>
+            <a:lvl6pPr>
+              <a:defRPr sz="1950" b="0">
+                <a:solidFill>
+                  <a:srgbClr val="202124"/>
+                </a:solidFill>
+                <a:latin typeface="Arial"/>
+                <a:ea typeface="Arial"/>
+                <a:cs typeface="Arial"/>
+              </a:defRPr>
+            </a:lvl6pPr>
+            <a:lvl7pPr>
+              <a:defRPr sz="1950" b="0">
+                <a:solidFill>
+                  <a:srgbClr val="202124"/>
+                </a:solidFill>
+                <a:latin typeface="Arial"/>
+                <a:ea typeface="Arial"/>
+                <a:cs typeface="Arial"/>
+              </a:defRPr>
+            </a:lvl7pPr>
+            <a:lvl8pPr>
+              <a:defRPr sz="1950" b="0">
+                <a:solidFill>
+                  <a:srgbClr val="202124"/>
+                </a:solidFill>
+                <a:latin typeface="Arial"/>
+                <a:ea typeface="Arial"/>
+                <a:cs typeface="Arial"/>
+              </a:defRPr>
+            </a:lvl8pPr>
+            <a:lvl9pPr>
+              <a:defRPr sz="1950" b="0">
+                <a:solidFill>
+                  <a:srgbClr val="202124"/>
+                </a:solidFill>
+                <a:latin typeface="Arial"/>
+                <a:ea typeface="Arial"/>
+                <a:cs typeface="Arial"/>
+              </a:defRPr>
+            </a:lvl9pPr>
+          </a:lstStyle>
+          <a:p xmlns:a="http://schemas.openxmlformats.org/drawingml/2006/main">
+            <a:pPr>
+              <a:defRPr sz="1950" b="0">
+                <a:solidFill>
+                  <a:srgbClr val="202124"/>
+                </a:solidFill>
+                <a:latin typeface="Arial"/>
+                <a:ea typeface="Arial"/>
+                <a:cs typeface="Arial"/>
+              </a:defRPr>
+            </a:pPr>
+            <a:r>
+              <a:rPr sz="1950" b="0">
+                <a:solidFill>
+                  <a:srgbClr val="202124"/>
+                </a:solidFill>
+                <a:latin typeface="Arial"/>
+                <a:ea typeface="Arial"/>
+                <a:cs typeface="Arial"/>
+              </a:rPr>
+              <a:t>Агенты пишут код и тесты. API MediaPipe и WebLLM сверяют через Context7.</a:t>
+            </a:r>
+          </a:p>
+        </p:txBody>
+      </p:sp>
+      <p:sp>
+        <p:nvSpPr>
+          <p:cNvPr id="9" name="Приёмка">
+            <a:extLst xmlns:a="http://schemas.openxmlformats.org/drawingml/2006/main">
+              <a:ext uri="{FF2B5EF4-FFF2-40B4-BE49-F238E27FC236}">
+                <a16:creationId xmlns:a16="http://schemas.microsoft.com/office/drawing/2014/main" id="{1824DA58-E1F4-4945-B8F7-AD149F8C09C8}"/>
+              </a:ext>
+            </a:extLst>
+          </p:cNvPr>
+          <p:cNvSpPr>
+            <a:spLocks xmlns:a="http://schemas.openxmlformats.org/drawingml/2006/main" noGrp="1"/>
+          </p:cNvSpPr>
+          <p:nvPr/>
+        </p:nvSpPr>
+        <p:spPr>
+          <a:xfrm xmlns:a="http://schemas.openxmlformats.org/drawingml/2006/main">
+            <a:off x="762000" y="4914900"/>
+            <a:ext cx="2428875" cy="381000"/>
+          </a:xfrm>
+          <a:prstGeom xmlns:a="http://schemas.openxmlformats.org/drawingml/2006/main" prst="rect">
+            <a:avLst/>
+          </a:prstGeom>
+          <a:noFill xmlns:a="http://schemas.openxmlformats.org/drawingml/2006/main"/>
+          <a:ln xmlns:a="http://schemas.openxmlformats.org/drawingml/2006/main" w="0">
+            <a:noFill/>
+          </a:ln>
+        </p:spPr>
+        <p:txBody>
+          <a:bodyPr xmlns:a="http://schemas.openxmlformats.org/drawingml/2006/main" wrap="square" lIns="0" tIns="0" rIns="0" bIns="0" anchor="t"/>
+          <a:lstStyle xmlns:a="http://schemas.openxmlformats.org/drawingml/2006/main">
+            <a:defPPr>
+              <a:defRPr sz="2100" b="1">
+                <a:solidFill>
+                  <a:srgbClr val="0866FF"/>
+                </a:solidFill>
+                <a:latin typeface="Arial"/>
+                <a:ea typeface="Arial"/>
+                <a:cs typeface="Arial"/>
+              </a:defRPr>
+            </a:defPPr>
+            <a:lvl1pPr>
+              <a:defRPr sz="2100" b="1">
+                <a:solidFill>
+                  <a:srgbClr val="0866FF"/>
+                </a:solidFill>
+                <a:latin typeface="Arial"/>
+                <a:ea typeface="Arial"/>
+                <a:cs typeface="Arial"/>
+              </a:defRPr>
+            </a:lvl1pPr>
+            <a:lvl2pPr>
+              <a:defRPr sz="2100" b="1">
+                <a:solidFill>
+                  <a:srgbClr val="0866FF"/>
+                </a:solidFill>
+                <a:latin typeface="Arial"/>
+                <a:ea typeface="Arial"/>
+                <a:cs typeface="Arial"/>
+              </a:defRPr>
+            </a:lvl2pPr>
+            <a:lvl3pPr>
+              <a:defRPr sz="2100" b="1">
+                <a:solidFill>
+                  <a:srgbClr val="0866FF"/>
+                </a:solidFill>
+                <a:latin typeface="Arial"/>
+                <a:ea typeface="Arial"/>
+                <a:cs typeface="Arial"/>
+              </a:defRPr>
+            </a:lvl3pPr>
+            <a:lvl4pPr>
+              <a:defRPr sz="2100" b="1">
+                <a:solidFill>
+                  <a:srgbClr val="0866FF"/>
+                </a:solidFill>
+                <a:latin typeface="Arial"/>
+                <a:ea typeface="Arial"/>
+                <a:cs typeface="Arial"/>
+              </a:defRPr>
+            </a:lvl4pPr>
+            <a:lvl5pPr>
+              <a:defRPr sz="2100" b="1">
+                <a:solidFill>
+                  <a:srgbClr val="0866FF"/>
+                </a:solidFill>
+                <a:latin typeface="Arial"/>
+                <a:ea typeface="Arial"/>
+                <a:cs typeface="Arial"/>
+              </a:defRPr>
+            </a:lvl5pPr>
+            <a:lvl6pPr>
+              <a:defRPr sz="2100" b="1">
+                <a:solidFill>
+                  <a:srgbClr val="0866FF"/>
+                </a:solidFill>
+                <a:latin typeface="Arial"/>
+                <a:ea typeface="Arial"/>
+                <a:cs typeface="Arial"/>
+              </a:defRPr>
+            </a:lvl6pPr>
+            <a:lvl7pPr>
+              <a:defRPr sz="2100" b="1">
+                <a:solidFill>
+                  <a:srgbClr val="0866FF"/>
+                </a:solidFill>
+                <a:latin typeface="Arial"/>
+                <a:ea typeface="Arial"/>
+                <a:cs typeface="Arial"/>
+              </a:defRPr>
+            </a:lvl7pPr>
+            <a:lvl8pPr>
+              <a:defRPr sz="2100" b="1">
+                <a:solidFill>
+                  <a:srgbClr val="0866FF"/>
+                </a:solidFill>
+                <a:latin typeface="Arial"/>
+                <a:ea typeface="Arial"/>
+                <a:cs typeface="Arial"/>
+              </a:defRPr>
+            </a:lvl8pPr>
+            <a:lvl9pPr>
+              <a:defRPr sz="2100" b="1">
+                <a:solidFill>
+                  <a:srgbClr val="0866FF"/>
+                </a:solidFill>
+                <a:latin typeface="Arial"/>
+                <a:ea typeface="Arial"/>
+                <a:cs typeface="Arial"/>
+              </a:defRPr>
+            </a:lvl9pPr>
+          </a:lstStyle>
+          <a:p xmlns:a="http://schemas.openxmlformats.org/drawingml/2006/main">
+            <a:pPr>
+              <a:defRPr sz="2100" b="1">
+                <a:solidFill>
+                  <a:srgbClr val="0866FF"/>
+                </a:solidFill>
+                <a:latin typeface="Arial"/>
+                <a:ea typeface="Arial"/>
+                <a:cs typeface="Arial"/>
+              </a:defRPr>
+            </a:pPr>
+            <a:r>
+              <a:rPr sz="2100" b="1">
+                <a:solidFill>
+                  <a:srgbClr val="0866FF"/>
+                </a:solidFill>
+                <a:latin typeface="Arial"/>
+                <a:ea typeface="Arial"/>
+                <a:cs typeface="Arial"/>
+              </a:rPr>
+              <a:t>Приёмка</a:t>
+            </a:r>
+          </a:p>
+        </p:txBody>
+      </p:sp>
+      <p:sp>
+        <p:nvSpPr>
+          <p:cNvPr id="10" name="Тесты и Chrome проверяют изменение. Люди принимают резу">
+            <a:extLst xmlns:a="http://schemas.openxmlformats.org/drawingml/2006/main">
+              <a:ext uri="{FF2B5EF4-FFF2-40B4-BE49-F238E27FC236}">
+                <a16:creationId xmlns:a16="http://schemas.microsoft.com/office/drawing/2014/main" id="{4EA449FA-F9FA-47D7-AAAF-2FC242E1B85B}"/>
+              </a:ext>
+            </a:extLst>
+          </p:cNvPr>
+          <p:cNvSpPr>
+            <a:spLocks xmlns:a="http://schemas.openxmlformats.org/drawingml/2006/main" noGrp="1"/>
+          </p:cNvSpPr>
+          <p:nvPr/>
+        </p:nvSpPr>
+        <p:spPr>
+          <a:xfrm xmlns:a="http://schemas.openxmlformats.org/drawingml/2006/main">
+            <a:off x="3476625" y="4914900"/>
+            <a:ext cx="7953375" cy="762000"/>
+          </a:xfrm>
+          <a:prstGeom xmlns:a="http://schemas.openxmlformats.org/drawingml/2006/main" prst="rect">
+            <a:avLst/>
+          </a:prstGeom>
+          <a:noFill xmlns:a="http://schemas.openxmlformats.org/drawingml/2006/main"/>
+          <a:ln xmlns:a="http://schemas.openxmlformats.org/drawingml/2006/main" w="0">
+            <a:noFill/>
+          </a:ln>
+        </p:spPr>
+        <p:txBody>
+          <a:bodyPr xmlns:a="http://schemas.openxmlformats.org/drawingml/2006/main" wrap="square" lIns="0" tIns="0" rIns="0" bIns="0" anchor="t"/>
+          <a:lstStyle xmlns:a="http://schemas.openxmlformats.org/drawingml/2006/main">
+            <a:defPPr>
+              <a:defRPr sz="1950" b="0">
+                <a:solidFill>
+                  <a:srgbClr val="202124"/>
+                </a:solidFill>
+                <a:latin typeface="Arial"/>
+                <a:ea typeface="Arial"/>
+                <a:cs typeface="Arial"/>
+              </a:defRPr>
+            </a:defPPr>
+            <a:lvl1pPr>
+              <a:defRPr sz="1950" b="0">
+                <a:solidFill>
+                  <a:srgbClr val="202124"/>
+                </a:solidFill>
+                <a:latin typeface="Arial"/>
+                <a:ea typeface="Arial"/>
+                <a:cs typeface="Arial"/>
+              </a:defRPr>
+            </a:lvl1pPr>
+            <a:lvl2pPr>
+              <a:defRPr sz="1950" b="0">
+                <a:solidFill>
+                  <a:srgbClr val="202124"/>
+                </a:solidFill>
+                <a:latin typeface="Arial"/>
+                <a:ea typeface="Arial"/>
+                <a:cs typeface="Arial"/>
+              </a:defRPr>
+            </a:lvl2pPr>
+            <a:lvl3pPr>
+              <a:defRPr sz="1950" b="0">
+                <a:solidFill>
+                  <a:srgbClr val="202124"/>
+                </a:solidFill>
+                <a:latin typeface="Arial"/>
+                <a:ea typeface="Arial"/>
+                <a:cs typeface="Arial"/>
+              </a:defRPr>
+            </a:lvl3pPr>
+            <a:lvl4pPr>
+              <a:defRPr sz="1950" b="0">
+                <a:solidFill>
+                  <a:srgbClr val="202124"/>
+                </a:solidFill>
+                <a:latin typeface="Arial"/>
+                <a:ea typeface="Arial"/>
+                <a:cs typeface="Arial"/>
+              </a:defRPr>
+            </a:lvl4pPr>
+            <a:lvl5pPr>
+              <a:defRPr sz="1950" b="0">
+                <a:solidFill>
+                  <a:srgbClr val="202124"/>
+                </a:solidFill>
+                <a:latin typeface="Arial"/>
+                <a:ea typeface="Arial"/>
+                <a:cs typeface="Arial"/>
+              </a:defRPr>
+            </a:lvl5pPr>
+            <a:lvl6pPr>
+              <a:defRPr sz="1950" b="0">
+                <a:solidFill>
+                  <a:srgbClr val="202124"/>
+                </a:solidFill>
+                <a:latin typeface="Arial"/>
+                <a:ea typeface="Arial"/>
+                <a:cs typeface="Arial"/>
+              </a:defRPr>
+            </a:lvl6pPr>
+            <a:lvl7pPr>
+              <a:defRPr sz="1950" b="0">
+                <a:solidFill>
+                  <a:srgbClr val="202124"/>
+                </a:solidFill>
+                <a:latin typeface="Arial"/>
+                <a:ea typeface="Arial"/>
+                <a:cs typeface="Arial"/>
+              </a:defRPr>
+            </a:lvl7pPr>
+            <a:lvl8pPr>
+              <a:defRPr sz="1950" b="0">
+                <a:solidFill>
+                  <a:srgbClr val="202124"/>
+                </a:solidFill>
+                <a:latin typeface="Arial"/>
+                <a:ea typeface="Arial"/>
+                <a:cs typeface="Arial"/>
+              </a:defRPr>
+            </a:lvl8pPr>
+            <a:lvl9pPr>
+              <a:defRPr sz="1950" b="0">
+                <a:solidFill>
+                  <a:srgbClr val="202124"/>
+                </a:solidFill>
+                <a:latin typeface="Arial"/>
+                <a:ea typeface="Arial"/>
+                <a:cs typeface="Arial"/>
+              </a:defRPr>
+            </a:lvl9pPr>
+          </a:lstStyle>
+          <a:p xmlns:a="http://schemas.openxmlformats.org/drawingml/2006/main">
+            <a:pPr>
+              <a:defRPr sz="1950" b="0">
+                <a:solidFill>
+                  <a:srgbClr val="202124"/>
+                </a:solidFill>
+                <a:latin typeface="Arial"/>
+                <a:ea typeface="Arial"/>
+                <a:cs typeface="Arial"/>
+              </a:defRPr>
+            </a:pPr>
+            <a:r>
+              <a:rPr sz="1950" b="0">
+                <a:solidFill>
+                  <a:srgbClr val="202124"/>
+                </a:solidFill>
+                <a:latin typeface="Arial"/>
+                <a:ea typeface="Arial"/>
+                <a:cs typeface="Arial"/>
+              </a:rPr>
+              <a:t>Тесты и Chrome проверяют изменение. Люди принимают результат и выпускают версию.</a:t>
+            </a:r>
+          </a:p>
+        </p:txBody>
+      </p:sp>
+      <p:sp>
+        <p:nvSpPr>
+          <p:cNvPr id="11" name="Aimo   /   Пайплайн разработки   /   11 из 15">
+            <a:extLst xmlns:a="http://schemas.openxmlformats.org/drawingml/2006/main">
+              <a:ext uri="{FF2B5EF4-FFF2-40B4-BE49-F238E27FC236}">
+                <a16:creationId xmlns:a16="http://schemas.microsoft.com/office/drawing/2014/main" id="{09A04ABA-AF78-4258-AE37-011E9D5F0C55}"/>
+              </a:ext>
+            </a:extLst>
+          </p:cNvPr>
+          <p:cNvSpPr>
+            <a:spLocks xmlns:a="http://schemas.openxmlformats.org/drawingml/2006/main" noGrp="1"/>
+          </p:cNvSpPr>
+          <p:nvPr/>
+        </p:nvSpPr>
+        <p:spPr>
+          <a:xfrm xmlns:a="http://schemas.openxmlformats.org/drawingml/2006/main">
+            <a:off x="762000" y="6391275"/>
+            <a:ext cx="10668000" cy="209550"/>
+          </a:xfrm>
+          <a:prstGeom xmlns:a="http://schemas.openxmlformats.org/drawingml/2006/main" prst="rect">
+            <a:avLst/>
+          </a:prstGeom>
+          <a:noFill xmlns:a="http://schemas.openxmlformats.org/drawingml/2006/main"/>
+          <a:ln xmlns:a="http://schemas.openxmlformats.org/drawingml/2006/main" w="0">
+            <a:noFill/>
+          </a:ln>
+        </p:spPr>
+        <p:txBody>
+          <a:bodyPr xmlns:a="http://schemas.openxmlformats.org/drawingml/2006/main" wrap="square" lIns="0" tIns="0" rIns="0" bIns="0" anchor="t"/>
+          <a:lstStyle xmlns:a="http://schemas.openxmlformats.org/drawingml/2006/main">
+            <a:defPPr>
+              <a:defRPr sz="1125" b="0">
+                <a:solidFill>
+                  <a:srgbClr val="62666D"/>
+                </a:solidFill>
+                <a:latin typeface="Arial"/>
+                <a:ea typeface="Arial"/>
+                <a:cs typeface="Arial"/>
+              </a:defRPr>
+            </a:defPPr>
+            <a:lvl1pPr>
+              <a:defRPr sz="1125" b="0">
+                <a:solidFill>
+                  <a:srgbClr val="62666D"/>
+                </a:solidFill>
+                <a:latin typeface="Arial"/>
+                <a:ea typeface="Arial"/>
+                <a:cs typeface="Arial"/>
+              </a:defRPr>
+            </a:lvl1pPr>
+            <a:lvl2pPr>
+              <a:defRPr sz="1125" b="0">
+                <a:solidFill>
+                  <a:srgbClr val="62666D"/>
+                </a:solidFill>
+                <a:latin typeface="Arial"/>
+                <a:ea typeface="Arial"/>
+                <a:cs typeface="Arial"/>
+              </a:defRPr>
+            </a:lvl2pPr>
+            <a:lvl3pPr>
+              <a:defRPr sz="1125" b="0">
+                <a:solidFill>
+                  <a:srgbClr val="62666D"/>
+                </a:solidFill>
+                <a:latin typeface="Arial"/>
+                <a:ea typeface="Arial"/>
+                <a:cs typeface="Arial"/>
+              </a:defRPr>
+            </a:lvl3pPr>
+            <a:lvl4pPr>
+              <a:defRPr sz="1125" b="0">
+                <a:solidFill>
+                  <a:srgbClr val="62666D"/>
+                </a:solidFill>
+                <a:latin typeface="Arial"/>
+                <a:ea typeface="Arial"/>
+                <a:cs typeface="Arial"/>
+              </a:defRPr>
+            </a:lvl4pPr>
+            <a:lvl5pPr>
+              <a:defRPr sz="1125" b="0">
+                <a:solidFill>
+                  <a:srgbClr val="62666D"/>
+                </a:solidFill>
+                <a:latin typeface="Arial"/>
+                <a:ea typeface="Arial"/>
+                <a:cs typeface="Arial"/>
+              </a:defRPr>
+            </a:lvl5pPr>
+            <a:lvl6pPr>
+              <a:defRPr sz="1125" b="0">
+                <a:solidFill>
+                  <a:srgbClr val="62666D"/>
+                </a:solidFill>
+                <a:latin typeface="Arial"/>
+                <a:ea typeface="Arial"/>
+                <a:cs typeface="Arial"/>
+              </a:defRPr>
+            </a:lvl6pPr>
+            <a:lvl7pPr>
+              <a:defRPr sz="1125" b="0">
+                <a:solidFill>
+                  <a:srgbClr val="62666D"/>
+                </a:solidFill>
+                <a:latin typeface="Arial"/>
+                <a:ea typeface="Arial"/>
+                <a:cs typeface="Arial"/>
+              </a:defRPr>
+            </a:lvl7pPr>
+            <a:lvl8pPr>
+              <a:defRPr sz="1125" b="0">
+                <a:solidFill>
+                  <a:srgbClr val="62666D"/>
+                </a:solidFill>
+                <a:latin typeface="Arial"/>
+                <a:ea typeface="Arial"/>
+                <a:cs typeface="Arial"/>
+              </a:defRPr>
+            </a:lvl8pPr>
+            <a:lvl9pPr>
+              <a:defRPr sz="1125" b="0">
+                <a:solidFill>
+                  <a:srgbClr val="62666D"/>
+                </a:solidFill>
+                <a:latin typeface="Arial"/>
+                <a:ea typeface="Arial"/>
+                <a:cs typeface="Arial"/>
+              </a:defRPr>
+            </a:lvl9pPr>
+          </a:lstStyle>
+          <a:p xmlns:a="http://schemas.openxmlformats.org/drawingml/2006/main">
+            <a:pPr>
+              <a:defRPr sz="1125" b="0">
+                <a:solidFill>
+                  <a:srgbClr val="62666D"/>
+                </a:solidFill>
+                <a:latin typeface="Arial"/>
+                <a:ea typeface="Arial"/>
+                <a:cs typeface="Arial"/>
+              </a:defRPr>
+            </a:pPr>
+            <a:r>
+              <a:rPr sz="1125" b="0">
+                <a:solidFill>
+                  <a:srgbClr val="62666D"/>
+                </a:solidFill>
+                <a:latin typeface="Arial"/>
+                <a:ea typeface="Arial"/>
+                <a:cs typeface="Arial"/>
+              </a:rPr>
+              <a:t>Aimo   /   Пайплайн разработки   /   11 из 15</a:t>
+            </a:r>
+          </a:p>
+        </p:txBody>
+      </p:sp>
+    </p:spTree>
+    <p:extLst>
+      <p:ext uri="{BB962C8B-B14F-4D97-AF65-F5344CB8AC3E}">
+        <p14:creationId xmlns:p14="http://schemas.microsoft.com/office/powerpoint/2010/main" val="305224063"/>
+      </p:ext>
+    </p:extLst>
+  </p:cSld>
+</p:sld>
+</file>
+
+<file path=ppt/slides/slide12.xml><?xml version="1.0" encoding="utf-8"?>
+<p:sld xmlns:p="http://schemas.openxmlformats.org/presentationml/2006/main">
+  <p:cSld>
+    <p:bg>
+      <p:bgPr>
+        <a:solidFill xmlns:a="http://schemas.openxmlformats.org/drawingml/2006/main">
+          <a:srgbClr val="FFFFFF"/>
+        </a:solidFill>
+      </p:bgPr>
+    </p:bg>
+    <p:spTree>
+      <p:nvGrpSpPr>
+        <p:cNvPr id="1" name=""/>
+        <p:cNvGrpSpPr/>
+        <p:nvPr/>
+      </p:nvGrpSpPr>
+      <p:grpSpPr>
+        <a:xfrm xmlns:a="http://schemas.openxmlformats.org/drawingml/2006/main"/>
+      </p:grpSpPr>
+      <p:sp>
+        <p:nvSpPr>
+          <p:cNvPr id="10" name="ВЫВОДЫ РАЗРАБОТКИ">
+            <a:extLst xmlns:a="http://schemas.openxmlformats.org/drawingml/2006/main">
+              <a:ext uri="{FF2B5EF4-FFF2-40B4-BE49-F238E27FC236}">
+                <a16:creationId xmlns:a16="http://schemas.microsoft.com/office/drawing/2014/main" id="{4013F69E-CDE8-4035-8128-F8362E8201AE}"/>
+              </a:ext>
+            </a:extLst>
+          </p:cNvPr>
+          <p:cNvSpPr>
+            <a:spLocks xmlns:a="http://schemas.openxmlformats.org/drawingml/2006/main" noGrp="1"/>
+          </p:cNvSpPr>
+          <p:nvPr/>
+        </p:nvSpPr>
+        <p:spPr>
+          <a:xfrm xmlns:a="http://schemas.openxmlformats.org/drawingml/2006/main">
+            <a:off x="762000" y="590550"/>
+            <a:ext cx="10668000" cy="247650"/>
+          </a:xfrm>
+          <a:prstGeom xmlns:a="http://schemas.openxmlformats.org/drawingml/2006/main" prst="rect">
+            <a:avLst/>
+          </a:prstGeom>
+          <a:noFill xmlns:a="http://schemas.openxmlformats.org/drawingml/2006/main"/>
+          <a:ln xmlns:a="http://schemas.openxmlformats.org/drawingml/2006/main" w="0">
+            <a:noFill/>
+          </a:ln>
+        </p:spPr>
+        <p:txBody>
+          <a:bodyPr xmlns:a="http://schemas.openxmlformats.org/drawingml/2006/main" wrap="square" lIns="0" tIns="0" rIns="0" bIns="0" anchor="t"/>
+          <a:lstStyle xmlns:a="http://schemas.openxmlformats.org/drawingml/2006/main">
+            <a:defPPr>
+              <a:defRPr sz="1350" b="1">
+                <a:solidFill>
+                  <a:srgbClr val="0866FF"/>
+                </a:solidFill>
+                <a:latin typeface="Arial"/>
+                <a:ea typeface="Arial"/>
+                <a:cs typeface="Arial"/>
+              </a:defRPr>
+            </a:defPPr>
+            <a:lvl1pPr>
+              <a:defRPr sz="1350" b="1">
+                <a:solidFill>
+                  <a:srgbClr val="0866FF"/>
+                </a:solidFill>
+                <a:latin typeface="Arial"/>
+                <a:ea typeface="Arial"/>
+                <a:cs typeface="Arial"/>
+              </a:defRPr>
+            </a:lvl1pPr>
+            <a:lvl2pPr>
+              <a:defRPr sz="1350" b="1">
+                <a:solidFill>
+                  <a:srgbClr val="0866FF"/>
+                </a:solidFill>
+                <a:latin typeface="Arial"/>
+                <a:ea typeface="Arial"/>
+                <a:cs typeface="Arial"/>
+              </a:defRPr>
+            </a:lvl2pPr>
+            <a:lvl3pPr>
+              <a:defRPr sz="1350" b="1">
+                <a:solidFill>
+                  <a:srgbClr val="0866FF"/>
+                </a:solidFill>
+                <a:latin typeface="Arial"/>
+                <a:ea typeface="Arial"/>
+                <a:cs typeface="Arial"/>
+              </a:defRPr>
+            </a:lvl3pPr>
+            <a:lvl4pPr>
+              <a:defRPr sz="1350" b="1">
+                <a:solidFill>
+                  <a:srgbClr val="0866FF"/>
+                </a:solidFill>
+                <a:latin typeface="Arial"/>
+                <a:ea typeface="Arial"/>
+                <a:cs typeface="Arial"/>
+              </a:defRPr>
+            </a:lvl4pPr>
+            <a:lvl5pPr>
+              <a:defRPr sz="1350" b="1">
+                <a:solidFill>
+                  <a:srgbClr val="0866FF"/>
+                </a:solidFill>
+                <a:latin typeface="Arial"/>
+                <a:ea typeface="Arial"/>
+                <a:cs typeface="Arial"/>
+              </a:defRPr>
+            </a:lvl5pPr>
+            <a:lvl6pPr>
+              <a:defRPr sz="1350" b="1">
+                <a:solidFill>
+                  <a:srgbClr val="0866FF"/>
+                </a:solidFill>
+                <a:latin typeface="Arial"/>
+                <a:ea typeface="Arial"/>
+                <a:cs typeface="Arial"/>
+              </a:defRPr>
+            </a:lvl6pPr>
+            <a:lvl7pPr>
+              <a:defRPr sz="1350" b="1">
+                <a:solidFill>
+                  <a:srgbClr val="0866FF"/>
+                </a:solidFill>
+                <a:latin typeface="Arial"/>
+                <a:ea typeface="Arial"/>
+                <a:cs typeface="Arial"/>
+              </a:defRPr>
+            </a:lvl7pPr>
+            <a:lvl8pPr>
+              <a:defRPr sz="1350" b="1">
+                <a:solidFill>
+                  <a:srgbClr val="0866FF"/>
+                </a:solidFill>
+                <a:latin typeface="Arial"/>
+                <a:ea typeface="Arial"/>
+                <a:cs typeface="Arial"/>
+              </a:defRPr>
+            </a:lvl8pPr>
+            <a:lvl9pPr>
+              <a:defRPr sz="1350" b="1">
+                <a:solidFill>
+                  <a:srgbClr val="0866FF"/>
+                </a:solidFill>
+                <a:latin typeface="Arial"/>
+                <a:ea typeface="Arial"/>
+                <a:cs typeface="Arial"/>
+              </a:defRPr>
+            </a:lvl9pPr>
+          </a:lstStyle>
+          <a:p xmlns:a="http://schemas.openxmlformats.org/drawingml/2006/main">
+            <a:pPr>
+              <a:defRPr sz="1350" b="1">
+                <a:solidFill>
+                  <a:srgbClr val="0866FF"/>
+                </a:solidFill>
+                <a:latin typeface="Arial"/>
+                <a:ea typeface="Arial"/>
+                <a:cs typeface="Arial"/>
+              </a:defRPr>
+            </a:pPr>
+            <a:r>
+              <a:rPr sz="1350" b="1">
+                <a:solidFill>
+                  <a:srgbClr val="0866FF"/>
+                </a:solidFill>
+                <a:latin typeface="Arial"/>
+                <a:ea typeface="Arial"/>
+                <a:cs typeface="Arial"/>
+              </a:rPr>
+              <a:t>ВЫВОДЫ РАЗРАБОТКИ</a:t>
+            </a:r>
+          </a:p>
+        </p:txBody>
+      </p:sp>
+      <p:sp>
+        <p:nvSpPr>
+          <p:cNvPr id="2" name="Саморефлексия команды">
+            <a:extLst xmlns:a="http://schemas.openxmlformats.org/drawingml/2006/main">
+              <a:ext uri="{FF2B5EF4-FFF2-40B4-BE49-F238E27FC236}">
+                <a16:creationId xmlns:a16="http://schemas.microsoft.com/office/drawing/2014/main" id="{50E2ECE8-7FC4-42BF-814A-DB6C1BDE1600}"/>
+              </a:ext>
+            </a:extLst>
+          </p:cNvPr>
+          <p:cNvSpPr>
+            <a:spLocks xmlns:a="http://schemas.openxmlformats.org/drawingml/2006/main" noGrp="1"/>
+          </p:cNvSpPr>
+          <p:nvPr/>
+        </p:nvSpPr>
+        <p:spPr>
+          <a:xfrm xmlns:a="http://schemas.openxmlformats.org/drawingml/2006/main">
+            <a:off x="762000" y="1000125"/>
+            <a:ext cx="10668000" cy="952500"/>
+          </a:xfrm>
+          <a:prstGeom xmlns:a="http://schemas.openxmlformats.org/drawingml/2006/main" prst="rect">
+            <a:avLst/>
+          </a:prstGeom>
+          <a:noFill xmlns:a="http://schemas.openxmlformats.org/drawingml/2006/main"/>
+          <a:ln xmlns:a="http://schemas.openxmlformats.org/drawingml/2006/main" w="0">
+            <a:noFill/>
+          </a:ln>
+        </p:spPr>
+        <p:txBody>
+          <a:bodyPr xmlns:a="http://schemas.openxmlformats.org/drawingml/2006/main" wrap="square" lIns="0" tIns="0" rIns="0" bIns="0" anchor="t"/>
+          <a:lstStyle xmlns:a="http://schemas.openxmlformats.org/drawingml/2006/main">
+            <a:defPPr>
+              <a:defRPr sz="3150" b="1">
+                <a:solidFill>
+                  <a:srgbClr val="202124"/>
+                </a:solidFill>
+                <a:latin typeface="Arial"/>
+                <a:ea typeface="Arial"/>
+                <a:cs typeface="Arial"/>
+              </a:defRPr>
+            </a:defPPr>
+            <a:lvl1pPr>
+              <a:defRPr sz="3150" b="1">
+                <a:solidFill>
+                  <a:srgbClr val="202124"/>
+                </a:solidFill>
+                <a:latin typeface="Arial"/>
+                <a:ea typeface="Arial"/>
+                <a:cs typeface="Arial"/>
+              </a:defRPr>
+            </a:lvl1pPr>
+            <a:lvl2pPr>
+              <a:defRPr sz="3150" b="1">
+                <a:solidFill>
+                  <a:srgbClr val="202124"/>
+                </a:solidFill>
+                <a:latin typeface="Arial"/>
+                <a:ea typeface="Arial"/>
+                <a:cs typeface="Arial"/>
+              </a:defRPr>
+            </a:lvl2pPr>
+            <a:lvl3pPr>
+              <a:defRPr sz="3150" b="1">
+                <a:solidFill>
+                  <a:srgbClr val="202124"/>
+                </a:solidFill>
+                <a:latin typeface="Arial"/>
+                <a:ea typeface="Arial"/>
+                <a:cs typeface="Arial"/>
+              </a:defRPr>
+            </a:lvl3pPr>
+            <a:lvl4pPr>
+              <a:defRPr sz="3150" b="1">
+                <a:solidFill>
+                  <a:srgbClr val="202124"/>
+                </a:solidFill>
+                <a:latin typeface="Arial"/>
+                <a:ea typeface="Arial"/>
+                <a:cs typeface="Arial"/>
+              </a:defRPr>
+            </a:lvl4pPr>
+            <a:lvl5pPr>
+              <a:defRPr sz="3150" b="1">
+                <a:solidFill>
+                  <a:srgbClr val="202124"/>
+                </a:solidFill>
+                <a:latin typeface="Arial"/>
+                <a:ea typeface="Arial"/>
+                <a:cs typeface="Arial"/>
+              </a:defRPr>
+            </a:lvl5pPr>
+            <a:lvl6pPr>
+              <a:defRPr sz="3150" b="1">
+                <a:solidFill>
+                  <a:srgbClr val="202124"/>
+                </a:solidFill>
+                <a:latin typeface="Arial"/>
+                <a:ea typeface="Arial"/>
+                <a:cs typeface="Arial"/>
+              </a:defRPr>
+            </a:lvl6pPr>
+            <a:lvl7pPr>
+              <a:defRPr sz="3150" b="1">
+                <a:solidFill>
+                  <a:srgbClr val="202124"/>
+                </a:solidFill>
+                <a:latin typeface="Arial"/>
+                <a:ea typeface="Arial"/>
+                <a:cs typeface="Arial"/>
+              </a:defRPr>
+            </a:lvl7pPr>
+            <a:lvl8pPr>
+              <a:defRPr sz="3150" b="1">
+                <a:solidFill>
+                  <a:srgbClr val="202124"/>
+                </a:solidFill>
+                <a:latin typeface="Arial"/>
+                <a:ea typeface="Arial"/>
+                <a:cs typeface="Arial"/>
+              </a:defRPr>
+            </a:lvl8pPr>
+            <a:lvl9pPr>
+              <a:defRPr sz="3150" b="1">
+                <a:solidFill>
+                  <a:srgbClr val="202124"/>
+                </a:solidFill>
+                <a:latin typeface="Arial"/>
+                <a:ea typeface="Arial"/>
+                <a:cs typeface="Arial"/>
+              </a:defRPr>
+            </a:lvl9pPr>
+          </a:lstStyle>
+          <a:p xmlns:a="http://schemas.openxmlformats.org/drawingml/2006/main">
+            <a:pPr>
+              <a:defRPr sz="3150" b="1">
+                <a:solidFill>
+                  <a:srgbClr val="202124"/>
+                </a:solidFill>
+                <a:latin typeface="Arial"/>
+                <a:ea typeface="Arial"/>
+                <a:cs typeface="Arial"/>
+              </a:defRPr>
+            </a:pPr>
+            <a:r>
+              <a:rPr sz="3150" b="1">
+                <a:solidFill>
+                  <a:srgbClr val="202124"/>
+                </a:solidFill>
+                <a:latin typeface="Arial"/>
+                <a:ea typeface="Arial"/>
+                <a:cs typeface="Arial"/>
+              </a:rPr>
+              <a:t>Саморефлексия команды</a:t>
+            </a:r>
+          </a:p>
+        </p:txBody>
+      </p:sp>
+      <p:sp>
+        <p:nvSpPr>
+          <p:cNvPr id="3" name="Что сработало">
+            <a:extLst xmlns:a="http://schemas.openxmlformats.org/drawingml/2006/main">
+              <a:ext uri="{FF2B5EF4-FFF2-40B4-BE49-F238E27FC236}">
+                <a16:creationId xmlns:a16="http://schemas.microsoft.com/office/drawing/2014/main" id="{4070ED99-DB86-431C-9F92-8971A7903084}"/>
+              </a:ext>
+            </a:extLst>
+          </p:cNvPr>
+          <p:cNvSpPr>
+            <a:spLocks xmlns:a="http://schemas.openxmlformats.org/drawingml/2006/main" noGrp="1"/>
+          </p:cNvSpPr>
+          <p:nvPr/>
+        </p:nvSpPr>
+        <p:spPr>
+          <a:xfrm xmlns:a="http://schemas.openxmlformats.org/drawingml/2006/main">
+            <a:off x="762000" y="2133600"/>
+            <a:ext cx="4905375" cy="552450"/>
+          </a:xfrm>
+          <a:prstGeom xmlns:a="http://schemas.openxmlformats.org/drawingml/2006/main" prst="rect">
+            <a:avLst/>
+          </a:prstGeom>
+          <a:noFill xmlns:a="http://schemas.openxmlformats.org/drawingml/2006/main"/>
+          <a:ln xmlns:a="http://schemas.openxmlformats.org/drawingml/2006/main" w="0">
+            <a:noFill/>
+          </a:ln>
+        </p:spPr>
+        <p:txBody>
+          <a:bodyPr xmlns:a="http://schemas.openxmlformats.org/drawingml/2006/main" wrap="square" lIns="0" tIns="0" rIns="0" bIns="0" anchor="t"/>
+          <a:lstStyle xmlns:a="http://schemas.openxmlformats.org/drawingml/2006/main">
+            <a:defPPr>
+              <a:defRPr sz="2175" b="1">
+                <a:solidFill>
+                  <a:srgbClr val="202124"/>
+                </a:solidFill>
+                <a:latin typeface="Arial"/>
+                <a:ea typeface="Arial"/>
+                <a:cs typeface="Arial"/>
+              </a:defRPr>
+            </a:defPPr>
+            <a:lvl1pPr>
+              <a:defRPr sz="2175" b="1">
+                <a:solidFill>
+                  <a:srgbClr val="202124"/>
+                </a:solidFill>
+                <a:latin typeface="Arial"/>
+                <a:ea typeface="Arial"/>
+                <a:cs typeface="Arial"/>
+              </a:defRPr>
+            </a:lvl1pPr>
+            <a:lvl2pPr>
+              <a:defRPr sz="2175" b="1">
+                <a:solidFill>
+                  <a:srgbClr val="202124"/>
+                </a:solidFill>
+                <a:latin typeface="Arial"/>
+                <a:ea typeface="Arial"/>
+                <a:cs typeface="Arial"/>
+              </a:defRPr>
+            </a:lvl2pPr>
+            <a:lvl3pPr>
+              <a:defRPr sz="2175" b="1">
+                <a:solidFill>
+                  <a:srgbClr val="202124"/>
+                </a:solidFill>
+                <a:latin typeface="Arial"/>
+                <a:ea typeface="Arial"/>
+                <a:cs typeface="Arial"/>
+              </a:defRPr>
+            </a:lvl3pPr>
+            <a:lvl4pPr>
+              <a:defRPr sz="2175" b="1">
+                <a:solidFill>
+                  <a:srgbClr val="202124"/>
+                </a:solidFill>
+                <a:latin typeface="Arial"/>
+                <a:ea typeface="Arial"/>
+                <a:cs typeface="Arial"/>
+              </a:defRPr>
+            </a:lvl4pPr>
+            <a:lvl5pPr>
+              <a:defRPr sz="2175" b="1">
+                <a:solidFill>
+                  <a:srgbClr val="202124"/>
+                </a:solidFill>
+                <a:latin typeface="Arial"/>
+                <a:ea typeface="Arial"/>
+                <a:cs typeface="Arial"/>
+              </a:defRPr>
+            </a:lvl5pPr>
+            <a:lvl6pPr>
+              <a:defRPr sz="2175" b="1">
+                <a:solidFill>
+                  <a:srgbClr val="202124"/>
+                </a:solidFill>
+                <a:latin typeface="Arial"/>
+                <a:ea typeface="Arial"/>
+                <a:cs typeface="Arial"/>
+              </a:defRPr>
+            </a:lvl6pPr>
+            <a:lvl7pPr>
+              <a:defRPr sz="2175" b="1">
+                <a:solidFill>
+                  <a:srgbClr val="202124"/>
+                </a:solidFill>
+                <a:latin typeface="Arial"/>
+                <a:ea typeface="Arial"/>
+                <a:cs typeface="Arial"/>
+              </a:defRPr>
+            </a:lvl7pPr>
+            <a:lvl8pPr>
+              <a:defRPr sz="2175" b="1">
+                <a:solidFill>
+                  <a:srgbClr val="202124"/>
+                </a:solidFill>
+                <a:latin typeface="Arial"/>
+                <a:ea typeface="Arial"/>
+                <a:cs typeface="Arial"/>
+              </a:defRPr>
+            </a:lvl8pPr>
+            <a:lvl9pPr>
+              <a:defRPr sz="2175" b="1">
+                <a:solidFill>
+                  <a:srgbClr val="202124"/>
+                </a:solidFill>
+                <a:latin typeface="Arial"/>
+                <a:ea typeface="Arial"/>
+                <a:cs typeface="Arial"/>
+              </a:defRPr>
+            </a:lvl9pPr>
+          </a:lstStyle>
+          <a:p xmlns:a="http://schemas.openxmlformats.org/drawingml/2006/main">
+            <a:pPr>
+              <a:defRPr sz="2175" b="1">
+                <a:solidFill>
+                  <a:srgbClr val="202124"/>
+                </a:solidFill>
+                <a:latin typeface="Arial"/>
+                <a:ea typeface="Arial"/>
+                <a:cs typeface="Arial"/>
+              </a:defRPr>
+            </a:pPr>
+            <a:r>
+              <a:rPr sz="2175" b="1">
+                <a:solidFill>
+                  <a:srgbClr val="202124"/>
+                </a:solidFill>
+                <a:latin typeface="Arial"/>
+                <a:ea typeface="Arial"/>
+                <a:cs typeface="Arial"/>
+              </a:rPr>
+              <a:t>Что сработало</a:t>
+            </a:r>
+          </a:p>
+        </p:txBody>
+      </p:sp>
+      <p:sp>
+        <p:nvSpPr>
+          <p:cNvPr id="4" name="Разделили измерение и генерацию речи. Правила определяю">
+            <a:extLst xmlns:a="http://schemas.openxmlformats.org/drawingml/2006/main">
+              <a:ext uri="{FF2B5EF4-FFF2-40B4-BE49-F238E27FC236}">
+                <a16:creationId xmlns:a16="http://schemas.microsoft.com/office/drawing/2014/main" id="{5A38D2F3-96B5-45C3-AB99-5AF906E8E821}"/>
+              </a:ext>
+            </a:extLst>
+          </p:cNvPr>
+          <p:cNvSpPr>
+            <a:spLocks xmlns:a="http://schemas.openxmlformats.org/drawingml/2006/main" noGrp="1"/>
+          </p:cNvSpPr>
+          <p:nvPr/>
+        </p:nvSpPr>
+        <p:spPr>
+          <a:xfrm xmlns:a="http://schemas.openxmlformats.org/drawingml/2006/main">
+            <a:off x="762000" y="2800350"/>
+            <a:ext cx="4905375" cy="2047875"/>
+          </a:xfrm>
+          <a:prstGeom xmlns:a="http://schemas.openxmlformats.org/drawingml/2006/main" prst="rect">
+            <a:avLst/>
+          </a:prstGeom>
+          <a:noFill xmlns:a="http://schemas.openxmlformats.org/drawingml/2006/main"/>
+          <a:ln xmlns:a="http://schemas.openxmlformats.org/drawingml/2006/main" w="0">
+            <a:noFill/>
+          </a:ln>
+        </p:spPr>
+        <p:txBody>
+          <a:bodyPr xmlns:a="http://schemas.openxmlformats.org/drawingml/2006/main" wrap="square" lIns="0" tIns="0" rIns="0" bIns="0" anchor="t"/>
+          <a:lstStyle xmlns:a="http://schemas.openxmlformats.org/drawingml/2006/main">
+            <a:defPPr>
+              <a:defRPr sz="1950" b="0">
+                <a:solidFill>
+                  <a:srgbClr val="62666D"/>
+                </a:solidFill>
+                <a:latin typeface="Arial"/>
+                <a:ea typeface="Arial"/>
+                <a:cs typeface="Arial"/>
+              </a:defRPr>
+            </a:defPPr>
+            <a:lvl1pPr>
+              <a:defRPr sz="1950" b="0">
+                <a:solidFill>
+                  <a:srgbClr val="62666D"/>
+                </a:solidFill>
+                <a:latin typeface="Arial"/>
+                <a:ea typeface="Arial"/>
+                <a:cs typeface="Arial"/>
+              </a:defRPr>
+            </a:lvl1pPr>
+            <a:lvl2pPr>
+              <a:defRPr sz="1950" b="0">
+                <a:solidFill>
+                  <a:srgbClr val="62666D"/>
+                </a:solidFill>
+                <a:latin typeface="Arial"/>
+                <a:ea typeface="Arial"/>
+                <a:cs typeface="Arial"/>
+              </a:defRPr>
+            </a:lvl2pPr>
+            <a:lvl3pPr>
+              <a:defRPr sz="1950" b="0">
+                <a:solidFill>
+                  <a:srgbClr val="62666D"/>
+                </a:solidFill>
+                <a:latin typeface="Arial"/>
+                <a:ea typeface="Arial"/>
+                <a:cs typeface="Arial"/>
+              </a:defRPr>
+            </a:lvl3pPr>
+            <a:lvl4pPr>
+              <a:defRPr sz="1950" b="0">
+                <a:solidFill>
+                  <a:srgbClr val="62666D"/>
+                </a:solidFill>
+                <a:latin typeface="Arial"/>
+                <a:ea typeface="Arial"/>
+                <a:cs typeface="Arial"/>
+              </a:defRPr>
+            </a:lvl4pPr>
+            <a:lvl5pPr>
+              <a:defRPr sz="1950" b="0">
+                <a:solidFill>
+                  <a:srgbClr val="62666D"/>
+                </a:solidFill>
+                <a:latin typeface="Arial"/>
+                <a:ea typeface="Arial"/>
+                <a:cs typeface="Arial"/>
+              </a:defRPr>
+            </a:lvl5pPr>
+            <a:lvl6pPr>
+              <a:defRPr sz="1950" b="0">
+                <a:solidFill>
+                  <a:srgbClr val="62666D"/>
+                </a:solidFill>
+                <a:latin typeface="Arial"/>
+                <a:ea typeface="Arial"/>
+                <a:cs typeface="Arial"/>
+              </a:defRPr>
+            </a:lvl6pPr>
+            <a:lvl7pPr>
+              <a:defRPr sz="1950" b="0">
+                <a:solidFill>
+                  <a:srgbClr val="62666D"/>
+                </a:solidFill>
+                <a:latin typeface="Arial"/>
+                <a:ea typeface="Arial"/>
+                <a:cs typeface="Arial"/>
+              </a:defRPr>
+            </a:lvl7pPr>
+            <a:lvl8pPr>
+              <a:defRPr sz="1950" b="0">
+                <a:solidFill>
+                  <a:srgbClr val="62666D"/>
+                </a:solidFill>
+                <a:latin typeface="Arial"/>
+                <a:ea typeface="Arial"/>
+                <a:cs typeface="Arial"/>
+              </a:defRPr>
+            </a:lvl8pPr>
+            <a:lvl9pPr>
+              <a:defRPr sz="1950" b="0">
+                <a:solidFill>
+                  <a:srgbClr val="62666D"/>
+                </a:solidFill>
+                <a:latin typeface="Arial"/>
+                <a:ea typeface="Arial"/>
+                <a:cs typeface="Arial"/>
+              </a:defRPr>
+            </a:lvl9pPr>
+          </a:lstStyle>
+          <a:p xmlns:a="http://schemas.openxmlformats.org/drawingml/2006/main">
+            <a:pPr>
+              <a:defRPr sz="1950" b="0">
+                <a:solidFill>
+                  <a:srgbClr val="62666D"/>
+                </a:solidFill>
+                <a:latin typeface="Arial"/>
+                <a:ea typeface="Arial"/>
+                <a:cs typeface="Arial"/>
+              </a:defRPr>
+            </a:pPr>
+            <a:r>
+              <a:rPr sz="1950" b="0">
+                <a:solidFill>
+                  <a:srgbClr val="62666D"/>
+                </a:solidFill>
+                <a:latin typeface="Arial"/>
+                <a:ea typeface="Arial"/>
+                <a:cs typeface="Arial"/>
+              </a:rPr>
+              <a:t>Разделили измерение и генерацию речи. Правила определяют результат, LLM делает ответ естественнее.</a:t>
+            </a:r>
+          </a:p>
+        </p:txBody>
+      </p:sp>
+      <p:sp>
+        <p:nvSpPr>
+          <p:cNvPr id="5" name="Что недооценили">
+            <a:extLst xmlns:a="http://schemas.openxmlformats.org/drawingml/2006/main">
+              <a:ext uri="{FF2B5EF4-FFF2-40B4-BE49-F238E27FC236}">
+                <a16:creationId xmlns:a16="http://schemas.microsoft.com/office/drawing/2014/main" id="{C3200EED-7FC5-4F87-A374-EA3D5FC0AEC7}"/>
+              </a:ext>
+            </a:extLst>
+          </p:cNvPr>
+          <p:cNvSpPr>
+            <a:spLocks xmlns:a="http://schemas.openxmlformats.org/drawingml/2006/main" noGrp="1"/>
+          </p:cNvSpPr>
+          <p:nvPr/>
+        </p:nvSpPr>
+        <p:spPr>
+          <a:xfrm xmlns:a="http://schemas.openxmlformats.org/drawingml/2006/main">
+            <a:off x="6524625" y="2133600"/>
+            <a:ext cx="4905375" cy="552450"/>
+          </a:xfrm>
+          <a:prstGeom xmlns:a="http://schemas.openxmlformats.org/drawingml/2006/main" prst="rect">
+            <a:avLst/>
+          </a:prstGeom>
+          <a:noFill xmlns:a="http://schemas.openxmlformats.org/drawingml/2006/main"/>
+          <a:ln xmlns:a="http://schemas.openxmlformats.org/drawingml/2006/main" w="0">
+            <a:noFill/>
+          </a:ln>
+        </p:spPr>
+        <p:txBody>
+          <a:bodyPr xmlns:a="http://schemas.openxmlformats.org/drawingml/2006/main" wrap="square" lIns="0" tIns="0" rIns="0" bIns="0" anchor="t"/>
+          <a:lstStyle xmlns:a="http://schemas.openxmlformats.org/drawingml/2006/main">
+            <a:defPPr>
+              <a:defRPr sz="2175" b="1">
+                <a:solidFill>
+                  <a:srgbClr val="202124"/>
+                </a:solidFill>
+                <a:latin typeface="Arial"/>
+                <a:ea typeface="Arial"/>
+                <a:cs typeface="Arial"/>
+              </a:defRPr>
+            </a:defPPr>
+            <a:lvl1pPr>
+              <a:defRPr sz="2175" b="1">
+                <a:solidFill>
+                  <a:srgbClr val="202124"/>
+                </a:solidFill>
+                <a:latin typeface="Arial"/>
+                <a:ea typeface="Arial"/>
+                <a:cs typeface="Arial"/>
+              </a:defRPr>
+            </a:lvl1pPr>
+            <a:lvl2pPr>
+              <a:defRPr sz="2175" b="1">
+                <a:solidFill>
+                  <a:srgbClr val="202124"/>
+                </a:solidFill>
+                <a:latin typeface="Arial"/>
+                <a:ea typeface="Arial"/>
+                <a:cs typeface="Arial"/>
+              </a:defRPr>
+            </a:lvl2pPr>
+            <a:lvl3pPr>
+              <a:defRPr sz="2175" b="1">
+                <a:solidFill>
+                  <a:srgbClr val="202124"/>
+                </a:solidFill>
+                <a:latin typeface="Arial"/>
+                <a:ea typeface="Arial"/>
+                <a:cs typeface="Arial"/>
+              </a:defRPr>
+            </a:lvl3pPr>
+            <a:lvl4pPr>
+              <a:defRPr sz="2175" b="1">
+                <a:solidFill>
+                  <a:srgbClr val="202124"/>
+                </a:solidFill>
+                <a:latin typeface="Arial"/>
+                <a:ea typeface="Arial"/>
+                <a:cs typeface="Arial"/>
+              </a:defRPr>
+            </a:lvl4pPr>
+            <a:lvl5pPr>
+              <a:defRPr sz="2175" b="1">
+                <a:solidFill>
+                  <a:srgbClr val="202124"/>
+                </a:solidFill>
+                <a:latin typeface="Arial"/>
+                <a:ea typeface="Arial"/>
+                <a:cs typeface="Arial"/>
+              </a:defRPr>
+            </a:lvl5pPr>
+            <a:lvl6pPr>
+              <a:defRPr sz="2175" b="1">
+                <a:solidFill>
+                  <a:srgbClr val="202124"/>
+                </a:solidFill>
+                <a:latin typeface="Arial"/>
+                <a:ea typeface="Arial"/>
+                <a:cs typeface="Arial"/>
+              </a:defRPr>
+            </a:lvl6pPr>
+            <a:lvl7pPr>
+              <a:defRPr sz="2175" b="1">
+                <a:solidFill>
+                  <a:srgbClr val="202124"/>
+                </a:solidFill>
+                <a:latin typeface="Arial"/>
+                <a:ea typeface="Arial"/>
+                <a:cs typeface="Arial"/>
+              </a:defRPr>
+            </a:lvl7pPr>
+            <a:lvl8pPr>
+              <a:defRPr sz="2175" b="1">
+                <a:solidFill>
+                  <a:srgbClr val="202124"/>
+                </a:solidFill>
+                <a:latin typeface="Arial"/>
+                <a:ea typeface="Arial"/>
+                <a:cs typeface="Arial"/>
+              </a:defRPr>
+            </a:lvl8pPr>
+            <a:lvl9pPr>
+              <a:defRPr sz="2175" b="1">
+                <a:solidFill>
+                  <a:srgbClr val="202124"/>
+                </a:solidFill>
+                <a:latin typeface="Arial"/>
+                <a:ea typeface="Arial"/>
+                <a:cs typeface="Arial"/>
+              </a:defRPr>
+            </a:lvl9pPr>
+          </a:lstStyle>
+          <a:p xmlns:a="http://schemas.openxmlformats.org/drawingml/2006/main">
+            <a:pPr>
+              <a:defRPr sz="2175" b="1">
+                <a:solidFill>
+                  <a:srgbClr val="202124"/>
+                </a:solidFill>
+                <a:latin typeface="Arial"/>
+                <a:ea typeface="Arial"/>
+                <a:cs typeface="Arial"/>
+              </a:defRPr>
+            </a:pPr>
+            <a:r>
+              <a:rPr sz="2175" b="1">
+                <a:solidFill>
+                  <a:srgbClr val="202124"/>
+                </a:solidFill>
+                <a:latin typeface="Arial"/>
+                <a:ea typeface="Arial"/>
+                <a:cs typeface="Arial"/>
+              </a:rPr>
+              <a:t>Что недооценили</a:t>
+            </a:r>
+          </a:p>
+        </p:txBody>
+      </p:sp>
+      <p:sp>
+        <p:nvSpPr>
+          <p:cNvPr id="6" name="Камера, клавиатура и кеш на телефоне потребовали нескол">
+            <a:extLst xmlns:a="http://schemas.openxmlformats.org/drawingml/2006/main">
+              <a:ext uri="{FF2B5EF4-FFF2-40B4-BE49-F238E27FC236}">
+                <a16:creationId xmlns:a16="http://schemas.microsoft.com/office/drawing/2014/main" id="{A178475A-E78D-4189-87A1-3054DA51664C}"/>
+              </a:ext>
+            </a:extLst>
+          </p:cNvPr>
+          <p:cNvSpPr>
+            <a:spLocks xmlns:a="http://schemas.openxmlformats.org/drawingml/2006/main" noGrp="1"/>
+          </p:cNvSpPr>
+          <p:nvPr/>
+        </p:nvSpPr>
+        <p:spPr>
+          <a:xfrm xmlns:a="http://schemas.openxmlformats.org/drawingml/2006/main">
+            <a:off x="6524625" y="2800350"/>
+            <a:ext cx="4905375" cy="2047875"/>
+          </a:xfrm>
+          <a:prstGeom xmlns:a="http://schemas.openxmlformats.org/drawingml/2006/main" prst="rect">
+            <a:avLst/>
+          </a:prstGeom>
+          <a:noFill xmlns:a="http://schemas.openxmlformats.org/drawingml/2006/main"/>
+          <a:ln xmlns:a="http://schemas.openxmlformats.org/drawingml/2006/main" w="0">
+            <a:noFill/>
+          </a:ln>
+        </p:spPr>
+        <p:txBody>
+          <a:bodyPr xmlns:a="http://schemas.openxmlformats.org/drawingml/2006/main" wrap="square" lIns="0" tIns="0" rIns="0" bIns="0" anchor="t"/>
+          <a:lstStyle xmlns:a="http://schemas.openxmlformats.org/drawingml/2006/main">
+            <a:defPPr>
+              <a:defRPr sz="1950" b="0">
+                <a:solidFill>
+                  <a:srgbClr val="62666D"/>
+                </a:solidFill>
+                <a:latin typeface="Arial"/>
+                <a:ea typeface="Arial"/>
+                <a:cs typeface="Arial"/>
+              </a:defRPr>
+            </a:defPPr>
+            <a:lvl1pPr>
+              <a:defRPr sz="1950" b="0">
+                <a:solidFill>
+                  <a:srgbClr val="62666D"/>
+                </a:solidFill>
+                <a:latin typeface="Arial"/>
+                <a:ea typeface="Arial"/>
+                <a:cs typeface="Arial"/>
+              </a:defRPr>
+            </a:lvl1pPr>
+            <a:lvl2pPr>
+              <a:defRPr sz="1950" b="0">
+                <a:solidFill>
+                  <a:srgbClr val="62666D"/>
+                </a:solidFill>
+                <a:latin typeface="Arial"/>
+                <a:ea typeface="Arial"/>
+                <a:cs typeface="Arial"/>
+              </a:defRPr>
+            </a:lvl2pPr>
+            <a:lvl3pPr>
+              <a:defRPr sz="1950" b="0">
+                <a:solidFill>
+                  <a:srgbClr val="62666D"/>
+                </a:solidFill>
+                <a:latin typeface="Arial"/>
+                <a:ea typeface="Arial"/>
+                <a:cs typeface="Arial"/>
+              </a:defRPr>
+            </a:lvl3pPr>
+            <a:lvl4pPr>
+              <a:defRPr sz="1950" b="0">
+                <a:solidFill>
+                  <a:srgbClr val="62666D"/>
+                </a:solidFill>
+                <a:latin typeface="Arial"/>
+                <a:ea typeface="Arial"/>
+                <a:cs typeface="Arial"/>
+              </a:defRPr>
+            </a:lvl4pPr>
+            <a:lvl5pPr>
+              <a:defRPr sz="1950" b="0">
+                <a:solidFill>
+                  <a:srgbClr val="62666D"/>
+                </a:solidFill>
+                <a:latin typeface="Arial"/>
+                <a:ea typeface="Arial"/>
+                <a:cs typeface="Arial"/>
+              </a:defRPr>
+            </a:lvl5pPr>
+            <a:lvl6pPr>
+              <a:defRPr sz="1950" b="0">
+                <a:solidFill>
+                  <a:srgbClr val="62666D"/>
+                </a:solidFill>
+                <a:latin typeface="Arial"/>
+                <a:ea typeface="Arial"/>
+                <a:cs typeface="Arial"/>
+              </a:defRPr>
+            </a:lvl6pPr>
+            <a:lvl7pPr>
+              <a:defRPr sz="1950" b="0">
+                <a:solidFill>
+                  <a:srgbClr val="62666D"/>
+                </a:solidFill>
+                <a:latin typeface="Arial"/>
+                <a:ea typeface="Arial"/>
+                <a:cs typeface="Arial"/>
+              </a:defRPr>
+            </a:lvl7pPr>
+            <a:lvl8pPr>
+              <a:defRPr sz="1950" b="0">
+                <a:solidFill>
+                  <a:srgbClr val="62666D"/>
+                </a:solidFill>
+                <a:latin typeface="Arial"/>
+                <a:ea typeface="Arial"/>
+                <a:cs typeface="Arial"/>
+              </a:defRPr>
+            </a:lvl8pPr>
+            <a:lvl9pPr>
+              <a:defRPr sz="1950" b="0">
+                <a:solidFill>
+                  <a:srgbClr val="62666D"/>
+                </a:solidFill>
+                <a:latin typeface="Arial"/>
+                <a:ea typeface="Arial"/>
+                <a:cs typeface="Arial"/>
+              </a:defRPr>
+            </a:lvl9pPr>
+          </a:lstStyle>
+          <a:p xmlns:a="http://schemas.openxmlformats.org/drawingml/2006/main">
+            <a:pPr>
+              <a:defRPr sz="1950" b="0">
+                <a:solidFill>
+                  <a:srgbClr val="62666D"/>
+                </a:solidFill>
+                <a:latin typeface="Arial"/>
+                <a:ea typeface="Arial"/>
+                <a:cs typeface="Arial"/>
+              </a:defRPr>
+            </a:pPr>
+            <a:r>
+              <a:rPr sz="1950" b="0">
+                <a:solidFill>
+                  <a:srgbClr val="62666D"/>
+                </a:solidFill>
+                <a:latin typeface="Arial"/>
+                <a:ea typeface="Arial"/>
+                <a:cs typeface="Arial"/>
+              </a:rPr>
+              <a:t>Камера, клавиатура и кеш на телефоне потребовали нескольких итераций. Демо не выявляет все ошибки реального видео.</a:t>
+            </a:r>
+          </a:p>
+        </p:txBody>
+      </p:sp>
+      <p:sp>
+        <p:nvSpPr>
+          <p:cNvPr id="7" name="Главный вывод">
+            <a:extLst xmlns:a="http://schemas.openxmlformats.org/drawingml/2006/main">
+              <a:ext uri="{FF2B5EF4-FFF2-40B4-BE49-F238E27FC236}">
+                <a16:creationId xmlns:a16="http://schemas.microsoft.com/office/drawing/2014/main" id="{D7DE4EA5-F02F-4A9C-8FDD-3DFC350B7CE7}"/>
+              </a:ext>
+            </a:extLst>
+          </p:cNvPr>
+          <p:cNvSpPr>
+            <a:spLocks xmlns:a="http://schemas.openxmlformats.org/drawingml/2006/main" noGrp="1"/>
+          </p:cNvSpPr>
+          <p:nvPr/>
+        </p:nvSpPr>
+        <p:spPr>
+          <a:xfrm xmlns:a="http://schemas.openxmlformats.org/drawingml/2006/main">
+            <a:off x="762000" y="4619625"/>
+            <a:ext cx="10668000" cy="428625"/>
+          </a:xfrm>
+          <a:prstGeom xmlns:a="http://schemas.openxmlformats.org/drawingml/2006/main" prst="rect">
+            <a:avLst/>
+          </a:prstGeom>
+          <a:noFill xmlns:a="http://schemas.openxmlformats.org/drawingml/2006/main"/>
+          <a:ln xmlns:a="http://schemas.openxmlformats.org/drawingml/2006/main" w="0">
+            <a:noFill/>
+          </a:ln>
+        </p:spPr>
+        <p:txBody>
+          <a:bodyPr xmlns:a="http://schemas.openxmlformats.org/drawingml/2006/main" wrap="square" lIns="0" tIns="0" rIns="0" bIns="0" anchor="t"/>
+          <a:lstStyle xmlns:a="http://schemas.openxmlformats.org/drawingml/2006/main">
+            <a:defPPr>
+              <a:defRPr sz="2250" b="1">
+                <a:solidFill>
+                  <a:srgbClr val="0866FF"/>
+                </a:solidFill>
+                <a:latin typeface="Arial"/>
+                <a:ea typeface="Arial"/>
+                <a:cs typeface="Arial"/>
+              </a:defRPr>
+            </a:defPPr>
+            <a:lvl1pPr>
+              <a:defRPr sz="2250" b="1">
+                <a:solidFill>
+                  <a:srgbClr val="0866FF"/>
+                </a:solidFill>
+                <a:latin typeface="Arial"/>
+                <a:ea typeface="Arial"/>
+                <a:cs typeface="Arial"/>
+              </a:defRPr>
+            </a:lvl1pPr>
+            <a:lvl2pPr>
+              <a:defRPr sz="2250" b="1">
+                <a:solidFill>
+                  <a:srgbClr val="0866FF"/>
+                </a:solidFill>
+                <a:latin typeface="Arial"/>
+                <a:ea typeface="Arial"/>
+                <a:cs typeface="Arial"/>
+              </a:defRPr>
+            </a:lvl2pPr>
+            <a:lvl3pPr>
+              <a:defRPr sz="2250" b="1">
+                <a:solidFill>
+                  <a:srgbClr val="0866FF"/>
+                </a:solidFill>
+                <a:latin typeface="Arial"/>
+                <a:ea typeface="Arial"/>
+                <a:cs typeface="Arial"/>
+              </a:defRPr>
+            </a:lvl3pPr>
+            <a:lvl4pPr>
+              <a:defRPr sz="2250" b="1">
+                <a:solidFill>
+                  <a:srgbClr val="0866FF"/>
+                </a:solidFill>
+                <a:latin typeface="Arial"/>
+                <a:ea typeface="Arial"/>
+                <a:cs typeface="Arial"/>
+              </a:defRPr>
+            </a:lvl4pPr>
+            <a:lvl5pPr>
+              <a:defRPr sz="2250" b="1">
+                <a:solidFill>
+                  <a:srgbClr val="0866FF"/>
+                </a:solidFill>
+                <a:latin typeface="Arial"/>
+                <a:ea typeface="Arial"/>
+                <a:cs typeface="Arial"/>
+              </a:defRPr>
+            </a:lvl5pPr>
+            <a:lvl6pPr>
+              <a:defRPr sz="2250" b="1">
+                <a:solidFill>
+                  <a:srgbClr val="0866FF"/>
+                </a:solidFill>
+                <a:latin typeface="Arial"/>
+                <a:ea typeface="Arial"/>
+                <a:cs typeface="Arial"/>
+              </a:defRPr>
+            </a:lvl6pPr>
+            <a:lvl7pPr>
+              <a:defRPr sz="2250" b="1">
+                <a:solidFill>
+                  <a:srgbClr val="0866FF"/>
+                </a:solidFill>
+                <a:latin typeface="Arial"/>
+                <a:ea typeface="Arial"/>
+                <a:cs typeface="Arial"/>
+              </a:defRPr>
+            </a:lvl7pPr>
+            <a:lvl8pPr>
+              <a:defRPr sz="2250" b="1">
+                <a:solidFill>
+                  <a:srgbClr val="0866FF"/>
+                </a:solidFill>
+                <a:latin typeface="Arial"/>
+                <a:ea typeface="Arial"/>
+                <a:cs typeface="Arial"/>
+              </a:defRPr>
+            </a:lvl8pPr>
+            <a:lvl9pPr>
+              <a:defRPr sz="2250" b="1">
+                <a:solidFill>
+                  <a:srgbClr val="0866FF"/>
+                </a:solidFill>
+                <a:latin typeface="Arial"/>
+                <a:ea typeface="Arial"/>
+                <a:cs typeface="Arial"/>
+              </a:defRPr>
+            </a:lvl9pPr>
+          </a:lstStyle>
+          <a:p xmlns:a="http://schemas.openxmlformats.org/drawingml/2006/main">
+            <a:pPr>
+              <a:defRPr sz="2250" b="1">
+                <a:solidFill>
+                  <a:srgbClr val="0866FF"/>
+                </a:solidFill>
+                <a:latin typeface="Arial"/>
+                <a:ea typeface="Arial"/>
+                <a:cs typeface="Arial"/>
+              </a:defRPr>
+            </a:pPr>
+            <a:r>
+              <a:rPr sz="2250" b="1">
+                <a:solidFill>
+                  <a:srgbClr val="0866FF"/>
+                </a:solidFill>
+                <a:latin typeface="Arial"/>
+                <a:ea typeface="Arial"/>
+                <a:cs typeface="Arial"/>
+              </a:rPr>
+              <a:t>Главный вывод</a:t>
+            </a:r>
+          </a:p>
+        </p:txBody>
+      </p:sp>
+      <p:sp>
+        <p:nvSpPr>
+          <p:cNvPr id="8" name="В следующей итерации начнём с одного навыка на реальных">
+            <a:extLst xmlns:a="http://schemas.openxmlformats.org/drawingml/2006/main">
+              <a:ext uri="{FF2B5EF4-FFF2-40B4-BE49-F238E27FC236}">
+                <a16:creationId xmlns:a16="http://schemas.microsoft.com/office/drawing/2014/main" id="{CDF85053-E96C-434D-B136-E153B90B55CD}"/>
+              </a:ext>
+            </a:extLst>
+          </p:cNvPr>
+          <p:cNvSpPr>
+            <a:spLocks xmlns:a="http://schemas.openxmlformats.org/drawingml/2006/main" noGrp="1"/>
+          </p:cNvSpPr>
+          <p:nvPr/>
+        </p:nvSpPr>
+        <p:spPr>
+          <a:xfrm xmlns:a="http://schemas.openxmlformats.org/drawingml/2006/main">
+            <a:off x="762000" y="5200650"/>
+            <a:ext cx="10668000" cy="952500"/>
+          </a:xfrm>
+          <a:prstGeom xmlns:a="http://schemas.openxmlformats.org/drawingml/2006/main" prst="rect">
+            <a:avLst/>
+          </a:prstGeom>
+          <a:noFill xmlns:a="http://schemas.openxmlformats.org/drawingml/2006/main"/>
+          <a:ln xmlns:a="http://schemas.openxmlformats.org/drawingml/2006/main" w="0">
+            <a:noFill/>
+          </a:ln>
+        </p:spPr>
+        <p:txBody>
+          <a:bodyPr xmlns:a="http://schemas.openxmlformats.org/drawingml/2006/main" wrap="square" lIns="0" tIns="0" rIns="0" bIns="0" anchor="t"/>
+          <a:lstStyle xmlns:a="http://schemas.openxmlformats.org/drawingml/2006/main">
+            <a:defPPr>
+              <a:defRPr sz="2250" b="1">
+                <a:solidFill>
+                  <a:srgbClr val="202124"/>
+                </a:solidFill>
+                <a:latin typeface="Arial"/>
+                <a:ea typeface="Arial"/>
+                <a:cs typeface="Arial"/>
+              </a:defRPr>
+            </a:defPPr>
+            <a:lvl1pPr>
+              <a:defRPr sz="2250" b="1">
+                <a:solidFill>
+                  <a:srgbClr val="202124"/>
+                </a:solidFill>
+                <a:latin typeface="Arial"/>
+                <a:ea typeface="Arial"/>
+                <a:cs typeface="Arial"/>
+              </a:defRPr>
+            </a:lvl1pPr>
+            <a:lvl2pPr>
+              <a:defRPr sz="2250" b="1">
+                <a:solidFill>
+                  <a:srgbClr val="202124"/>
+                </a:solidFill>
+                <a:latin typeface="Arial"/>
+                <a:ea typeface="Arial"/>
+                <a:cs typeface="Arial"/>
+              </a:defRPr>
+            </a:lvl2pPr>
+            <a:lvl3pPr>
+              <a:defRPr sz="2250" b="1">
+                <a:solidFill>
+                  <a:srgbClr val="202124"/>
+                </a:solidFill>
+                <a:latin typeface="Arial"/>
+                <a:ea typeface="Arial"/>
+                <a:cs typeface="Arial"/>
+              </a:defRPr>
+            </a:lvl3pPr>
+            <a:lvl4pPr>
+              <a:defRPr sz="2250" b="1">
+                <a:solidFill>
+                  <a:srgbClr val="202124"/>
+                </a:solidFill>
+                <a:latin typeface="Arial"/>
+                <a:ea typeface="Arial"/>
+                <a:cs typeface="Arial"/>
+              </a:defRPr>
+            </a:lvl4pPr>
+            <a:lvl5pPr>
+              <a:defRPr sz="2250" b="1">
+                <a:solidFill>
+                  <a:srgbClr val="202124"/>
+                </a:solidFill>
+                <a:latin typeface="Arial"/>
+                <a:ea typeface="Arial"/>
+                <a:cs typeface="Arial"/>
+              </a:defRPr>
+            </a:lvl5pPr>
+            <a:lvl6pPr>
+              <a:defRPr sz="2250" b="1">
+                <a:solidFill>
+                  <a:srgbClr val="202124"/>
+                </a:solidFill>
+                <a:latin typeface="Arial"/>
+                <a:ea typeface="Arial"/>
+                <a:cs typeface="Arial"/>
+              </a:defRPr>
+            </a:lvl6pPr>
+            <a:lvl7pPr>
+              <a:defRPr sz="2250" b="1">
+                <a:solidFill>
+                  <a:srgbClr val="202124"/>
+                </a:solidFill>
+                <a:latin typeface="Arial"/>
+                <a:ea typeface="Arial"/>
+                <a:cs typeface="Arial"/>
+              </a:defRPr>
+            </a:lvl7pPr>
+            <a:lvl8pPr>
+              <a:defRPr sz="2250" b="1">
+                <a:solidFill>
+                  <a:srgbClr val="202124"/>
+                </a:solidFill>
+                <a:latin typeface="Arial"/>
+                <a:ea typeface="Arial"/>
+                <a:cs typeface="Arial"/>
+              </a:defRPr>
+            </a:lvl8pPr>
+            <a:lvl9pPr>
+              <a:defRPr sz="2250" b="1">
+                <a:solidFill>
+                  <a:srgbClr val="202124"/>
+                </a:solidFill>
+                <a:latin typeface="Arial"/>
+                <a:ea typeface="Arial"/>
+                <a:cs typeface="Arial"/>
+              </a:defRPr>
+            </a:lvl9pPr>
+          </a:lstStyle>
+          <a:p xmlns:a="http://schemas.openxmlformats.org/drawingml/2006/main">
+            <a:pPr>
+              <a:defRPr sz="2250" b="1">
+                <a:solidFill>
+                  <a:srgbClr val="202124"/>
+                </a:solidFill>
+                <a:latin typeface="Arial"/>
+                <a:ea typeface="Arial"/>
+                <a:cs typeface="Arial"/>
+              </a:defRPr>
+            </a:pPr>
+            <a:r>
+              <a:rPr sz="2250" b="1">
+                <a:solidFill>
+                  <a:srgbClr val="202124"/>
+                </a:solidFill>
+                <a:latin typeface="Arial"/>
+                <a:ea typeface="Arial"/>
+                <a:cs typeface="Arial"/>
+              </a:rPr>
+              <a:t>В следующей итерации начнём с одного навыка на реальных телефонах. Расширять каталог будем после сравнения счёта с ручной разметкой.</a:t>
+            </a:r>
+          </a:p>
+        </p:txBody>
+      </p:sp>
+      <p:sp>
+        <p:nvSpPr>
+          <p:cNvPr id="9" name="Aimo   /   Что поняли и изменим   /   12 из 15">
+            <a:extLst xmlns:a="http://schemas.openxmlformats.org/drawingml/2006/main">
+              <a:ext uri="{FF2B5EF4-FFF2-40B4-BE49-F238E27FC236}">
+                <a16:creationId xmlns:a16="http://schemas.microsoft.com/office/drawing/2014/main" id="{372AD0B8-146A-46A1-A2D1-C80672DD6C11}"/>
+              </a:ext>
+            </a:extLst>
+          </p:cNvPr>
+          <p:cNvSpPr>
+            <a:spLocks xmlns:a="http://schemas.openxmlformats.org/drawingml/2006/main" noGrp="1"/>
+          </p:cNvSpPr>
+          <p:nvPr/>
+        </p:nvSpPr>
+        <p:spPr>
+          <a:xfrm xmlns:a="http://schemas.openxmlformats.org/drawingml/2006/main">
+            <a:off x="762000" y="6391275"/>
+            <a:ext cx="10668000" cy="209550"/>
+          </a:xfrm>
+          <a:prstGeom xmlns:a="http://schemas.openxmlformats.org/drawingml/2006/main" prst="rect">
+            <a:avLst/>
+          </a:prstGeom>
+          <a:noFill xmlns:a="http://schemas.openxmlformats.org/drawingml/2006/main"/>
+          <a:ln xmlns:a="http://schemas.openxmlformats.org/drawingml/2006/main" w="0">
+            <a:noFill/>
+          </a:ln>
+        </p:spPr>
+        <p:txBody>
+          <a:bodyPr xmlns:a="http://schemas.openxmlformats.org/drawingml/2006/main" wrap="square" lIns="0" tIns="0" rIns="0" bIns="0" anchor="t"/>
+          <a:lstStyle xmlns:a="http://schemas.openxmlformats.org/drawingml/2006/main">
+            <a:defPPr>
+              <a:defRPr sz="1125" b="0">
+                <a:solidFill>
+                  <a:srgbClr val="62666D"/>
+                </a:solidFill>
+                <a:latin typeface="Arial"/>
+                <a:ea typeface="Arial"/>
+                <a:cs typeface="Arial"/>
+              </a:defRPr>
+            </a:defPPr>
+            <a:lvl1pPr>
+              <a:defRPr sz="1125" b="0">
+                <a:solidFill>
+                  <a:srgbClr val="62666D"/>
+                </a:solidFill>
+                <a:latin typeface="Arial"/>
+                <a:ea typeface="Arial"/>
+                <a:cs typeface="Arial"/>
+              </a:defRPr>
+            </a:lvl1pPr>
+            <a:lvl2pPr>
+              <a:defRPr sz="1125" b="0">
+                <a:solidFill>
+                  <a:srgbClr val="62666D"/>
+                </a:solidFill>
+                <a:latin typeface="Arial"/>
+                <a:ea typeface="Arial"/>
+                <a:cs typeface="Arial"/>
+              </a:defRPr>
+            </a:lvl2pPr>
+            <a:lvl3pPr>
+              <a:defRPr sz="1125" b="0">
+                <a:solidFill>
+                  <a:srgbClr val="62666D"/>
+                </a:solidFill>
+                <a:latin typeface="Arial"/>
+                <a:ea typeface="Arial"/>
+                <a:cs typeface="Arial"/>
+              </a:defRPr>
+            </a:lvl3pPr>
+            <a:lvl4pPr>
+              <a:defRPr sz="1125" b="0">
+                <a:solidFill>
+                  <a:srgbClr val="62666D"/>
+                </a:solidFill>
+                <a:latin typeface="Arial"/>
+                <a:ea typeface="Arial"/>
+                <a:cs typeface="Arial"/>
+              </a:defRPr>
+            </a:lvl4pPr>
+            <a:lvl5pPr>
+              <a:defRPr sz="1125" b="0">
+                <a:solidFill>
+                  <a:srgbClr val="62666D"/>
+                </a:solidFill>
+                <a:latin typeface="Arial"/>
+                <a:ea typeface="Arial"/>
+                <a:cs typeface="Arial"/>
+              </a:defRPr>
+            </a:lvl5pPr>
+            <a:lvl6pPr>
+              <a:defRPr sz="1125" b="0">
+                <a:solidFill>
+                  <a:srgbClr val="62666D"/>
+                </a:solidFill>
+                <a:latin typeface="Arial"/>
+                <a:ea typeface="Arial"/>
+                <a:cs typeface="Arial"/>
+              </a:defRPr>
+            </a:lvl6pPr>
+            <a:lvl7pPr>
+              <a:defRPr sz="1125" b="0">
+                <a:solidFill>
+                  <a:srgbClr val="62666D"/>
+                </a:solidFill>
+                <a:latin typeface="Arial"/>
+                <a:ea typeface="Arial"/>
+                <a:cs typeface="Arial"/>
+              </a:defRPr>
+            </a:lvl7pPr>
+            <a:lvl8pPr>
+              <a:defRPr sz="1125" b="0">
+                <a:solidFill>
+                  <a:srgbClr val="62666D"/>
+                </a:solidFill>
+                <a:latin typeface="Arial"/>
+                <a:ea typeface="Arial"/>
+                <a:cs typeface="Arial"/>
+              </a:defRPr>
+            </a:lvl8pPr>
+            <a:lvl9pPr>
+              <a:defRPr sz="1125" b="0">
+                <a:solidFill>
+                  <a:srgbClr val="62666D"/>
+                </a:solidFill>
+                <a:latin typeface="Arial"/>
+                <a:ea typeface="Arial"/>
+                <a:cs typeface="Arial"/>
+              </a:defRPr>
+            </a:lvl9pPr>
+          </a:lstStyle>
+          <a:p xmlns:a="http://schemas.openxmlformats.org/drawingml/2006/main">
+            <a:pPr>
+              <a:defRPr sz="1125" b="0">
+                <a:solidFill>
+                  <a:srgbClr val="62666D"/>
+                </a:solidFill>
+                <a:latin typeface="Arial"/>
+                <a:ea typeface="Arial"/>
+                <a:cs typeface="Arial"/>
+              </a:defRPr>
+            </a:pPr>
+            <a:r>
+              <a:rPr sz="1125" b="0">
+                <a:solidFill>
+                  <a:srgbClr val="62666D"/>
+                </a:solidFill>
+                <a:latin typeface="Arial"/>
+                <a:ea typeface="Arial"/>
+                <a:cs typeface="Arial"/>
+              </a:rPr>
+              <a:t>Aimo   /   Что поняли и изменим   /   12 из 15</a:t>
+            </a:r>
+          </a:p>
+        </p:txBody>
+      </p:sp>
+    </p:spTree>
+    <p:extLst>
+      <p:ext uri="{BB962C8B-B14F-4D97-AF65-F5344CB8AC3E}">
+        <p14:creationId xmlns:p14="http://schemas.microsoft.com/office/powerpoint/2010/main" val="416932759"/>
+      </p:ext>
+    </p:extLst>
+  </p:cSld>
+</p:sld>
+</file>
+
+<file path=ppt/slides/slide13.xml><?xml version="1.0" encoding="utf-8"?>
+<p:sld xmlns:p="http://schemas.openxmlformats.org/presentationml/2006/main">
+  <p:cSld>
+    <p:bg>
+      <p:bgPr>
+        <a:solidFill xmlns:a="http://schemas.openxmlformats.org/drawingml/2006/main">
+          <a:srgbClr val="EFF1F4"/>
+        </a:solidFill>
+      </p:bgPr>
+    </p:bg>
+    <p:spTree>
+      <p:nvGrpSpPr>
+        <p:cNvPr id="1" name=""/>
+        <p:cNvGrpSpPr/>
+        <p:nvPr/>
+      </p:nvGrpSpPr>
+      <p:grpSpPr>
+        <a:xfrm xmlns:a="http://schemas.openxmlformats.org/drawingml/2006/main"/>
+      </p:grpSpPr>
+      <p:sp>
+        <p:nvSpPr>
+          <p:cNvPr id="6" name="ПОЛЬЗА И ГРАНИЦЫ ПРОТОТИПА">
+            <a:extLst xmlns:a="http://schemas.openxmlformats.org/drawingml/2006/main">
+              <a:ext uri="{FF2B5EF4-FFF2-40B4-BE49-F238E27FC236}">
+                <a16:creationId xmlns:a16="http://schemas.microsoft.com/office/drawing/2014/main" id="{DF9447D9-11F6-4D69-935E-12C169C15361}"/>
+              </a:ext>
+            </a:extLst>
+          </p:cNvPr>
+          <p:cNvSpPr>
+            <a:spLocks xmlns:a="http://schemas.openxmlformats.org/drawingml/2006/main" noGrp="1"/>
+          </p:cNvSpPr>
+          <p:nvPr/>
+        </p:nvSpPr>
+        <p:spPr>
+          <a:xfrm xmlns:a="http://schemas.openxmlformats.org/drawingml/2006/main">
+            <a:off x="762000" y="590550"/>
+            <a:ext cx="10668000" cy="247650"/>
+          </a:xfrm>
+          <a:prstGeom xmlns:a="http://schemas.openxmlformats.org/drawingml/2006/main" prst="rect">
+            <a:avLst/>
+          </a:prstGeom>
+          <a:noFill xmlns:a="http://schemas.openxmlformats.org/drawingml/2006/main"/>
+          <a:ln xmlns:a="http://schemas.openxmlformats.org/drawingml/2006/main" w="0">
+            <a:noFill/>
+          </a:ln>
+        </p:spPr>
+        <p:txBody>
+          <a:bodyPr xmlns:a="http://schemas.openxmlformats.org/drawingml/2006/main" wrap="square" lIns="0" tIns="0" rIns="0" bIns="0" anchor="t"/>
+          <a:lstStyle xmlns:a="http://schemas.openxmlformats.org/drawingml/2006/main">
+            <a:defPPr>
+              <a:defRPr sz="1350" b="1">
+                <a:solidFill>
+                  <a:srgbClr val="0866FF"/>
+                </a:solidFill>
+                <a:latin typeface="Arial"/>
+                <a:ea typeface="Arial"/>
+                <a:cs typeface="Arial"/>
+              </a:defRPr>
+            </a:defPPr>
+            <a:lvl1pPr>
+              <a:defRPr sz="1350" b="1">
+                <a:solidFill>
+                  <a:srgbClr val="0866FF"/>
+                </a:solidFill>
+                <a:latin typeface="Arial"/>
+                <a:ea typeface="Arial"/>
+                <a:cs typeface="Arial"/>
+              </a:defRPr>
+            </a:lvl1pPr>
+            <a:lvl2pPr>
+              <a:defRPr sz="1350" b="1">
+                <a:solidFill>
+                  <a:srgbClr val="0866FF"/>
+                </a:solidFill>
+                <a:latin typeface="Arial"/>
+                <a:ea typeface="Arial"/>
+                <a:cs typeface="Arial"/>
+              </a:defRPr>
+            </a:lvl2pPr>
+            <a:lvl3pPr>
+              <a:defRPr sz="1350" b="1">
+                <a:solidFill>
+                  <a:srgbClr val="0866FF"/>
+                </a:solidFill>
+                <a:latin typeface="Arial"/>
+                <a:ea typeface="Arial"/>
+                <a:cs typeface="Arial"/>
+              </a:defRPr>
+            </a:lvl3pPr>
+            <a:lvl4pPr>
+              <a:defRPr sz="1350" b="1">
+                <a:solidFill>
+                  <a:srgbClr val="0866FF"/>
+                </a:solidFill>
+                <a:latin typeface="Arial"/>
+                <a:ea typeface="Arial"/>
+                <a:cs typeface="Arial"/>
+              </a:defRPr>
+            </a:lvl4pPr>
+            <a:lvl5pPr>
+              <a:defRPr sz="1350" b="1">
+                <a:solidFill>
+                  <a:srgbClr val="0866FF"/>
+                </a:solidFill>
+                <a:latin typeface="Arial"/>
+                <a:ea typeface="Arial"/>
+                <a:cs typeface="Arial"/>
+              </a:defRPr>
+            </a:lvl5pPr>
+            <a:lvl6pPr>
+              <a:defRPr sz="1350" b="1">
+                <a:solidFill>
+                  <a:srgbClr val="0866FF"/>
+                </a:solidFill>
+                <a:latin typeface="Arial"/>
+                <a:ea typeface="Arial"/>
+                <a:cs typeface="Arial"/>
+              </a:defRPr>
+            </a:lvl6pPr>
+            <a:lvl7pPr>
+              <a:defRPr sz="1350" b="1">
+                <a:solidFill>
+                  <a:srgbClr val="0866FF"/>
+                </a:solidFill>
+                <a:latin typeface="Arial"/>
+                <a:ea typeface="Arial"/>
+                <a:cs typeface="Arial"/>
+              </a:defRPr>
+            </a:lvl7pPr>
+            <a:lvl8pPr>
+              <a:defRPr sz="1350" b="1">
+                <a:solidFill>
+                  <a:srgbClr val="0866FF"/>
+                </a:solidFill>
+                <a:latin typeface="Arial"/>
+                <a:ea typeface="Arial"/>
+                <a:cs typeface="Arial"/>
+              </a:defRPr>
+            </a:lvl8pPr>
+            <a:lvl9pPr>
+              <a:defRPr sz="1350" b="1">
+                <a:solidFill>
+                  <a:srgbClr val="0866FF"/>
+                </a:solidFill>
+                <a:latin typeface="Arial"/>
+                <a:ea typeface="Arial"/>
+                <a:cs typeface="Arial"/>
+              </a:defRPr>
+            </a:lvl9pPr>
+          </a:lstStyle>
+          <a:p xmlns:a="http://schemas.openxmlformats.org/drawingml/2006/main">
+            <a:pPr>
+              <a:defRPr sz="1350" b="1">
+                <a:solidFill>
+                  <a:srgbClr val="0866FF"/>
+                </a:solidFill>
+                <a:latin typeface="Arial"/>
+                <a:ea typeface="Arial"/>
+                <a:cs typeface="Arial"/>
+              </a:defRPr>
+            </a:pPr>
+            <a:r>
+              <a:rPr sz="1350" b="1">
+                <a:solidFill>
+                  <a:srgbClr val="0866FF"/>
+                </a:solidFill>
+                <a:latin typeface="Arial"/>
+                <a:ea typeface="Arial"/>
+                <a:cs typeface="Arial"/>
+              </a:rPr>
+              <a:t>ПОЛЬЗА И ГРАНИЦЫ ПРОТОТИПА</a:t>
+            </a:r>
+          </a:p>
+        </p:txBody>
+      </p:sp>
+      <p:sp>
+        <p:nvSpPr>
+          <p:cNvPr id="2" name="Следующая итерация: проверка с новичками">
+            <a:extLst xmlns:a="http://schemas.openxmlformats.org/drawingml/2006/main">
+              <a:ext uri="{FF2B5EF4-FFF2-40B4-BE49-F238E27FC236}">
+                <a16:creationId xmlns:a16="http://schemas.microsoft.com/office/drawing/2014/main" id="{44F9C006-D1D0-4D76-8D10-A242F1B4C6EA}"/>
+              </a:ext>
+            </a:extLst>
+          </p:cNvPr>
+          <p:cNvSpPr>
+            <a:spLocks xmlns:a="http://schemas.openxmlformats.org/drawingml/2006/main" noGrp="1"/>
+          </p:cNvSpPr>
+          <p:nvPr/>
+        </p:nvSpPr>
+        <p:spPr>
+          <a:xfrm xmlns:a="http://schemas.openxmlformats.org/drawingml/2006/main">
+            <a:off x="762000" y="1000125"/>
+            <a:ext cx="10668000" cy="952500"/>
+          </a:xfrm>
+          <a:prstGeom xmlns:a="http://schemas.openxmlformats.org/drawingml/2006/main" prst="rect">
+            <a:avLst/>
+          </a:prstGeom>
+          <a:noFill xmlns:a="http://schemas.openxmlformats.org/drawingml/2006/main"/>
+          <a:ln xmlns:a="http://schemas.openxmlformats.org/drawingml/2006/main" w="0">
+            <a:noFill/>
+          </a:ln>
+        </p:spPr>
+        <p:txBody>
+          <a:bodyPr xmlns:a="http://schemas.openxmlformats.org/drawingml/2006/main" wrap="square" lIns="0" tIns="0" rIns="0" bIns="0" anchor="t"/>
+          <a:lstStyle xmlns:a="http://schemas.openxmlformats.org/drawingml/2006/main">
+            <a:defPPr>
+              <a:defRPr sz="3150" b="1">
+                <a:solidFill>
+                  <a:srgbClr val="202124"/>
+                </a:solidFill>
+                <a:latin typeface="Arial"/>
+                <a:ea typeface="Arial"/>
+                <a:cs typeface="Arial"/>
+              </a:defRPr>
+            </a:defPPr>
+            <a:lvl1pPr>
+              <a:defRPr sz="3150" b="1">
+                <a:solidFill>
+                  <a:srgbClr val="202124"/>
+                </a:solidFill>
+                <a:latin typeface="Arial"/>
+                <a:ea typeface="Arial"/>
+                <a:cs typeface="Arial"/>
+              </a:defRPr>
+            </a:lvl1pPr>
+            <a:lvl2pPr>
+              <a:defRPr sz="3150" b="1">
+                <a:solidFill>
+                  <a:srgbClr val="202124"/>
+                </a:solidFill>
+                <a:latin typeface="Arial"/>
+                <a:ea typeface="Arial"/>
+                <a:cs typeface="Arial"/>
+              </a:defRPr>
+            </a:lvl2pPr>
+            <a:lvl3pPr>
+              <a:defRPr sz="3150" b="1">
+                <a:solidFill>
+                  <a:srgbClr val="202124"/>
+                </a:solidFill>
+                <a:latin typeface="Arial"/>
+                <a:ea typeface="Arial"/>
+                <a:cs typeface="Arial"/>
+              </a:defRPr>
+            </a:lvl3pPr>
+            <a:lvl4pPr>
+              <a:defRPr sz="3150" b="1">
+                <a:solidFill>
+                  <a:srgbClr val="202124"/>
+                </a:solidFill>
+                <a:latin typeface="Arial"/>
+                <a:ea typeface="Arial"/>
+                <a:cs typeface="Arial"/>
+              </a:defRPr>
+            </a:lvl4pPr>
+            <a:lvl5pPr>
+              <a:defRPr sz="3150" b="1">
+                <a:solidFill>
+                  <a:srgbClr val="202124"/>
+                </a:solidFill>
+                <a:latin typeface="Arial"/>
+                <a:ea typeface="Arial"/>
+                <a:cs typeface="Arial"/>
+              </a:defRPr>
+            </a:lvl5pPr>
+            <a:lvl6pPr>
+              <a:defRPr sz="3150" b="1">
+                <a:solidFill>
+                  <a:srgbClr val="202124"/>
+                </a:solidFill>
+                <a:latin typeface="Arial"/>
+                <a:ea typeface="Arial"/>
+                <a:cs typeface="Arial"/>
+              </a:defRPr>
+            </a:lvl6pPr>
+            <a:lvl7pPr>
+              <a:defRPr sz="3150" b="1">
+                <a:solidFill>
+                  <a:srgbClr val="202124"/>
+                </a:solidFill>
+                <a:latin typeface="Arial"/>
+                <a:ea typeface="Arial"/>
+                <a:cs typeface="Arial"/>
+              </a:defRPr>
+            </a:lvl7pPr>
+            <a:lvl8pPr>
+              <a:defRPr sz="3150" b="1">
+                <a:solidFill>
+                  <a:srgbClr val="202124"/>
+                </a:solidFill>
+                <a:latin typeface="Arial"/>
+                <a:ea typeface="Arial"/>
+                <a:cs typeface="Arial"/>
+              </a:defRPr>
+            </a:lvl8pPr>
+            <a:lvl9pPr>
+              <a:defRPr sz="3150" b="1">
+                <a:solidFill>
+                  <a:srgbClr val="202124"/>
+                </a:solidFill>
+                <a:latin typeface="Arial"/>
+                <a:ea typeface="Arial"/>
+                <a:cs typeface="Arial"/>
+              </a:defRPr>
+            </a:lvl9pPr>
+          </a:lstStyle>
+          <a:p xmlns:a="http://schemas.openxmlformats.org/drawingml/2006/main">
+            <a:pPr>
+              <a:defRPr sz="3150" b="1">
+                <a:solidFill>
+                  <a:srgbClr val="202124"/>
+                </a:solidFill>
+                <a:latin typeface="Arial"/>
+                <a:ea typeface="Arial"/>
+                <a:cs typeface="Arial"/>
+              </a:defRPr>
+            </a:pPr>
+            <a:r>
+              <a:rPr sz="3150" b="1">
+                <a:solidFill>
+                  <a:srgbClr val="202124"/>
+                </a:solidFill>
+                <a:latin typeface="Arial"/>
+                <a:ea typeface="Arial"/>
+                <a:cs typeface="Arial"/>
+              </a:rPr>
               <a:t>Следующая итерация: проверка с новичками</a:t>
             </a:r>
           </a:p>
@@ -7000,7 +10808,7 @@
           <p:cNvPr id="3" name="">
             <a:extLst xmlns:a="http://schemas.openxmlformats.org/drawingml/2006/main">
               <a:ext uri="{FF2B5EF4-FFF2-40B4-BE49-F238E27FC236}">
-                <a16:creationId xmlns:a16="http://schemas.microsoft.com/office/drawing/2014/main" id="{0A89EEFD-F27D-42B9-A330-AC4C05F013F5}"/>
+                <a16:creationId xmlns:a16="http://schemas.microsoft.com/office/drawing/2014/main" id="{ADF86373-5906-401C-BBD7-0B48CE43129B}"/>
               </a:ext>
             </a:extLst>
           </p:cNvPr>
@@ -7440,7 +11248,7 @@
           <p:cNvPr id="4" name="Это план проверки. Метрики точности и пользовательской ">
             <a:extLst xmlns:a="http://schemas.openxmlformats.org/drawingml/2006/main">
               <a:ext uri="{FF2B5EF4-FFF2-40B4-BE49-F238E27FC236}">
-                <a16:creationId xmlns:a16="http://schemas.microsoft.com/office/drawing/2014/main" id="{6F34C575-7151-415B-BE01-8D61D02B5E25}"/>
+                <a16:creationId xmlns:a16="http://schemas.microsoft.com/office/drawing/2014/main" id="{E0830641-1F99-4624-8306-B9D9105A2760}"/>
               </a:ext>
             </a:extLst>
           </p:cNvPr>
@@ -7593,10 +11401,10 @@
       </p:sp>
       <p:sp>
         <p:nvSpPr>
-          <p:cNvPr id="5" name="Aimo   /   План и ограничения   /   11 из 13">
+          <p:cNvPr id="5" name="Aimo   /   План и ограничения   /   13 из 15">
             <a:extLst xmlns:a="http://schemas.openxmlformats.org/drawingml/2006/main">
               <a:ext uri="{FF2B5EF4-FFF2-40B4-BE49-F238E27FC236}">
-                <a16:creationId xmlns:a16="http://schemas.microsoft.com/office/drawing/2014/main" id="{6D4C5579-4D4B-472E-A70E-26F5E3EFEA88}"/>
+                <a16:creationId xmlns:a16="http://schemas.microsoft.com/office/drawing/2014/main" id="{5AB5B95B-DA64-47EF-9EBF-8047B12EDF24}"/>
               </a:ext>
             </a:extLst>
           </p:cNvPr>
@@ -7742,7 +11550,7 @@
                 <a:ea typeface="Arial"/>
                 <a:cs typeface="Arial"/>
               </a:rPr>
-              <a:t>Aimo   /   План и ограничения   /   11 из 13</a:t>
+              <a:t>Aimo   /   План и ограничения   /   13 из 15</a:t>
             </a:r>
           </a:p>
         </p:txBody>
@@ -7750,14 +11558,14 @@
     </p:spTree>
     <p:extLst>
       <p:ext uri="{BB962C8B-B14F-4D97-AF65-F5344CB8AC3E}">
-        <p14:creationId xmlns:p14="http://schemas.microsoft.com/office/powerpoint/2010/main" val="524621927"/>
+        <p14:creationId xmlns:p14="http://schemas.microsoft.com/office/powerpoint/2010/main" val="427669286"/>
       </p:ext>
     </p:extLst>
   </p:cSld>
 </p:sld>
 </file>
 
-<file path=ppt/slides/slide12.xml><?xml version="1.0" encoding="utf-8"?>
+<file path=ppt/slides/slide14.xml><?xml version="1.0" encoding="utf-8"?>
 <p:sld xmlns:p="http://schemas.openxmlformats.org/presentationml/2006/main">
   <p:cSld>
     <p:bg>
@@ -7781,7 +11589,7 @@
           <p:cNvPr id="6" name="aimo">
             <a:extLst xmlns:a="http://schemas.openxmlformats.org/drawingml/2006/main">
               <a:ext uri="{FF2B5EF4-FFF2-40B4-BE49-F238E27FC236}">
-                <a16:creationId xmlns:a16="http://schemas.microsoft.com/office/drawing/2014/main" id="{E765BB71-B22A-41A7-B712-B652A69737FD}"/>
+                <a16:creationId xmlns:a16="http://schemas.microsoft.com/office/drawing/2014/main" id="{08CF4BEE-BE15-4569-BAA5-FF93326BB0B8}"/>
               </a:ext>
             </a:extLst>
           </p:cNvPr>
@@ -7937,7 +11745,7 @@
           <p:cNvPr id="2" name="Тренировка начинается&#10;с понятного следующего шага">
             <a:extLst xmlns:a="http://schemas.openxmlformats.org/drawingml/2006/main">
               <a:ext uri="{FF2B5EF4-FFF2-40B4-BE49-F238E27FC236}">
-                <a16:creationId xmlns:a16="http://schemas.microsoft.com/office/drawing/2014/main" id="{7B10740A-888D-4D89-A7C7-A9DDDA8EF96C}"/>
+                <a16:creationId xmlns:a16="http://schemas.microsoft.com/office/drawing/2014/main" id="{80C350E1-2484-4CF1-9F78-4241AFD9B4CD}"/>
               </a:ext>
             </a:extLst>
           </p:cNvPr>
@@ -8116,7 +11924,7 @@
           <p:cNvPr id="3" name="Рабочее приложение">
             <a:extLst xmlns:a="http://schemas.openxmlformats.org/drawingml/2006/main">
               <a:ext uri="{FF2B5EF4-FFF2-40B4-BE49-F238E27FC236}">
-                <a16:creationId xmlns:a16="http://schemas.microsoft.com/office/drawing/2014/main" id="{EE1386D6-4AB8-46A9-9F06-59CAA821F929}"/>
+                <a16:creationId xmlns:a16="http://schemas.microsoft.com/office/drawing/2014/main" id="{93504178-ECA3-466B-AF9E-89404A23F63D}"/>
               </a:ext>
             </a:extLst>
           </p:cNvPr>
@@ -8272,7 +12080,7 @@
           <p:cNvPr id="4" name="https://nomad-dreamteam.github.io/Aimo/">
             <a:extLst xmlns:a="http://schemas.openxmlformats.org/drawingml/2006/main">
               <a:ext uri="{FF2B5EF4-FFF2-40B4-BE49-F238E27FC236}">
-                <a16:creationId xmlns:a16="http://schemas.microsoft.com/office/drawing/2014/main" id="{099BF705-80EE-42DF-A283-58452677EB8D}"/>
+                <a16:creationId xmlns:a16="http://schemas.microsoft.com/office/drawing/2014/main" id="{85046315-8CF9-4EA3-B1CF-CB4B8D5F3EFB}"/>
               </a:ext>
             </a:extLst>
           </p:cNvPr>
@@ -8411,7 +12219,7 @@
             </a:pPr>
             <a:r>
               <a:rPr>
-                <a:hlinkClick xmlns:r="http://schemas.openxmlformats.org/officeDocument/2006/relationships" r:id="Rbc197438798947b5"/>
+                <a:hlinkClick xmlns:r="http://schemas.openxmlformats.org/officeDocument/2006/relationships" r:id="R661ec816c34a4c69"/>
               </a:rPr>
               <a:t>https://nomad-dreamteam.github.io/Aimo/</a:t>
             </a:r>
@@ -8423,7 +12231,7 @@
           <p:cNvPr id="5" name="Исходный код и релиз: github.com/noMad-dreamteam/Aimo">
             <a:extLst xmlns:a="http://schemas.openxmlformats.org/drawingml/2006/main">
               <a:ext uri="{FF2B5EF4-FFF2-40B4-BE49-F238E27FC236}">
-                <a16:creationId xmlns:a16="http://schemas.microsoft.com/office/drawing/2014/main" id="{0F43215F-AD11-486D-B91B-A8F92066783B}"/>
+                <a16:creationId xmlns:a16="http://schemas.microsoft.com/office/drawing/2014/main" id="{25F81016-7664-419D-837B-BA2DFB24AA69}"/>
               </a:ext>
             </a:extLst>
           </p:cNvPr>
@@ -8562,7 +12370,7 @@
             </a:pPr>
             <a:r>
               <a:rPr>
-                <a:hlinkClick xmlns:r="http://schemas.openxmlformats.org/officeDocument/2006/relationships" r:id="R8a27664481694afb"/>
+                <a:hlinkClick xmlns:r="http://schemas.openxmlformats.org/officeDocument/2006/relationships" r:id="Rb1e8c7579f73470f"/>
               </a:rPr>
               <a:t>Исходный код и релиз: github.com/noMad-dreamteam/Aimo</a:t>
             </a:r>
@@ -8572,14 +12380,14 @@
     </p:spTree>
     <p:extLst>
       <p:ext uri="{BB962C8B-B14F-4D97-AF65-F5344CB8AC3E}">
-        <p14:creationId xmlns:p14="http://schemas.microsoft.com/office/powerpoint/2010/main" val="302985049"/>
+        <p14:creationId xmlns:p14="http://schemas.microsoft.com/office/powerpoint/2010/main" val="1020796794"/>
       </p:ext>
     </p:extLst>
   </p:cSld>
 </p:sld>
 </file>
 
-<file path=ppt/slides/slide13.xml><?xml version="1.0" encoding="utf-8"?>
+<file path=ppt/slides/slide15.xml><?xml version="1.0" encoding="utf-8"?>
 <p:sld xmlns:p="http://schemas.openxmlformats.org/presentationml/2006/main">
   <p:cSld>
     <p:bg>
@@ -8603,7 +12411,7 @@
           <p:cNvPr id="5" name="СПРАВОЧНЫЙ СЛАЙД">
             <a:extLst xmlns:a="http://schemas.openxmlformats.org/drawingml/2006/main">
               <a:ext uri="{FF2B5EF4-FFF2-40B4-BE49-F238E27FC236}">
-                <a16:creationId xmlns:a16="http://schemas.microsoft.com/office/drawing/2014/main" id="{E0174BB7-CED7-496D-8F4E-AE88FC507F54}"/>
+                <a16:creationId xmlns:a16="http://schemas.microsoft.com/office/drawing/2014/main" id="{48E8DBA6-671E-4FCA-9A84-1ED82A5B433B}"/>
               </a:ext>
             </a:extLst>
           </p:cNvPr>
@@ -8759,7 +12567,7 @@
           <p:cNvPr id="2" name="Соответствие критериям жюри">
             <a:extLst xmlns:a="http://schemas.openxmlformats.org/drawingml/2006/main">
               <a:ext uri="{FF2B5EF4-FFF2-40B4-BE49-F238E27FC236}">
-                <a16:creationId xmlns:a16="http://schemas.microsoft.com/office/drawing/2014/main" id="{75EB70E6-385A-4945-85B9-3A62031B0AA7}"/>
+                <a16:creationId xmlns:a16="http://schemas.microsoft.com/office/drawing/2014/main" id="{A644A882-69FB-4F41-9EFE-28EEC1844411}"/>
               </a:ext>
             </a:extLst>
           </p:cNvPr>
@@ -8915,7 +12723,7 @@
           <p:cNvPr id="3" name="">
             <a:extLst xmlns:a="http://schemas.openxmlformats.org/drawingml/2006/main">
               <a:ext uri="{FF2B5EF4-FFF2-40B4-BE49-F238E27FC236}">
-                <a16:creationId xmlns:a16="http://schemas.microsoft.com/office/drawing/2014/main" id="{E60F620E-FD5A-4488-999B-CC321D556883}"/>
+                <a16:creationId xmlns:a16="http://schemas.microsoft.com/office/drawing/2014/main" id="{789E27D6-2131-480B-934D-B84499C46661}"/>
               </a:ext>
             </a:extLst>
           </p:cNvPr>
@@ -9278,7 +13086,7 @@
                           <a:ea typeface="Arial"/>
                           <a:cs typeface="Arial"/>
                         </a:rPr>
-                        <a:t>Проблема новичка и план проверки гипотезы (2, 11).</a:t>
+                        <a:t>Проблема новичка и план проверки гипотезы (2, 13).</a:t>
                       </a:r>
                     </a:p>
                   </a:txBody>
@@ -9626,7 +13434,7 @@
                           <a:ea typeface="Arial"/>
                           <a:cs typeface="Arial"/>
                         </a:rPr>
-                        <a:t>Вклад Максима и Нарана, решение при интеграции (8).</a:t>
+                        <a:t>Контракт команды и роли двух участников (8, 9).</a:t>
                       </a:r>
                     </a:p>
                   </a:txBody>
@@ -9742,7 +13550,7 @@
                           <a:ea typeface="Arial"/>
                           <a:cs typeface="Arial"/>
                         </a:rPr>
-                        <a:t>Пайплайн агентов, Context7, проверка людьми (9).</a:t>
+                        <a:t>Стек, агенты, MCP и пайплайн проверки (10, 11).</a:t>
                       </a:r>
                     </a:p>
                   </a:txBody>
@@ -9771,10 +13579,10 @@
       </p:graphicFrame>
       <p:sp>
         <p:nvSpPr>
-          <p:cNvPr id="4" name="Aimo   /   Карта защиты   /   13 из 13">
+          <p:cNvPr id="4" name="Aimo   /   Карта защиты   /   15 из 15">
             <a:extLst xmlns:a="http://schemas.openxmlformats.org/drawingml/2006/main">
               <a:ext uri="{FF2B5EF4-FFF2-40B4-BE49-F238E27FC236}">
-                <a16:creationId xmlns:a16="http://schemas.microsoft.com/office/drawing/2014/main" id="{14B1A43F-95A0-4E74-8907-3B8C6DC7B4D0}"/>
+                <a16:creationId xmlns:a16="http://schemas.microsoft.com/office/drawing/2014/main" id="{F95C4DF0-53B3-4F76-B102-FF63C73C40EC}"/>
               </a:ext>
             </a:extLst>
           </p:cNvPr>
@@ -9920,7 +13728,7 @@
                 <a:ea typeface="Arial"/>
                 <a:cs typeface="Arial"/>
               </a:rPr>
-              <a:t>Aimo   /   Карта защиты   /   13 из 13</a:t>
+              <a:t>Aimo   /   Карта защиты   /   15 из 15</a:t>
             </a:r>
           </a:p>
         </p:txBody>
@@ -9928,7 +13736,7 @@
     </p:spTree>
     <p:extLst>
       <p:ext uri="{BB962C8B-B14F-4D97-AF65-F5344CB8AC3E}">
-        <p14:creationId xmlns:p14="http://schemas.microsoft.com/office/powerpoint/2010/main" val="1892511738"/>
+        <p14:creationId xmlns:p14="http://schemas.microsoft.com/office/powerpoint/2010/main" val="1151392449"/>
       </p:ext>
     </p:extLst>
   </p:cSld>
@@ -9959,7 +13767,7 @@
           <p:cNvPr id="12" name="ПОЛЬЗА 20%">
             <a:extLst xmlns:a="http://schemas.openxmlformats.org/drawingml/2006/main">
               <a:ext uri="{FF2B5EF4-FFF2-40B4-BE49-F238E27FC236}">
-                <a16:creationId xmlns:a16="http://schemas.microsoft.com/office/drawing/2014/main" id="{1424BF64-D942-4487-9211-386D3C0DCC17}"/>
+                <a16:creationId xmlns:a16="http://schemas.microsoft.com/office/drawing/2014/main" id="{92A36051-78A8-4B4E-AA2A-24AB94850D4C}"/>
               </a:ext>
             </a:extLst>
           </p:cNvPr>
@@ -10115,7 +13923,7 @@
           <p:cNvPr id="2" name="Обратная связь для новичка">
             <a:extLst xmlns:a="http://schemas.openxmlformats.org/drawingml/2006/main">
               <a:ext uri="{FF2B5EF4-FFF2-40B4-BE49-F238E27FC236}">
-                <a16:creationId xmlns:a16="http://schemas.microsoft.com/office/drawing/2014/main" id="{47DFEC6C-5B79-4A70-A8AE-9C1A9A548879}"/>
+                <a16:creationId xmlns:a16="http://schemas.microsoft.com/office/drawing/2014/main" id="{F8EBABEE-939B-45FD-A034-30A4DAF86A2F}"/>
               </a:ext>
             </a:extLst>
           </p:cNvPr>
@@ -10271,7 +14079,7 @@
           <p:cNvPr id="3" name="Ситуация">
             <a:extLst xmlns:a="http://schemas.openxmlformats.org/drawingml/2006/main">
               <a:ext uri="{FF2B5EF4-FFF2-40B4-BE49-F238E27FC236}">
-                <a16:creationId xmlns:a16="http://schemas.microsoft.com/office/drawing/2014/main" id="{9964F175-05A3-405C-BA3B-C97DD878E2E0}"/>
+                <a16:creationId xmlns:a16="http://schemas.microsoft.com/office/drawing/2014/main" id="{4D94D058-BA2D-4D04-AB6A-E60EB9084155}"/>
               </a:ext>
             </a:extLst>
           </p:cNvPr>
@@ -10427,7 +14235,7 @@
           <p:cNvPr id="4" name="Человек тренируется дома или во дворе. Рядом нет того, ">
             <a:extLst xmlns:a="http://schemas.openxmlformats.org/drawingml/2006/main">
               <a:ext uri="{FF2B5EF4-FFF2-40B4-BE49-F238E27FC236}">
-                <a16:creationId xmlns:a16="http://schemas.microsoft.com/office/drawing/2014/main" id="{3E6D573A-817C-4024-82B4-63149711E076}"/>
+                <a16:creationId xmlns:a16="http://schemas.microsoft.com/office/drawing/2014/main" id="{FB82B406-3D67-4DD5-94B8-322F58509195}"/>
               </a:ext>
             </a:extLst>
           </p:cNvPr>
@@ -10583,7 +14391,7 @@
           <p:cNvPr id="5" name="Трудность">
             <a:extLst xmlns:a="http://schemas.openxmlformats.org/drawingml/2006/main">
               <a:ext uri="{FF2B5EF4-FFF2-40B4-BE49-F238E27FC236}">
-                <a16:creationId xmlns:a16="http://schemas.microsoft.com/office/drawing/2014/main" id="{E4EAEBC8-E0A0-4E38-B9DA-C460246B767A}"/>
+                <a16:creationId xmlns:a16="http://schemas.microsoft.com/office/drawing/2014/main" id="{E5019800-F155-41B7-8226-4DD288EB6AEA}"/>
               </a:ext>
             </a:extLst>
           </p:cNvPr>
@@ -10739,7 +14547,7 @@
           <p:cNvPr id="6" name="По видеоуроку трудно понять, получилось ли движение и ч">
             <a:extLst xmlns:a="http://schemas.openxmlformats.org/drawingml/2006/main">
               <a:ext uri="{FF2B5EF4-FFF2-40B4-BE49-F238E27FC236}">
-                <a16:creationId xmlns:a16="http://schemas.microsoft.com/office/drawing/2014/main" id="{7E6DDBD8-0BBC-4926-A323-80C15090FA5A}"/>
+                <a16:creationId xmlns:a16="http://schemas.microsoft.com/office/drawing/2014/main" id="{9FF3F2FE-8ED4-41E0-8D96-F7C43B25AAAE}"/>
               </a:ext>
             </a:extLst>
           </p:cNvPr>
@@ -10895,7 +14703,7 @@
           <p:cNvPr id="7" name="Наша помощь">
             <a:extLst xmlns:a="http://schemas.openxmlformats.org/drawingml/2006/main">
               <a:ext uri="{FF2B5EF4-FFF2-40B4-BE49-F238E27FC236}">
-                <a16:creationId xmlns:a16="http://schemas.microsoft.com/office/drawing/2014/main" id="{B62170D5-3D87-4C95-AFD3-17630DC6530E}"/>
+                <a16:creationId xmlns:a16="http://schemas.microsoft.com/office/drawing/2014/main" id="{B8C08906-ADBC-4106-81A0-BDF060EDB061}"/>
               </a:ext>
             </a:extLst>
           </p:cNvPr>
@@ -11051,7 +14859,7 @@
           <p:cNvPr id="8" name="Короткая подсказка во время попытки и понятный план сле">
             <a:extLst xmlns:a="http://schemas.openxmlformats.org/drawingml/2006/main">
               <a:ext uri="{FF2B5EF4-FFF2-40B4-BE49-F238E27FC236}">
-                <a16:creationId xmlns:a16="http://schemas.microsoft.com/office/drawing/2014/main" id="{ABE52530-0041-4C15-9715-F70F9CCD4B45}"/>
+                <a16:creationId xmlns:a16="http://schemas.microsoft.com/office/drawing/2014/main" id="{B0DA40AF-AE0D-4612-A6B1-343206145A86}"/>
               </a:ext>
             </a:extLst>
           </p:cNvPr>
@@ -11207,7 +15015,7 @@
           <p:cNvPr id="9" name="Гипотеза: понятная обратная связь поможет новичку чаще ">
             <a:extLst xmlns:a="http://schemas.openxmlformats.org/drawingml/2006/main">
               <a:ext uri="{FF2B5EF4-FFF2-40B4-BE49-F238E27FC236}">
-                <a16:creationId xmlns:a16="http://schemas.microsoft.com/office/drawing/2014/main" id="{706B58FE-A326-42CF-B189-1531D36518DC}"/>
+                <a16:creationId xmlns:a16="http://schemas.microsoft.com/office/drawing/2014/main" id="{61C3A9E6-4EFF-4FD6-A8CB-80C39D2B52AF}"/>
               </a:ext>
             </a:extLst>
           </p:cNvPr>
@@ -11363,7 +15171,7 @@
           <p:cNvPr id="10" name="Её ещё предстоит проверить с новичками. Эффект обучения">
             <a:extLst xmlns:a="http://schemas.openxmlformats.org/drawingml/2006/main">
               <a:ext uri="{FF2B5EF4-FFF2-40B4-BE49-F238E27FC236}">
-                <a16:creationId xmlns:a16="http://schemas.microsoft.com/office/drawing/2014/main" id="{4C759F63-876B-4B97-B665-1AF0700AF9F7}"/>
+                <a16:creationId xmlns:a16="http://schemas.microsoft.com/office/drawing/2014/main" id="{2C28CFBF-5DE8-4E67-BA42-A6F66C4012F0}"/>
               </a:ext>
             </a:extLst>
           </p:cNvPr>
@@ -11516,10 +15324,10 @@
       </p:sp>
       <p:sp>
         <p:nvSpPr>
-          <p:cNvPr id="11" name="Aimo   /   Проблема и ценность   /   2 из 13">
+          <p:cNvPr id="11" name="Aimo   /   Проблема и ценность   /   2 из 15">
             <a:extLst xmlns:a="http://schemas.openxmlformats.org/drawingml/2006/main">
               <a:ext uri="{FF2B5EF4-FFF2-40B4-BE49-F238E27FC236}">
-                <a16:creationId xmlns:a16="http://schemas.microsoft.com/office/drawing/2014/main" id="{8E3EF86C-0904-484D-9A16-A813F7F60492}"/>
+                <a16:creationId xmlns:a16="http://schemas.microsoft.com/office/drawing/2014/main" id="{32F87955-962C-435C-8910-13F0772002C6}"/>
               </a:ext>
             </a:extLst>
           </p:cNvPr>
@@ -11665,7 +15473,7 @@
                 <a:ea typeface="Arial"/>
                 <a:cs typeface="Arial"/>
               </a:rPr>
-              <a:t>Aimo   /   Проблема и ценность   /   2 из 13</a:t>
+              <a:t>Aimo   /   Проблема и ценность   /   2 из 15</a:t>
             </a:r>
           </a:p>
         </p:txBody>
@@ -11673,7 +15481,7 @@
     </p:spTree>
     <p:extLst>
       <p:ext uri="{BB962C8B-B14F-4D97-AF65-F5344CB8AC3E}">
-        <p14:creationId xmlns:p14="http://schemas.microsoft.com/office/powerpoint/2010/main" val="2059659130"/>
+        <p14:creationId xmlns:p14="http://schemas.microsoft.com/office/powerpoint/2010/main" val="1418573337"/>
       </p:ext>
     </p:extLst>
   </p:cSld>
@@ -11704,7 +15512,7 @@
           <p:cNvPr id="14" name="ОРИГИНАЛЬНОСТЬ 25%">
             <a:extLst xmlns:a="http://schemas.openxmlformats.org/drawingml/2006/main">
               <a:ext uri="{FF2B5EF4-FFF2-40B4-BE49-F238E27FC236}">
-                <a16:creationId xmlns:a16="http://schemas.microsoft.com/office/drawing/2014/main" id="{D02C12DD-B10D-483B-9CF9-6AC4BA4650FC}"/>
+                <a16:creationId xmlns:a16="http://schemas.microsoft.com/office/drawing/2014/main" id="{26C1CBF2-3AF9-42C0-B904-FC5DE1F8F6E6}"/>
               </a:ext>
             </a:extLst>
           </p:cNvPr>
@@ -11860,7 +15668,7 @@
           <p:cNvPr id="2" name="Урок меняется по реальному движению">
             <a:extLst xmlns:a="http://schemas.openxmlformats.org/drawingml/2006/main">
               <a:ext uri="{FF2B5EF4-FFF2-40B4-BE49-F238E27FC236}">
-                <a16:creationId xmlns:a16="http://schemas.microsoft.com/office/drawing/2014/main" id="{6801105E-E209-4E07-815B-F5CA816ED4AD}"/>
+                <a16:creationId xmlns:a16="http://schemas.microsoft.com/office/drawing/2014/main" id="{DE6A1119-3BB1-4DFA-B019-D83A4128F92D}"/>
               </a:ext>
             </a:extLst>
           </p:cNvPr>
@@ -12016,7 +15824,7 @@
           <p:cNvPr id="3" name="01">
             <a:extLst xmlns:a="http://schemas.openxmlformats.org/drawingml/2006/main">
               <a:ext uri="{FF2B5EF4-FFF2-40B4-BE49-F238E27FC236}">
-                <a16:creationId xmlns:a16="http://schemas.microsoft.com/office/drawing/2014/main" id="{163038A8-612F-4CC6-9F34-88D6D444F828}"/>
+                <a16:creationId xmlns:a16="http://schemas.microsoft.com/office/drawing/2014/main" id="{19E91A8B-2846-4DE8-A3F6-BBC57D392913}"/>
               </a:ext>
             </a:extLst>
           </p:cNvPr>
@@ -12172,7 +15980,7 @@
           <p:cNvPr id="4" name="Шаги по наблюдениям">
             <a:extLst xmlns:a="http://schemas.openxmlformats.org/drawingml/2006/main">
               <a:ext uri="{FF2B5EF4-FFF2-40B4-BE49-F238E27FC236}">
-                <a16:creationId xmlns:a16="http://schemas.microsoft.com/office/drawing/2014/main" id="{BABA2AC6-C461-4B37-A9E3-8792CB1CA982}"/>
+                <a16:creationId xmlns:a16="http://schemas.microsoft.com/office/drawing/2014/main" id="{4E2F2A0B-A6F1-4598-B861-AEEF01B4E432}"/>
               </a:ext>
             </a:extLst>
           </p:cNvPr>
@@ -12328,7 +16136,7 @@
           <p:cNvPr id="5" name="Стойка, подъёмы, касания. Урок продолжается, когда выпо">
             <a:extLst xmlns:a="http://schemas.openxmlformats.org/drawingml/2006/main">
               <a:ext uri="{FF2B5EF4-FFF2-40B4-BE49-F238E27FC236}">
-                <a16:creationId xmlns:a16="http://schemas.microsoft.com/office/drawing/2014/main" id="{66C34806-BAA6-44D8-A15A-E1C450A2190C}"/>
+                <a16:creationId xmlns:a16="http://schemas.microsoft.com/office/drawing/2014/main" id="{086E8535-0495-4D08-B1C4-6BEF30D721D7}"/>
               </a:ext>
             </a:extLst>
           </p:cNvPr>
@@ -12484,7 +16292,7 @@
           <p:cNvPr id="6" name="02">
             <a:extLst xmlns:a="http://schemas.openxmlformats.org/drawingml/2006/main">
               <a:ext uri="{FF2B5EF4-FFF2-40B4-BE49-F238E27FC236}">
-                <a16:creationId xmlns:a16="http://schemas.microsoft.com/office/drawing/2014/main" id="{EAA4D970-80C9-4DBB-A8EB-D76D1418627D}"/>
+                <a16:creationId xmlns:a16="http://schemas.microsoft.com/office/drawing/2014/main" id="{F824D16A-3931-4D7E-92FA-73E7FC41E3A5}"/>
               </a:ext>
             </a:extLst>
           </p:cNvPr>
@@ -12640,7 +16448,7 @@
           <p:cNvPr id="7" name="Формат прямого эфира">
             <a:extLst xmlns:a="http://schemas.openxmlformats.org/drawingml/2006/main">
               <a:ext uri="{FF2B5EF4-FFF2-40B4-BE49-F238E27FC236}">
-                <a16:creationId xmlns:a16="http://schemas.microsoft.com/office/drawing/2014/main" id="{A79DF47C-EBCB-4D8F-89BC-3165C8A5E440}"/>
+                <a16:creationId xmlns:a16="http://schemas.microsoft.com/office/drawing/2014/main" id="{41EC3CD2-F47A-4077-B141-B6177955BAD3}"/>
               </a:ext>
             </a:extLst>
           </p:cNvPr>
@@ -12796,7 +16604,7 @@
           <p:cNvPr id="8" name="Одна строка тренера, крупный счётчик и голос. Вопрос мо">
             <a:extLst xmlns:a="http://schemas.openxmlformats.org/drawingml/2006/main">
               <a:ext uri="{FF2B5EF4-FFF2-40B4-BE49-F238E27FC236}">
-                <a16:creationId xmlns:a16="http://schemas.microsoft.com/office/drawing/2014/main" id="{BC094A28-D093-4265-8C4E-574012CF652C}"/>
+                <a16:creationId xmlns:a16="http://schemas.microsoft.com/office/drawing/2014/main" id="{4D556714-190A-48AB-BBF0-92C62C621B55}"/>
               </a:ext>
             </a:extLst>
           </p:cNvPr>
@@ -12952,7 +16760,7 @@
           <p:cNvPr id="9" name="03">
             <a:extLst xmlns:a="http://schemas.openxmlformats.org/drawingml/2006/main">
               <a:ext uri="{FF2B5EF4-FFF2-40B4-BE49-F238E27FC236}">
-                <a16:creationId xmlns:a16="http://schemas.microsoft.com/office/drawing/2014/main" id="{8B8CDB16-AFD0-495B-B03A-3EC0AD0ABA15}"/>
+                <a16:creationId xmlns:a16="http://schemas.microsoft.com/office/drawing/2014/main" id="{2C7A4B6F-21BC-4CFC-891C-07F2DAE5E88B}"/>
               </a:ext>
             </a:extLst>
           </p:cNvPr>
@@ -13108,7 +16916,7 @@
           <p:cNvPr id="10" name="Проверяемые факты">
             <a:extLst xmlns:a="http://schemas.openxmlformats.org/drawingml/2006/main">
               <a:ext uri="{FF2B5EF4-FFF2-40B4-BE49-F238E27FC236}">
-                <a16:creationId xmlns:a16="http://schemas.microsoft.com/office/drawing/2014/main" id="{A8B063BC-B247-4ADC-99C4-6EA32E066B4C}"/>
+                <a16:creationId xmlns:a16="http://schemas.microsoft.com/office/drawing/2014/main" id="{DCD2CE3B-5B22-40B1-856F-ADDD1CEB7082}"/>
               </a:ext>
             </a:extLst>
           </p:cNvPr>
@@ -13264,7 +17072,7 @@
           <p:cNvPr id="11" name="Счёт дают правила движения. Языковая модель получает св">
             <a:extLst xmlns:a="http://schemas.openxmlformats.org/drawingml/2006/main">
               <a:ext uri="{FF2B5EF4-FFF2-40B4-BE49-F238E27FC236}">
-                <a16:creationId xmlns:a16="http://schemas.microsoft.com/office/drawing/2014/main" id="{2E96F2DE-0E52-483C-9A18-3532988565DD}"/>
+                <a16:creationId xmlns:a16="http://schemas.microsoft.com/office/drawing/2014/main" id="{E00647C4-3BDB-43C2-8C1E-A8848E7DDCCA}"/>
               </a:ext>
             </a:extLst>
           </p:cNvPr>
@@ -13420,7 +17228,7 @@
           <p:cNvPr id="12" name="Особенность Aimo: сценарий обучения связывает зрение, у">
             <a:extLst xmlns:a="http://schemas.openxmlformats.org/drawingml/2006/main">
               <a:ext uri="{FF2B5EF4-FFF2-40B4-BE49-F238E27FC236}">
-                <a16:creationId xmlns:a16="http://schemas.microsoft.com/office/drawing/2014/main" id="{DC76D76C-D8E7-4071-9ED7-7CCFD6AF275C}"/>
+                <a16:creationId xmlns:a16="http://schemas.microsoft.com/office/drawing/2014/main" id="{40444478-5083-4E36-B109-AF40546A8C7A}"/>
               </a:ext>
             </a:extLst>
           </p:cNvPr>
@@ -13573,10 +17381,10 @@
       </p:sp>
       <p:sp>
         <p:nvSpPr>
-          <p:cNvPr id="13" name="Aimo   /   Отличие решения   /   3 из 13">
+          <p:cNvPr id="13" name="Aimo   /   Отличие решения   /   3 из 15">
             <a:extLst xmlns:a="http://schemas.openxmlformats.org/drawingml/2006/main">
               <a:ext uri="{FF2B5EF4-FFF2-40B4-BE49-F238E27FC236}">
-                <a16:creationId xmlns:a16="http://schemas.microsoft.com/office/drawing/2014/main" id="{38678B37-3F65-446E-B83A-5DBBD0FC856E}"/>
+                <a16:creationId xmlns:a16="http://schemas.microsoft.com/office/drawing/2014/main" id="{9026BE0D-372A-497A-923A-D95B9DE17A6E}"/>
               </a:ext>
             </a:extLst>
           </p:cNvPr>
@@ -13722,7 +17530,7 @@
                 <a:ea typeface="Arial"/>
                 <a:cs typeface="Arial"/>
               </a:rPr>
-              <a:t>Aimo   /   Отличие решения   /   3 из 13</a:t>
+              <a:t>Aimo   /   Отличие решения   /   3 из 15</a:t>
             </a:r>
           </a:p>
         </p:txBody>
@@ -13730,7 +17538,7 @@
     </p:spTree>
     <p:extLst>
       <p:ext uri="{BB962C8B-B14F-4D97-AF65-F5344CB8AC3E}">
-        <p14:creationId xmlns:p14="http://schemas.microsoft.com/office/powerpoint/2010/main" val="1205473563"/>
+        <p14:creationId xmlns:p14="http://schemas.microsoft.com/office/powerpoint/2010/main" val="1978151451"/>
       </p:ext>
     </p:extLst>
   </p:cSld>
@@ -13761,7 +17569,7 @@
           <p:cNvPr id="10" name="КАЧЕСТВО ИСПОЛНЕНИЯ 15%">
             <a:extLst xmlns:a="http://schemas.openxmlformats.org/drawingml/2006/main">
               <a:ext uri="{FF2B5EF4-FFF2-40B4-BE49-F238E27FC236}">
-                <a16:creationId xmlns:a16="http://schemas.microsoft.com/office/drawing/2014/main" id="{B1908BDF-C729-42B2-8306-A96F1AAD8512}"/>
+                <a16:creationId xmlns:a16="http://schemas.microsoft.com/office/drawing/2014/main" id="{517DFB21-3C9E-48C5-A75D-8B7378D47E1B}"/>
               </a:ext>
             </a:extLst>
           </p:cNvPr>
@@ -13917,7 +17725,7 @@
           <p:cNvPr id="2" name="Как выглядит приложение">
             <a:extLst xmlns:a="http://schemas.openxmlformats.org/drawingml/2006/main">
               <a:ext uri="{FF2B5EF4-FFF2-40B4-BE49-F238E27FC236}">
-                <a16:creationId xmlns:a16="http://schemas.microsoft.com/office/drawing/2014/main" id="{98078A8A-6692-49FF-960B-F1C0C1EA3267}"/>
+                <a16:creationId xmlns:a16="http://schemas.microsoft.com/office/drawing/2014/main" id="{220786E1-2DBE-407C-ADA9-8839450C3E83}"/>
               </a:ext>
             </a:extLst>
           </p:cNvPr>
@@ -14073,7 +17881,7 @@
           <p:cNvPr id="3" name="">
             <a:extLst xmlns:a="http://schemas.openxmlformats.org/drawingml/2006/main">
               <a:ext uri="{FF2B5EF4-FFF2-40B4-BE49-F238E27FC236}">
-                <a16:creationId xmlns:a16="http://schemas.microsoft.com/office/drawing/2014/main" id="{C2B48E34-7091-4559-A14D-A7AEC073A5AC}"/>
+                <a16:creationId xmlns:a16="http://schemas.microsoft.com/office/drawing/2014/main" id="{7FCE6DF9-C458-41C9-8AE9-82E33033B0FF}"/>
               </a:ext>
             </a:extLst>
           </p:cNvPr>
@@ -14083,7 +17891,7 @@
           <p:nvPr/>
         </p:nvPicPr>
         <p:blipFill>
-          <a:blip xmlns:r="http://schemas.openxmlformats.org/officeDocument/2006/relationships" xmlns:a="http://schemas.openxmlformats.org/drawingml/2006/main" r:embed="R621ab8d885e24ec7"/>
+          <a:blip xmlns:r="http://schemas.openxmlformats.org/officeDocument/2006/relationships" xmlns:a="http://schemas.openxmlformats.org/drawingml/2006/main" r:embed="Rad5aa41e50134335"/>
           <a:stretch xmlns:a="http://schemas.openxmlformats.org/drawingml/2006/main"/>
         </p:blipFill>
         <p:spPr>
@@ -14101,7 +17909,7 @@
           <p:cNvPr id="4" name="Цель и маршрут">
             <a:extLst xmlns:a="http://schemas.openxmlformats.org/drawingml/2006/main">
               <a:ext uri="{FF2B5EF4-FFF2-40B4-BE49-F238E27FC236}">
-                <a16:creationId xmlns:a16="http://schemas.microsoft.com/office/drawing/2014/main" id="{5FE7CB21-7AC9-48E0-B6D6-8797C805278A}"/>
+                <a16:creationId xmlns:a16="http://schemas.microsoft.com/office/drawing/2014/main" id="{28B51443-BF5D-4A73-A898-D7B20FAE5A64}"/>
               </a:ext>
             </a:extLst>
           </p:cNvPr>
@@ -14257,7 +18065,7 @@
           <p:cNvPr id="5" name="">
             <a:extLst xmlns:a="http://schemas.openxmlformats.org/drawingml/2006/main">
               <a:ext uri="{FF2B5EF4-FFF2-40B4-BE49-F238E27FC236}">
-                <a16:creationId xmlns:a16="http://schemas.microsoft.com/office/drawing/2014/main" id="{D0AFC407-CAD4-4CA8-9D6A-86E0F4969E10}"/>
+                <a16:creationId xmlns:a16="http://schemas.microsoft.com/office/drawing/2014/main" id="{99ED52F4-3873-4BF6-BDB6-D3E94CF5BE3D}"/>
               </a:ext>
             </a:extLst>
           </p:cNvPr>
@@ -14267,7 +18075,7 @@
           <p:nvPr/>
         </p:nvPicPr>
         <p:blipFill>
-          <a:blip xmlns:r="http://schemas.openxmlformats.org/officeDocument/2006/relationships" xmlns:a="http://schemas.openxmlformats.org/drawingml/2006/main" r:embed="R5355480619fb4b8f"/>
+          <a:blip xmlns:r="http://schemas.openxmlformats.org/officeDocument/2006/relationships" xmlns:a="http://schemas.openxmlformats.org/drawingml/2006/main" r:embed="R41df6e027bc74535"/>
           <a:stretch xmlns:a="http://schemas.openxmlformats.org/drawingml/2006/main"/>
         </p:blipFill>
         <p:spPr>
@@ -14285,7 +18093,7 @@
           <p:cNvPr id="6" name="Восемь навыков">
             <a:extLst xmlns:a="http://schemas.openxmlformats.org/drawingml/2006/main">
               <a:ext uri="{FF2B5EF4-FFF2-40B4-BE49-F238E27FC236}">
-                <a16:creationId xmlns:a16="http://schemas.microsoft.com/office/drawing/2014/main" id="{2B5ADCA8-3FDF-48BC-8FDF-71E730B29EE7}"/>
+                <a16:creationId xmlns:a16="http://schemas.microsoft.com/office/drawing/2014/main" id="{EAA9049E-1B32-4B72-916D-FE00DA145906}"/>
               </a:ext>
             </a:extLst>
           </p:cNvPr>
@@ -14441,7 +18249,7 @@
           <p:cNvPr id="7" name="">
             <a:extLst xmlns:a="http://schemas.openxmlformats.org/drawingml/2006/main">
               <a:ext uri="{FF2B5EF4-FFF2-40B4-BE49-F238E27FC236}">
-                <a16:creationId xmlns:a16="http://schemas.microsoft.com/office/drawing/2014/main" id="{6347AA2A-C4DB-4B60-A6E0-95B6F1A9FD94}"/>
+                <a16:creationId xmlns:a16="http://schemas.microsoft.com/office/drawing/2014/main" id="{4027D92C-923A-4790-A3BC-CEDF4EE7B0EB}"/>
               </a:ext>
             </a:extLst>
           </p:cNvPr>
@@ -14451,7 +18259,7 @@
           <p:nvPr/>
         </p:nvPicPr>
         <p:blipFill>
-          <a:blip xmlns:r="http://schemas.openxmlformats.org/officeDocument/2006/relationships" xmlns:a="http://schemas.openxmlformats.org/drawingml/2006/main" r:embed="R4aa43459a9534b5f"/>
+          <a:blip xmlns:r="http://schemas.openxmlformats.org/officeDocument/2006/relationships" xmlns:a="http://schemas.openxmlformats.org/drawingml/2006/main" r:embed="R6e2db235dd2b4275"/>
           <a:stretch xmlns:a="http://schemas.openxmlformats.org/drawingml/2006/main"/>
         </p:blipFill>
         <p:spPr>
@@ -14469,7 +18277,7 @@
           <p:cNvPr id="8" name="Голос и настройки">
             <a:extLst xmlns:a="http://schemas.openxmlformats.org/drawingml/2006/main">
               <a:ext uri="{FF2B5EF4-FFF2-40B4-BE49-F238E27FC236}">
-                <a16:creationId xmlns:a16="http://schemas.microsoft.com/office/drawing/2014/main" id="{9300F0D1-B0B9-4F30-B270-7395A8AB9391}"/>
+                <a16:creationId xmlns:a16="http://schemas.microsoft.com/office/drawing/2014/main" id="{A596C8A8-15F6-4C67-9690-DB3C462C371B}"/>
               </a:ext>
             </a:extLst>
           </p:cNvPr>
@@ -14622,10 +18430,10 @@
       </p:sp>
       <p:sp>
         <p:nvSpPr>
-          <p:cNvPr id="9" name="Aimo   /   Экраны приложения   /   4 из 13">
+          <p:cNvPr id="9" name="Aimo   /   Экраны приложения   /   4 из 15">
             <a:extLst xmlns:a="http://schemas.openxmlformats.org/drawingml/2006/main">
               <a:ext uri="{FF2B5EF4-FFF2-40B4-BE49-F238E27FC236}">
-                <a16:creationId xmlns:a16="http://schemas.microsoft.com/office/drawing/2014/main" id="{5950F422-CCB3-4190-B087-D942B799FE13}"/>
+                <a16:creationId xmlns:a16="http://schemas.microsoft.com/office/drawing/2014/main" id="{D9DCDB3A-A43D-4A1F-A0D9-B918B2C1FF34}"/>
               </a:ext>
             </a:extLst>
           </p:cNvPr>
@@ -14771,7 +18579,7 @@
                 <a:ea typeface="Arial"/>
                 <a:cs typeface="Arial"/>
               </a:rPr>
-              <a:t>Aimo   /   Экраны приложения   /   4 из 13</a:t>
+              <a:t>Aimo   /   Экраны приложения   /   4 из 15</a:t>
             </a:r>
           </a:p>
         </p:txBody>
@@ -14779,7 +18587,7 @@
     </p:spTree>
     <p:extLst>
       <p:ext uri="{BB962C8B-B14F-4D97-AF65-F5344CB8AC3E}">
-        <p14:creationId xmlns:p14="http://schemas.microsoft.com/office/powerpoint/2010/main" val="540689722"/>
+        <p14:creationId xmlns:p14="http://schemas.microsoft.com/office/powerpoint/2010/main" val="565274113"/>
       </p:ext>
     </p:extLst>
   </p:cSld>
@@ -14810,7 +18618,7 @@
           <p:cNvPr id="18" name="РАБОТОСПОСОБНОСТЬ 20%">
             <a:extLst xmlns:a="http://schemas.openxmlformats.org/drawingml/2006/main">
               <a:ext uri="{FF2B5EF4-FFF2-40B4-BE49-F238E27FC236}">
-                <a16:creationId xmlns:a16="http://schemas.microsoft.com/office/drawing/2014/main" id="{407AC961-4EC4-4A8A-B061-8C719D0EC91E}"/>
+                <a16:creationId xmlns:a16="http://schemas.microsoft.com/office/drawing/2014/main" id="{B8728F94-A2BF-45BA-BBF4-AF20DCD29C96}"/>
               </a:ext>
             </a:extLst>
           </p:cNvPr>
@@ -14966,7 +18774,7 @@
           <p:cNvPr id="2" name="Основной сценарий за одну минуту">
             <a:extLst xmlns:a="http://schemas.openxmlformats.org/drawingml/2006/main">
               <a:ext uri="{FF2B5EF4-FFF2-40B4-BE49-F238E27FC236}">
-                <a16:creationId xmlns:a16="http://schemas.microsoft.com/office/drawing/2014/main" id="{4C43F045-0C7D-4216-97B1-29D644EAD612}"/>
+                <a16:creationId xmlns:a16="http://schemas.microsoft.com/office/drawing/2014/main" id="{1D6E7DA0-7178-48F6-BB03-F2360C02E6C8}"/>
               </a:ext>
             </a:extLst>
           </p:cNvPr>
@@ -15122,7 +18930,7 @@
           <p:cNvPr id="3" name="">
             <a:extLst xmlns:a="http://schemas.openxmlformats.org/drawingml/2006/main">
               <a:ext uri="{FF2B5EF4-FFF2-40B4-BE49-F238E27FC236}">
-                <a16:creationId xmlns:a16="http://schemas.microsoft.com/office/drawing/2014/main" id="{E01ADD74-C6D1-4125-BAD6-C557479C38C7}"/>
+                <a16:creationId xmlns:a16="http://schemas.microsoft.com/office/drawing/2014/main" id="{64E8050A-5EDF-4427-AC67-8419D3413025}"/>
               </a:ext>
             </a:extLst>
           </p:cNvPr>
@@ -15132,7 +18940,7 @@
           <p:nvPr/>
         </p:nvPicPr>
         <p:blipFill>
-          <a:blip xmlns:r="http://schemas.openxmlformats.org/officeDocument/2006/relationships" xmlns:a="http://schemas.openxmlformats.org/drawingml/2006/main" r:embed="R769f66882c5a4b0d"/>
+          <a:blip xmlns:r="http://schemas.openxmlformats.org/officeDocument/2006/relationships" xmlns:a="http://schemas.openxmlformats.org/drawingml/2006/main" r:embed="Ra18cc65c763d49a3"/>
           <a:stretch xmlns:a="http://schemas.openxmlformats.org/drawingml/2006/main"/>
         </p:blipFill>
         <p:spPr>
@@ -15150,7 +18958,7 @@
           <p:cNvPr id="4" name="1">
             <a:extLst xmlns:a="http://schemas.openxmlformats.org/drawingml/2006/main">
               <a:ext uri="{FF2B5EF4-FFF2-40B4-BE49-F238E27FC236}">
-                <a16:creationId xmlns:a16="http://schemas.microsoft.com/office/drawing/2014/main" id="{E5156F54-9859-4AF2-BADA-3FD2F49F7BF9}"/>
+                <a16:creationId xmlns:a16="http://schemas.microsoft.com/office/drawing/2014/main" id="{A6BFFDCB-919D-4514-8829-D651C010CB0C}"/>
               </a:ext>
             </a:extLst>
           </p:cNvPr>
@@ -15306,7 +19114,7 @@
           <p:cNvPr id="5" name="Цель в чате">
             <a:extLst xmlns:a="http://schemas.openxmlformats.org/drawingml/2006/main">
               <a:ext uri="{FF2B5EF4-FFF2-40B4-BE49-F238E27FC236}">
-                <a16:creationId xmlns:a16="http://schemas.microsoft.com/office/drawing/2014/main" id="{96CD9BB3-5563-4F48-8BB8-EA5B9EAE371C}"/>
+                <a16:creationId xmlns:a16="http://schemas.microsoft.com/office/drawing/2014/main" id="{3112A3CA-E84C-40F3-8307-487B63FD200B}"/>
               </a:ext>
             </a:extLst>
           </p:cNvPr>
@@ -15462,7 +19270,7 @@
           <p:cNvPr id="6" name="«Хочу укрепить ноги» даёт маршрут занятия.">
             <a:extLst xmlns:a="http://schemas.openxmlformats.org/drawingml/2006/main">
               <a:ext uri="{FF2B5EF4-FFF2-40B4-BE49-F238E27FC236}">
-                <a16:creationId xmlns:a16="http://schemas.microsoft.com/office/drawing/2014/main" id="{9922AC02-07B0-4F18-BFAB-E3E1C9A15D40}"/>
+                <a16:creationId xmlns:a16="http://schemas.microsoft.com/office/drawing/2014/main" id="{DF6D8CCA-E3A6-4F72-997D-6635A232CCB2}"/>
               </a:ext>
             </a:extLst>
           </p:cNvPr>
@@ -15618,7 +19426,7 @@
           <p:cNvPr id="7" name="2">
             <a:extLst xmlns:a="http://schemas.openxmlformats.org/drawingml/2006/main">
               <a:ext uri="{FF2B5EF4-FFF2-40B4-BE49-F238E27FC236}">
-                <a16:creationId xmlns:a16="http://schemas.microsoft.com/office/drawing/2014/main" id="{919A919C-28F3-41E1-BFF0-44916055801E}"/>
+                <a16:creationId xmlns:a16="http://schemas.microsoft.com/office/drawing/2014/main" id="{B7A8C743-A562-425E-A4F4-302797BFBE18}"/>
               </a:ext>
             </a:extLst>
           </p:cNvPr>
@@ -15774,7 +19582,7 @@
           <p:cNvPr id="8" name="Выбор навыка">
             <a:extLst xmlns:a="http://schemas.openxmlformats.org/drawingml/2006/main">
               <a:ext uri="{FF2B5EF4-FFF2-40B4-BE49-F238E27FC236}">
-                <a16:creationId xmlns:a16="http://schemas.microsoft.com/office/drawing/2014/main" id="{364DC1B7-D939-42CF-AADA-38F592762011}"/>
+                <a16:creationId xmlns:a16="http://schemas.microsoft.com/office/drawing/2014/main" id="{46B451DF-2D3A-41DD-A413-AEE156E20CDE}"/>
               </a:ext>
             </a:extLst>
           </p:cNvPr>
@@ -15930,7 +19738,7 @@
           <p:cNvPr id="9" name="Открываем шаги урока и подсказку по ракурсу.">
             <a:extLst xmlns:a="http://schemas.openxmlformats.org/drawingml/2006/main">
               <a:ext uri="{FF2B5EF4-FFF2-40B4-BE49-F238E27FC236}">
-                <a16:creationId xmlns:a16="http://schemas.microsoft.com/office/drawing/2014/main" id="{DF72B14D-60EC-44C3-B043-B41EDF8DB8E8}"/>
+                <a16:creationId xmlns:a16="http://schemas.microsoft.com/office/drawing/2014/main" id="{9191C8D5-BB4E-4100-942F-4127E92A8132}"/>
               </a:ext>
             </a:extLst>
           </p:cNvPr>
@@ -16086,7 +19894,7 @@
           <p:cNvPr id="10" name="3">
             <a:extLst xmlns:a="http://schemas.openxmlformats.org/drawingml/2006/main">
               <a:ext uri="{FF2B5EF4-FFF2-40B4-BE49-F238E27FC236}">
-                <a16:creationId xmlns:a16="http://schemas.microsoft.com/office/drawing/2014/main" id="{467CE055-D235-4750-BE15-C1B51D4D5C7A}"/>
+                <a16:creationId xmlns:a16="http://schemas.microsoft.com/office/drawing/2014/main" id="{1A5E0A66-690C-41C3-9352-2CA25FC99CF6}"/>
               </a:ext>
             </a:extLst>
           </p:cNvPr>
@@ -16242,7 +20050,7 @@
           <p:cNvPr id="11" name="Эфир с камерой">
             <a:extLst xmlns:a="http://schemas.openxmlformats.org/drawingml/2006/main">
               <a:ext uri="{FF2B5EF4-FFF2-40B4-BE49-F238E27FC236}">
-                <a16:creationId xmlns:a16="http://schemas.microsoft.com/office/drawing/2014/main" id="{8CEA7C80-9E13-4071-95D1-B517192E1AED}"/>
+                <a16:creationId xmlns:a16="http://schemas.microsoft.com/office/drawing/2014/main" id="{20687C54-2BBF-4A61-B040-11B3A7E25ACD}"/>
               </a:ext>
             </a:extLst>
           </p:cNvPr>
@@ -16398,7 +20206,7 @@
           <p:cNvPr id="12" name="Выполняем движение, видим счёт и подсказку.">
             <a:extLst xmlns:a="http://schemas.openxmlformats.org/drawingml/2006/main">
               <a:ext uri="{FF2B5EF4-FFF2-40B4-BE49-F238E27FC236}">
-                <a16:creationId xmlns:a16="http://schemas.microsoft.com/office/drawing/2014/main" id="{00196725-F02F-48B3-B6DB-AC272A4E3B5F}"/>
+                <a16:creationId xmlns:a16="http://schemas.microsoft.com/office/drawing/2014/main" id="{239EB386-B53C-4F91-AEE4-D0E179CF5D69}"/>
               </a:ext>
             </a:extLst>
           </p:cNvPr>
@@ -16554,7 +20362,7 @@
           <p:cNvPr id="13" name="4">
             <a:extLst xmlns:a="http://schemas.openxmlformats.org/drawingml/2006/main">
               <a:ext uri="{FF2B5EF4-FFF2-40B4-BE49-F238E27FC236}">
-                <a16:creationId xmlns:a16="http://schemas.microsoft.com/office/drawing/2014/main" id="{FCA6FEDA-4B10-477C-9FA6-6667071E12B0}"/>
+                <a16:creationId xmlns:a16="http://schemas.microsoft.com/office/drawing/2014/main" id="{ABE7914C-5571-40FE-9F9A-6199601E2784}"/>
               </a:ext>
             </a:extLst>
           </p:cNvPr>
@@ -16710,7 +20518,7 @@
           <p:cNvPr id="14" name="Завершение">
             <a:extLst xmlns:a="http://schemas.openxmlformats.org/drawingml/2006/main">
               <a:ext uri="{FF2B5EF4-FFF2-40B4-BE49-F238E27FC236}">
-                <a16:creationId xmlns:a16="http://schemas.microsoft.com/office/drawing/2014/main" id="{295383EA-48C5-43CD-85E6-0C0BBF7BB21B}"/>
+                <a16:creationId xmlns:a16="http://schemas.microsoft.com/office/drawing/2014/main" id="{F7635F7B-682C-4909-98E6-C1F4431134CC}"/>
               </a:ext>
             </a:extLst>
           </p:cNvPr>
@@ -16866,7 +20674,7 @@
           <p:cNvPr id="15" name="Итог появляется в чате и локальной истории.">
             <a:extLst xmlns:a="http://schemas.openxmlformats.org/drawingml/2006/main">
               <a:ext uri="{FF2B5EF4-FFF2-40B4-BE49-F238E27FC236}">
-                <a16:creationId xmlns:a16="http://schemas.microsoft.com/office/drawing/2014/main" id="{4EC383E5-0875-4B9D-BF7F-B4A64B2FE370}"/>
+                <a16:creationId xmlns:a16="http://schemas.microsoft.com/office/drawing/2014/main" id="{9BE4DD2C-5AA9-452D-805E-A2C16A949A2C}"/>
               </a:ext>
             </a:extLst>
           </p:cNvPr>
@@ -17022,7 +20830,7 @@
           <p:cNvPr id="16" name="Резерв на сцене: локальный видеофайл или явно обозначен">
             <a:extLst xmlns:a="http://schemas.openxmlformats.org/drawingml/2006/main">
               <a:ext uri="{FF2B5EF4-FFF2-40B4-BE49-F238E27FC236}">
-                <a16:creationId xmlns:a16="http://schemas.microsoft.com/office/drawing/2014/main" id="{45B5D91D-0F9F-46D1-8ADE-815FDA9A9645}"/>
+                <a16:creationId xmlns:a16="http://schemas.microsoft.com/office/drawing/2014/main" id="{3FDF5597-2062-4968-82E1-28D6CBD3AC13}"/>
               </a:ext>
             </a:extLst>
           </p:cNvPr>
@@ -17175,10 +20983,10 @@
       </p:sp>
       <p:sp>
         <p:nvSpPr>
-          <p:cNvPr id="17" name="Aimo   /   Показ продукта   /   5 из 13">
+          <p:cNvPr id="17" name="Aimo   /   Показ продукта   /   5 из 15">
             <a:extLst xmlns:a="http://schemas.openxmlformats.org/drawingml/2006/main">
               <a:ext uri="{FF2B5EF4-FFF2-40B4-BE49-F238E27FC236}">
-                <a16:creationId xmlns:a16="http://schemas.microsoft.com/office/drawing/2014/main" id="{84FA0263-F95F-4E41-B428-F9951439BE86}"/>
+                <a16:creationId xmlns:a16="http://schemas.microsoft.com/office/drawing/2014/main" id="{79E72EFD-40E9-4019-83FE-C6AB974416FE}"/>
               </a:ext>
             </a:extLst>
           </p:cNvPr>
@@ -17324,7 +21132,7 @@
                 <a:ea typeface="Arial"/>
                 <a:cs typeface="Arial"/>
               </a:rPr>
-              <a:t>Aimo   /   Показ продукта   /   5 из 13</a:t>
+              <a:t>Aimo   /   Показ продукта   /   5 из 15</a:t>
             </a:r>
           </a:p>
         </p:txBody>
@@ -17332,7 +21140,7 @@
     </p:spTree>
     <p:extLst>
       <p:ext uri="{BB962C8B-B14F-4D97-AF65-F5344CB8AC3E}">
-        <p14:creationId xmlns:p14="http://schemas.microsoft.com/office/powerpoint/2010/main" val="922575521"/>
+        <p14:creationId xmlns:p14="http://schemas.microsoft.com/office/powerpoint/2010/main" val="1645484907"/>
       </p:ext>
     </p:extLst>
   </p:cSld>
@@ -17363,7 +21171,7 @@
           <p:cNvPr id="12" name="ИИ В ПРОДУКТЕ">
             <a:extLst xmlns:a="http://schemas.openxmlformats.org/drawingml/2006/main">
               <a:ext uri="{FF2B5EF4-FFF2-40B4-BE49-F238E27FC236}">
-                <a16:creationId xmlns:a16="http://schemas.microsoft.com/office/drawing/2014/main" id="{F5870CBD-0C77-4DC0-9CE9-6E3E83A6EFB2}"/>
+                <a16:creationId xmlns:a16="http://schemas.microsoft.com/office/drawing/2014/main" id="{5D636C71-14F3-4827-ADE1-BD2482926138}"/>
               </a:ext>
             </a:extLst>
           </p:cNvPr>
@@ -17519,7 +21327,7 @@
           <p:cNvPr id="2" name="Три уровня анализа на устройстве">
             <a:extLst xmlns:a="http://schemas.openxmlformats.org/drawingml/2006/main">
               <a:ext uri="{FF2B5EF4-FFF2-40B4-BE49-F238E27FC236}">
-                <a16:creationId xmlns:a16="http://schemas.microsoft.com/office/drawing/2014/main" id="{750D108E-64AF-4707-8ED0-33910DA012B1}"/>
+                <a16:creationId xmlns:a16="http://schemas.microsoft.com/office/drawing/2014/main" id="{75CB1729-75B3-42C8-A64C-9A10934BE1FC}"/>
               </a:ext>
             </a:extLst>
           </p:cNvPr>
@@ -17675,7 +21483,7 @@
           <p:cNvPr id="3" name="Зрение">
             <a:extLst xmlns:a="http://schemas.openxmlformats.org/drawingml/2006/main">
               <a:ext uri="{FF2B5EF4-FFF2-40B4-BE49-F238E27FC236}">
-                <a16:creationId xmlns:a16="http://schemas.microsoft.com/office/drawing/2014/main" id="{25B38DA1-2A82-4C03-934D-91F7424D9E96}"/>
+                <a16:creationId xmlns:a16="http://schemas.microsoft.com/office/drawing/2014/main" id="{A37C7944-F40F-4138-9346-BA90715E6F4D}"/>
               </a:ext>
             </a:extLst>
           </p:cNvPr>
@@ -17831,7 +21639,7 @@
           <p:cNvPr id="4" name="MediaPipe находит позу и предметы. Для мяча учитывается">
             <a:extLst xmlns:a="http://schemas.openxmlformats.org/drawingml/2006/main">
               <a:ext uri="{FF2B5EF4-FFF2-40B4-BE49-F238E27FC236}">
-                <a16:creationId xmlns:a16="http://schemas.microsoft.com/office/drawing/2014/main" id="{B9F3825D-0DC1-40AF-9AF1-2093083BDA01}"/>
+                <a16:creationId xmlns:a16="http://schemas.microsoft.com/office/drawing/2014/main" id="{54E6006F-66BA-4FBC-97FC-2FBFB3FAD8FF}"/>
               </a:ext>
             </a:extLst>
           </p:cNvPr>
@@ -17987,7 +21795,7 @@
           <p:cNvPr id="5" name="Правила движения">
             <a:extLst xmlns:a="http://schemas.openxmlformats.org/drawingml/2006/main">
               <a:ext uri="{FF2B5EF4-FFF2-40B4-BE49-F238E27FC236}">
-                <a16:creationId xmlns:a16="http://schemas.microsoft.com/office/drawing/2014/main" id="{EC13A784-E6A3-4F90-9E55-34F7C33DA15A}"/>
+                <a16:creationId xmlns:a16="http://schemas.microsoft.com/office/drawing/2014/main" id="{2D44A2D3-27B6-4224-A413-591605BE1B7E}"/>
               </a:ext>
             </a:extLst>
           </p:cNvPr>
@@ -18143,7 +21951,7 @@
           <p:cNvPr id="6" name="Калибровка под человека, цикл повтора и подтверждение о">
             <a:extLst xmlns:a="http://schemas.openxmlformats.org/drawingml/2006/main">
               <a:ext uri="{FF2B5EF4-FFF2-40B4-BE49-F238E27FC236}">
-                <a16:creationId xmlns:a16="http://schemas.microsoft.com/office/drawing/2014/main" id="{19A6CB92-D38A-4C06-B794-627705C3338A}"/>
+                <a16:creationId xmlns:a16="http://schemas.microsoft.com/office/drawing/2014/main" id="{8B461C34-93B9-4BB5-8600-0F32D223C241}"/>
               </a:ext>
             </a:extLst>
           </p:cNvPr>
@@ -18299,7 +22107,7 @@
           <p:cNvPr id="7" name="Локальная LLM">
             <a:extLst xmlns:a="http://schemas.openxmlformats.org/drawingml/2006/main">
               <a:ext uri="{FF2B5EF4-FFF2-40B4-BE49-F238E27FC236}">
-                <a16:creationId xmlns:a16="http://schemas.microsoft.com/office/drawing/2014/main" id="{E1151E49-55FF-459D-B216-4CFCB9A5DDA2}"/>
+                <a16:creationId xmlns:a16="http://schemas.microsoft.com/office/drawing/2014/main" id="{D3D95C79-8370-4311-AA81-525EF8673EED}"/>
               </a:ext>
             </a:extLst>
           </p:cNvPr>
@@ -18455,7 +22263,7 @@
           <p:cNvPr id="8" name="WebLLM и Qwen получают текст и числовую сводку. Код про">
             <a:extLst xmlns:a="http://schemas.openxmlformats.org/drawingml/2006/main">
               <a:ext uri="{FF2B5EF4-FFF2-40B4-BE49-F238E27FC236}">
-                <a16:creationId xmlns:a16="http://schemas.microsoft.com/office/drawing/2014/main" id="{04F65596-EB86-41EE-9554-6EEB1C78FD1B}"/>
+                <a16:creationId xmlns:a16="http://schemas.microsoft.com/office/drawing/2014/main" id="{F49BF39F-CD79-4463-9909-9255E52EBF96}"/>
               </a:ext>
             </a:extLst>
           </p:cNvPr>
@@ -18611,7 +22419,7 @@
           <p:cNvPr id="9" name="Видео остаётся на устройстве. Для Qwen нужен WebGPU и с">
             <a:extLst xmlns:a="http://schemas.openxmlformats.org/drawingml/2006/main">
               <a:ext uri="{FF2B5EF4-FFF2-40B4-BE49-F238E27FC236}">
-                <a16:creationId xmlns:a16="http://schemas.microsoft.com/office/drawing/2014/main" id="{B08537A3-3641-4E57-9E7F-3DA71CBCC34A}"/>
+                <a16:creationId xmlns:a16="http://schemas.microsoft.com/office/drawing/2014/main" id="{DB5C4021-EE72-4CE9-8ACA-A315C8CD2279}"/>
               </a:ext>
             </a:extLst>
           </p:cNvPr>
@@ -18767,7 +22575,7 @@
           <p:cNvPr id="10" name="Голосовой вопрос: браузер может передавать аудио своему">
             <a:extLst xmlns:a="http://schemas.openxmlformats.org/drawingml/2006/main">
               <a:ext uri="{FF2B5EF4-FFF2-40B4-BE49-F238E27FC236}">
-                <a16:creationId xmlns:a16="http://schemas.microsoft.com/office/drawing/2014/main" id="{2EC1A177-FB45-40E4-B6FE-FFA5EF8890EC}"/>
+                <a16:creationId xmlns:a16="http://schemas.microsoft.com/office/drawing/2014/main" id="{23DD7CB2-246C-4741-8C41-64B60138A549}"/>
               </a:ext>
             </a:extLst>
           </p:cNvPr>
@@ -18920,10 +22728,10 @@
       </p:sp>
       <p:sp>
         <p:nvSpPr>
-          <p:cNvPr id="11" name="Aimo   /   Архитектура и данные   /   6 из 13">
+          <p:cNvPr id="11" name="Aimo   /   Архитектура и данные   /   6 из 15">
             <a:extLst xmlns:a="http://schemas.openxmlformats.org/drawingml/2006/main">
               <a:ext uri="{FF2B5EF4-FFF2-40B4-BE49-F238E27FC236}">
-                <a16:creationId xmlns:a16="http://schemas.microsoft.com/office/drawing/2014/main" id="{33F11153-1550-4541-97B8-DDD319CBF13A}"/>
+                <a16:creationId xmlns:a16="http://schemas.microsoft.com/office/drawing/2014/main" id="{B8A4822D-B681-4BFA-9249-CBABE0D43205}"/>
               </a:ext>
             </a:extLst>
           </p:cNvPr>
@@ -19069,7 +22877,7 @@
                 <a:ea typeface="Arial"/>
                 <a:cs typeface="Arial"/>
               </a:rPr>
-              <a:t>Aimo   /   Архитектура и данные   /   6 из 13</a:t>
+              <a:t>Aimo   /   Архитектура и данные   /   6 из 15</a:t>
             </a:r>
           </a:p>
         </p:txBody>
@@ -19077,7 +22885,7 @@
     </p:spTree>
     <p:extLst>
       <p:ext uri="{BB962C8B-B14F-4D97-AF65-F5344CB8AC3E}">
-        <p14:creationId xmlns:p14="http://schemas.microsoft.com/office/powerpoint/2010/main" val="1393218954"/>
+        <p14:creationId xmlns:p14="http://schemas.microsoft.com/office/powerpoint/2010/main" val="990847472"/>
       </p:ext>
     </p:extLst>
   </p:cSld>
@@ -19108,7 +22916,7 @@
           <p:cNvPr id="12" name="РАБОТОСПОСОБНОСТЬ 20%">
             <a:extLst xmlns:a="http://schemas.openxmlformats.org/drawingml/2006/main">
               <a:ext uri="{FF2B5EF4-FFF2-40B4-BE49-F238E27FC236}">
-                <a16:creationId xmlns:a16="http://schemas.microsoft.com/office/drawing/2014/main" id="{A0B3D01F-1C10-486F-948A-9052F9C857D9}"/>
+                <a16:creationId xmlns:a16="http://schemas.microsoft.com/office/drawing/2014/main" id="{24C4722F-9AC0-479D-9EC3-145422CD0405}"/>
               </a:ext>
             </a:extLst>
           </p:cNvPr>
@@ -19264,7 +23072,7 @@
           <p:cNvPr id="2" name="Проверки и результаты итераций">
             <a:extLst xmlns:a="http://schemas.openxmlformats.org/drawingml/2006/main">
               <a:ext uri="{FF2B5EF4-FFF2-40B4-BE49-F238E27FC236}">
-                <a16:creationId xmlns:a16="http://schemas.microsoft.com/office/drawing/2014/main" id="{0AE03C12-C9B6-41D1-8D54-7B51246E4185}"/>
+                <a16:creationId xmlns:a16="http://schemas.microsoft.com/office/drawing/2014/main" id="{FA4AF081-1DE3-48AD-83C4-96F13F74186E}"/>
               </a:ext>
             </a:extLst>
           </p:cNvPr>
@@ -19420,7 +23228,7 @@
           <p:cNvPr id="3" name="187">
             <a:extLst xmlns:a="http://schemas.openxmlformats.org/drawingml/2006/main">
               <a:ext uri="{FF2B5EF4-FFF2-40B4-BE49-F238E27FC236}">
-                <a16:creationId xmlns:a16="http://schemas.microsoft.com/office/drawing/2014/main" id="{918989BC-14AA-4207-84DE-B3CE6B78C099}"/>
+                <a16:creationId xmlns:a16="http://schemas.microsoft.com/office/drawing/2014/main" id="{B7EF27D4-7531-4326-9B73-653326042CD7}"/>
               </a:ext>
             </a:extLst>
           </p:cNvPr>
@@ -19576,7 +23384,7 @@
           <p:cNvPr id="4" name="автотестов проходят">
             <a:extLst xmlns:a="http://schemas.openxmlformats.org/drawingml/2006/main">
               <a:ext uri="{FF2B5EF4-FFF2-40B4-BE49-F238E27FC236}">
-                <a16:creationId xmlns:a16="http://schemas.microsoft.com/office/drawing/2014/main" id="{C8DEE63F-AD70-43D8-AD4D-0B23AC3446BF}"/>
+                <a16:creationId xmlns:a16="http://schemas.microsoft.com/office/drawing/2014/main" id="{37F29EEE-9B36-4469-9646-11E7BB1E4144}"/>
               </a:ext>
             </a:extLst>
           </p:cNvPr>
@@ -19732,7 +23540,7 @@
           <p:cNvPr id="5" name="8">
             <a:extLst xmlns:a="http://schemas.openxmlformats.org/drawingml/2006/main">
               <a:ext uri="{FF2B5EF4-FFF2-40B4-BE49-F238E27FC236}">
-                <a16:creationId xmlns:a16="http://schemas.microsoft.com/office/drawing/2014/main" id="{C91C43EC-963B-463B-A496-F616DD3281FB}"/>
+                <a16:creationId xmlns:a16="http://schemas.microsoft.com/office/drawing/2014/main" id="{455D7A9A-B4BE-44B0-89DB-3ECD18D29227}"/>
               </a:ext>
             </a:extLst>
           </p:cNvPr>
@@ -19888,7 +23696,7 @@
           <p:cNvPr id="6" name="навыков в каталоге">
             <a:extLst xmlns:a="http://schemas.openxmlformats.org/drawingml/2006/main">
               <a:ext uri="{FF2B5EF4-FFF2-40B4-BE49-F238E27FC236}">
-                <a16:creationId xmlns:a16="http://schemas.microsoft.com/office/drawing/2014/main" id="{81F8DA87-B616-47AB-BC0D-CAAA39EE0B3E}"/>
+                <a16:creationId xmlns:a16="http://schemas.microsoft.com/office/drawing/2014/main" id="{BE03A069-57DE-4124-BA87-43965C5C8F03}"/>
               </a:ext>
             </a:extLst>
           </p:cNvPr>
@@ -20044,7 +23852,7 @@
           <p:cNvPr id="7" name="28">
             <a:extLst xmlns:a="http://schemas.openxmlformats.org/drawingml/2006/main">
               <a:ext uri="{FF2B5EF4-FFF2-40B4-BE49-F238E27FC236}">
-                <a16:creationId xmlns:a16="http://schemas.microsoft.com/office/drawing/2014/main" id="{FCE79CC6-8C48-4B73-916E-F294D983448E}"/>
+                <a16:creationId xmlns:a16="http://schemas.microsoft.com/office/drawing/2014/main" id="{BE7B03C2-DB18-4EAA-9B55-CABB267E42D8}"/>
               </a:ext>
             </a:extLst>
           </p:cNvPr>
@@ -20200,7 +24008,7 @@
           <p:cNvPr id="8" name="шагов уроков">
             <a:extLst xmlns:a="http://schemas.openxmlformats.org/drawingml/2006/main">
               <a:ext uri="{FF2B5EF4-FFF2-40B4-BE49-F238E27FC236}">
-                <a16:creationId xmlns:a16="http://schemas.microsoft.com/office/drawing/2014/main" id="{49127643-7BF8-4AC0-AA5C-7C4539202F1B}"/>
+                <a16:creationId xmlns:a16="http://schemas.microsoft.com/office/drawing/2014/main" id="{7DB16EE9-CCEE-433D-9816-872154470BBB}"/>
               </a:ext>
             </a:extLst>
           </p:cNvPr>
@@ -20356,7 +24164,7 @@
           <p:cNvPr id="9" name="">
             <a:extLst xmlns:a="http://schemas.openxmlformats.org/drawingml/2006/main">
               <a:ext uri="{FF2B5EF4-FFF2-40B4-BE49-F238E27FC236}">
-                <a16:creationId xmlns:a16="http://schemas.microsoft.com/office/drawing/2014/main" id="{EB65910C-D238-40BE-9444-7E237CD239F7}"/>
+                <a16:creationId xmlns:a16="http://schemas.microsoft.com/office/drawing/2014/main" id="{1F4BC214-70CE-45B9-ACC0-AFE20A0C217D}"/>
               </a:ext>
             </a:extLst>
           </p:cNvPr>
@@ -20867,7 +24675,7 @@
           <p:cNvPr id="10" name="Одинаковые синтетические кадры. Сравнение частоты подск">
             <a:extLst xmlns:a="http://schemas.openxmlformats.org/drawingml/2006/main">
               <a:ext uri="{FF2B5EF4-FFF2-40B4-BE49-F238E27FC236}">
-                <a16:creationId xmlns:a16="http://schemas.microsoft.com/office/drawing/2014/main" id="{6061AB46-E15C-4AEC-9A0E-54FCF7DCEAFE}"/>
+                <a16:creationId xmlns:a16="http://schemas.microsoft.com/office/drawing/2014/main" id="{4334D2C6-BDB0-4D46-AD51-E636F27803DB}"/>
               </a:ext>
             </a:extLst>
           </p:cNvPr>
@@ -21020,10 +24828,10 @@
       </p:sp>
       <p:sp>
         <p:nvSpPr>
-          <p:cNvPr id="11" name="Aimo   /   Подтверждённые цифры   /   7 из 13">
+          <p:cNvPr id="11" name="Aimo   /   Подтверждённые цифры   /   7 из 15">
             <a:extLst xmlns:a="http://schemas.openxmlformats.org/drawingml/2006/main">
               <a:ext uri="{FF2B5EF4-FFF2-40B4-BE49-F238E27FC236}">
-                <a16:creationId xmlns:a16="http://schemas.microsoft.com/office/drawing/2014/main" id="{03131658-CC42-4591-9581-828837BC5992}"/>
+                <a16:creationId xmlns:a16="http://schemas.microsoft.com/office/drawing/2014/main" id="{183ED0F4-9D84-4083-AA3F-B4BB2BD6E862}"/>
               </a:ext>
             </a:extLst>
           </p:cNvPr>
@@ -21169,7 +24977,7 @@
                 <a:ea typeface="Arial"/>
                 <a:cs typeface="Arial"/>
               </a:rPr>
-              <a:t>Aimo   /   Подтверждённые цифры   /   7 из 13</a:t>
+              <a:t>Aimo   /   Подтверждённые цифры   /   7 из 15</a:t>
             </a:r>
           </a:p>
         </p:txBody>
@@ -21177,7 +24985,7 @@
     </p:spTree>
     <p:extLst>
       <p:ext uri="{BB962C8B-B14F-4D97-AF65-F5344CB8AC3E}">
-        <p14:creationId xmlns:p14="http://schemas.microsoft.com/office/powerpoint/2010/main" val="183317214"/>
+        <p14:creationId xmlns:p14="http://schemas.microsoft.com/office/powerpoint/2010/main" val="409070978"/>
       </p:ext>
     </p:extLst>
   </p:cSld>
@@ -21205,10 +25013,10 @@
       </p:grpSpPr>
       <p:sp>
         <p:nvSpPr>
-          <p:cNvPr id="10" name="РАБОТА В КОМАНДЕ 10%">
+          <p:cNvPr id="12" name="РАБОТА В КОМАНДЕ 10%">
             <a:extLst xmlns:a="http://schemas.openxmlformats.org/drawingml/2006/main">
               <a:ext uri="{FF2B5EF4-FFF2-40B4-BE49-F238E27FC236}">
-                <a16:creationId xmlns:a16="http://schemas.microsoft.com/office/drawing/2014/main" id="{A6F382C6-9E5A-4CFF-AC41-5A8D16B0283B}"/>
+                <a16:creationId xmlns:a16="http://schemas.microsoft.com/office/drawing/2014/main" id="{9CABC77D-313C-40B8-942B-3EB0C9B3C70D}"/>
               </a:ext>
             </a:extLst>
           </p:cNvPr>
@@ -21361,10 +25169,10 @@
       </p:sp>
       <p:sp>
         <p:nvSpPr>
-          <p:cNvPr id="2" name="Два участника и общее принятие решений">
+          <p:cNvPr id="2" name="Общий контракт вместо двух отдельных частей">
             <a:extLst xmlns:a="http://schemas.openxmlformats.org/drawingml/2006/main">
               <a:ext uri="{FF2B5EF4-FFF2-40B4-BE49-F238E27FC236}">
-                <a16:creationId xmlns:a16="http://schemas.microsoft.com/office/drawing/2014/main" id="{881E9864-9CFB-4A63-9960-6D033C71F86E}"/>
+                <a16:creationId xmlns:a16="http://schemas.microsoft.com/office/drawing/2014/main" id="{5938217A-8263-432B-A5BC-B2CD724F80C8}"/>
               </a:ext>
             </a:extLst>
           </p:cNvPr>
@@ -21510,17 +25318,17 @@
                 <a:ea typeface="Arial"/>
                 <a:cs typeface="Arial"/>
               </a:rPr>
-              <a:t>Два участника и общее принятие решений</a:t>
+              <a:t>Общий контракт вместо двух отдельных частей</a:t>
             </a:r>
           </a:p>
         </p:txBody>
       </p:sp>
       <p:sp>
         <p:nvSpPr>
-          <p:cNvPr id="3" name="Максим">
+          <p:cNvPr id="3" name="Зоны ответственности">
             <a:extLst xmlns:a="http://schemas.openxmlformats.org/drawingml/2006/main">
               <a:ext uri="{FF2B5EF4-FFF2-40B4-BE49-F238E27FC236}">
-                <a16:creationId xmlns:a16="http://schemas.microsoft.com/office/drawing/2014/main" id="{71E32664-2C02-4212-BEC7-ADE36D34BDD4}"/>
+                <a16:creationId xmlns:a16="http://schemas.microsoft.com/office/drawing/2014/main" id="{7B5F242A-FF2C-41C9-A43E-42C4E6D2C476}"/>
               </a:ext>
             </a:extLst>
           </p:cNvPr>
@@ -21532,7 +25340,7 @@
         <p:spPr>
           <a:xfrm xmlns:a="http://schemas.openxmlformats.org/drawingml/2006/main">
             <a:off x="762000" y="2095500"/>
-            <a:ext cx="4905375" cy="552450"/>
+            <a:ext cx="3209925" cy="552450"/>
           </a:xfrm>
           <a:prstGeom xmlns:a="http://schemas.openxmlformats.org/drawingml/2006/main" prst="rect">
             <a:avLst/>
@@ -21666,17 +25474,17 @@
                 <a:ea typeface="Arial"/>
                 <a:cs typeface="Arial"/>
               </a:rPr>
-              <a:t>Максим</a:t>
+              <a:t>Зоны ответственности</a:t>
             </a:r>
           </a:p>
         </p:txBody>
       </p:sp>
       <p:sp>
         <p:nvSpPr>
-          <p:cNvPr id="4" name="Интеграция приложения и агентов Claude Code. Камера, эф">
+          <p:cNvPr id="4" name="Наран отвечает за продукт и приложение. Максим ведёт мо">
             <a:extLst xmlns:a="http://schemas.openxmlformats.org/drawingml/2006/main">
               <a:ext uri="{FF2B5EF4-FFF2-40B4-BE49-F238E27FC236}">
-                <a16:creationId xmlns:a16="http://schemas.microsoft.com/office/drawing/2014/main" id="{C2AB468C-9762-4713-A9F9-E5C0CE1E4AE1}"/>
+                <a16:creationId xmlns:a16="http://schemas.microsoft.com/office/drawing/2014/main" id="{839893F1-778F-41D8-951E-1418E5386E87}"/>
               </a:ext>
             </a:extLst>
           </p:cNvPr>
@@ -21688,7 +25496,7 @@
         <p:spPr>
           <a:xfrm xmlns:a="http://schemas.openxmlformats.org/drawingml/2006/main">
             <a:off x="762000" y="2762250"/>
-            <a:ext cx="4905375" cy="2047875"/>
+            <a:ext cx="3209925" cy="2047875"/>
           </a:xfrm>
           <a:prstGeom xmlns:a="http://schemas.openxmlformats.org/drawingml/2006/main" prst="rect">
             <a:avLst/>
@@ -21702,7 +25510,7 @@
           <a:bodyPr xmlns:a="http://schemas.openxmlformats.org/drawingml/2006/main" wrap="square" lIns="0" tIns="0" rIns="0" bIns="0" anchor="t"/>
           <a:lstStyle xmlns:a="http://schemas.openxmlformats.org/drawingml/2006/main">
             <a:defPPr>
-              <a:defRPr sz="2025" b="0">
+              <a:defRPr sz="1875" b="0">
                 <a:solidFill>
                   <a:srgbClr val="62666D"/>
                 </a:solidFill>
@@ -21712,7 +25520,7 @@
               </a:defRPr>
             </a:defPPr>
             <a:lvl1pPr>
-              <a:defRPr sz="2025" b="0">
+              <a:defRPr sz="1875" b="0">
                 <a:solidFill>
                   <a:srgbClr val="62666D"/>
                 </a:solidFill>
@@ -21722,7 +25530,7 @@
               </a:defRPr>
             </a:lvl1pPr>
             <a:lvl2pPr>
-              <a:defRPr sz="2025" b="0">
+              <a:defRPr sz="1875" b="0">
                 <a:solidFill>
                   <a:srgbClr val="62666D"/>
                 </a:solidFill>
@@ -21732,7 +25540,7 @@
               </a:defRPr>
             </a:lvl2pPr>
             <a:lvl3pPr>
-              <a:defRPr sz="2025" b="0">
+              <a:defRPr sz="1875" b="0">
                 <a:solidFill>
                   <a:srgbClr val="62666D"/>
                 </a:solidFill>
@@ -21742,7 +25550,7 @@
               </a:defRPr>
             </a:lvl3pPr>
             <a:lvl4pPr>
-              <a:defRPr sz="2025" b="0">
+              <a:defRPr sz="1875" b="0">
                 <a:solidFill>
                   <a:srgbClr val="62666D"/>
                 </a:solidFill>
@@ -21752,7 +25560,7 @@
               </a:defRPr>
             </a:lvl4pPr>
             <a:lvl5pPr>
-              <a:defRPr sz="2025" b="0">
+              <a:defRPr sz="1875" b="0">
                 <a:solidFill>
                   <a:srgbClr val="62666D"/>
                 </a:solidFill>
@@ -21762,7 +25570,7 @@
               </a:defRPr>
             </a:lvl5pPr>
             <a:lvl6pPr>
-              <a:defRPr sz="2025" b="0">
+              <a:defRPr sz="1875" b="0">
                 <a:solidFill>
                   <a:srgbClr val="62666D"/>
                 </a:solidFill>
@@ -21772,7 +25580,7 @@
               </a:defRPr>
             </a:lvl6pPr>
             <a:lvl7pPr>
-              <a:defRPr sz="2025" b="0">
+              <a:defRPr sz="1875" b="0">
                 <a:solidFill>
                   <a:srgbClr val="62666D"/>
                 </a:solidFill>
@@ -21782,7 +25590,7 @@
               </a:defRPr>
             </a:lvl7pPr>
             <a:lvl8pPr>
-              <a:defRPr sz="2025" b="0">
+              <a:defRPr sz="1875" b="0">
                 <a:solidFill>
                   <a:srgbClr val="62666D"/>
                 </a:solidFill>
@@ -21792,7 +25600,7 @@
               </a:defRPr>
             </a:lvl8pPr>
             <a:lvl9pPr>
-              <a:defRPr sz="2025" b="0">
+              <a:defRPr sz="1875" b="0">
                 <a:solidFill>
                   <a:srgbClr val="62666D"/>
                 </a:solidFill>
@@ -21804,7 +25612,7 @@
           </a:lstStyle>
           <a:p xmlns:a="http://schemas.openxmlformats.org/drawingml/2006/main">
             <a:pPr>
-              <a:defRPr sz="2025" b="0">
+              <a:defRPr sz="1875" b="0">
                 <a:solidFill>
                   <a:srgbClr val="62666D"/>
                 </a:solidFill>
@@ -21814,7 +25622,7 @@
               </a:defRPr>
             </a:pPr>
             <a:r>
-              <a:rPr sz="2025" b="0">
+              <a:rPr sz="1875" b="0">
                 <a:solidFill>
                   <a:srgbClr val="62666D"/>
                 </a:solidFill>
@@ -21822,17 +25630,17 @@
                 <a:ea typeface="Arial"/>
                 <a:cs typeface="Arial"/>
               </a:rPr>
-              <a:t>Интеграция приложения и агентов Claude Code. Камера, эфир, чат и проверки. Записи тестирования с iPhone.</a:t>
+              <a:t>Наран отвечает за продукт и приложение. Максим ведёт модели, промпты и проверку ответов.</a:t>
             </a:r>
           </a:p>
         </p:txBody>
       </p:sp>
       <p:sp>
         <p:nvSpPr>
-          <p:cNvPr id="5" name="Наран">
+          <p:cNvPr id="5" name="Точка интеграции">
             <a:extLst xmlns:a="http://schemas.openxmlformats.org/drawingml/2006/main">
               <a:ext uri="{FF2B5EF4-FFF2-40B4-BE49-F238E27FC236}">
-                <a16:creationId xmlns:a16="http://schemas.microsoft.com/office/drawing/2014/main" id="{C1A1994F-B09C-4A3A-B614-3E080B16A0EA}"/>
+                <a16:creationId xmlns:a16="http://schemas.microsoft.com/office/drawing/2014/main" id="{E19D4211-7F3F-4989-8EB4-266F380C4892}"/>
               </a:ext>
             </a:extLst>
           </p:cNvPr>
@@ -21843,8 +25651,8 @@
         </p:nvSpPr>
         <p:spPr>
           <a:xfrm xmlns:a="http://schemas.openxmlformats.org/drawingml/2006/main">
-            <a:off x="6524625" y="2095500"/>
-            <a:ext cx="4905375" cy="552450"/>
+            <a:off x="4495800" y="2095500"/>
+            <a:ext cx="3209925" cy="552450"/>
           </a:xfrm>
           <a:prstGeom xmlns:a="http://schemas.openxmlformats.org/drawingml/2006/main" prst="rect">
             <a:avLst/>
@@ -21978,17 +25786,17 @@
                 <a:ea typeface="Arial"/>
                 <a:cs typeface="Arial"/>
               </a:rPr>
-              <a:t>Наран</a:t>
+              <a:t>Точка интеграции</a:t>
             </a:r>
           </a:p>
         </p:txBody>
       </p:sp>
       <p:sp>
         <p:nvSpPr>
-          <p:cNvPr id="6" name="Публикация сайта, интерфейс и голоса. Проверка на iPhon">
+          <p:cNvPr id="6" name="Оба участника согласуют формат наблюдений, событий урок">
             <a:extLst xmlns:a="http://schemas.openxmlformats.org/drawingml/2006/main">
               <a:ext uri="{FF2B5EF4-FFF2-40B4-BE49-F238E27FC236}">
-                <a16:creationId xmlns:a16="http://schemas.microsoft.com/office/drawing/2014/main" id="{2B3B6F9F-A359-4907-9C58-401A8089B3CF}"/>
+                <a16:creationId xmlns:a16="http://schemas.microsoft.com/office/drawing/2014/main" id="{1BA4B054-B8F2-45B2-97E3-2BF42CCDBB1D}"/>
               </a:ext>
             </a:extLst>
           </p:cNvPr>
@@ -21999,8 +25807,8 @@
         </p:nvSpPr>
         <p:spPr>
           <a:xfrm xmlns:a="http://schemas.openxmlformats.org/drawingml/2006/main">
-            <a:off x="6524625" y="2762250"/>
-            <a:ext cx="4905375" cy="2047875"/>
+            <a:off x="4495800" y="2762250"/>
+            <a:ext cx="3209925" cy="2047875"/>
           </a:xfrm>
           <a:prstGeom xmlns:a="http://schemas.openxmlformats.org/drawingml/2006/main" prst="rect">
             <a:avLst/>
@@ -22014,7 +25822,7 @@
           <a:bodyPr xmlns:a="http://schemas.openxmlformats.org/drawingml/2006/main" wrap="square" lIns="0" tIns="0" rIns="0" bIns="0" anchor="t"/>
           <a:lstStyle xmlns:a="http://schemas.openxmlformats.org/drawingml/2006/main">
             <a:defPPr>
-              <a:defRPr sz="2025" b="0">
+              <a:defRPr sz="1875" b="0">
                 <a:solidFill>
                   <a:srgbClr val="62666D"/>
                 </a:solidFill>
@@ -22024,7 +25832,7 @@
               </a:defRPr>
             </a:defPPr>
             <a:lvl1pPr>
-              <a:defRPr sz="2025" b="0">
+              <a:defRPr sz="1875" b="0">
                 <a:solidFill>
                   <a:srgbClr val="62666D"/>
                 </a:solidFill>
@@ -22034,7 +25842,7 @@
               </a:defRPr>
             </a:lvl1pPr>
             <a:lvl2pPr>
-              <a:defRPr sz="2025" b="0">
+              <a:defRPr sz="1875" b="0">
                 <a:solidFill>
                   <a:srgbClr val="62666D"/>
                 </a:solidFill>
@@ -22044,7 +25852,7 @@
               </a:defRPr>
             </a:lvl2pPr>
             <a:lvl3pPr>
-              <a:defRPr sz="2025" b="0">
+              <a:defRPr sz="1875" b="0">
                 <a:solidFill>
                   <a:srgbClr val="62666D"/>
                 </a:solidFill>
@@ -22054,7 +25862,7 @@
               </a:defRPr>
             </a:lvl3pPr>
             <a:lvl4pPr>
-              <a:defRPr sz="2025" b="0">
+              <a:defRPr sz="1875" b="0">
                 <a:solidFill>
                   <a:srgbClr val="62666D"/>
                 </a:solidFill>
@@ -22064,7 +25872,7 @@
               </a:defRPr>
             </a:lvl4pPr>
             <a:lvl5pPr>
-              <a:defRPr sz="2025" b="0">
+              <a:defRPr sz="1875" b="0">
                 <a:solidFill>
                   <a:srgbClr val="62666D"/>
                 </a:solidFill>
@@ -22074,7 +25882,7 @@
               </a:defRPr>
             </a:lvl5pPr>
             <a:lvl6pPr>
-              <a:defRPr sz="2025" b="0">
+              <a:defRPr sz="1875" b="0">
                 <a:solidFill>
                   <a:srgbClr val="62666D"/>
                 </a:solidFill>
@@ -22084,7 +25892,7 @@
               </a:defRPr>
             </a:lvl6pPr>
             <a:lvl7pPr>
-              <a:defRPr sz="2025" b="0">
+              <a:defRPr sz="1875" b="0">
                 <a:solidFill>
                   <a:srgbClr val="62666D"/>
                 </a:solidFill>
@@ -22094,7 +25902,7 @@
               </a:defRPr>
             </a:lvl7pPr>
             <a:lvl8pPr>
-              <a:defRPr sz="2025" b="0">
+              <a:defRPr sz="1875" b="0">
                 <a:solidFill>
                   <a:srgbClr val="62666D"/>
                 </a:solidFill>
@@ -22104,7 +25912,7 @@
               </a:defRPr>
             </a:lvl8pPr>
             <a:lvl9pPr>
-              <a:defRPr sz="2025" b="0">
+              <a:defRPr sz="1875" b="0">
                 <a:solidFill>
                   <a:srgbClr val="62666D"/>
                 </a:solidFill>
@@ -22116,7 +25924,7 @@
           </a:lstStyle>
           <a:p xmlns:a="http://schemas.openxmlformats.org/drawingml/2006/main">
             <a:pPr>
-              <a:defRPr sz="2025" b="0">
+              <a:defRPr sz="1875" b="0">
                 <a:solidFill>
                   <a:srgbClr val="62666D"/>
                 </a:solidFill>
@@ -22126,7 +25934,7 @@
               </a:defRPr>
             </a:pPr>
             <a:r>
-              <a:rPr sz="2025" b="0">
+              <a:rPr sz="1875" b="0">
                 <a:solidFill>
                   <a:srgbClr val="62666D"/>
                 </a:solidFill>
@@ -22134,17 +25942,17 @@
                 <a:ea typeface="Arial"/>
                 <a:cs typeface="Arial"/>
               </a:rPr>
-              <a:t>Публикация сайта, интерфейс и голоса. Проверка на iPhone и обратная связь по экранам и управлению.</a:t>
+              <a:t>Оба участника согласуют формат наблюдений, событий урока и сводки для LLM.</a:t>
             </a:r>
           </a:p>
         </p:txBody>
       </p:sp>
       <p:sp>
         <p:nvSpPr>
-          <p:cNvPr id="7" name="Согласование при объединении">
+          <p:cNvPr id="7" name="Совместная приёмка">
             <a:extLst xmlns:a="http://schemas.openxmlformats.org/drawingml/2006/main">
               <a:ext uri="{FF2B5EF4-FFF2-40B4-BE49-F238E27FC236}">
-                <a16:creationId xmlns:a16="http://schemas.microsoft.com/office/drawing/2014/main" id="{D4E21E04-FB43-48D5-B4A4-69E3DCBD0744}"/>
+                <a16:creationId xmlns:a16="http://schemas.microsoft.com/office/drawing/2014/main" id="{40A13E49-FBFC-4222-BAF3-7BF01D97E262}"/>
               </a:ext>
             </a:extLst>
           </p:cNvPr>
@@ -22155,7 +25963,319 @@
         </p:nvSpPr>
         <p:spPr>
           <a:xfrm xmlns:a="http://schemas.openxmlformats.org/drawingml/2006/main">
-            <a:off x="762000" y="4752975"/>
+            <a:off x="8229600" y="2095500"/>
+            <a:ext cx="3209925" cy="552450"/>
+          </a:xfrm>
+          <a:prstGeom xmlns:a="http://schemas.openxmlformats.org/drawingml/2006/main" prst="rect">
+            <a:avLst/>
+          </a:prstGeom>
+          <a:noFill xmlns:a="http://schemas.openxmlformats.org/drawingml/2006/main"/>
+          <a:ln xmlns:a="http://schemas.openxmlformats.org/drawingml/2006/main" w="0">
+            <a:noFill/>
+          </a:ln>
+        </p:spPr>
+        <p:txBody>
+          <a:bodyPr xmlns:a="http://schemas.openxmlformats.org/drawingml/2006/main" wrap="square" lIns="0" tIns="0" rIns="0" bIns="0" anchor="t"/>
+          <a:lstStyle xmlns:a="http://schemas.openxmlformats.org/drawingml/2006/main">
+            <a:defPPr>
+              <a:defRPr sz="2175" b="1">
+                <a:solidFill>
+                  <a:srgbClr val="202124"/>
+                </a:solidFill>
+                <a:latin typeface="Arial"/>
+                <a:ea typeface="Arial"/>
+                <a:cs typeface="Arial"/>
+              </a:defRPr>
+            </a:defPPr>
+            <a:lvl1pPr>
+              <a:defRPr sz="2175" b="1">
+                <a:solidFill>
+                  <a:srgbClr val="202124"/>
+                </a:solidFill>
+                <a:latin typeface="Arial"/>
+                <a:ea typeface="Arial"/>
+                <a:cs typeface="Arial"/>
+              </a:defRPr>
+            </a:lvl1pPr>
+            <a:lvl2pPr>
+              <a:defRPr sz="2175" b="1">
+                <a:solidFill>
+                  <a:srgbClr val="202124"/>
+                </a:solidFill>
+                <a:latin typeface="Arial"/>
+                <a:ea typeface="Arial"/>
+                <a:cs typeface="Arial"/>
+              </a:defRPr>
+            </a:lvl2pPr>
+            <a:lvl3pPr>
+              <a:defRPr sz="2175" b="1">
+                <a:solidFill>
+                  <a:srgbClr val="202124"/>
+                </a:solidFill>
+                <a:latin typeface="Arial"/>
+                <a:ea typeface="Arial"/>
+                <a:cs typeface="Arial"/>
+              </a:defRPr>
+            </a:lvl3pPr>
+            <a:lvl4pPr>
+              <a:defRPr sz="2175" b="1">
+                <a:solidFill>
+                  <a:srgbClr val="202124"/>
+                </a:solidFill>
+                <a:latin typeface="Arial"/>
+                <a:ea typeface="Arial"/>
+                <a:cs typeface="Arial"/>
+              </a:defRPr>
+            </a:lvl4pPr>
+            <a:lvl5pPr>
+              <a:defRPr sz="2175" b="1">
+                <a:solidFill>
+                  <a:srgbClr val="202124"/>
+                </a:solidFill>
+                <a:latin typeface="Arial"/>
+                <a:ea typeface="Arial"/>
+                <a:cs typeface="Arial"/>
+              </a:defRPr>
+            </a:lvl5pPr>
+            <a:lvl6pPr>
+              <a:defRPr sz="2175" b="1">
+                <a:solidFill>
+                  <a:srgbClr val="202124"/>
+                </a:solidFill>
+                <a:latin typeface="Arial"/>
+                <a:ea typeface="Arial"/>
+                <a:cs typeface="Arial"/>
+              </a:defRPr>
+            </a:lvl6pPr>
+            <a:lvl7pPr>
+              <a:defRPr sz="2175" b="1">
+                <a:solidFill>
+                  <a:srgbClr val="202124"/>
+                </a:solidFill>
+                <a:latin typeface="Arial"/>
+                <a:ea typeface="Arial"/>
+                <a:cs typeface="Arial"/>
+              </a:defRPr>
+            </a:lvl7pPr>
+            <a:lvl8pPr>
+              <a:defRPr sz="2175" b="1">
+                <a:solidFill>
+                  <a:srgbClr val="202124"/>
+                </a:solidFill>
+                <a:latin typeface="Arial"/>
+                <a:ea typeface="Arial"/>
+                <a:cs typeface="Arial"/>
+              </a:defRPr>
+            </a:lvl8pPr>
+            <a:lvl9pPr>
+              <a:defRPr sz="2175" b="1">
+                <a:solidFill>
+                  <a:srgbClr val="202124"/>
+                </a:solidFill>
+                <a:latin typeface="Arial"/>
+                <a:ea typeface="Arial"/>
+                <a:cs typeface="Arial"/>
+              </a:defRPr>
+            </a:lvl9pPr>
+          </a:lstStyle>
+          <a:p xmlns:a="http://schemas.openxmlformats.org/drawingml/2006/main">
+            <a:pPr>
+              <a:defRPr sz="2175" b="1">
+                <a:solidFill>
+                  <a:srgbClr val="202124"/>
+                </a:solidFill>
+                <a:latin typeface="Arial"/>
+                <a:ea typeface="Arial"/>
+                <a:cs typeface="Arial"/>
+              </a:defRPr>
+            </a:pPr>
+            <a:r>
+              <a:rPr sz="2175" b="1">
+                <a:solidFill>
+                  <a:srgbClr val="202124"/>
+                </a:solidFill>
+                <a:latin typeface="Arial"/>
+                <a:ea typeface="Arial"/>
+                <a:cs typeface="Arial"/>
+              </a:rPr>
+              <a:t>Совместная приёмка</a:t>
+            </a:r>
+          </a:p>
+        </p:txBody>
+      </p:sp>
+      <p:sp>
+        <p:nvSpPr>
+          <p:cNvPr id="8" name="Изменение проходит тесты, проверку в Chrome и просмотр ">
+            <a:extLst xmlns:a="http://schemas.openxmlformats.org/drawingml/2006/main">
+              <a:ext uri="{FF2B5EF4-FFF2-40B4-BE49-F238E27FC236}">
+                <a16:creationId xmlns:a16="http://schemas.microsoft.com/office/drawing/2014/main" id="{A2B47238-9FE5-432E-B53B-9AB450D8C989}"/>
+              </a:ext>
+            </a:extLst>
+          </p:cNvPr>
+          <p:cNvSpPr>
+            <a:spLocks xmlns:a="http://schemas.openxmlformats.org/drawingml/2006/main" noGrp="1"/>
+          </p:cNvSpPr>
+          <p:nvPr/>
+        </p:nvSpPr>
+        <p:spPr>
+          <a:xfrm xmlns:a="http://schemas.openxmlformats.org/drawingml/2006/main">
+            <a:off x="8229600" y="2762250"/>
+            <a:ext cx="3209925" cy="2047875"/>
+          </a:xfrm>
+          <a:prstGeom xmlns:a="http://schemas.openxmlformats.org/drawingml/2006/main" prst="rect">
+            <a:avLst/>
+          </a:prstGeom>
+          <a:noFill xmlns:a="http://schemas.openxmlformats.org/drawingml/2006/main"/>
+          <a:ln xmlns:a="http://schemas.openxmlformats.org/drawingml/2006/main" w="0">
+            <a:noFill/>
+          </a:ln>
+        </p:spPr>
+        <p:txBody>
+          <a:bodyPr xmlns:a="http://schemas.openxmlformats.org/drawingml/2006/main" wrap="square" lIns="0" tIns="0" rIns="0" bIns="0" anchor="t"/>
+          <a:lstStyle xmlns:a="http://schemas.openxmlformats.org/drawingml/2006/main">
+            <a:defPPr>
+              <a:defRPr sz="1875" b="0">
+                <a:solidFill>
+                  <a:srgbClr val="62666D"/>
+                </a:solidFill>
+                <a:latin typeface="Arial"/>
+                <a:ea typeface="Arial"/>
+                <a:cs typeface="Arial"/>
+              </a:defRPr>
+            </a:defPPr>
+            <a:lvl1pPr>
+              <a:defRPr sz="1875" b="0">
+                <a:solidFill>
+                  <a:srgbClr val="62666D"/>
+                </a:solidFill>
+                <a:latin typeface="Arial"/>
+                <a:ea typeface="Arial"/>
+                <a:cs typeface="Arial"/>
+              </a:defRPr>
+            </a:lvl1pPr>
+            <a:lvl2pPr>
+              <a:defRPr sz="1875" b="0">
+                <a:solidFill>
+                  <a:srgbClr val="62666D"/>
+                </a:solidFill>
+                <a:latin typeface="Arial"/>
+                <a:ea typeface="Arial"/>
+                <a:cs typeface="Arial"/>
+              </a:defRPr>
+            </a:lvl2pPr>
+            <a:lvl3pPr>
+              <a:defRPr sz="1875" b="0">
+                <a:solidFill>
+                  <a:srgbClr val="62666D"/>
+                </a:solidFill>
+                <a:latin typeface="Arial"/>
+                <a:ea typeface="Arial"/>
+                <a:cs typeface="Arial"/>
+              </a:defRPr>
+            </a:lvl3pPr>
+            <a:lvl4pPr>
+              <a:defRPr sz="1875" b="0">
+                <a:solidFill>
+                  <a:srgbClr val="62666D"/>
+                </a:solidFill>
+                <a:latin typeface="Arial"/>
+                <a:ea typeface="Arial"/>
+                <a:cs typeface="Arial"/>
+              </a:defRPr>
+            </a:lvl4pPr>
+            <a:lvl5pPr>
+              <a:defRPr sz="1875" b="0">
+                <a:solidFill>
+                  <a:srgbClr val="62666D"/>
+                </a:solidFill>
+                <a:latin typeface="Arial"/>
+                <a:ea typeface="Arial"/>
+                <a:cs typeface="Arial"/>
+              </a:defRPr>
+            </a:lvl5pPr>
+            <a:lvl6pPr>
+              <a:defRPr sz="1875" b="0">
+                <a:solidFill>
+                  <a:srgbClr val="62666D"/>
+                </a:solidFill>
+                <a:latin typeface="Arial"/>
+                <a:ea typeface="Arial"/>
+                <a:cs typeface="Arial"/>
+              </a:defRPr>
+            </a:lvl6pPr>
+            <a:lvl7pPr>
+              <a:defRPr sz="1875" b="0">
+                <a:solidFill>
+                  <a:srgbClr val="62666D"/>
+                </a:solidFill>
+                <a:latin typeface="Arial"/>
+                <a:ea typeface="Arial"/>
+                <a:cs typeface="Arial"/>
+              </a:defRPr>
+            </a:lvl7pPr>
+            <a:lvl8pPr>
+              <a:defRPr sz="1875" b="0">
+                <a:solidFill>
+                  <a:srgbClr val="62666D"/>
+                </a:solidFill>
+                <a:latin typeface="Arial"/>
+                <a:ea typeface="Arial"/>
+                <a:cs typeface="Arial"/>
+              </a:defRPr>
+            </a:lvl8pPr>
+            <a:lvl9pPr>
+              <a:defRPr sz="1875" b="0">
+                <a:solidFill>
+                  <a:srgbClr val="62666D"/>
+                </a:solidFill>
+                <a:latin typeface="Arial"/>
+                <a:ea typeface="Arial"/>
+                <a:cs typeface="Arial"/>
+              </a:defRPr>
+            </a:lvl9pPr>
+          </a:lstStyle>
+          <a:p xmlns:a="http://schemas.openxmlformats.org/drawingml/2006/main">
+            <a:pPr>
+              <a:defRPr sz="1875" b="0">
+                <a:solidFill>
+                  <a:srgbClr val="62666D"/>
+                </a:solidFill>
+                <a:latin typeface="Arial"/>
+                <a:ea typeface="Arial"/>
+                <a:cs typeface="Arial"/>
+              </a:defRPr>
+            </a:pPr>
+            <a:r>
+              <a:rPr sz="1875" b="0">
+                <a:solidFill>
+                  <a:srgbClr val="62666D"/>
+                </a:solidFill>
+                <a:latin typeface="Arial"/>
+                <a:ea typeface="Arial"/>
+                <a:cs typeface="Arial"/>
+              </a:rPr>
+              <a:t>Изменение проходит тесты, проверку в Chrome и просмотр результата участниками.</a:t>
+            </a:r>
+          </a:p>
+        </p:txBody>
+      </p:sp>
+      <p:sp>
+        <p:nvSpPr>
+          <p:cNvPr id="9" name="Пример решения">
+            <a:extLst xmlns:a="http://schemas.openxmlformats.org/drawingml/2006/main">
+              <a:ext uri="{FF2B5EF4-FFF2-40B4-BE49-F238E27FC236}">
+                <a16:creationId xmlns:a16="http://schemas.microsoft.com/office/drawing/2014/main" id="{3EC1B4F9-B253-4E26-9204-F3B92DBA570C}"/>
+              </a:ext>
+            </a:extLst>
+          </p:cNvPr>
+          <p:cNvSpPr>
+            <a:spLocks xmlns:a="http://schemas.openxmlformats.org/drawingml/2006/main" noGrp="1"/>
+          </p:cNvSpPr>
+          <p:nvPr/>
+        </p:nvSpPr>
+        <p:spPr>
+          <a:xfrm xmlns:a="http://schemas.openxmlformats.org/drawingml/2006/main">
+            <a:off x="762000" y="4914900"/>
             <a:ext cx="10668000" cy="381000"/>
           </a:xfrm>
           <a:prstGeom xmlns:a="http://schemas.openxmlformats.org/drawingml/2006/main" prst="rect">
@@ -22290,17 +26410,17 @@
                 <a:ea typeface="Arial"/>
                 <a:cs typeface="Arial"/>
               </a:rPr>
-              <a:t>Согласование при объединении</a:t>
+              <a:t>Пример решения</a:t>
             </a:r>
           </a:p>
         </p:txBody>
       </p:sp>
       <p:sp>
         <p:nvSpPr>
-          <p:cNvPr id="8" name="Сохранили детектор предметов и настройки голосов, совме">
+          <p:cNvPr id="10" name="Детектор видит разные предметы, но счёт касаний получае">
             <a:extLst xmlns:a="http://schemas.openxmlformats.org/drawingml/2006/main">
               <a:ext uri="{FF2B5EF4-FFF2-40B4-BE49-F238E27FC236}">
-                <a16:creationId xmlns:a16="http://schemas.microsoft.com/office/drawing/2014/main" id="{33A25026-A5A1-4564-BB60-39CDFE89ADC1}"/>
+                <a16:creationId xmlns:a16="http://schemas.microsoft.com/office/drawing/2014/main" id="{6CFFFAF2-81AD-4233-9D93-F6198BC83CDF}"/>
               </a:ext>
             </a:extLst>
           </p:cNvPr>
@@ -22311,8 +26431,8 @@
         </p:nvSpPr>
         <p:spPr>
           <a:xfrm xmlns:a="http://schemas.openxmlformats.org/drawingml/2006/main">
-            <a:off x="762000" y="5276850"/>
-            <a:ext cx="10668000" cy="809625"/>
+            <a:off x="762000" y="5410200"/>
+            <a:ext cx="10668000" cy="666750"/>
           </a:xfrm>
           <a:prstGeom xmlns:a="http://schemas.openxmlformats.org/drawingml/2006/main" prst="rect">
             <a:avLst/>
@@ -22446,17 +26566,17 @@
                 <a:ea typeface="Arial"/>
                 <a:cs typeface="Arial"/>
               </a:rPr>
-              <a:t>Сохранили детектор предметов и настройки голосов, совместили их с проверкой движений и управлением камерой.</a:t>
+              <a:t>Детектор видит разные предметы, но счёт касаний получает только подтверждённый класс sports ball.</a:t>
             </a:r>
           </a:p>
         </p:txBody>
       </p:sp>
       <p:sp>
         <p:nvSpPr>
-          <p:cNvPr id="9" name="Aimo   /   Вклад людей   /   8 из 13">
+          <p:cNvPr id="11" name="Aimo   /   Вклад людей   /   8 из 15">
             <a:extLst xmlns:a="http://schemas.openxmlformats.org/drawingml/2006/main">
               <a:ext uri="{FF2B5EF4-FFF2-40B4-BE49-F238E27FC236}">
-                <a16:creationId xmlns:a16="http://schemas.microsoft.com/office/drawing/2014/main" id="{32F48EDF-7680-43E8-A74C-E9EFA4FEC50F}"/>
+                <a16:creationId xmlns:a16="http://schemas.microsoft.com/office/drawing/2014/main" id="{27FE3855-9D5D-4A3D-95AF-E470F9C0485E}"/>
               </a:ext>
             </a:extLst>
           </p:cNvPr>
@@ -22602,7 +26722,7 @@
                 <a:ea typeface="Arial"/>
                 <a:cs typeface="Arial"/>
               </a:rPr>
-              <a:t>Aimo   /   Вклад людей   /   8 из 13</a:t>
+              <a:t>Aimo   /   Вклад людей   /   8 из 15</a:t>
             </a:r>
           </a:p>
         </p:txBody>
@@ -22610,7 +26730,7 @@
     </p:spTree>
     <p:extLst>
       <p:ext uri="{BB962C8B-B14F-4D97-AF65-F5344CB8AC3E}">
-        <p14:creationId xmlns:p14="http://schemas.microsoft.com/office/powerpoint/2010/main" val="181496486"/>
+        <p14:creationId xmlns:p14="http://schemas.microsoft.com/office/powerpoint/2010/main" val="633828877"/>
       </p:ext>
     </p:extLst>
   </p:cSld>
@@ -22623,7 +26743,7 @@
     <p:bg>
       <p:bgPr>
         <a:solidFill xmlns:a="http://schemas.openxmlformats.org/drawingml/2006/main">
-          <a:srgbClr val="EFF1F4"/>
+          <a:srgbClr val="FFFFFF"/>
         </a:solidFill>
       </p:bgPr>
     </p:bg>
@@ -22638,10 +26758,10 @@
       </p:grpSpPr>
       <p:sp>
         <p:nvSpPr>
-          <p:cNvPr id="12" name="ИСПОЛЬЗОВАНИЕ ИИ 10%">
+          <p:cNvPr id="10" name="РОЛИ КОМАНДЫ">
             <a:extLst xmlns:a="http://schemas.openxmlformats.org/drawingml/2006/main">
               <a:ext uri="{FF2B5EF4-FFF2-40B4-BE49-F238E27FC236}">
-                <a16:creationId xmlns:a16="http://schemas.microsoft.com/office/drawing/2014/main" id="{61923190-1288-40C0-AF06-7EFB2DD7FD30}"/>
+                <a16:creationId xmlns:a16="http://schemas.microsoft.com/office/drawing/2014/main" id="{376563B7-9613-4012-A1C2-2F7919A8BE3A}"/>
               </a:ext>
             </a:extLst>
           </p:cNvPr>
@@ -22787,17 +26907,17 @@
                 <a:ea typeface="Arial"/>
                 <a:cs typeface="Arial"/>
               </a:rPr>
-              <a:t>ИСПОЛЬЗОВАНИЕ ИИ 10%</a:t>
+              <a:t>РОЛИ КОМАНДЫ</a:t>
             </a:r>
           </a:p>
         </p:txBody>
       </p:sp>
       <p:sp>
         <p:nvSpPr>
-          <p:cNvPr id="2" name="ИИ в разработке: задача, код, проверка">
+          <p:cNvPr id="2" name="Два участника, две зоны ответственности">
             <a:extLst xmlns:a="http://schemas.openxmlformats.org/drawingml/2006/main">
               <a:ext uri="{FF2B5EF4-FFF2-40B4-BE49-F238E27FC236}">
-                <a16:creationId xmlns:a16="http://schemas.microsoft.com/office/drawing/2014/main" id="{673C5501-095B-4B0E-8057-6F5B86260FDD}"/>
+                <a16:creationId xmlns:a16="http://schemas.microsoft.com/office/drawing/2014/main" id="{7A792CDD-8B59-4887-B9AA-AA91FA294F43}"/>
               </a:ext>
             </a:extLst>
           </p:cNvPr>
@@ -22943,17 +27063,17 @@
                 <a:ea typeface="Arial"/>
                 <a:cs typeface="Arial"/>
               </a:rPr>
-              <a:t>ИИ в разработке: задача, код, проверка</a:t>
+              <a:t>Два участника, две зоны ответственности</a:t>
             </a:r>
           </a:p>
         </p:txBody>
       </p:sp>
       <p:sp>
         <p:nvSpPr>
-          <p:cNvPr id="3" name="Постановка">
+          <p:cNvPr id="3" name="Наран · тимлид и full-stack">
             <a:extLst xmlns:a="http://schemas.openxmlformats.org/drawingml/2006/main">
               <a:ext uri="{FF2B5EF4-FFF2-40B4-BE49-F238E27FC236}">
-                <a16:creationId xmlns:a16="http://schemas.microsoft.com/office/drawing/2014/main" id="{332E24EC-D0B7-4784-9872-A1F20A3692E8}"/>
+                <a16:creationId xmlns:a16="http://schemas.microsoft.com/office/drawing/2014/main" id="{80B68065-C351-4516-B926-6D4A96FD5E1E}"/>
               </a:ext>
             </a:extLst>
           </p:cNvPr>
@@ -22964,8 +27084,8 @@
         </p:nvSpPr>
         <p:spPr>
           <a:xfrm xmlns:a="http://schemas.openxmlformats.org/drawingml/2006/main">
-            <a:off x="762000" y="2057400"/>
-            <a:ext cx="2428875" cy="381000"/>
+            <a:off x="762000" y="2047875"/>
+            <a:ext cx="4905375" cy="552450"/>
           </a:xfrm>
           <a:prstGeom xmlns:a="http://schemas.openxmlformats.org/drawingml/2006/main" prst="rect">
             <a:avLst/>
@@ -22979,9 +27099,9 @@
           <a:bodyPr xmlns:a="http://schemas.openxmlformats.org/drawingml/2006/main" wrap="square" lIns="0" tIns="0" rIns="0" bIns="0" anchor="t"/>
           <a:lstStyle xmlns:a="http://schemas.openxmlformats.org/drawingml/2006/main">
             <a:defPPr>
-              <a:defRPr sz="2100" b="1">
-                <a:solidFill>
-                  <a:srgbClr val="0866FF"/>
+              <a:defRPr sz="2175" b="1">
+                <a:solidFill>
+                  <a:srgbClr val="202124"/>
                 </a:solidFill>
                 <a:latin typeface="Arial"/>
                 <a:ea typeface="Arial"/>
@@ -22989,9 +27109,9 @@
               </a:defRPr>
             </a:defPPr>
             <a:lvl1pPr>
-              <a:defRPr sz="2100" b="1">
-                <a:solidFill>
-                  <a:srgbClr val="0866FF"/>
+              <a:defRPr sz="2175" b="1">
+                <a:solidFill>
+                  <a:srgbClr val="202124"/>
                 </a:solidFill>
                 <a:latin typeface="Arial"/>
                 <a:ea typeface="Arial"/>
@@ -22999,9 +27119,9 @@
               </a:defRPr>
             </a:lvl1pPr>
             <a:lvl2pPr>
-              <a:defRPr sz="2100" b="1">
-                <a:solidFill>
-                  <a:srgbClr val="0866FF"/>
+              <a:defRPr sz="2175" b="1">
+                <a:solidFill>
+                  <a:srgbClr val="202124"/>
                 </a:solidFill>
                 <a:latin typeface="Arial"/>
                 <a:ea typeface="Arial"/>
@@ -23009,9 +27129,9 @@
               </a:defRPr>
             </a:lvl2pPr>
             <a:lvl3pPr>
-              <a:defRPr sz="2100" b="1">
-                <a:solidFill>
-                  <a:srgbClr val="0866FF"/>
+              <a:defRPr sz="2175" b="1">
+                <a:solidFill>
+                  <a:srgbClr val="202124"/>
                 </a:solidFill>
                 <a:latin typeface="Arial"/>
                 <a:ea typeface="Arial"/>
@@ -23019,9 +27139,9 @@
               </a:defRPr>
             </a:lvl3pPr>
             <a:lvl4pPr>
-              <a:defRPr sz="2100" b="1">
-                <a:solidFill>
-                  <a:srgbClr val="0866FF"/>
+              <a:defRPr sz="2175" b="1">
+                <a:solidFill>
+                  <a:srgbClr val="202124"/>
                 </a:solidFill>
                 <a:latin typeface="Arial"/>
                 <a:ea typeface="Arial"/>
@@ -23029,9 +27149,9 @@
               </a:defRPr>
             </a:lvl4pPr>
             <a:lvl5pPr>
-              <a:defRPr sz="2100" b="1">
-                <a:solidFill>
-                  <a:srgbClr val="0866FF"/>
+              <a:defRPr sz="2175" b="1">
+                <a:solidFill>
+                  <a:srgbClr val="202124"/>
                 </a:solidFill>
                 <a:latin typeface="Arial"/>
                 <a:ea typeface="Arial"/>
@@ -23039,9 +27159,9 @@
               </a:defRPr>
             </a:lvl5pPr>
             <a:lvl6pPr>
-              <a:defRPr sz="2100" b="1">
-                <a:solidFill>
-                  <a:srgbClr val="0866FF"/>
+              <a:defRPr sz="2175" b="1">
+                <a:solidFill>
+                  <a:srgbClr val="202124"/>
                 </a:solidFill>
                 <a:latin typeface="Arial"/>
                 <a:ea typeface="Arial"/>
@@ -23049,9 +27169,9 @@
               </a:defRPr>
             </a:lvl6pPr>
             <a:lvl7pPr>
-              <a:defRPr sz="2100" b="1">
-                <a:solidFill>
-                  <a:srgbClr val="0866FF"/>
+              <a:defRPr sz="2175" b="1">
+                <a:solidFill>
+                  <a:srgbClr val="202124"/>
                 </a:solidFill>
                 <a:latin typeface="Arial"/>
                 <a:ea typeface="Arial"/>
@@ -23059,9 +27179,9 @@
               </a:defRPr>
             </a:lvl7pPr>
             <a:lvl8pPr>
-              <a:defRPr sz="2100" b="1">
-                <a:solidFill>
-                  <a:srgbClr val="0866FF"/>
+              <a:defRPr sz="2175" b="1">
+                <a:solidFill>
+                  <a:srgbClr val="202124"/>
                 </a:solidFill>
                 <a:latin typeface="Arial"/>
                 <a:ea typeface="Arial"/>
@@ -23069,9 +27189,9 @@
               </a:defRPr>
             </a:lvl8pPr>
             <a:lvl9pPr>
-              <a:defRPr sz="2100" b="1">
-                <a:solidFill>
-                  <a:srgbClr val="0866FF"/>
+              <a:defRPr sz="2175" b="1">
+                <a:solidFill>
+                  <a:srgbClr val="202124"/>
                 </a:solidFill>
                 <a:latin typeface="Arial"/>
                 <a:ea typeface="Arial"/>
@@ -23081,9 +27201,9 @@
           </a:lstStyle>
           <a:p xmlns:a="http://schemas.openxmlformats.org/drawingml/2006/main">
             <a:pPr>
-              <a:defRPr sz="2100" b="1">
-                <a:solidFill>
-                  <a:srgbClr val="0866FF"/>
+              <a:defRPr sz="2175" b="1">
+                <a:solidFill>
+                  <a:srgbClr val="202124"/>
                 </a:solidFill>
                 <a:latin typeface="Arial"/>
                 <a:ea typeface="Arial"/>
@@ -23091,25 +27211,25 @@
               </a:defRPr>
             </a:pPr>
             <a:r>
-              <a:rPr sz="2100" b="1">
-                <a:solidFill>
-                  <a:srgbClr val="0866FF"/>
+              <a:rPr sz="2175" b="1">
+                <a:solidFill>
+                  <a:srgbClr val="202124"/>
                 </a:solidFill>
                 <a:latin typeface="Arial"/>
                 <a:ea typeface="Arial"/>
                 <a:cs typeface="Arial"/>
               </a:rPr>
-              <a:t>Постановка</a:t>
+              <a:t>Наран · тимлид и full-stack</a:t>
             </a:r>
           </a:p>
         </p:txBody>
       </p:sp>
       <p:sp>
         <p:nvSpPr>
-          <p:cNvPr id="4" name="Люди задают сценарий, присылают запись экрана и формули">
+          <p:cNvPr id="4" name="Определяет продуктовый сценарий, соединяет интерфейс и ">
             <a:extLst xmlns:a="http://schemas.openxmlformats.org/drawingml/2006/main">
               <a:ext uri="{FF2B5EF4-FFF2-40B4-BE49-F238E27FC236}">
-                <a16:creationId xmlns:a16="http://schemas.microsoft.com/office/drawing/2014/main" id="{DA83D082-553E-4BAD-8368-9085115FF333}"/>
+                <a16:creationId xmlns:a16="http://schemas.microsoft.com/office/drawing/2014/main" id="{4AFD6D40-AE1F-4544-8A77-CC170A6D27BE}"/>
               </a:ext>
             </a:extLst>
           </p:cNvPr>
@@ -23120,8 +27240,632 @@
         </p:nvSpPr>
         <p:spPr>
           <a:xfrm xmlns:a="http://schemas.openxmlformats.org/drawingml/2006/main">
-            <a:off x="3476625" y="2057400"/>
-            <a:ext cx="7953375" cy="762000"/>
+            <a:off x="762000" y="2714625"/>
+            <a:ext cx="4905375" cy="2047875"/>
+          </a:xfrm>
+          <a:prstGeom xmlns:a="http://schemas.openxmlformats.org/drawingml/2006/main" prst="rect">
+            <a:avLst/>
+          </a:prstGeom>
+          <a:noFill xmlns:a="http://schemas.openxmlformats.org/drawingml/2006/main"/>
+          <a:ln xmlns:a="http://schemas.openxmlformats.org/drawingml/2006/main" w="0">
+            <a:noFill/>
+          </a:ln>
+        </p:spPr>
+        <p:txBody>
+          <a:bodyPr xmlns:a="http://schemas.openxmlformats.org/drawingml/2006/main" wrap="square" lIns="0" tIns="0" rIns="0" bIns="0" anchor="t"/>
+          <a:lstStyle xmlns:a="http://schemas.openxmlformats.org/drawingml/2006/main">
+            <a:defPPr>
+              <a:defRPr sz="1875" b="0">
+                <a:solidFill>
+                  <a:srgbClr val="62666D"/>
+                </a:solidFill>
+                <a:latin typeface="Arial"/>
+                <a:ea typeface="Arial"/>
+                <a:cs typeface="Arial"/>
+              </a:defRPr>
+            </a:defPPr>
+            <a:lvl1pPr>
+              <a:defRPr sz="1875" b="0">
+                <a:solidFill>
+                  <a:srgbClr val="62666D"/>
+                </a:solidFill>
+                <a:latin typeface="Arial"/>
+                <a:ea typeface="Arial"/>
+                <a:cs typeface="Arial"/>
+              </a:defRPr>
+            </a:lvl1pPr>
+            <a:lvl2pPr>
+              <a:defRPr sz="1875" b="0">
+                <a:solidFill>
+                  <a:srgbClr val="62666D"/>
+                </a:solidFill>
+                <a:latin typeface="Arial"/>
+                <a:ea typeface="Arial"/>
+                <a:cs typeface="Arial"/>
+              </a:defRPr>
+            </a:lvl2pPr>
+            <a:lvl3pPr>
+              <a:defRPr sz="1875" b="0">
+                <a:solidFill>
+                  <a:srgbClr val="62666D"/>
+                </a:solidFill>
+                <a:latin typeface="Arial"/>
+                <a:ea typeface="Arial"/>
+                <a:cs typeface="Arial"/>
+              </a:defRPr>
+            </a:lvl3pPr>
+            <a:lvl4pPr>
+              <a:defRPr sz="1875" b="0">
+                <a:solidFill>
+                  <a:srgbClr val="62666D"/>
+                </a:solidFill>
+                <a:latin typeface="Arial"/>
+                <a:ea typeface="Arial"/>
+                <a:cs typeface="Arial"/>
+              </a:defRPr>
+            </a:lvl4pPr>
+            <a:lvl5pPr>
+              <a:defRPr sz="1875" b="0">
+                <a:solidFill>
+                  <a:srgbClr val="62666D"/>
+                </a:solidFill>
+                <a:latin typeface="Arial"/>
+                <a:ea typeface="Arial"/>
+                <a:cs typeface="Arial"/>
+              </a:defRPr>
+            </a:lvl5pPr>
+            <a:lvl6pPr>
+              <a:defRPr sz="1875" b="0">
+                <a:solidFill>
+                  <a:srgbClr val="62666D"/>
+                </a:solidFill>
+                <a:latin typeface="Arial"/>
+                <a:ea typeface="Arial"/>
+                <a:cs typeface="Arial"/>
+              </a:defRPr>
+            </a:lvl6pPr>
+            <a:lvl7pPr>
+              <a:defRPr sz="1875" b="0">
+                <a:solidFill>
+                  <a:srgbClr val="62666D"/>
+                </a:solidFill>
+                <a:latin typeface="Arial"/>
+                <a:ea typeface="Arial"/>
+                <a:cs typeface="Arial"/>
+              </a:defRPr>
+            </a:lvl7pPr>
+            <a:lvl8pPr>
+              <a:defRPr sz="1875" b="0">
+                <a:solidFill>
+                  <a:srgbClr val="62666D"/>
+                </a:solidFill>
+                <a:latin typeface="Arial"/>
+                <a:ea typeface="Arial"/>
+                <a:cs typeface="Arial"/>
+              </a:defRPr>
+            </a:lvl8pPr>
+            <a:lvl9pPr>
+              <a:defRPr sz="1875" b="0">
+                <a:solidFill>
+                  <a:srgbClr val="62666D"/>
+                </a:solidFill>
+                <a:latin typeface="Arial"/>
+                <a:ea typeface="Arial"/>
+                <a:cs typeface="Arial"/>
+              </a:defRPr>
+            </a:lvl9pPr>
+          </a:lstStyle>
+          <a:p xmlns:a="http://schemas.openxmlformats.org/drawingml/2006/main">
+            <a:pPr>
+              <a:defRPr sz="1875" b="0">
+                <a:solidFill>
+                  <a:srgbClr val="62666D"/>
+                </a:solidFill>
+                <a:latin typeface="Arial"/>
+                <a:ea typeface="Arial"/>
+                <a:cs typeface="Arial"/>
+              </a:defRPr>
+            </a:pPr>
+            <a:r>
+              <a:rPr sz="1875" b="0">
+                <a:solidFill>
+                  <a:srgbClr val="62666D"/>
+                </a:solidFill>
+                <a:latin typeface="Arial"/>
+                <a:ea typeface="Arial"/>
+                <a:cs typeface="Arial"/>
+              </a:rPr>
+              <a:t>Определяет продуктовый сценарий, соединяет интерфейс и анализ, ведёт Git и публикацию. Принимает решения по интеграции.</a:t>
+            </a:r>
+          </a:p>
+        </p:txBody>
+      </p:sp>
+      <p:sp>
+        <p:nvSpPr>
+          <p:cNvPr id="5" name="Максим · ML/LLM-инженер">
+            <a:extLst xmlns:a="http://schemas.openxmlformats.org/drawingml/2006/main">
+              <a:ext uri="{FF2B5EF4-FFF2-40B4-BE49-F238E27FC236}">
+                <a16:creationId xmlns:a16="http://schemas.microsoft.com/office/drawing/2014/main" id="{D96215F5-1A87-44FA-AE64-C3888605331A}"/>
+              </a:ext>
+            </a:extLst>
+          </p:cNvPr>
+          <p:cNvSpPr>
+            <a:spLocks xmlns:a="http://schemas.openxmlformats.org/drawingml/2006/main" noGrp="1"/>
+          </p:cNvSpPr>
+          <p:nvPr/>
+        </p:nvSpPr>
+        <p:spPr>
+          <a:xfrm xmlns:a="http://schemas.openxmlformats.org/drawingml/2006/main">
+            <a:off x="6524625" y="2047875"/>
+            <a:ext cx="4905375" cy="552450"/>
+          </a:xfrm>
+          <a:prstGeom xmlns:a="http://schemas.openxmlformats.org/drawingml/2006/main" prst="rect">
+            <a:avLst/>
+          </a:prstGeom>
+          <a:noFill xmlns:a="http://schemas.openxmlformats.org/drawingml/2006/main"/>
+          <a:ln xmlns:a="http://schemas.openxmlformats.org/drawingml/2006/main" w="0">
+            <a:noFill/>
+          </a:ln>
+        </p:spPr>
+        <p:txBody>
+          <a:bodyPr xmlns:a="http://schemas.openxmlformats.org/drawingml/2006/main" wrap="square" lIns="0" tIns="0" rIns="0" bIns="0" anchor="t"/>
+          <a:lstStyle xmlns:a="http://schemas.openxmlformats.org/drawingml/2006/main">
+            <a:defPPr>
+              <a:defRPr sz="2175" b="1">
+                <a:solidFill>
+                  <a:srgbClr val="202124"/>
+                </a:solidFill>
+                <a:latin typeface="Arial"/>
+                <a:ea typeface="Arial"/>
+                <a:cs typeface="Arial"/>
+              </a:defRPr>
+            </a:defPPr>
+            <a:lvl1pPr>
+              <a:defRPr sz="2175" b="1">
+                <a:solidFill>
+                  <a:srgbClr val="202124"/>
+                </a:solidFill>
+                <a:latin typeface="Arial"/>
+                <a:ea typeface="Arial"/>
+                <a:cs typeface="Arial"/>
+              </a:defRPr>
+            </a:lvl1pPr>
+            <a:lvl2pPr>
+              <a:defRPr sz="2175" b="1">
+                <a:solidFill>
+                  <a:srgbClr val="202124"/>
+                </a:solidFill>
+                <a:latin typeface="Arial"/>
+                <a:ea typeface="Arial"/>
+                <a:cs typeface="Arial"/>
+              </a:defRPr>
+            </a:lvl2pPr>
+            <a:lvl3pPr>
+              <a:defRPr sz="2175" b="1">
+                <a:solidFill>
+                  <a:srgbClr val="202124"/>
+                </a:solidFill>
+                <a:latin typeface="Arial"/>
+                <a:ea typeface="Arial"/>
+                <a:cs typeface="Arial"/>
+              </a:defRPr>
+            </a:lvl3pPr>
+            <a:lvl4pPr>
+              <a:defRPr sz="2175" b="1">
+                <a:solidFill>
+                  <a:srgbClr val="202124"/>
+                </a:solidFill>
+                <a:latin typeface="Arial"/>
+                <a:ea typeface="Arial"/>
+                <a:cs typeface="Arial"/>
+              </a:defRPr>
+            </a:lvl4pPr>
+            <a:lvl5pPr>
+              <a:defRPr sz="2175" b="1">
+                <a:solidFill>
+                  <a:srgbClr val="202124"/>
+                </a:solidFill>
+                <a:latin typeface="Arial"/>
+                <a:ea typeface="Arial"/>
+                <a:cs typeface="Arial"/>
+              </a:defRPr>
+            </a:lvl5pPr>
+            <a:lvl6pPr>
+              <a:defRPr sz="2175" b="1">
+                <a:solidFill>
+                  <a:srgbClr val="202124"/>
+                </a:solidFill>
+                <a:latin typeface="Arial"/>
+                <a:ea typeface="Arial"/>
+                <a:cs typeface="Arial"/>
+              </a:defRPr>
+            </a:lvl6pPr>
+            <a:lvl7pPr>
+              <a:defRPr sz="2175" b="1">
+                <a:solidFill>
+                  <a:srgbClr val="202124"/>
+                </a:solidFill>
+                <a:latin typeface="Arial"/>
+                <a:ea typeface="Arial"/>
+                <a:cs typeface="Arial"/>
+              </a:defRPr>
+            </a:lvl7pPr>
+            <a:lvl8pPr>
+              <a:defRPr sz="2175" b="1">
+                <a:solidFill>
+                  <a:srgbClr val="202124"/>
+                </a:solidFill>
+                <a:latin typeface="Arial"/>
+                <a:ea typeface="Arial"/>
+                <a:cs typeface="Arial"/>
+              </a:defRPr>
+            </a:lvl8pPr>
+            <a:lvl9pPr>
+              <a:defRPr sz="2175" b="1">
+                <a:solidFill>
+                  <a:srgbClr val="202124"/>
+                </a:solidFill>
+                <a:latin typeface="Arial"/>
+                <a:ea typeface="Arial"/>
+                <a:cs typeface="Arial"/>
+              </a:defRPr>
+            </a:lvl9pPr>
+          </a:lstStyle>
+          <a:p xmlns:a="http://schemas.openxmlformats.org/drawingml/2006/main">
+            <a:pPr>
+              <a:defRPr sz="2175" b="1">
+                <a:solidFill>
+                  <a:srgbClr val="202124"/>
+                </a:solidFill>
+                <a:latin typeface="Arial"/>
+                <a:ea typeface="Arial"/>
+                <a:cs typeface="Arial"/>
+              </a:defRPr>
+            </a:pPr>
+            <a:r>
+              <a:rPr sz="2175" b="1">
+                <a:solidFill>
+                  <a:srgbClr val="202124"/>
+                </a:solidFill>
+                <a:latin typeface="Arial"/>
+                <a:ea typeface="Arial"/>
+                <a:cs typeface="Arial"/>
+              </a:rPr>
+              <a:t>Максим · ML/LLM-инженер</a:t>
+            </a:r>
+          </a:p>
+        </p:txBody>
+      </p:sp>
+      <p:sp>
+        <p:nvSpPr>
+          <p:cNvPr id="6" name="Разрабатывает анализ движений и локальную LLM. Отвечает">
+            <a:extLst xmlns:a="http://schemas.openxmlformats.org/drawingml/2006/main">
+              <a:ext uri="{FF2B5EF4-FFF2-40B4-BE49-F238E27FC236}">
+                <a16:creationId xmlns:a16="http://schemas.microsoft.com/office/drawing/2014/main" id="{18F48A64-EF30-48E0-B811-A4C85FC29EDE}"/>
+              </a:ext>
+            </a:extLst>
+          </p:cNvPr>
+          <p:cNvSpPr>
+            <a:spLocks xmlns:a="http://schemas.openxmlformats.org/drawingml/2006/main" noGrp="1"/>
+          </p:cNvSpPr>
+          <p:nvPr/>
+        </p:nvSpPr>
+        <p:spPr>
+          <a:xfrm xmlns:a="http://schemas.openxmlformats.org/drawingml/2006/main">
+            <a:off x="6524625" y="2714625"/>
+            <a:ext cx="4905375" cy="2047875"/>
+          </a:xfrm>
+          <a:prstGeom xmlns:a="http://schemas.openxmlformats.org/drawingml/2006/main" prst="rect">
+            <a:avLst/>
+          </a:prstGeom>
+          <a:noFill xmlns:a="http://schemas.openxmlformats.org/drawingml/2006/main"/>
+          <a:ln xmlns:a="http://schemas.openxmlformats.org/drawingml/2006/main" w="0">
+            <a:noFill/>
+          </a:ln>
+        </p:spPr>
+        <p:txBody>
+          <a:bodyPr xmlns:a="http://schemas.openxmlformats.org/drawingml/2006/main" wrap="square" lIns="0" tIns="0" rIns="0" bIns="0" anchor="t"/>
+          <a:lstStyle xmlns:a="http://schemas.openxmlformats.org/drawingml/2006/main">
+            <a:defPPr>
+              <a:defRPr sz="1875" b="0">
+                <a:solidFill>
+                  <a:srgbClr val="62666D"/>
+                </a:solidFill>
+                <a:latin typeface="Arial"/>
+                <a:ea typeface="Arial"/>
+                <a:cs typeface="Arial"/>
+              </a:defRPr>
+            </a:defPPr>
+            <a:lvl1pPr>
+              <a:defRPr sz="1875" b="0">
+                <a:solidFill>
+                  <a:srgbClr val="62666D"/>
+                </a:solidFill>
+                <a:latin typeface="Arial"/>
+                <a:ea typeface="Arial"/>
+                <a:cs typeface="Arial"/>
+              </a:defRPr>
+            </a:lvl1pPr>
+            <a:lvl2pPr>
+              <a:defRPr sz="1875" b="0">
+                <a:solidFill>
+                  <a:srgbClr val="62666D"/>
+                </a:solidFill>
+                <a:latin typeface="Arial"/>
+                <a:ea typeface="Arial"/>
+                <a:cs typeface="Arial"/>
+              </a:defRPr>
+            </a:lvl2pPr>
+            <a:lvl3pPr>
+              <a:defRPr sz="1875" b="0">
+                <a:solidFill>
+                  <a:srgbClr val="62666D"/>
+                </a:solidFill>
+                <a:latin typeface="Arial"/>
+                <a:ea typeface="Arial"/>
+                <a:cs typeface="Arial"/>
+              </a:defRPr>
+            </a:lvl3pPr>
+            <a:lvl4pPr>
+              <a:defRPr sz="1875" b="0">
+                <a:solidFill>
+                  <a:srgbClr val="62666D"/>
+                </a:solidFill>
+                <a:latin typeface="Arial"/>
+                <a:ea typeface="Arial"/>
+                <a:cs typeface="Arial"/>
+              </a:defRPr>
+            </a:lvl4pPr>
+            <a:lvl5pPr>
+              <a:defRPr sz="1875" b="0">
+                <a:solidFill>
+                  <a:srgbClr val="62666D"/>
+                </a:solidFill>
+                <a:latin typeface="Arial"/>
+                <a:ea typeface="Arial"/>
+                <a:cs typeface="Arial"/>
+              </a:defRPr>
+            </a:lvl5pPr>
+            <a:lvl6pPr>
+              <a:defRPr sz="1875" b="0">
+                <a:solidFill>
+                  <a:srgbClr val="62666D"/>
+                </a:solidFill>
+                <a:latin typeface="Arial"/>
+                <a:ea typeface="Arial"/>
+                <a:cs typeface="Arial"/>
+              </a:defRPr>
+            </a:lvl6pPr>
+            <a:lvl7pPr>
+              <a:defRPr sz="1875" b="0">
+                <a:solidFill>
+                  <a:srgbClr val="62666D"/>
+                </a:solidFill>
+                <a:latin typeface="Arial"/>
+                <a:ea typeface="Arial"/>
+                <a:cs typeface="Arial"/>
+              </a:defRPr>
+            </a:lvl7pPr>
+            <a:lvl8pPr>
+              <a:defRPr sz="1875" b="0">
+                <a:solidFill>
+                  <a:srgbClr val="62666D"/>
+                </a:solidFill>
+                <a:latin typeface="Arial"/>
+                <a:ea typeface="Arial"/>
+                <a:cs typeface="Arial"/>
+              </a:defRPr>
+            </a:lvl8pPr>
+            <a:lvl9pPr>
+              <a:defRPr sz="1875" b="0">
+                <a:solidFill>
+                  <a:srgbClr val="62666D"/>
+                </a:solidFill>
+                <a:latin typeface="Arial"/>
+                <a:ea typeface="Arial"/>
+                <a:cs typeface="Arial"/>
+              </a:defRPr>
+            </a:lvl9pPr>
+          </a:lstStyle>
+          <a:p xmlns:a="http://schemas.openxmlformats.org/drawingml/2006/main">
+            <a:pPr>
+              <a:defRPr sz="1875" b="0">
+                <a:solidFill>
+                  <a:srgbClr val="62666D"/>
+                </a:solidFill>
+                <a:latin typeface="Arial"/>
+                <a:ea typeface="Arial"/>
+                <a:cs typeface="Arial"/>
+              </a:defRPr>
+            </a:pPr>
+            <a:r>
+              <a:rPr sz="1875" b="0">
+                <a:solidFill>
+                  <a:srgbClr val="62666D"/>
+                </a:solidFill>
+                <a:latin typeface="Arial"/>
+                <a:ea typeface="Arial"/>
+                <a:cs typeface="Arial"/>
+              </a:rPr>
+              <a:t>Разрабатывает анализ движений и локальную LLM. Отвечает за промпты, проверку ответов и эксперименты.</a:t>
+            </a:r>
+          </a:p>
+        </p:txBody>
+      </p:sp>
+      <p:sp>
+        <p:nvSpPr>
+          <p:cNvPr id="7" name="Общее">
+            <a:extLst xmlns:a="http://schemas.openxmlformats.org/drawingml/2006/main">
+              <a:ext uri="{FF2B5EF4-FFF2-40B4-BE49-F238E27FC236}">
+                <a16:creationId xmlns:a16="http://schemas.microsoft.com/office/drawing/2014/main" id="{5F602AB5-6773-4FEE-96A3-B59211DCB731}"/>
+              </a:ext>
+            </a:extLst>
+          </p:cNvPr>
+          <p:cNvSpPr>
+            <a:spLocks xmlns:a="http://schemas.openxmlformats.org/drawingml/2006/main" noGrp="1"/>
+          </p:cNvSpPr>
+          <p:nvPr/>
+        </p:nvSpPr>
+        <p:spPr>
+          <a:xfrm xmlns:a="http://schemas.openxmlformats.org/drawingml/2006/main">
+            <a:off x="762000" y="4667250"/>
+            <a:ext cx="10668000" cy="381000"/>
+          </a:xfrm>
+          <a:prstGeom xmlns:a="http://schemas.openxmlformats.org/drawingml/2006/main" prst="rect">
+            <a:avLst/>
+          </a:prstGeom>
+          <a:noFill xmlns:a="http://schemas.openxmlformats.org/drawingml/2006/main"/>
+          <a:ln xmlns:a="http://schemas.openxmlformats.org/drawingml/2006/main" w="0">
+            <a:noFill/>
+          </a:ln>
+        </p:spPr>
+        <p:txBody>
+          <a:bodyPr xmlns:a="http://schemas.openxmlformats.org/drawingml/2006/main" wrap="square" lIns="0" tIns="0" rIns="0" bIns="0" anchor="t"/>
+          <a:lstStyle xmlns:a="http://schemas.openxmlformats.org/drawingml/2006/main">
+            <a:defPPr>
+              <a:defRPr sz="2175" b="1">
+                <a:solidFill>
+                  <a:srgbClr val="0866FF"/>
+                </a:solidFill>
+                <a:latin typeface="Arial"/>
+                <a:ea typeface="Arial"/>
+                <a:cs typeface="Arial"/>
+              </a:defRPr>
+            </a:defPPr>
+            <a:lvl1pPr>
+              <a:defRPr sz="2175" b="1">
+                <a:solidFill>
+                  <a:srgbClr val="0866FF"/>
+                </a:solidFill>
+                <a:latin typeface="Arial"/>
+                <a:ea typeface="Arial"/>
+                <a:cs typeface="Arial"/>
+              </a:defRPr>
+            </a:lvl1pPr>
+            <a:lvl2pPr>
+              <a:defRPr sz="2175" b="1">
+                <a:solidFill>
+                  <a:srgbClr val="0866FF"/>
+                </a:solidFill>
+                <a:latin typeface="Arial"/>
+                <a:ea typeface="Arial"/>
+                <a:cs typeface="Arial"/>
+              </a:defRPr>
+            </a:lvl2pPr>
+            <a:lvl3pPr>
+              <a:defRPr sz="2175" b="1">
+                <a:solidFill>
+                  <a:srgbClr val="0866FF"/>
+                </a:solidFill>
+                <a:latin typeface="Arial"/>
+                <a:ea typeface="Arial"/>
+                <a:cs typeface="Arial"/>
+              </a:defRPr>
+            </a:lvl3pPr>
+            <a:lvl4pPr>
+              <a:defRPr sz="2175" b="1">
+                <a:solidFill>
+                  <a:srgbClr val="0866FF"/>
+                </a:solidFill>
+                <a:latin typeface="Arial"/>
+                <a:ea typeface="Arial"/>
+                <a:cs typeface="Arial"/>
+              </a:defRPr>
+            </a:lvl4pPr>
+            <a:lvl5pPr>
+              <a:defRPr sz="2175" b="1">
+                <a:solidFill>
+                  <a:srgbClr val="0866FF"/>
+                </a:solidFill>
+                <a:latin typeface="Arial"/>
+                <a:ea typeface="Arial"/>
+                <a:cs typeface="Arial"/>
+              </a:defRPr>
+            </a:lvl5pPr>
+            <a:lvl6pPr>
+              <a:defRPr sz="2175" b="1">
+                <a:solidFill>
+                  <a:srgbClr val="0866FF"/>
+                </a:solidFill>
+                <a:latin typeface="Arial"/>
+                <a:ea typeface="Arial"/>
+                <a:cs typeface="Arial"/>
+              </a:defRPr>
+            </a:lvl6pPr>
+            <a:lvl7pPr>
+              <a:defRPr sz="2175" b="1">
+                <a:solidFill>
+                  <a:srgbClr val="0866FF"/>
+                </a:solidFill>
+                <a:latin typeface="Arial"/>
+                <a:ea typeface="Arial"/>
+                <a:cs typeface="Arial"/>
+              </a:defRPr>
+            </a:lvl7pPr>
+            <a:lvl8pPr>
+              <a:defRPr sz="2175" b="1">
+                <a:solidFill>
+                  <a:srgbClr val="0866FF"/>
+                </a:solidFill>
+                <a:latin typeface="Arial"/>
+                <a:ea typeface="Arial"/>
+                <a:cs typeface="Arial"/>
+              </a:defRPr>
+            </a:lvl8pPr>
+            <a:lvl9pPr>
+              <a:defRPr sz="2175" b="1">
+                <a:solidFill>
+                  <a:srgbClr val="0866FF"/>
+                </a:solidFill>
+                <a:latin typeface="Arial"/>
+                <a:ea typeface="Arial"/>
+                <a:cs typeface="Arial"/>
+              </a:defRPr>
+            </a:lvl9pPr>
+          </a:lstStyle>
+          <a:p xmlns:a="http://schemas.openxmlformats.org/drawingml/2006/main">
+            <a:pPr>
+              <a:defRPr sz="2175" b="1">
+                <a:solidFill>
+                  <a:srgbClr val="0866FF"/>
+                </a:solidFill>
+                <a:latin typeface="Arial"/>
+                <a:ea typeface="Arial"/>
+                <a:cs typeface="Arial"/>
+              </a:defRPr>
+            </a:pPr>
+            <a:r>
+              <a:rPr sz="2175" b="1">
+                <a:solidFill>
+                  <a:srgbClr val="0866FF"/>
+                </a:solidFill>
+                <a:latin typeface="Arial"/>
+                <a:ea typeface="Arial"/>
+                <a:cs typeface="Arial"/>
+              </a:rPr>
+              <a:t>Общее</a:t>
+            </a:r>
+          </a:p>
+        </p:txBody>
+      </p:sp>
+      <p:sp>
+        <p:nvSpPr>
+          <p:cNvPr id="8" name="Оба участника тестируют сценарий на телефонах, разбираю">
+            <a:extLst xmlns:a="http://schemas.openxmlformats.org/drawingml/2006/main">
+              <a:ext uri="{FF2B5EF4-FFF2-40B4-BE49-F238E27FC236}">
+                <a16:creationId xmlns:a16="http://schemas.microsoft.com/office/drawing/2014/main" id="{E9076C39-C087-493E-93E2-B0E835043664}"/>
+              </a:ext>
+            </a:extLst>
+          </p:cNvPr>
+          <p:cNvSpPr>
+            <a:spLocks xmlns:a="http://schemas.openxmlformats.org/drawingml/2006/main" noGrp="1"/>
+          </p:cNvSpPr>
+          <p:nvPr/>
+        </p:nvSpPr>
+        <p:spPr>
+          <a:xfrm xmlns:a="http://schemas.openxmlformats.org/drawingml/2006/main">
+            <a:off x="762000" y="5143500"/>
+            <a:ext cx="10668000" cy="666750"/>
           </a:xfrm>
           <a:prstGeom xmlns:a="http://schemas.openxmlformats.org/drawingml/2006/main" prst="rect">
             <a:avLst/>
@@ -23137,7 +27881,7 @@
             <a:defPPr>
               <a:defRPr sz="1950" b="0">
                 <a:solidFill>
-                  <a:srgbClr val="202124"/>
+                  <a:srgbClr val="62666D"/>
                 </a:solidFill>
                 <a:latin typeface="Arial"/>
                 <a:ea typeface="Arial"/>
@@ -23147,7 +27891,7 @@
             <a:lvl1pPr>
               <a:defRPr sz="1950" b="0">
                 <a:solidFill>
-                  <a:srgbClr val="202124"/>
+                  <a:srgbClr val="62666D"/>
                 </a:solidFill>
                 <a:latin typeface="Arial"/>
                 <a:ea typeface="Arial"/>
@@ -23157,7 +27901,7 @@
             <a:lvl2pPr>
               <a:defRPr sz="1950" b="0">
                 <a:solidFill>
-                  <a:srgbClr val="202124"/>
+                  <a:srgbClr val="62666D"/>
                 </a:solidFill>
                 <a:latin typeface="Arial"/>
                 <a:ea typeface="Arial"/>
@@ -23167,7 +27911,7 @@
             <a:lvl3pPr>
               <a:defRPr sz="1950" b="0">
                 <a:solidFill>
-                  <a:srgbClr val="202124"/>
+                  <a:srgbClr val="62666D"/>
                 </a:solidFill>
                 <a:latin typeface="Arial"/>
                 <a:ea typeface="Arial"/>
@@ -23177,7 +27921,7 @@
             <a:lvl4pPr>
               <a:defRPr sz="1950" b="0">
                 <a:solidFill>
-                  <a:srgbClr val="202124"/>
+                  <a:srgbClr val="62666D"/>
                 </a:solidFill>
                 <a:latin typeface="Arial"/>
                 <a:ea typeface="Arial"/>
@@ -23187,7 +27931,7 @@
             <a:lvl5pPr>
               <a:defRPr sz="1950" b="0">
                 <a:solidFill>
-                  <a:srgbClr val="202124"/>
+                  <a:srgbClr val="62666D"/>
                 </a:solidFill>
                 <a:latin typeface="Arial"/>
                 <a:ea typeface="Arial"/>
@@ -23197,7 +27941,7 @@
             <a:lvl6pPr>
               <a:defRPr sz="1950" b="0">
                 <a:solidFill>
-                  <a:srgbClr val="202124"/>
+                  <a:srgbClr val="62666D"/>
                 </a:solidFill>
                 <a:latin typeface="Arial"/>
                 <a:ea typeface="Arial"/>
@@ -23207,7 +27951,7 @@
             <a:lvl7pPr>
               <a:defRPr sz="1950" b="0">
                 <a:solidFill>
-                  <a:srgbClr val="202124"/>
+                  <a:srgbClr val="62666D"/>
                 </a:solidFill>
                 <a:latin typeface="Arial"/>
                 <a:ea typeface="Arial"/>
@@ -23217,7 +27961,7 @@
             <a:lvl8pPr>
               <a:defRPr sz="1950" b="0">
                 <a:solidFill>
-                  <a:srgbClr val="202124"/>
+                  <a:srgbClr val="62666D"/>
                 </a:solidFill>
                 <a:latin typeface="Arial"/>
                 <a:ea typeface="Arial"/>
@@ -23227,7 +27971,7 @@
             <a:lvl9pPr>
               <a:defRPr sz="1950" b="0">
                 <a:solidFill>
-                  <a:srgbClr val="202124"/>
+                  <a:srgbClr val="62666D"/>
                 </a:solidFill>
                 <a:latin typeface="Arial"/>
                 <a:ea typeface="Arial"/>
@@ -23239,7 +27983,7 @@
             <a:pPr>
               <a:defRPr sz="1950" b="0">
                 <a:solidFill>
-                  <a:srgbClr val="202124"/>
+                  <a:srgbClr val="62666D"/>
                 </a:solidFill>
                 <a:latin typeface="Arial"/>
                 <a:ea typeface="Arial"/>
@@ -23249,959 +27993,23 @@
             <a:r>
               <a:rPr sz="1950" b="0">
                 <a:solidFill>
-                  <a:srgbClr val="202124"/>
+                  <a:srgbClr val="62666D"/>
                 </a:solidFill>
                 <a:latin typeface="Arial"/>
                 <a:ea typeface="Arial"/>
                 <a:cs typeface="Arial"/>
               </a:rPr>
-              <a:t>Люди задают сценарий, присылают запись экрана и формулируют дефект.</a:t>
+              <a:t>Оба участника тестируют сценарий на телефонах, разбирают дефекты и подтверждают изменения перед выпуском.</a:t>
             </a:r>
           </a:p>
         </p:txBody>
       </p:sp>
       <p:sp>
         <p:nvSpPr>
-          <p:cNvPr id="5" name="Разделение">
+          <p:cNvPr id="9" name="Aimo   /   Разделение обязанностей   /   9 из 15">
             <a:extLst xmlns:a="http://schemas.openxmlformats.org/drawingml/2006/main">
               <a:ext uri="{FF2B5EF4-FFF2-40B4-BE49-F238E27FC236}">
-                <a16:creationId xmlns:a16="http://schemas.microsoft.com/office/drawing/2014/main" id="{4A643903-EFEA-4D1D-9CA7-DCB7C21C6C49}"/>
-              </a:ext>
-            </a:extLst>
-          </p:cNvPr>
-          <p:cNvSpPr>
-            <a:spLocks xmlns:a="http://schemas.openxmlformats.org/drawingml/2006/main" noGrp="1"/>
-          </p:cNvSpPr>
-          <p:nvPr/>
-        </p:nvSpPr>
-        <p:spPr>
-          <a:xfrm xmlns:a="http://schemas.openxmlformats.org/drawingml/2006/main">
-            <a:off x="762000" y="3009900"/>
-            <a:ext cx="2428875" cy="381000"/>
-          </a:xfrm>
-          <a:prstGeom xmlns:a="http://schemas.openxmlformats.org/drawingml/2006/main" prst="rect">
-            <a:avLst/>
-          </a:prstGeom>
-          <a:noFill xmlns:a="http://schemas.openxmlformats.org/drawingml/2006/main"/>
-          <a:ln xmlns:a="http://schemas.openxmlformats.org/drawingml/2006/main" w="0">
-            <a:noFill/>
-          </a:ln>
-        </p:spPr>
-        <p:txBody>
-          <a:bodyPr xmlns:a="http://schemas.openxmlformats.org/drawingml/2006/main" wrap="square" lIns="0" tIns="0" rIns="0" bIns="0" anchor="t"/>
-          <a:lstStyle xmlns:a="http://schemas.openxmlformats.org/drawingml/2006/main">
-            <a:defPPr>
-              <a:defRPr sz="2100" b="1">
-                <a:solidFill>
-                  <a:srgbClr val="0866FF"/>
-                </a:solidFill>
-                <a:latin typeface="Arial"/>
-                <a:ea typeface="Arial"/>
-                <a:cs typeface="Arial"/>
-              </a:defRPr>
-            </a:defPPr>
-            <a:lvl1pPr>
-              <a:defRPr sz="2100" b="1">
-                <a:solidFill>
-                  <a:srgbClr val="0866FF"/>
-                </a:solidFill>
-                <a:latin typeface="Arial"/>
-                <a:ea typeface="Arial"/>
-                <a:cs typeface="Arial"/>
-              </a:defRPr>
-            </a:lvl1pPr>
-            <a:lvl2pPr>
-              <a:defRPr sz="2100" b="1">
-                <a:solidFill>
-                  <a:srgbClr val="0866FF"/>
-                </a:solidFill>
-                <a:latin typeface="Arial"/>
-                <a:ea typeface="Arial"/>
-                <a:cs typeface="Arial"/>
-              </a:defRPr>
-            </a:lvl2pPr>
-            <a:lvl3pPr>
-              <a:defRPr sz="2100" b="1">
-                <a:solidFill>
-                  <a:srgbClr val="0866FF"/>
-                </a:solidFill>
-                <a:latin typeface="Arial"/>
-                <a:ea typeface="Arial"/>
-                <a:cs typeface="Arial"/>
-              </a:defRPr>
-            </a:lvl3pPr>
-            <a:lvl4pPr>
-              <a:defRPr sz="2100" b="1">
-                <a:solidFill>
-                  <a:srgbClr val="0866FF"/>
-                </a:solidFill>
-                <a:latin typeface="Arial"/>
-                <a:ea typeface="Arial"/>
-                <a:cs typeface="Arial"/>
-              </a:defRPr>
-            </a:lvl4pPr>
-            <a:lvl5pPr>
-              <a:defRPr sz="2100" b="1">
-                <a:solidFill>
-                  <a:srgbClr val="0866FF"/>
-                </a:solidFill>
-                <a:latin typeface="Arial"/>
-                <a:ea typeface="Arial"/>
-                <a:cs typeface="Arial"/>
-              </a:defRPr>
-            </a:lvl5pPr>
-            <a:lvl6pPr>
-              <a:defRPr sz="2100" b="1">
-                <a:solidFill>
-                  <a:srgbClr val="0866FF"/>
-                </a:solidFill>
-                <a:latin typeface="Arial"/>
-                <a:ea typeface="Arial"/>
-                <a:cs typeface="Arial"/>
-              </a:defRPr>
-            </a:lvl6pPr>
-            <a:lvl7pPr>
-              <a:defRPr sz="2100" b="1">
-                <a:solidFill>
-                  <a:srgbClr val="0866FF"/>
-                </a:solidFill>
-                <a:latin typeface="Arial"/>
-                <a:ea typeface="Arial"/>
-                <a:cs typeface="Arial"/>
-              </a:defRPr>
-            </a:lvl7pPr>
-            <a:lvl8pPr>
-              <a:defRPr sz="2100" b="1">
-                <a:solidFill>
-                  <a:srgbClr val="0866FF"/>
-                </a:solidFill>
-                <a:latin typeface="Arial"/>
-                <a:ea typeface="Arial"/>
-                <a:cs typeface="Arial"/>
-              </a:defRPr>
-            </a:lvl8pPr>
-            <a:lvl9pPr>
-              <a:defRPr sz="2100" b="1">
-                <a:solidFill>
-                  <a:srgbClr val="0866FF"/>
-                </a:solidFill>
-                <a:latin typeface="Arial"/>
-                <a:ea typeface="Arial"/>
-                <a:cs typeface="Arial"/>
-              </a:defRPr>
-            </a:lvl9pPr>
-          </a:lstStyle>
-          <a:p xmlns:a="http://schemas.openxmlformats.org/drawingml/2006/main">
-            <a:pPr>
-              <a:defRPr sz="2100" b="1">
-                <a:solidFill>
-                  <a:srgbClr val="0866FF"/>
-                </a:solidFill>
-                <a:latin typeface="Arial"/>
-                <a:ea typeface="Arial"/>
-                <a:cs typeface="Arial"/>
-              </a:defRPr>
-            </a:pPr>
-            <a:r>
-              <a:rPr sz="2100" b="1">
-                <a:solidFill>
-                  <a:srgbClr val="0866FF"/>
-                </a:solidFill>
-                <a:latin typeface="Arial"/>
-                <a:ea typeface="Arial"/>
-                <a:cs typeface="Arial"/>
-              </a:rPr>
-              <a:t>Разделение</a:t>
-            </a:r>
-          </a:p>
-        </p:txBody>
-      </p:sp>
-      <p:sp>
-        <p:nvSpPr>
-          <p:cNvPr id="6" name="Агенты frontend, vision, coach-llm и root работают по к">
-            <a:extLst xmlns:a="http://schemas.openxmlformats.org/drawingml/2006/main">
-              <a:ext uri="{FF2B5EF4-FFF2-40B4-BE49-F238E27FC236}">
-                <a16:creationId xmlns:a16="http://schemas.microsoft.com/office/drawing/2014/main" id="{6DE0FA2D-E388-4D39-8164-7809F745E940}"/>
-              </a:ext>
-            </a:extLst>
-          </p:cNvPr>
-          <p:cNvSpPr>
-            <a:spLocks xmlns:a="http://schemas.openxmlformats.org/drawingml/2006/main" noGrp="1"/>
-          </p:cNvSpPr>
-          <p:nvPr/>
-        </p:nvSpPr>
-        <p:spPr>
-          <a:xfrm xmlns:a="http://schemas.openxmlformats.org/drawingml/2006/main">
-            <a:off x="3476625" y="3009900"/>
-            <a:ext cx="7953375" cy="762000"/>
-          </a:xfrm>
-          <a:prstGeom xmlns:a="http://schemas.openxmlformats.org/drawingml/2006/main" prst="rect">
-            <a:avLst/>
-          </a:prstGeom>
-          <a:noFill xmlns:a="http://schemas.openxmlformats.org/drawingml/2006/main"/>
-          <a:ln xmlns:a="http://schemas.openxmlformats.org/drawingml/2006/main" w="0">
-            <a:noFill/>
-          </a:ln>
-        </p:spPr>
-        <p:txBody>
-          <a:bodyPr xmlns:a="http://schemas.openxmlformats.org/drawingml/2006/main" wrap="square" lIns="0" tIns="0" rIns="0" bIns="0" anchor="t"/>
-          <a:lstStyle xmlns:a="http://schemas.openxmlformats.org/drawingml/2006/main">
-            <a:defPPr>
-              <a:defRPr sz="1950" b="0">
-                <a:solidFill>
-                  <a:srgbClr val="202124"/>
-                </a:solidFill>
-                <a:latin typeface="Arial"/>
-                <a:ea typeface="Arial"/>
-                <a:cs typeface="Arial"/>
-              </a:defRPr>
-            </a:defPPr>
-            <a:lvl1pPr>
-              <a:defRPr sz="1950" b="0">
-                <a:solidFill>
-                  <a:srgbClr val="202124"/>
-                </a:solidFill>
-                <a:latin typeface="Arial"/>
-                <a:ea typeface="Arial"/>
-                <a:cs typeface="Arial"/>
-              </a:defRPr>
-            </a:lvl1pPr>
-            <a:lvl2pPr>
-              <a:defRPr sz="1950" b="0">
-                <a:solidFill>
-                  <a:srgbClr val="202124"/>
-                </a:solidFill>
-                <a:latin typeface="Arial"/>
-                <a:ea typeface="Arial"/>
-                <a:cs typeface="Arial"/>
-              </a:defRPr>
-            </a:lvl2pPr>
-            <a:lvl3pPr>
-              <a:defRPr sz="1950" b="0">
-                <a:solidFill>
-                  <a:srgbClr val="202124"/>
-                </a:solidFill>
-                <a:latin typeface="Arial"/>
-                <a:ea typeface="Arial"/>
-                <a:cs typeface="Arial"/>
-              </a:defRPr>
-            </a:lvl3pPr>
-            <a:lvl4pPr>
-              <a:defRPr sz="1950" b="0">
-                <a:solidFill>
-                  <a:srgbClr val="202124"/>
-                </a:solidFill>
-                <a:latin typeface="Arial"/>
-                <a:ea typeface="Arial"/>
-                <a:cs typeface="Arial"/>
-              </a:defRPr>
-            </a:lvl4pPr>
-            <a:lvl5pPr>
-              <a:defRPr sz="1950" b="0">
-                <a:solidFill>
-                  <a:srgbClr val="202124"/>
-                </a:solidFill>
-                <a:latin typeface="Arial"/>
-                <a:ea typeface="Arial"/>
-                <a:cs typeface="Arial"/>
-              </a:defRPr>
-            </a:lvl5pPr>
-            <a:lvl6pPr>
-              <a:defRPr sz="1950" b="0">
-                <a:solidFill>
-                  <a:srgbClr val="202124"/>
-                </a:solidFill>
-                <a:latin typeface="Arial"/>
-                <a:ea typeface="Arial"/>
-                <a:cs typeface="Arial"/>
-              </a:defRPr>
-            </a:lvl6pPr>
-            <a:lvl7pPr>
-              <a:defRPr sz="1950" b="0">
-                <a:solidFill>
-                  <a:srgbClr val="202124"/>
-                </a:solidFill>
-                <a:latin typeface="Arial"/>
-                <a:ea typeface="Arial"/>
-                <a:cs typeface="Arial"/>
-              </a:defRPr>
-            </a:lvl7pPr>
-            <a:lvl8pPr>
-              <a:defRPr sz="1950" b="0">
-                <a:solidFill>
-                  <a:srgbClr val="202124"/>
-                </a:solidFill>
-                <a:latin typeface="Arial"/>
-                <a:ea typeface="Arial"/>
-                <a:cs typeface="Arial"/>
-              </a:defRPr>
-            </a:lvl8pPr>
-            <a:lvl9pPr>
-              <a:defRPr sz="1950" b="0">
-                <a:solidFill>
-                  <a:srgbClr val="202124"/>
-                </a:solidFill>
-                <a:latin typeface="Arial"/>
-                <a:ea typeface="Arial"/>
-                <a:cs typeface="Arial"/>
-              </a:defRPr>
-            </a:lvl9pPr>
-          </a:lstStyle>
-          <a:p xmlns:a="http://schemas.openxmlformats.org/drawingml/2006/main">
-            <a:pPr>
-              <a:defRPr sz="1950" b="0">
-                <a:solidFill>
-                  <a:srgbClr val="202124"/>
-                </a:solidFill>
-                <a:latin typeface="Arial"/>
-                <a:ea typeface="Arial"/>
-                <a:cs typeface="Arial"/>
-              </a:defRPr>
-            </a:pPr>
-            <a:r>
-              <a:rPr sz="1950" b="0">
-                <a:solidFill>
-                  <a:srgbClr val="202124"/>
-                </a:solidFill>
-                <a:latin typeface="Arial"/>
-                <a:ea typeface="Arial"/>
-                <a:cs typeface="Arial"/>
-              </a:rPr>
-              <a:t>Агенты frontend, vision, coach-llm и root работают по контрактам файлов.</a:t>
-            </a:r>
-          </a:p>
-        </p:txBody>
-      </p:sp>
-      <p:sp>
-        <p:nvSpPr>
-          <p:cNvPr id="7" name="Реализация">
-            <a:extLst xmlns:a="http://schemas.openxmlformats.org/drawingml/2006/main">
-              <a:ext uri="{FF2B5EF4-FFF2-40B4-BE49-F238E27FC236}">
-                <a16:creationId xmlns:a16="http://schemas.microsoft.com/office/drawing/2014/main" id="{67940E82-4536-493B-AD5A-0175043654D5}"/>
-              </a:ext>
-            </a:extLst>
-          </p:cNvPr>
-          <p:cNvSpPr>
-            <a:spLocks xmlns:a="http://schemas.openxmlformats.org/drawingml/2006/main" noGrp="1"/>
-          </p:cNvSpPr>
-          <p:nvPr/>
-        </p:nvSpPr>
-        <p:spPr>
-          <a:xfrm xmlns:a="http://schemas.openxmlformats.org/drawingml/2006/main">
-            <a:off x="762000" y="3962400"/>
-            <a:ext cx="2428875" cy="381000"/>
-          </a:xfrm>
-          <a:prstGeom xmlns:a="http://schemas.openxmlformats.org/drawingml/2006/main" prst="rect">
-            <a:avLst/>
-          </a:prstGeom>
-          <a:noFill xmlns:a="http://schemas.openxmlformats.org/drawingml/2006/main"/>
-          <a:ln xmlns:a="http://schemas.openxmlformats.org/drawingml/2006/main" w="0">
-            <a:noFill/>
-          </a:ln>
-        </p:spPr>
-        <p:txBody>
-          <a:bodyPr xmlns:a="http://schemas.openxmlformats.org/drawingml/2006/main" wrap="square" lIns="0" tIns="0" rIns="0" bIns="0" anchor="t"/>
-          <a:lstStyle xmlns:a="http://schemas.openxmlformats.org/drawingml/2006/main">
-            <a:defPPr>
-              <a:defRPr sz="2100" b="1">
-                <a:solidFill>
-                  <a:srgbClr val="0866FF"/>
-                </a:solidFill>
-                <a:latin typeface="Arial"/>
-                <a:ea typeface="Arial"/>
-                <a:cs typeface="Arial"/>
-              </a:defRPr>
-            </a:defPPr>
-            <a:lvl1pPr>
-              <a:defRPr sz="2100" b="1">
-                <a:solidFill>
-                  <a:srgbClr val="0866FF"/>
-                </a:solidFill>
-                <a:latin typeface="Arial"/>
-                <a:ea typeface="Arial"/>
-                <a:cs typeface="Arial"/>
-              </a:defRPr>
-            </a:lvl1pPr>
-            <a:lvl2pPr>
-              <a:defRPr sz="2100" b="1">
-                <a:solidFill>
-                  <a:srgbClr val="0866FF"/>
-                </a:solidFill>
-                <a:latin typeface="Arial"/>
-                <a:ea typeface="Arial"/>
-                <a:cs typeface="Arial"/>
-              </a:defRPr>
-            </a:lvl2pPr>
-            <a:lvl3pPr>
-              <a:defRPr sz="2100" b="1">
-                <a:solidFill>
-                  <a:srgbClr val="0866FF"/>
-                </a:solidFill>
-                <a:latin typeface="Arial"/>
-                <a:ea typeface="Arial"/>
-                <a:cs typeface="Arial"/>
-              </a:defRPr>
-            </a:lvl3pPr>
-            <a:lvl4pPr>
-              <a:defRPr sz="2100" b="1">
-                <a:solidFill>
-                  <a:srgbClr val="0866FF"/>
-                </a:solidFill>
-                <a:latin typeface="Arial"/>
-                <a:ea typeface="Arial"/>
-                <a:cs typeface="Arial"/>
-              </a:defRPr>
-            </a:lvl4pPr>
-            <a:lvl5pPr>
-              <a:defRPr sz="2100" b="1">
-                <a:solidFill>
-                  <a:srgbClr val="0866FF"/>
-                </a:solidFill>
-                <a:latin typeface="Arial"/>
-                <a:ea typeface="Arial"/>
-                <a:cs typeface="Arial"/>
-              </a:defRPr>
-            </a:lvl5pPr>
-            <a:lvl6pPr>
-              <a:defRPr sz="2100" b="1">
-                <a:solidFill>
-                  <a:srgbClr val="0866FF"/>
-                </a:solidFill>
-                <a:latin typeface="Arial"/>
-                <a:ea typeface="Arial"/>
-                <a:cs typeface="Arial"/>
-              </a:defRPr>
-            </a:lvl6pPr>
-            <a:lvl7pPr>
-              <a:defRPr sz="2100" b="1">
-                <a:solidFill>
-                  <a:srgbClr val="0866FF"/>
-                </a:solidFill>
-                <a:latin typeface="Arial"/>
-                <a:ea typeface="Arial"/>
-                <a:cs typeface="Arial"/>
-              </a:defRPr>
-            </a:lvl7pPr>
-            <a:lvl8pPr>
-              <a:defRPr sz="2100" b="1">
-                <a:solidFill>
-                  <a:srgbClr val="0866FF"/>
-                </a:solidFill>
-                <a:latin typeface="Arial"/>
-                <a:ea typeface="Arial"/>
-                <a:cs typeface="Arial"/>
-              </a:defRPr>
-            </a:lvl8pPr>
-            <a:lvl9pPr>
-              <a:defRPr sz="2100" b="1">
-                <a:solidFill>
-                  <a:srgbClr val="0866FF"/>
-                </a:solidFill>
-                <a:latin typeface="Arial"/>
-                <a:ea typeface="Arial"/>
-                <a:cs typeface="Arial"/>
-              </a:defRPr>
-            </a:lvl9pPr>
-          </a:lstStyle>
-          <a:p xmlns:a="http://schemas.openxmlformats.org/drawingml/2006/main">
-            <a:pPr>
-              <a:defRPr sz="2100" b="1">
-                <a:solidFill>
-                  <a:srgbClr val="0866FF"/>
-                </a:solidFill>
-                <a:latin typeface="Arial"/>
-                <a:ea typeface="Arial"/>
-                <a:cs typeface="Arial"/>
-              </a:defRPr>
-            </a:pPr>
-            <a:r>
-              <a:rPr sz="2100" b="1">
-                <a:solidFill>
-                  <a:srgbClr val="0866FF"/>
-                </a:solidFill>
-                <a:latin typeface="Arial"/>
-                <a:ea typeface="Arial"/>
-                <a:cs typeface="Arial"/>
-              </a:rPr>
-              <a:t>Реализация</a:t>
-            </a:r>
-          </a:p>
-        </p:txBody>
-      </p:sp>
-      <p:sp>
-        <p:nvSpPr>
-          <p:cNvPr id="8" name="Агенты пишут код и тесты. API MediaPipe и WebLLM сверяю">
-            <a:extLst xmlns:a="http://schemas.openxmlformats.org/drawingml/2006/main">
-              <a:ext uri="{FF2B5EF4-FFF2-40B4-BE49-F238E27FC236}">
-                <a16:creationId xmlns:a16="http://schemas.microsoft.com/office/drawing/2014/main" id="{FFA838F6-6A62-41A8-8AF4-A93A25DE5539}"/>
-              </a:ext>
-            </a:extLst>
-          </p:cNvPr>
-          <p:cNvSpPr>
-            <a:spLocks xmlns:a="http://schemas.openxmlformats.org/drawingml/2006/main" noGrp="1"/>
-          </p:cNvSpPr>
-          <p:nvPr/>
-        </p:nvSpPr>
-        <p:spPr>
-          <a:xfrm xmlns:a="http://schemas.openxmlformats.org/drawingml/2006/main">
-            <a:off x="3476625" y="3962400"/>
-            <a:ext cx="7953375" cy="762000"/>
-          </a:xfrm>
-          <a:prstGeom xmlns:a="http://schemas.openxmlformats.org/drawingml/2006/main" prst="rect">
-            <a:avLst/>
-          </a:prstGeom>
-          <a:noFill xmlns:a="http://schemas.openxmlformats.org/drawingml/2006/main"/>
-          <a:ln xmlns:a="http://schemas.openxmlformats.org/drawingml/2006/main" w="0">
-            <a:noFill/>
-          </a:ln>
-        </p:spPr>
-        <p:txBody>
-          <a:bodyPr xmlns:a="http://schemas.openxmlformats.org/drawingml/2006/main" wrap="square" lIns="0" tIns="0" rIns="0" bIns="0" anchor="t"/>
-          <a:lstStyle xmlns:a="http://schemas.openxmlformats.org/drawingml/2006/main">
-            <a:defPPr>
-              <a:defRPr sz="1950" b="0">
-                <a:solidFill>
-                  <a:srgbClr val="202124"/>
-                </a:solidFill>
-                <a:latin typeface="Arial"/>
-                <a:ea typeface="Arial"/>
-                <a:cs typeface="Arial"/>
-              </a:defRPr>
-            </a:defPPr>
-            <a:lvl1pPr>
-              <a:defRPr sz="1950" b="0">
-                <a:solidFill>
-                  <a:srgbClr val="202124"/>
-                </a:solidFill>
-                <a:latin typeface="Arial"/>
-                <a:ea typeface="Arial"/>
-                <a:cs typeface="Arial"/>
-              </a:defRPr>
-            </a:lvl1pPr>
-            <a:lvl2pPr>
-              <a:defRPr sz="1950" b="0">
-                <a:solidFill>
-                  <a:srgbClr val="202124"/>
-                </a:solidFill>
-                <a:latin typeface="Arial"/>
-                <a:ea typeface="Arial"/>
-                <a:cs typeface="Arial"/>
-              </a:defRPr>
-            </a:lvl2pPr>
-            <a:lvl3pPr>
-              <a:defRPr sz="1950" b="0">
-                <a:solidFill>
-                  <a:srgbClr val="202124"/>
-                </a:solidFill>
-                <a:latin typeface="Arial"/>
-                <a:ea typeface="Arial"/>
-                <a:cs typeface="Arial"/>
-              </a:defRPr>
-            </a:lvl3pPr>
-            <a:lvl4pPr>
-              <a:defRPr sz="1950" b="0">
-                <a:solidFill>
-                  <a:srgbClr val="202124"/>
-                </a:solidFill>
-                <a:latin typeface="Arial"/>
-                <a:ea typeface="Arial"/>
-                <a:cs typeface="Arial"/>
-              </a:defRPr>
-            </a:lvl4pPr>
-            <a:lvl5pPr>
-              <a:defRPr sz="1950" b="0">
-                <a:solidFill>
-                  <a:srgbClr val="202124"/>
-                </a:solidFill>
-                <a:latin typeface="Arial"/>
-                <a:ea typeface="Arial"/>
-                <a:cs typeface="Arial"/>
-              </a:defRPr>
-            </a:lvl5pPr>
-            <a:lvl6pPr>
-              <a:defRPr sz="1950" b="0">
-                <a:solidFill>
-                  <a:srgbClr val="202124"/>
-                </a:solidFill>
-                <a:latin typeface="Arial"/>
-                <a:ea typeface="Arial"/>
-                <a:cs typeface="Arial"/>
-              </a:defRPr>
-            </a:lvl6pPr>
-            <a:lvl7pPr>
-              <a:defRPr sz="1950" b="0">
-                <a:solidFill>
-                  <a:srgbClr val="202124"/>
-                </a:solidFill>
-                <a:latin typeface="Arial"/>
-                <a:ea typeface="Arial"/>
-                <a:cs typeface="Arial"/>
-              </a:defRPr>
-            </a:lvl7pPr>
-            <a:lvl8pPr>
-              <a:defRPr sz="1950" b="0">
-                <a:solidFill>
-                  <a:srgbClr val="202124"/>
-                </a:solidFill>
-                <a:latin typeface="Arial"/>
-                <a:ea typeface="Arial"/>
-                <a:cs typeface="Arial"/>
-              </a:defRPr>
-            </a:lvl8pPr>
-            <a:lvl9pPr>
-              <a:defRPr sz="1950" b="0">
-                <a:solidFill>
-                  <a:srgbClr val="202124"/>
-                </a:solidFill>
-                <a:latin typeface="Arial"/>
-                <a:ea typeface="Arial"/>
-                <a:cs typeface="Arial"/>
-              </a:defRPr>
-            </a:lvl9pPr>
-          </a:lstStyle>
-          <a:p xmlns:a="http://schemas.openxmlformats.org/drawingml/2006/main">
-            <a:pPr>
-              <a:defRPr sz="1950" b="0">
-                <a:solidFill>
-                  <a:srgbClr val="202124"/>
-                </a:solidFill>
-                <a:latin typeface="Arial"/>
-                <a:ea typeface="Arial"/>
-                <a:cs typeface="Arial"/>
-              </a:defRPr>
-            </a:pPr>
-            <a:r>
-              <a:rPr sz="1950" b="0">
-                <a:solidFill>
-                  <a:srgbClr val="202124"/>
-                </a:solidFill>
-                <a:latin typeface="Arial"/>
-                <a:ea typeface="Arial"/>
-                <a:cs typeface="Arial"/>
-              </a:rPr>
-              <a:t>Агенты пишут код и тесты. API MediaPipe и WebLLM сверяют через Context7.</a:t>
-            </a:r>
-          </a:p>
-        </p:txBody>
-      </p:sp>
-      <p:sp>
-        <p:nvSpPr>
-          <p:cNvPr id="9" name="Приёмка">
-            <a:extLst xmlns:a="http://schemas.openxmlformats.org/drawingml/2006/main">
-              <a:ext uri="{FF2B5EF4-FFF2-40B4-BE49-F238E27FC236}">
-                <a16:creationId xmlns:a16="http://schemas.microsoft.com/office/drawing/2014/main" id="{C43E2470-EB8C-48D4-882A-91BDE20A81A8}"/>
-              </a:ext>
-            </a:extLst>
-          </p:cNvPr>
-          <p:cNvSpPr>
-            <a:spLocks xmlns:a="http://schemas.openxmlformats.org/drawingml/2006/main" noGrp="1"/>
-          </p:cNvSpPr>
-          <p:nvPr/>
-        </p:nvSpPr>
-        <p:spPr>
-          <a:xfrm xmlns:a="http://schemas.openxmlformats.org/drawingml/2006/main">
-            <a:off x="762000" y="4914900"/>
-            <a:ext cx="2428875" cy="381000"/>
-          </a:xfrm>
-          <a:prstGeom xmlns:a="http://schemas.openxmlformats.org/drawingml/2006/main" prst="rect">
-            <a:avLst/>
-          </a:prstGeom>
-          <a:noFill xmlns:a="http://schemas.openxmlformats.org/drawingml/2006/main"/>
-          <a:ln xmlns:a="http://schemas.openxmlformats.org/drawingml/2006/main" w="0">
-            <a:noFill/>
-          </a:ln>
-        </p:spPr>
-        <p:txBody>
-          <a:bodyPr xmlns:a="http://schemas.openxmlformats.org/drawingml/2006/main" wrap="square" lIns="0" tIns="0" rIns="0" bIns="0" anchor="t"/>
-          <a:lstStyle xmlns:a="http://schemas.openxmlformats.org/drawingml/2006/main">
-            <a:defPPr>
-              <a:defRPr sz="2100" b="1">
-                <a:solidFill>
-                  <a:srgbClr val="0866FF"/>
-                </a:solidFill>
-                <a:latin typeface="Arial"/>
-                <a:ea typeface="Arial"/>
-                <a:cs typeface="Arial"/>
-              </a:defRPr>
-            </a:defPPr>
-            <a:lvl1pPr>
-              <a:defRPr sz="2100" b="1">
-                <a:solidFill>
-                  <a:srgbClr val="0866FF"/>
-                </a:solidFill>
-                <a:latin typeface="Arial"/>
-                <a:ea typeface="Arial"/>
-                <a:cs typeface="Arial"/>
-              </a:defRPr>
-            </a:lvl1pPr>
-            <a:lvl2pPr>
-              <a:defRPr sz="2100" b="1">
-                <a:solidFill>
-                  <a:srgbClr val="0866FF"/>
-                </a:solidFill>
-                <a:latin typeface="Arial"/>
-                <a:ea typeface="Arial"/>
-                <a:cs typeface="Arial"/>
-              </a:defRPr>
-            </a:lvl2pPr>
-            <a:lvl3pPr>
-              <a:defRPr sz="2100" b="1">
-                <a:solidFill>
-                  <a:srgbClr val="0866FF"/>
-                </a:solidFill>
-                <a:latin typeface="Arial"/>
-                <a:ea typeface="Arial"/>
-                <a:cs typeface="Arial"/>
-              </a:defRPr>
-            </a:lvl3pPr>
-            <a:lvl4pPr>
-              <a:defRPr sz="2100" b="1">
-                <a:solidFill>
-                  <a:srgbClr val="0866FF"/>
-                </a:solidFill>
-                <a:latin typeface="Arial"/>
-                <a:ea typeface="Arial"/>
-                <a:cs typeface="Arial"/>
-              </a:defRPr>
-            </a:lvl4pPr>
-            <a:lvl5pPr>
-              <a:defRPr sz="2100" b="1">
-                <a:solidFill>
-                  <a:srgbClr val="0866FF"/>
-                </a:solidFill>
-                <a:latin typeface="Arial"/>
-                <a:ea typeface="Arial"/>
-                <a:cs typeface="Arial"/>
-              </a:defRPr>
-            </a:lvl5pPr>
-            <a:lvl6pPr>
-              <a:defRPr sz="2100" b="1">
-                <a:solidFill>
-                  <a:srgbClr val="0866FF"/>
-                </a:solidFill>
-                <a:latin typeface="Arial"/>
-                <a:ea typeface="Arial"/>
-                <a:cs typeface="Arial"/>
-              </a:defRPr>
-            </a:lvl6pPr>
-            <a:lvl7pPr>
-              <a:defRPr sz="2100" b="1">
-                <a:solidFill>
-                  <a:srgbClr val="0866FF"/>
-                </a:solidFill>
-                <a:latin typeface="Arial"/>
-                <a:ea typeface="Arial"/>
-                <a:cs typeface="Arial"/>
-              </a:defRPr>
-            </a:lvl7pPr>
-            <a:lvl8pPr>
-              <a:defRPr sz="2100" b="1">
-                <a:solidFill>
-                  <a:srgbClr val="0866FF"/>
-                </a:solidFill>
-                <a:latin typeface="Arial"/>
-                <a:ea typeface="Arial"/>
-                <a:cs typeface="Arial"/>
-              </a:defRPr>
-            </a:lvl8pPr>
-            <a:lvl9pPr>
-              <a:defRPr sz="2100" b="1">
-                <a:solidFill>
-                  <a:srgbClr val="0866FF"/>
-                </a:solidFill>
-                <a:latin typeface="Arial"/>
-                <a:ea typeface="Arial"/>
-                <a:cs typeface="Arial"/>
-              </a:defRPr>
-            </a:lvl9pPr>
-          </a:lstStyle>
-          <a:p xmlns:a="http://schemas.openxmlformats.org/drawingml/2006/main">
-            <a:pPr>
-              <a:defRPr sz="2100" b="1">
-                <a:solidFill>
-                  <a:srgbClr val="0866FF"/>
-                </a:solidFill>
-                <a:latin typeface="Arial"/>
-                <a:ea typeface="Arial"/>
-                <a:cs typeface="Arial"/>
-              </a:defRPr>
-            </a:pPr>
-            <a:r>
-              <a:rPr sz="2100" b="1">
-                <a:solidFill>
-                  <a:srgbClr val="0866FF"/>
-                </a:solidFill>
-                <a:latin typeface="Arial"/>
-                <a:ea typeface="Arial"/>
-                <a:cs typeface="Arial"/>
-              </a:rPr>
-              <a:t>Приёмка</a:t>
-            </a:r>
-          </a:p>
-        </p:txBody>
-      </p:sp>
-      <p:sp>
-        <p:nvSpPr>
-          <p:cNvPr id="10" name="Тесты и Chrome проверяют изменение. Люди принимают резу">
-            <a:extLst xmlns:a="http://schemas.openxmlformats.org/drawingml/2006/main">
-              <a:ext uri="{FF2B5EF4-FFF2-40B4-BE49-F238E27FC236}">
-                <a16:creationId xmlns:a16="http://schemas.microsoft.com/office/drawing/2014/main" id="{C484787B-FAFA-465A-94FF-5FFB52D72BB4}"/>
-              </a:ext>
-            </a:extLst>
-          </p:cNvPr>
-          <p:cNvSpPr>
-            <a:spLocks xmlns:a="http://schemas.openxmlformats.org/drawingml/2006/main" noGrp="1"/>
-          </p:cNvSpPr>
-          <p:nvPr/>
-        </p:nvSpPr>
-        <p:spPr>
-          <a:xfrm xmlns:a="http://schemas.openxmlformats.org/drawingml/2006/main">
-            <a:off x="3476625" y="4914900"/>
-            <a:ext cx="7953375" cy="762000"/>
-          </a:xfrm>
-          <a:prstGeom xmlns:a="http://schemas.openxmlformats.org/drawingml/2006/main" prst="rect">
-            <a:avLst/>
-          </a:prstGeom>
-          <a:noFill xmlns:a="http://schemas.openxmlformats.org/drawingml/2006/main"/>
-          <a:ln xmlns:a="http://schemas.openxmlformats.org/drawingml/2006/main" w="0">
-            <a:noFill/>
-          </a:ln>
-        </p:spPr>
-        <p:txBody>
-          <a:bodyPr xmlns:a="http://schemas.openxmlformats.org/drawingml/2006/main" wrap="square" lIns="0" tIns="0" rIns="0" bIns="0" anchor="t"/>
-          <a:lstStyle xmlns:a="http://schemas.openxmlformats.org/drawingml/2006/main">
-            <a:defPPr>
-              <a:defRPr sz="1950" b="0">
-                <a:solidFill>
-                  <a:srgbClr val="202124"/>
-                </a:solidFill>
-                <a:latin typeface="Arial"/>
-                <a:ea typeface="Arial"/>
-                <a:cs typeface="Arial"/>
-              </a:defRPr>
-            </a:defPPr>
-            <a:lvl1pPr>
-              <a:defRPr sz="1950" b="0">
-                <a:solidFill>
-                  <a:srgbClr val="202124"/>
-                </a:solidFill>
-                <a:latin typeface="Arial"/>
-                <a:ea typeface="Arial"/>
-                <a:cs typeface="Arial"/>
-              </a:defRPr>
-            </a:lvl1pPr>
-            <a:lvl2pPr>
-              <a:defRPr sz="1950" b="0">
-                <a:solidFill>
-                  <a:srgbClr val="202124"/>
-                </a:solidFill>
-                <a:latin typeface="Arial"/>
-                <a:ea typeface="Arial"/>
-                <a:cs typeface="Arial"/>
-              </a:defRPr>
-            </a:lvl2pPr>
-            <a:lvl3pPr>
-              <a:defRPr sz="1950" b="0">
-                <a:solidFill>
-                  <a:srgbClr val="202124"/>
-                </a:solidFill>
-                <a:latin typeface="Arial"/>
-                <a:ea typeface="Arial"/>
-                <a:cs typeface="Arial"/>
-              </a:defRPr>
-            </a:lvl3pPr>
-            <a:lvl4pPr>
-              <a:defRPr sz="1950" b="0">
-                <a:solidFill>
-                  <a:srgbClr val="202124"/>
-                </a:solidFill>
-                <a:latin typeface="Arial"/>
-                <a:ea typeface="Arial"/>
-                <a:cs typeface="Arial"/>
-              </a:defRPr>
-            </a:lvl4pPr>
-            <a:lvl5pPr>
-              <a:defRPr sz="1950" b="0">
-                <a:solidFill>
-                  <a:srgbClr val="202124"/>
-                </a:solidFill>
-                <a:latin typeface="Arial"/>
-                <a:ea typeface="Arial"/>
-                <a:cs typeface="Arial"/>
-              </a:defRPr>
-            </a:lvl5pPr>
-            <a:lvl6pPr>
-              <a:defRPr sz="1950" b="0">
-                <a:solidFill>
-                  <a:srgbClr val="202124"/>
-                </a:solidFill>
-                <a:latin typeface="Arial"/>
-                <a:ea typeface="Arial"/>
-                <a:cs typeface="Arial"/>
-              </a:defRPr>
-            </a:lvl6pPr>
-            <a:lvl7pPr>
-              <a:defRPr sz="1950" b="0">
-                <a:solidFill>
-                  <a:srgbClr val="202124"/>
-                </a:solidFill>
-                <a:latin typeface="Arial"/>
-                <a:ea typeface="Arial"/>
-                <a:cs typeface="Arial"/>
-              </a:defRPr>
-            </a:lvl7pPr>
-            <a:lvl8pPr>
-              <a:defRPr sz="1950" b="0">
-                <a:solidFill>
-                  <a:srgbClr val="202124"/>
-                </a:solidFill>
-                <a:latin typeface="Arial"/>
-                <a:ea typeface="Arial"/>
-                <a:cs typeface="Arial"/>
-              </a:defRPr>
-            </a:lvl8pPr>
-            <a:lvl9pPr>
-              <a:defRPr sz="1950" b="0">
-                <a:solidFill>
-                  <a:srgbClr val="202124"/>
-                </a:solidFill>
-                <a:latin typeface="Arial"/>
-                <a:ea typeface="Arial"/>
-                <a:cs typeface="Arial"/>
-              </a:defRPr>
-            </a:lvl9pPr>
-          </a:lstStyle>
-          <a:p xmlns:a="http://schemas.openxmlformats.org/drawingml/2006/main">
-            <a:pPr>
-              <a:defRPr sz="1950" b="0">
-                <a:solidFill>
-                  <a:srgbClr val="202124"/>
-                </a:solidFill>
-                <a:latin typeface="Arial"/>
-                <a:ea typeface="Arial"/>
-                <a:cs typeface="Arial"/>
-              </a:defRPr>
-            </a:pPr>
-            <a:r>
-              <a:rPr sz="1950" b="0">
-                <a:solidFill>
-                  <a:srgbClr val="202124"/>
-                </a:solidFill>
-                <a:latin typeface="Arial"/>
-                <a:ea typeface="Arial"/>
-                <a:cs typeface="Arial"/>
-              </a:rPr>
-              <a:t>Тесты и Chrome проверяют изменение. Люди принимают результат и выпускают версию.</a:t>
-            </a:r>
-          </a:p>
-        </p:txBody>
-      </p:sp>
-      <p:sp>
-        <p:nvSpPr>
-          <p:cNvPr id="11" name="Aimo   /   Пайплайн разработки   /   9 из 13">
-            <a:extLst xmlns:a="http://schemas.openxmlformats.org/drawingml/2006/main">
-              <a:ext uri="{FF2B5EF4-FFF2-40B4-BE49-F238E27FC236}">
-                <a16:creationId xmlns:a16="http://schemas.microsoft.com/office/drawing/2014/main" id="{2E9E69AE-DF24-4F37-86B2-A3E7029F8E88}"/>
+                <a16:creationId xmlns:a16="http://schemas.microsoft.com/office/drawing/2014/main" id="{2C499994-D2A1-4DBC-BE21-A722836DA8C8}"/>
               </a:ext>
             </a:extLst>
           </p:cNvPr>
@@ -24347,7 +28155,7 @@
                 <a:ea typeface="Arial"/>
                 <a:cs typeface="Arial"/>
               </a:rPr>
-              <a:t>Aimo   /   Пайплайн разработки   /   9 из 13</a:t>
+              <a:t>Aimo   /   Разделение обязанностей   /   9 из 15</a:t>
             </a:r>
           </a:p>
         </p:txBody>
@@ -24355,7 +28163,7 @@
     </p:spTree>
     <p:extLst>
       <p:ext uri="{BB962C8B-B14F-4D97-AF65-F5344CB8AC3E}">
-        <p14:creationId xmlns:p14="http://schemas.microsoft.com/office/powerpoint/2010/main" val="221706777"/>
+        <p14:creationId xmlns:p14="http://schemas.microsoft.com/office/powerpoint/2010/main" val="1828212385"/>
       </p:ext>
     </p:extLst>
   </p:cSld>
